--- a/submission/Diabetes_Statistics_Presentation.pptx
+++ b/submission/Diabetes_Statistics_Presentation.pptx
@@ -2,24 +2,25 @@
 <file path=ppt/presentation.xml><?xml version="1.0" encoding="utf-8"?>
 <p:presentation xmlns:p="http://schemas.openxmlformats.org/presentationml/2006/main">
   <p:sldMasterIdLst>
-    <p:sldMasterId xmlns:r="http://schemas.openxmlformats.org/officeDocument/2006/relationships" id="2147483648" r:id="R2020f9dad9b1460a"/>
+    <p:sldMasterId xmlns:r="http://schemas.openxmlformats.org/officeDocument/2006/relationships" id="2147483648" r:id="Rd46a8a1e917745f2"/>
   </p:sldMasterIdLst>
   <p:notesMasterIdLst>
-    <p:notesMasterId xmlns:r="http://schemas.openxmlformats.org/officeDocument/2006/relationships" r:id="Ra8625e2457c24f3d"/>
+    <p:notesMasterId xmlns:r="http://schemas.openxmlformats.org/officeDocument/2006/relationships" r:id="R4454d24151aa4079"/>
   </p:notesMasterIdLst>
   <p:sldIdLst>
-    <p:sldId xmlns:r="http://schemas.openxmlformats.org/officeDocument/2006/relationships" id="256" r:id="Rc145b11230d8497c"/>
-    <p:sldId xmlns:r="http://schemas.openxmlformats.org/officeDocument/2006/relationships" id="257" r:id="R0e899a5e8c3a4cbc"/>
-    <p:sldId xmlns:r="http://schemas.openxmlformats.org/officeDocument/2006/relationships" id="258" r:id="Ra1208514ef2f4227"/>
-    <p:sldId xmlns:r="http://schemas.openxmlformats.org/officeDocument/2006/relationships" id="259" r:id="R3294deb5e4aa42be"/>
-    <p:sldId xmlns:r="http://schemas.openxmlformats.org/officeDocument/2006/relationships" id="260" r:id="R6a258b22361d4171"/>
-    <p:sldId xmlns:r="http://schemas.openxmlformats.org/officeDocument/2006/relationships" id="261" r:id="R55dde79d00d046e9"/>
-    <p:sldId xmlns:r="http://schemas.openxmlformats.org/officeDocument/2006/relationships" id="262" r:id="Rde86e8520a464abc"/>
-    <p:sldId xmlns:r="http://schemas.openxmlformats.org/officeDocument/2006/relationships" id="263" r:id="Rc5e73f2506204549"/>
-    <p:sldId xmlns:r="http://schemas.openxmlformats.org/officeDocument/2006/relationships" id="264" r:id="R16856120ae4246a7"/>
-    <p:sldId xmlns:r="http://schemas.openxmlformats.org/officeDocument/2006/relationships" id="265" r:id="R1344693a2e714e3e"/>
-    <p:sldId xmlns:r="http://schemas.openxmlformats.org/officeDocument/2006/relationships" id="266" r:id="R248d6f20b3ad417c"/>
-    <p:sldId xmlns:r="http://schemas.openxmlformats.org/officeDocument/2006/relationships" id="267" r:id="R98431a21622e4df1"/>
+    <p:sldId xmlns:r="http://schemas.openxmlformats.org/officeDocument/2006/relationships" id="256" r:id="Rf516ea4fde85476c"/>
+    <p:sldId xmlns:r="http://schemas.openxmlformats.org/officeDocument/2006/relationships" id="257" r:id="R20dd35349a324db1"/>
+    <p:sldId xmlns:r="http://schemas.openxmlformats.org/officeDocument/2006/relationships" id="258" r:id="R83cd2c4d9020450d"/>
+    <p:sldId xmlns:r="http://schemas.openxmlformats.org/officeDocument/2006/relationships" id="259" r:id="Ree590c06e93e4134"/>
+    <p:sldId xmlns:r="http://schemas.openxmlformats.org/officeDocument/2006/relationships" id="260" r:id="R23259eee1a914b98"/>
+    <p:sldId xmlns:r="http://schemas.openxmlformats.org/officeDocument/2006/relationships" id="261" r:id="R18c4286989ba4c8c"/>
+    <p:sldId xmlns:r="http://schemas.openxmlformats.org/officeDocument/2006/relationships" id="262" r:id="R7325a8d7d6bf4111"/>
+    <p:sldId xmlns:r="http://schemas.openxmlformats.org/officeDocument/2006/relationships" id="263" r:id="R94968a0b0b484374"/>
+    <p:sldId xmlns:r="http://schemas.openxmlformats.org/officeDocument/2006/relationships" id="264" r:id="R9936bd10539243df"/>
+    <p:sldId xmlns:r="http://schemas.openxmlformats.org/officeDocument/2006/relationships" id="265" r:id="R10a154c06622453d"/>
+    <p:sldId xmlns:r="http://schemas.openxmlformats.org/officeDocument/2006/relationships" id="266" r:id="R46ba7fef87a04e1a"/>
+    <p:sldId xmlns:r="http://schemas.openxmlformats.org/officeDocument/2006/relationships" id="267" r:id="R0a1a580112bf4565"/>
+    <p:sldId xmlns:r="http://schemas.openxmlformats.org/officeDocument/2006/relationships" id="268" r:id="R2f9030ab96094b3c"/>
   </p:sldIdLst>
   <p:sldSz cx="12192000" cy="6858000"/>
   <p:notesSz cx="6858000" cy="9144000"/>
@@ -578,7 +579,7 @@
           <a:lstStyle xmlns:a="http://schemas.openxmlformats.org/drawingml/2006/main"/>
           <a:p xmlns:a="http://schemas.openxmlformats.org/drawingml/2006/main">
             <a:r>
-              <a:t>Course Experiment 10. Equal-frequency age GOF is a hypothetical teaching null across 13 unequal-width bands: chi-square 678.1247, df12, p&lt;.001. Status means prediabetes or diabetes. Independence tests use Pearson chi-square without continuity correction: status×HighBP 226.2818, df1, p&lt;.001, Cramer V .27464; status×Smoker 6.0746, df1, p .013714, V .0449985. Expected cells exceed five. No-high-BP positive share 118/1703=6.929%; high-BP 351/1297=27.062%. Never/ever100-cigarette shares 14.087% and17.361%. Compare association magnitudes, not p-values alone. These are observational relationships. Suggested time: 90 seconds.</a:t>
+              <a:t>Course Experiment9 only, with independent and dependent (paired) tests. Independent example: BRFSS female n1667,male n1333; poor physical-health days means4.705459 and3.459115; Welch t3.992741,df2956.428,p .0000669; female−male1.246344days,95%CI .634286to1.858402. Different respondents; the bounded skewed count warrants a cautious mean comparison. Paired example: genuine29CBT patients from MASS anorexia, postminuspre mean3.006897lb,CI .226890to5.786903,t2.215588,df28,p .035023. Blue lines join the same patient, orange line joins means82.6897and85.6966lb. Paired t tests the average within-patient difference against zero. Differences Shapiro p .007945 and signed-rank sensitivity p .064466 qualify the result. Within-group change does not prove therapy caused it. Data sets stay separate; the paired data do not come from BRFSS. Suggested time: 100 seconds.</a:t>
             </a:r>
           </a:p>
           <a:p xmlns:a="http://schemas.openxmlformats.org/drawingml/2006/main">
@@ -703,7 +704,7 @@
           <a:lstStyle xmlns:a="http://schemas.openxmlformats.org/drawingml/2006/main"/>
           <a:p xmlns:a="http://schemas.openxmlformats.org/drawingml/2006/main">
             <a:r>
-              <a:t>Course Experiment 11. BMI by education is observational ANOVA, F14.4064,p&lt;.001,eta-square .02349. Unequal variances motivate Welch p .000351 and Holm separate-variance pair comparisons. Genuine Cochran potato CRD:32 plots,7 sulfur treatments,F3.6081,p .010262; control8 replicates,others4 each; Tukey control-minus-F12 difference16.875 percentage points,p .005965. Gomez rice complete-block design:24 plots,6 rates,4 blocks. Block F5.8622,p .007416; rate F2.1678,p .112809. Residual MSE decreases from200152 to110558,44.76%. Goulden wheat Latin Square:5 treatments in5 rows and5 columns. Row p .01328,column p .26343,treatment F21.0321,p .00002366; Cweeklydusting mean13.12 exceeds each other treatment with Tukey adjustment. Yield units unspecified for wheat, kg/ha for rice. Models are additive with negligible interaction assumed; genuine published designs are separate from survey data. Suggested time: 150 seconds.</a:t>
+              <a:t>Course Experiment 10. Equal-frequency age GOF is a hypothetical teaching null across 13 unequal-width bands: chi-square 678.1247, df12, p&lt;.001. Status means prediabetes or diabetes. Independence tests use Pearson chi-square without continuity correction: status×HighBP 226.2818, df1, p&lt;.001, Cramer V .27464; status×Smoker 6.0746, df1, p .013714, V .0449985. Expected cells exceed five. No-high-BP positive share 118/1703=6.929%; high-BP 351/1297=27.062%. Never/ever100-cigarette shares 14.087% and17.361%. Compare association magnitudes, not p-values alone. These are observational relationships. Suggested time: 85 seconds.</a:t>
             </a:r>
           </a:p>
           <a:p xmlns:a="http://schemas.openxmlformats.org/drawingml/2006/main">
@@ -828,6 +829,131 @@
           <a:lstStyle xmlns:a="http://schemas.openxmlformats.org/drawingml/2006/main"/>
           <a:p xmlns:a="http://schemas.openxmlformats.org/drawingml/2006/main">
             <a:r>
+              <a:t>Course Experiment 11. BMI by education is observational ANOVA, F14.4064,p&lt;.001,eta-square .02349. Unequal variances motivate Welch p .000351 and Holm separate-variance pair comparisons. Genuine Cochran potato CRD:32 plots,7 sulfur treatments,F3.6081,p .010262; control8 replicates,others4 each; Tukey control-minus-F12 difference16.875 percentage points,p .005965. Gomez rice complete-block design:24 plots,6 rates,4 blocks. Block F5.8622,p .007416; rate F2.1678,p .112809. Residual MSE decreases from200152 to110558,44.76%. Goulden wheat Latin Square:5 treatments in5 rows and5 columns. Row p .01328,column p .26343,treatment F21.0321,p .00002366; Cweeklydusting mean13.12 exceeds each other treatment with Tukey adjustment. Yield units unspecified for wheat, kg/ha for rice. Models are additive with negligible interaction assumed; genuine published designs are separate from survey data. Suggested time: 145 seconds.</a:t>
+            </a:r>
+          </a:p>
+          <a:p xmlns:a="http://schemas.openxmlformats.org/drawingml/2006/main">
+            <a:r>
+              <a:t/>
+            </a:r>
+          </a:p>
+          <a:p xmlns:a="http://schemas.openxmlformats.org/drawingml/2006/main">
+            <a:r>
+              <a:t>Sources:</a:t>
+            </a:r>
+          </a:p>
+          <a:p xmlns:a="http://schemas.openxmlformats.org/drawingml/2006/main">
+            <a:r>
+              <a:t>https://www.cdc.gov/brfss/annual_data/annual_2015.html</a:t>
+            </a:r>
+          </a:p>
+          <a:p xmlns:a="http://schemas.openxmlformats.org/drawingml/2006/main">
+            <a:r>
+              <a:t>https://www.kaggle.com/datasets/alexteboul/diabetes-health-indicators-dataset</a:t>
+            </a:r>
+          </a:p>
+          <a:p xmlns:a="http://schemas.openxmlformats.org/drawingml/2006/main">
+            <a:r>
+              <a:t>https://archive.ics.uci.edu/dataset/891/cdc+diabetes+health+indicators</a:t>
+            </a:r>
+          </a:p>
+          <a:p xmlns:a="http://schemas.openxmlformats.org/drawingml/2006/main">
+            <a:r>
+              <a:t>https://stat.ethz.ch/R-manual/R-devel/library/MASS/html/anorexia.html</a:t>
+            </a:r>
+          </a:p>
+          <a:p xmlns:a="http://schemas.openxmlformats.org/drawingml/2006/main">
+            <a:r>
+              <a:t>https://kwstat.github.io/agridat/reference/cochran.crd.html</a:t>
+            </a:r>
+          </a:p>
+          <a:p xmlns:a="http://schemas.openxmlformats.org/drawingml/2006/main">
+            <a:r>
+              <a:t>https://kwstat.github.io/agridat/reference/gomez.seedrate.html</a:t>
+            </a:r>
+          </a:p>
+          <a:p xmlns:a="http://schemas.openxmlformats.org/drawingml/2006/main">
+            <a:r>
+              <a:t>https://kwstat.github.io/agridat/reference/goulden.latin.html</a:t>
+            </a:r>
+          </a:p>
+          <a:p xmlns:a="http://schemas.openxmlformats.org/drawingml/2006/main">
+            <a:r>
+              <a:t>https://www.itl.nist.gov/div898/handbook/eda/section3/eda35f.htm</a:t>
+            </a:r>
+          </a:p>
+          <a:p xmlns:a="http://schemas.openxmlformats.org/drawingml/2006/main">
+            <a:r>
+              <a:t>Calculations: matching saved R lab outputs. All29 original figures remain in the complete atlas.</a:t>
+            </a:r>
+          </a:p>
+        </p:txBody>
+      </p:sp>
+      <p:sp>
+        <p:nvSpPr>
+          <p:cNvPr id="4" name="Slide Number Placeholder 3"/>
+          <p:cNvSpPr>
+            <a:spLocks xmlns:a="http://schemas.openxmlformats.org/drawingml/2006/main" noGrp="1"/>
+          </p:cNvSpPr>
+          <p:nvPr>
+            <p:ph type="sldNum" idx="5"/>
+          </p:nvPr>
+        </p:nvSpPr>
+        <p:spPr/>
+        <p:txBody>
+          <a:bodyPr xmlns:a="http://schemas.openxmlformats.org/drawingml/2006/main"/>
+          <a:lstStyle xmlns:a="http://schemas.openxmlformats.org/drawingml/2006/main"/>
+          <a:p xmlns:a="http://schemas.openxmlformats.org/drawingml/2006/main"/>
+        </p:txBody>
+      </p:sp>
+    </p:spTree>
+  </p:cSld>
+  <p:clrMapOvr>
+    <a:masterClrMapping xmlns:a="http://schemas.openxmlformats.org/drawingml/2006/main"/>
+  </p:clrMapOvr>
+</p:notes>
+</file>
+
+<file path=ppt/notesSlides/notesSlide13.xml><?xml version="1.0" encoding="utf-8"?>
+<p:notes xmlns:p="http://schemas.openxmlformats.org/presentationml/2006/main">
+  <p:cSld>
+    <p:spTree>
+      <p:nvGrpSpPr>
+        <p:cNvPr id="1" name=""/>
+        <p:cNvGrpSpPr/>
+        <p:nvPr/>
+      </p:nvGrpSpPr>
+      <p:grpSpPr>
+        <a:xfrm xmlns:a="http://schemas.openxmlformats.org/drawingml/2006/main"/>
+      </p:grpSpPr>
+      <p:sp>
+        <p:nvSpPr>
+          <p:cNvPr id="2" name="Slide Image Placeholder 1"/>
+          <p:cNvSpPr>
+            <a:spLocks xmlns:a="http://schemas.openxmlformats.org/drawingml/2006/main" noGrp="1"/>
+          </p:cNvSpPr>
+          <p:nvPr>
+            <p:ph type="sldImg" idx="0"/>
+          </p:nvPr>
+        </p:nvSpPr>
+        <p:spPr/>
+      </p:sp>
+      <p:sp>
+        <p:nvSpPr>
+          <p:cNvPr id="3" name="Notes Placeholder 2"/>
+          <p:cNvSpPr>
+            <a:spLocks xmlns:a="http://schemas.openxmlformats.org/drawingml/2006/main" noGrp="1"/>
+          </p:cNvSpPr>
+          <p:nvPr>
+            <p:ph type="body" idx="1"/>
+          </p:nvPr>
+        </p:nvSpPr>
+        <p:spPr/>
+        <p:txBody>
+          <a:bodyPr xmlns:a="http://schemas.openxmlformats.org/drawingml/2006/main"/>
+          <a:lstStyle xmlns:a="http://schemas.openxmlformats.org/drawingml/2006/main"/>
+          <a:p xmlns:a="http://schemas.openxmlformats.org/drawingml/2006/main">
+            <a:r>
               <a:t>Final review of all course experiments. Mean BMI is higher in prediabetes/diabetes groups with overlapping individual distributions. Pearson r .102 and simple R-square1.03% show a weak association; the different multiple specification explains6.81%, not validated prediction accuracy. Removing114BMI flags changes mean28.40to27.65 and variance40.34to24.59. Binomial grouped fit is adequate to this test; normal and ordinary Poisson descriptions fail. BP status association V .275 exceeds smoking .045. Published paired/design supplements demonstrate the appropriate data structure. Rice blocks reduce residual MSE44.8%; weekly-dusting C has greatest wheat yield mean13.12 with significant adjusted pair comparisons. Limitations:historical,self-report,omitted complex survey design,sparse categories,confounding,model diagnostics and method-sensitive paired result. Next steps:more recent/better data, useful predictors, evaluation on unseen observations, repeat model checks. Explain findings as associations and course demonstrations. Suggested time: 100 seconds.</a:t>
             </a:r>
           </a:p>
@@ -953,7 +1079,7 @@
           <a:lstStyle xmlns:a="http://schemas.openxmlformats.org/drawingml/2006/main"/>
           <a:p xmlns:a="http://schemas.openxmlformats.org/drawingml/2006/main">
             <a:r>
-              <a:t>Secondary data collection: CDC BRFSS 2015, processed by Alex Teboul on Kaggle. Exact derivative: 253680 rows, 22 raw columns (21 predictors plus target). Random sample without replacement, seed101. Combined positive status includes prediabetes OR diabetes:469/3000=15.633%. Original CDC survey441456 records. The derivative omits survey-design weights, so the study supports sample associations rather than national prevalence. Explain source, relevance, size and variables. Suggested time: 65 seconds.</a:t>
+              <a:t>Secondary data collection: CDC BRFSS 2015, processed by Alex Teboul on Kaggle. Exact derivative: 253680 rows, 22 raw columns (21 predictors plus target). Random sample without replacement, seed101. Combined positive status includes prediabetes OR diabetes:469/3000=15.633%. Original CDC survey441456 records. The derivative omits survey-design weights, so the study supports sample associations rather than national prevalence. Explain source, relevance, size and variables. Suggested time: 60 seconds.</a:t>
             </a:r>
           </a:p>
           <a:p xmlns:a="http://schemas.openxmlformats.org/drawingml/2006/main">
@@ -1078,7 +1204,7 @@
           <a:lstStyle xmlns:a="http://schemas.openxmlformats.org/drawingml/2006/main"/>
           <a:p xmlns:a="http://schemas.openxmlformats.org/drawingml/2006/main">
             <a:r>
-              <a:t>Course Experiment1: types, import/export. Labs00/01. We read CSV, select3000 with seed101, inspect schema, missingness and allowed codes/ranges, and convert categories to readable factors. Missing cells0, invalid records0. The sample has13 repeated feature profiles, which do not establish duplicated people. RDS preserves factor levels and CSV provides portable output. Scripts retain source-row lineage. BMI/health days remain numeric, age/income/education are ordered bands but regression uses category contrasts. Suggested time: 50 seconds.</a:t>
+              <a:t>Course Experiment1: types, import/export. Labs00/01. We read CSV, select3000 with seed101, inspect schema, missingness and allowed codes/ranges, and convert categories to readable factors. Missing cells0, invalid records0. The sample has13 repeated feature profiles, which do not establish duplicated people. RDS preserves factor levels and CSV provides portable output. Scripts retain source-row lineage. BMI/health days remain numeric, age/income/education are ordered bands but regression uses category contrasts. Suggested time: 45 seconds.</a:t>
             </a:r>
           </a:p>
           <a:p xmlns:a="http://schemas.openxmlformats.org/drawingml/2006/main">
@@ -1203,7 +1329,7 @@
           <a:lstStyle xmlns:a="http://schemas.openxmlformats.org/drawingml/2006/main"/>
           <a:p xmlns:a="http://schemas.openxmlformats.org/drawingml/2006/main">
             <a:r>
-              <a:t>Lab01B, additional presentation requirement. Fences are Q1−1.5IQR and Q3+1.5IQR.114 observations (3.8%) are high-side flags. The source-row ledger records their BMI/status. Demonstrate actual removal with the2886-row sensitivity dataset and compare mean, variance and status composition. Valid extreme BMI values stay in the primary analysis because being unusual does not establish error. The removal comparison is explicitly a different analysis sample. Suggested time: 80 seconds.</a:t>
+              <a:t>Lab01B, additional presentation requirement. Fences are Q1−1.5IQR and Q3+1.5IQR.114 observations (3.8%) are high-side flags. The source-row ledger records their BMI/status. Demonstrate actual removal with the2886-row sensitivity dataset and compare mean, variance and status composition. Valid extreme BMI values stay in the primary analysis because being unusual does not establish error. The removal comparison is explicitly a different analysis sample. Suggested time: 75 seconds.</a:t>
             </a:r>
           </a:p>
           <a:p xmlns:a="http://schemas.openxmlformats.org/drawingml/2006/main">
@@ -1328,7 +1454,7 @@
           <a:lstStyle xmlns:a="http://schemas.openxmlformats.org/drawingml/2006/main"/>
           <a:p xmlns:a="http://schemas.openxmlformats.org/drawingml/2006/main">
             <a:r>
-              <a:t>Course Experiment2, Lab02. The numeric summary uses sample SD/variance (n−1). BMI units kg/m²; variance squared units. Mental/physical days have median0, while means3.256 and4.152 indicate right-skewness. Graphs demonstrate histogram, boxplot, density, education bar and sex pie; physical-day bar and all29 original drawings are in the atlas. The no-school group has2 respondents. Explain bar comparison, pie proportions and the density right tail. Suggested time: 80 seconds.</a:t>
+              <a:t>Course Experiment2, Lab02. The numeric summary uses sample SD/variance (n−1). BMI units kg/m²; variance squared units. Mental/physical days have median0, while means3.256 and4.152 indicate right-skewness. Graphs demonstrate histogram, boxplot, density, education bar and sex pie; physical-day bar and all29 original drawings are in the atlas. The no-school group has2 respondents. Explain bar comparison, pie proportions and the density right tail. Suggested time: 75 seconds.</a:t>
             </a:r>
           </a:p>
           <a:p xmlns:a="http://schemas.openxmlformats.org/drawingml/2006/main">
@@ -1453,7 +1579,7 @@
           <a:lstStyle xmlns:a="http://schemas.openxmlformats.org/drawingml/2006/main"/>
           <a:p xmlns:a="http://schemas.openxmlformats.org/drawingml/2006/main">
             <a:r>
-              <a:t>Course Experiment3, Lab03. Pearsonr .101606,95%CI .06606–.13689,p&lt;.001; Spearman .107897. Slope .074898,95%CI .048637–.101159. Covariance5.56044 BMI×days measures shared variation; correlation scales it. R² .0103238. A one-day increase is associated with0.075BMI units in the fitted line. Boxplots and means show higher average BMI in prediabetes/diabetes, with overlapping distributions. Prediabetesn48 limits precision. The model estimates BMI associations rather than causal effects. Suggested time: 90 seconds.</a:t>
+              <a:t>Course Experiment3, Lab03. Pearsonr .101606,95%CI .06606–.13689,p&lt;.001; Spearman .107897. Slope .074898,95%CI .048637–.101159. Covariance5.56044 BMI×days measures shared variation; correlation scales it. R² .0103238. A one-day increase is associated with0.075BMI units in the fitted line. Boxplots and means show higher average BMI in prediabetes/diabetes, with overlapping distributions. Prediabetesn48 limits precision. The model estimates BMI associations rather than causal effects. Suggested time: 85 seconds.</a:t>
             </a:r>
           </a:p>
           <a:p xmlns:a="http://schemas.openxmlformats.org/drawingml/2006/main">
@@ -1578,7 +1704,7 @@
           <a:lstStyle xmlns:a="http://schemas.openxmlformats.org/drawingml/2006/main"/>
           <a:p xmlns:a="http://schemas.openxmlformats.org/drawingml/2006/main">
             <a:r>
-              <a:t>Course Experiment4, Lab04. BMI response with factor Age/Income/Education, activity and ever100-cigarettes indicator. References age50–54, income35–50k, high school, inactive, never100. R² .068067,adjusted .059917. Joint partialF tests account for other predictors. Smoking BMI coefficient−.0633,CI−.5206 to .3940,p.786. The right-skewed residuals and uneven spread limit the approximation. Cook4/n flags140 for review. Filtering yields adjustedR²4.89%. Full coefficients, confidence intervals and VIFs remain in the report/CSV. No diabetes classification accuracy is claimed. Suggested time: 90 seconds.</a:t>
+              <a:t>Course Experiment4, Lab04. BMI response with factor Age/Income/Education, activity and ever100-cigarettes indicator. References age50–54, income35–50k, high school, inactive, never100. R² .068067,adjusted .059917. Joint partialF tests account for other predictors. Smoking BMI coefficient−.0633,CI−.5206 to .3940,p.786. The right-skewed residuals and uneven spread limit the approximation. Cook4/n flags140 for review. Filtering yields adjustedR²4.89%. Full coefficients, confidence intervals and VIFs remain in the report/CSV. No diabetes classification accuracy is claimed. Suggested time: 85 seconds.</a:t>
             </a:r>
           </a:p>
           <a:p xmlns:a="http://schemas.openxmlformats.org/drawingml/2006/main">
@@ -1703,7 +1829,7 @@
           <a:lstStyle xmlns:a="http://schemas.openxmlformats.org/drawingml/2006/main"/>
           <a:p xmlns:a="http://schemas.openxmlformats.org/drawingml/2006/main">
             <a:r>
-              <a:t>Course Experiments5/6, Labs05/06. Binomial:300 artificial groups of10,rawpositivep .156333; pooled MLE .154999,chi .287105,df3,p .962435,expectedmin16.65. Plot aggregates5–10 into5+ for readability. NormalBMI mean28.398,SD6.351,ShapiroW.896929,p&lt;.001. Poisson rawmeanlambda4.151667,var74.240077,dispersion17.88199,zeros62.9%,30days7.4%. Native chart aggregates full support, including&gt;30. Formal pooled test uses grouped MLElambda1.797448,chi41781.676,df6,p&lt;.001,expectedmin7.65. Ordinary overlay uses rawmean; the two estimation procedures are distinguished in the report. Describe why normal/Poisson fail rather than forcing a good fit. Suggested time: 90 seconds.</a:t>
+              <a:t>Course Experiments5/6, Labs05/06. Binomial:300 artificial groups of10,rawpositivep .156333; pooled MLE .154999,chi .287105,df3,p .962435,expectedmin16.65. Plot aggregates5–10 into5+ for readability. NormalBMI mean28.398,SD6.351,ShapiroW.896929,p&lt;.001. Poisson rawmeanlambda4.151667,var74.240077,dispersion17.88199,zeros62.9%,30days7.4%. Native chart aggregates full support, including&gt;30. Formal pooled test uses grouped MLElambda1.797448,chi41781.676,df6,p&lt;.001,expectedmin7.65. Ordinary overlay uses rawmean; the two estimation procedures are distinguished in the report. Describe why normal/Poisson fail rather than forcing a good fit. Suggested time: 85 seconds.</a:t>
             </a:r>
           </a:p>
           <a:p xmlns:a="http://schemas.openxmlformats.org/drawingml/2006/main">
@@ -1828,7 +1954,7 @@
           <a:lstStyle xmlns:a="http://schemas.openxmlformats.org/drawingml/2006/main"/>
           <a:p xmlns:a="http://schemas.openxmlformats.org/drawingml/2006/main">
             <a:r>
-              <a:t>Course Experiments7/8/9, Labs07/08/09a/09b. All alternatives two-sided. BMI27 and positive proportion11% are hypothetical classroom benchmarks. Welch BMI differencefemale−male−.6494,CI−1.0958 to−.2030,p.004368; smokerpositive14.087% versus17.361%,difference−3.273pp,CI−5.953 to−.594,p.015765 using continuity correction. PhysHlthfemale−male1.2463days,CI.6343 to1.8584,p&lt;.001. Genuine paired example uses29 CBT patients from MASS anorexia, postminuspre mean3.0069lb,CI.2269 to5.7869,t2.2156,df28,p.0350. Non-normal differences Shapiro.00795 and signed-rank sensitivityp.0645 make this result method-sensitive. A within-group change does not prove treatment efficacy. Patient trajectories are blue and average orange. Suggested time: 110 seconds.</a:t>
+              <a:t>Course Experiments7/8 only. All alternatives are two-sided. One-sample BMI benchmark27 and combined-positive benchmark11% are hypothetical classroom assumptions. MeanBMI28.3983,95%CI28.1710–28.6257,t12.0587,df2999,p&lt;.001. Positive469/3000=.156333,95%CI .143617–.169940,continuity-corrected score-test chi-square65.3124,p&lt;.001. Welch independent BMI comparison: female mean28.1098,male28.7592,differencefemale−male−.649412,CI−1.095818to−.203006,p .004368. Never/ever100-cigarette combined-positive shares223/1583=.140872 versus246/1417=.173606,differencenever−ever−.032734,CI−.059530to−.005939,p .015765 with continuity correction. Counts use the explicit positive event: prediabetes OR diabetes. Charts show observed group means/proportions; captions give confidence intervals for differences, not for individual measurements. All rows use the primary3000 sample. Suggested time: 100 seconds.</a:t>
             </a:r>
           </a:p>
           <a:p xmlns:a="http://schemas.openxmlformats.org/drawingml/2006/main">
@@ -1930,7 +2056,7 @@
           <p:cNvPr id="3" name="Title">
             <a:extLst xmlns:a="http://schemas.openxmlformats.org/drawingml/2006/main">
               <a:ext uri="{FF2B5EF4-FFF2-40B4-BE49-F238E27FC236}">
-                <a16:creationId xmlns:a16="http://schemas.microsoft.com/office/drawing/2014/main" id="{942CEF49-8614-40DA-90E4-9AFE03D6D164}"/>
+                <a16:creationId xmlns:a16="http://schemas.microsoft.com/office/drawing/2014/main" id="{15F2FDB9-DDB1-4860-9A30-3F5F1E1EC4C7}"/>
               </a:ext>
             </a:extLst>
           </p:cNvPr>
@@ -2087,7 +2213,7 @@
           <p:cNvPr id="2" name="Subtitle">
             <a:extLst xmlns:a="http://schemas.openxmlformats.org/drawingml/2006/main">
               <a:ext uri="{FF2B5EF4-FFF2-40B4-BE49-F238E27FC236}">
-                <a16:creationId xmlns:a16="http://schemas.microsoft.com/office/drawing/2014/main" id="{1A7C3A8A-58F0-4216-BC9A-661534EE74B2}"/>
+                <a16:creationId xmlns:a16="http://schemas.microsoft.com/office/drawing/2014/main" id="{0B27ECE4-9F91-4C2B-891C-6636437E0476}"/>
               </a:ext>
             </a:extLst>
           </p:cNvPr>
@@ -2261,7 +2387,7 @@
           <p:cNvPr id="2" name="Section title">
             <a:extLst xmlns:a="http://schemas.openxmlformats.org/drawingml/2006/main">
               <a:ext uri="{FF2B5EF4-FFF2-40B4-BE49-F238E27FC236}">
-                <a16:creationId xmlns:a16="http://schemas.microsoft.com/office/drawing/2014/main" id="{CA51C420-63F1-46A2-906C-BC9BC6B29534}"/>
+                <a16:creationId xmlns:a16="http://schemas.microsoft.com/office/drawing/2014/main" id="{E9430536-90DE-42C4-9F63-063DC68C7855}"/>
               </a:ext>
             </a:extLst>
           </p:cNvPr>
@@ -2435,7 +2561,7 @@
           <p:cNvPr id="3" name="Title">
             <a:extLst xmlns:a="http://schemas.openxmlformats.org/drawingml/2006/main">
               <a:ext uri="{FF2B5EF4-FFF2-40B4-BE49-F238E27FC236}">
-                <a16:creationId xmlns:a16="http://schemas.microsoft.com/office/drawing/2014/main" id="{33FC8BEE-805C-44D2-B8F5-A4D1C260A1B4}"/>
+                <a16:creationId xmlns:a16="http://schemas.microsoft.com/office/drawing/2014/main" id="{777F2F77-BDE7-4492-BFB8-2D14061188A6}"/>
               </a:ext>
             </a:extLst>
           </p:cNvPr>
@@ -2592,7 +2718,7 @@
           <p:cNvPr id="2" name="Body">
             <a:extLst xmlns:a="http://schemas.openxmlformats.org/drawingml/2006/main">
               <a:ext uri="{FF2B5EF4-FFF2-40B4-BE49-F238E27FC236}">
-                <a16:creationId xmlns:a16="http://schemas.microsoft.com/office/drawing/2014/main" id="{5776CC00-2452-41C9-BB0B-15CB9FE6AD35}"/>
+                <a16:creationId xmlns:a16="http://schemas.microsoft.com/office/drawing/2014/main" id="{3D3F2B60-AB2E-4241-973F-DADB80A05F2C}"/>
               </a:ext>
             </a:extLst>
           </p:cNvPr>
@@ -2766,7 +2892,7 @@
           <p:cNvPr id="4" name="Title">
             <a:extLst xmlns:a="http://schemas.openxmlformats.org/drawingml/2006/main">
               <a:ext uri="{FF2B5EF4-FFF2-40B4-BE49-F238E27FC236}">
-                <a16:creationId xmlns:a16="http://schemas.microsoft.com/office/drawing/2014/main" id="{408FC889-9357-41EE-87D2-87DC853C9F57}"/>
+                <a16:creationId xmlns:a16="http://schemas.microsoft.com/office/drawing/2014/main" id="{EB54C296-BD40-48B5-8E68-66F1D74C453D}"/>
               </a:ext>
             </a:extLst>
           </p:cNvPr>
@@ -2923,7 +3049,7 @@
           <p:cNvPr id="2" name="Left column">
             <a:extLst xmlns:a="http://schemas.openxmlformats.org/drawingml/2006/main">
               <a:ext uri="{FF2B5EF4-FFF2-40B4-BE49-F238E27FC236}">
-                <a16:creationId xmlns:a16="http://schemas.microsoft.com/office/drawing/2014/main" id="{7F339861-064D-4EB9-9FB5-59CB087A2766}"/>
+                <a16:creationId xmlns:a16="http://schemas.microsoft.com/office/drawing/2014/main" id="{760B2F3C-F111-4FC0-B146-CD346EAE8C69}"/>
               </a:ext>
             </a:extLst>
           </p:cNvPr>
@@ -3080,7 +3206,7 @@
           <p:cNvPr id="3" name="Right column">
             <a:extLst xmlns:a="http://schemas.openxmlformats.org/drawingml/2006/main">
               <a:ext uri="{FF2B5EF4-FFF2-40B4-BE49-F238E27FC236}">
-                <a16:creationId xmlns:a16="http://schemas.microsoft.com/office/drawing/2014/main" id="{A9437D7B-1E0A-495A-83B1-135E4FE5B256}"/>
+                <a16:creationId xmlns:a16="http://schemas.microsoft.com/office/drawing/2014/main" id="{4C1FF995-7097-40E9-A7FE-FF95460743AF}"/>
               </a:ext>
             </a:extLst>
           </p:cNvPr>
@@ -3254,7 +3380,7 @@
           <p:cNvPr id="3" name="Title">
             <a:extLst xmlns:a="http://schemas.openxmlformats.org/drawingml/2006/main">
               <a:ext uri="{FF2B5EF4-FFF2-40B4-BE49-F238E27FC236}">
-                <a16:creationId xmlns:a16="http://schemas.microsoft.com/office/drawing/2014/main" id="{D8BA2789-EDBE-4989-88FB-138347014A21}"/>
+                <a16:creationId xmlns:a16="http://schemas.microsoft.com/office/drawing/2014/main" id="{35C0BB59-84AE-4938-B527-D108C3353A85}"/>
               </a:ext>
             </a:extLst>
           </p:cNvPr>
@@ -3411,7 +3537,7 @@
           <p:cNvPr id="2" name="Left column">
             <a:extLst xmlns:a="http://schemas.openxmlformats.org/drawingml/2006/main">
               <a:ext uri="{FF2B5EF4-FFF2-40B4-BE49-F238E27FC236}">
-                <a16:creationId xmlns:a16="http://schemas.microsoft.com/office/drawing/2014/main" id="{61EDD9C7-0288-4160-9F94-CA0721969EEA}"/>
+                <a16:creationId xmlns:a16="http://schemas.microsoft.com/office/drawing/2014/main" id="{EBEAD80B-177D-486C-9826-9FC24460231B}"/>
               </a:ext>
             </a:extLst>
           </p:cNvPr>
@@ -3606,12 +3732,12 @@
   </p:cSld>
   <p:clrMap bg1="lt1" tx1="dk1" bg2="lt2" tx2="dk2" accent1="accent1" accent2="accent2" accent3="accent3" accent4="accent4" accent5="accent5" accent6="accent6" hlink="hlink" folHlink="folHlink"/>
   <p:sldLayoutIdLst>
-    <p:sldLayoutId xmlns:r="http://schemas.openxmlformats.org/officeDocument/2006/relationships" id="2147483649" r:id="R0749e719fdfb4588"/>
-    <p:sldLayoutId xmlns:r="http://schemas.openxmlformats.org/officeDocument/2006/relationships" id="2147483650" r:id="Rb74a1b8e0a22405a"/>
-    <p:sldLayoutId xmlns:r="http://schemas.openxmlformats.org/officeDocument/2006/relationships" id="2147483651" r:id="R6208e2aa360d4a4f"/>
-    <p:sldLayoutId xmlns:r="http://schemas.openxmlformats.org/officeDocument/2006/relationships" id="2147483652" r:id="Ra0143974aa2b4d86"/>
-    <p:sldLayoutId xmlns:r="http://schemas.openxmlformats.org/officeDocument/2006/relationships" id="2147483653" r:id="R6a9aab3484f746a0"/>
-    <p:sldLayoutId xmlns:r="http://schemas.openxmlformats.org/officeDocument/2006/relationships" id="2147483654" r:id="Rfb426bc917554a07"/>
+    <p:sldLayoutId xmlns:r="http://schemas.openxmlformats.org/officeDocument/2006/relationships" id="2147483649" r:id="R20b7da9f41c74563"/>
+    <p:sldLayoutId xmlns:r="http://schemas.openxmlformats.org/officeDocument/2006/relationships" id="2147483650" r:id="R650def1fd99442f3"/>
+    <p:sldLayoutId xmlns:r="http://schemas.openxmlformats.org/officeDocument/2006/relationships" id="2147483651" r:id="Rd965106ed74147be"/>
+    <p:sldLayoutId xmlns:r="http://schemas.openxmlformats.org/officeDocument/2006/relationships" id="2147483652" r:id="R9c56f456e6324f29"/>
+    <p:sldLayoutId xmlns:r="http://schemas.openxmlformats.org/officeDocument/2006/relationships" id="2147483653" r:id="Re4ee6324d8fb4c23"/>
+    <p:sldLayoutId xmlns:r="http://schemas.openxmlformats.org/officeDocument/2006/relationships" id="2147483654" r:id="R78357283b62c4a0f"/>
   </p:sldLayoutIdLst>
   <p:txStyles>
     <p:titleStyle>
@@ -4355,6 +4481,923 @@
 </c:chartSpace>
 </file>
 
+<file path=ppt/slides/charts/chart10.xml><?xml version="1.0" encoding="utf-8"?>
+<c:chartSpace xmlns:c="http://schemas.openxmlformats.org/drawingml/2006/chart" xmlns:r="http://schemas.openxmlformats.org/officeDocument/2006/relationships">
+  <c:lang val="en-US"/>
+  <c:chart>
+    <c:plotArea>
+      <c:barChart>
+        <c:barDir val="col"/>
+        <c:grouping val="clustered"/>
+        <c:varyColors val="0"/>
+        <c:ser>
+          <c:idx val="0"/>
+          <c:order val="0"/>
+          <c:tx>
+            <c:v>Positive status (%)</c:v>
+          </c:tx>
+          <c:invertIfNegative val="0"/>
+          <c:dPt>
+            <c:idx val="0"/>
+            <c:invertIfNegative val="0"/>
+            <c:spPr>
+              <a:solidFill xmlns:a="http://schemas.openxmlformats.org/drawingml/2006/main">
+                <a:srgbClr val="176D8C"/>
+              </a:solidFill>
+            </c:spPr>
+          </c:dPt>
+          <c:dPt>
+            <c:idx val="1"/>
+            <c:invertIfNegative val="0"/>
+            <c:spPr>
+              <a:solidFill xmlns:a="http://schemas.openxmlformats.org/drawingml/2006/main">
+                <a:srgbClr val="D87945"/>
+              </a:solidFill>
+            </c:spPr>
+          </c:dPt>
+          <c:cat>
+            <c:strRef>
+              <c:f>'Chart Data'!$A$2:$A$3</c:f>
+              <c:strCache>
+                <c:ptCount val="2"/>
+                <c:pt idx="0">
+                  <c:v>No high BP</c:v>
+                </c:pt>
+                <c:pt idx="1">
+                  <c:v>High BP</c:v>
+                </c:pt>
+              </c:strCache>
+            </c:strRef>
+          </c:cat>
+          <c:val>
+            <c:numRef>
+              <c:f>'Chart Data'!$B$2:$B$3</c:f>
+              <c:numCache>
+                <c:formatCode>General</c:formatCode>
+                <c:ptCount val="2"/>
+                <c:pt idx="0">
+                  <c:v>6.9289</c:v>
+                </c:pt>
+                <c:pt idx="1">
+                  <c:v>27.0625</c:v>
+                </c:pt>
+              </c:numCache>
+            </c:numRef>
+          </c:val>
+        </c:ser>
+        <c:dLbls>
+          <c:numFmt formatCode="0.0&quot;%&quot;" sourceLinked="0"/>
+          <c:txPr>
+            <a:bodyPr xmlns:a="http://schemas.openxmlformats.org/drawingml/2006/main" anchorCtr="1"/>
+            <a:lstStyle xmlns:a="http://schemas.openxmlformats.org/drawingml/2006/main"/>
+            <a:p xmlns:a="http://schemas.openxmlformats.org/drawingml/2006/main">
+              <a:pPr>
+                <a:defRPr sz="1575">
+                  <a:latin typeface="Arial"/>
+                  <a:ea typeface="Arial"/>
+                  <a:cs typeface="Arial"/>
+                </a:defRPr>
+              </a:pPr>
+            </a:p>
+          </c:txPr>
+          <c:dLblPos val="outEnd"/>
+          <c:showLegendKey val="0"/>
+          <c:showVal val="1"/>
+          <c:showCatName val="0"/>
+          <c:showSerName val="0"/>
+          <c:showPercent val="0"/>
+          <c:showBubbleSize val="0"/>
+          <c:showLeaderLines val="0"/>
+        </c:dLbls>
+        <c:gapWidth val="65"/>
+        <c:axId val="48650112"/>
+        <c:axId val="48672768"/>
+      </c:barChart>
+      <c:catAx>
+        <c:axId val="48650112"/>
+        <c:scaling>
+          <c:orientation val="minMax"/>
+        </c:scaling>
+        <c:delete val="0"/>
+        <c:axPos val="b"/>
+        <c:numFmt formatCode="General"/>
+        <c:majorTickMark val="none"/>
+        <c:minorTickMark val="none"/>
+        <c:spPr>
+          <a:ln xmlns:a="http://schemas.openxmlformats.org/drawingml/2006/main" w="9525">
+            <a:solidFill>
+              <a:srgbClr val="AABCC6"/>
+            </a:solidFill>
+          </a:ln>
+        </c:spPr>
+        <c:txPr>
+          <a:bodyPr xmlns:a="http://schemas.openxmlformats.org/drawingml/2006/main" anchorCtr="1"/>
+          <a:lstStyle xmlns:a="http://schemas.openxmlformats.org/drawingml/2006/main"/>
+          <a:p xmlns:a="http://schemas.openxmlformats.org/drawingml/2006/main">
+            <a:pPr>
+              <a:defRPr sz="1275">
+                <a:solidFill>
+                  <a:srgbClr val="666666"/>
+                </a:solidFill>
+                <a:latin typeface="Arial"/>
+                <a:ea typeface="Arial"/>
+                <a:cs typeface="Arial"/>
+              </a:defRPr>
+            </a:pPr>
+          </a:p>
+        </c:txPr>
+        <c:crossAx val="48672768"/>
+      </c:catAx>
+      <c:valAx>
+        <c:axId val="48672768"/>
+        <c:scaling>
+          <c:orientation val="minMax"/>
+          <c:max val="35"/>
+          <c:min val="0"/>
+        </c:scaling>
+        <c:delete val="0"/>
+        <c:axPos val="l"/>
+        <c:majorGridlines>
+          <c:spPr>
+            <a:ln xmlns:a="http://schemas.openxmlformats.org/drawingml/2006/main" w="9525">
+              <a:solidFill>
+                <a:srgbClr val="DFE7EB"/>
+              </a:solidFill>
+            </a:ln>
+          </c:spPr>
+        </c:majorGridlines>
+        <c:title>
+          <c:tx>
+            <c:rich>
+              <a:bodyPr xmlns:a="http://schemas.openxmlformats.org/drawingml/2006/main"/>
+              <a:lstStyle xmlns:a="http://schemas.openxmlformats.org/drawingml/2006/main"/>
+              <a:p xmlns:a="http://schemas.openxmlformats.org/drawingml/2006/main">
+                <a:r>
+                  <a:rPr sz="1275">
+                    <a:latin typeface="Arial"/>
+                    <a:ea typeface="Arial"/>
+                    <a:cs typeface="Arial"/>
+                  </a:rPr>
+                  <a:t>Positive status (%)</a:t>
+                </a:r>
+              </a:p>
+            </c:rich>
+          </c:tx>
+          <c:overlay val="0"/>
+          <c:txPr>
+            <a:bodyPr xmlns:a="http://schemas.openxmlformats.org/drawingml/2006/main" anchorCtr="1"/>
+            <a:lstStyle xmlns:a="http://schemas.openxmlformats.org/drawingml/2006/main"/>
+            <a:p xmlns:a="http://schemas.openxmlformats.org/drawingml/2006/main">
+              <a:pPr>
+                <a:defRPr sz="1275">
+                  <a:latin typeface="Arial"/>
+                  <a:ea typeface="Arial"/>
+                  <a:cs typeface="Arial"/>
+                </a:defRPr>
+              </a:pPr>
+            </a:p>
+          </c:txPr>
+        </c:title>
+        <c:numFmt formatCode="General"/>
+        <c:majorTickMark val="none"/>
+        <c:minorTickMark val="none"/>
+        <c:spPr>
+          <a:ln xmlns:a="http://schemas.openxmlformats.org/drawingml/2006/main" w="9525">
+            <a:solidFill>
+              <a:srgbClr val="D4D4D4"/>
+            </a:solidFill>
+            <a:prstDash val="solid"/>
+          </a:ln>
+        </c:spPr>
+        <c:txPr>
+          <a:bodyPr xmlns:a="http://schemas.openxmlformats.org/drawingml/2006/main" anchorCtr="1"/>
+          <a:lstStyle xmlns:a="http://schemas.openxmlformats.org/drawingml/2006/main"/>
+          <a:p xmlns:a="http://schemas.openxmlformats.org/drawingml/2006/main">
+            <a:pPr>
+              <a:defRPr sz="1275">
+                <a:solidFill>
+                  <a:srgbClr val="666666"/>
+                </a:solidFill>
+                <a:latin typeface="Arial"/>
+                <a:ea typeface="Arial"/>
+                <a:cs typeface="Arial"/>
+              </a:defRPr>
+            </a:pPr>
+          </a:p>
+        </c:txPr>
+        <c:crossAx val="48650112"/>
+        <c:crossBetween val="between"/>
+        <c:majorUnit val="10"/>
+      </c:valAx>
+      <c:spPr>
+        <a:solidFill xmlns:a="http://schemas.openxmlformats.org/drawingml/2006/main">
+          <a:srgbClr val="FFFFFF"/>
+        </a:solidFill>
+      </c:spPr>
+    </c:plotArea>
+    <c:plotVisOnly val="1"/>
+  </c:chart>
+  <c:spPr>
+    <a:solidFill xmlns:a="http://schemas.openxmlformats.org/drawingml/2006/main">
+      <a:srgbClr val="FFFFFF"/>
+    </a:solidFill>
+    <a:ln xmlns:a="http://schemas.openxmlformats.org/drawingml/2006/main" w="0">
+      <a:noFill/>
+    </a:ln>
+  </c:spPr>
+  <c:externalData r:id="rIdChartSnapshot1">
+    <c:autoUpdate val="0"/>
+  </c:externalData>
+</c:chartSpace>
+</file>
+
+<file path=ppt/slides/charts/chart11.xml><?xml version="1.0" encoding="utf-8"?>
+<c:chartSpace xmlns:c="http://schemas.openxmlformats.org/drawingml/2006/chart" xmlns:r="http://schemas.openxmlformats.org/officeDocument/2006/relationships">
+  <c:lang val="en-US"/>
+  <c:chart>
+    <c:plotArea>
+      <c:barChart>
+        <c:barDir val="col"/>
+        <c:grouping val="clustered"/>
+        <c:varyColors val="0"/>
+        <c:ser>
+          <c:idx val="0"/>
+          <c:order val="0"/>
+          <c:tx>
+            <c:v>Positive status (%)</c:v>
+          </c:tx>
+          <c:invertIfNegative val="0"/>
+          <c:dPt>
+            <c:idx val="0"/>
+            <c:invertIfNegative val="0"/>
+            <c:spPr>
+              <a:solidFill xmlns:a="http://schemas.openxmlformats.org/drawingml/2006/main">
+                <a:srgbClr val="176D8C"/>
+              </a:solidFill>
+            </c:spPr>
+          </c:dPt>
+          <c:dPt>
+            <c:idx val="1"/>
+            <c:invertIfNegative val="0"/>
+            <c:spPr>
+              <a:solidFill xmlns:a="http://schemas.openxmlformats.org/drawingml/2006/main">
+                <a:srgbClr val="D87945"/>
+              </a:solidFill>
+            </c:spPr>
+          </c:dPt>
+          <c:cat>
+            <c:strRef>
+              <c:f>'Chart Data'!$A$2:$A$3</c:f>
+              <c:strCache>
+                <c:ptCount val="2"/>
+                <c:pt idx="0">
+                  <c:v>Never 100 cigarettes</c:v>
+                </c:pt>
+                <c:pt idx="1">
+                  <c:v>Ever 100 cigarettes</c:v>
+                </c:pt>
+              </c:strCache>
+            </c:strRef>
+          </c:cat>
+          <c:val>
+            <c:numRef>
+              <c:f>'Chart Data'!$B$2:$B$3</c:f>
+              <c:numCache>
+                <c:formatCode>General</c:formatCode>
+                <c:ptCount val="2"/>
+                <c:pt idx="0">
+                  <c:v>14.0872</c:v>
+                </c:pt>
+                <c:pt idx="1">
+                  <c:v>17.3606</c:v>
+                </c:pt>
+              </c:numCache>
+            </c:numRef>
+          </c:val>
+        </c:ser>
+        <c:dLbls>
+          <c:numFmt formatCode="0.0&quot;%&quot;" sourceLinked="0"/>
+          <c:txPr>
+            <a:bodyPr xmlns:a="http://schemas.openxmlformats.org/drawingml/2006/main" anchorCtr="1"/>
+            <a:lstStyle xmlns:a="http://schemas.openxmlformats.org/drawingml/2006/main"/>
+            <a:p xmlns:a="http://schemas.openxmlformats.org/drawingml/2006/main">
+              <a:pPr>
+                <a:defRPr sz="1575">
+                  <a:latin typeface="Arial"/>
+                  <a:ea typeface="Arial"/>
+                  <a:cs typeface="Arial"/>
+                </a:defRPr>
+              </a:pPr>
+            </a:p>
+          </c:txPr>
+          <c:dLblPos val="outEnd"/>
+          <c:showLegendKey val="0"/>
+          <c:showVal val="1"/>
+          <c:showCatName val="0"/>
+          <c:showSerName val="0"/>
+          <c:showPercent val="0"/>
+          <c:showBubbleSize val="0"/>
+          <c:showLeaderLines val="0"/>
+        </c:dLbls>
+        <c:gapWidth val="65"/>
+        <c:axId val="48650112"/>
+        <c:axId val="48672768"/>
+      </c:barChart>
+      <c:catAx>
+        <c:axId val="48650112"/>
+        <c:scaling>
+          <c:orientation val="minMax"/>
+        </c:scaling>
+        <c:delete val="0"/>
+        <c:axPos val="b"/>
+        <c:numFmt formatCode="General"/>
+        <c:majorTickMark val="none"/>
+        <c:minorTickMark val="none"/>
+        <c:spPr>
+          <a:ln xmlns:a="http://schemas.openxmlformats.org/drawingml/2006/main" w="9525">
+            <a:solidFill>
+              <a:srgbClr val="AABCC6"/>
+            </a:solidFill>
+          </a:ln>
+        </c:spPr>
+        <c:txPr>
+          <a:bodyPr xmlns:a="http://schemas.openxmlformats.org/drawingml/2006/main" anchorCtr="1"/>
+          <a:lstStyle xmlns:a="http://schemas.openxmlformats.org/drawingml/2006/main"/>
+          <a:p xmlns:a="http://schemas.openxmlformats.org/drawingml/2006/main">
+            <a:pPr>
+              <a:defRPr sz="1275">
+                <a:solidFill>
+                  <a:srgbClr val="666666"/>
+                </a:solidFill>
+                <a:latin typeface="Arial"/>
+                <a:ea typeface="Arial"/>
+                <a:cs typeface="Arial"/>
+              </a:defRPr>
+            </a:pPr>
+          </a:p>
+        </c:txPr>
+        <c:crossAx val="48672768"/>
+      </c:catAx>
+      <c:valAx>
+        <c:axId val="48672768"/>
+        <c:scaling>
+          <c:orientation val="minMax"/>
+          <c:max val="35"/>
+          <c:min val="0"/>
+        </c:scaling>
+        <c:delete val="0"/>
+        <c:axPos val="l"/>
+        <c:majorGridlines>
+          <c:spPr>
+            <a:ln xmlns:a="http://schemas.openxmlformats.org/drawingml/2006/main" w="9525">
+              <a:solidFill>
+                <a:srgbClr val="DFE7EB"/>
+              </a:solidFill>
+            </a:ln>
+          </c:spPr>
+        </c:majorGridlines>
+        <c:title>
+          <c:tx>
+            <c:rich>
+              <a:bodyPr xmlns:a="http://schemas.openxmlformats.org/drawingml/2006/main"/>
+              <a:lstStyle xmlns:a="http://schemas.openxmlformats.org/drawingml/2006/main"/>
+              <a:p xmlns:a="http://schemas.openxmlformats.org/drawingml/2006/main">
+                <a:r>
+                  <a:rPr sz="1275">
+                    <a:latin typeface="Arial"/>
+                    <a:ea typeface="Arial"/>
+                    <a:cs typeface="Arial"/>
+                  </a:rPr>
+                  <a:t>Positive status (%)</a:t>
+                </a:r>
+              </a:p>
+            </c:rich>
+          </c:tx>
+          <c:overlay val="0"/>
+          <c:txPr>
+            <a:bodyPr xmlns:a="http://schemas.openxmlformats.org/drawingml/2006/main" anchorCtr="1"/>
+            <a:lstStyle xmlns:a="http://schemas.openxmlformats.org/drawingml/2006/main"/>
+            <a:p xmlns:a="http://schemas.openxmlformats.org/drawingml/2006/main">
+              <a:pPr>
+                <a:defRPr sz="1275">
+                  <a:latin typeface="Arial"/>
+                  <a:ea typeface="Arial"/>
+                  <a:cs typeface="Arial"/>
+                </a:defRPr>
+              </a:pPr>
+            </a:p>
+          </c:txPr>
+        </c:title>
+        <c:numFmt formatCode="General"/>
+        <c:majorTickMark val="none"/>
+        <c:minorTickMark val="none"/>
+        <c:spPr>
+          <a:ln xmlns:a="http://schemas.openxmlformats.org/drawingml/2006/main" w="9525">
+            <a:solidFill>
+              <a:srgbClr val="D4D4D4"/>
+            </a:solidFill>
+            <a:prstDash val="solid"/>
+          </a:ln>
+        </c:spPr>
+        <c:txPr>
+          <a:bodyPr xmlns:a="http://schemas.openxmlformats.org/drawingml/2006/main" anchorCtr="1"/>
+          <a:lstStyle xmlns:a="http://schemas.openxmlformats.org/drawingml/2006/main"/>
+          <a:p xmlns:a="http://schemas.openxmlformats.org/drawingml/2006/main">
+            <a:pPr>
+              <a:defRPr sz="1275">
+                <a:solidFill>
+                  <a:srgbClr val="666666"/>
+                </a:solidFill>
+                <a:latin typeface="Arial"/>
+                <a:ea typeface="Arial"/>
+                <a:cs typeface="Arial"/>
+              </a:defRPr>
+            </a:pPr>
+          </a:p>
+        </c:txPr>
+        <c:crossAx val="48650112"/>
+        <c:crossBetween val="between"/>
+        <c:majorUnit val="10"/>
+      </c:valAx>
+      <c:spPr>
+        <a:solidFill xmlns:a="http://schemas.openxmlformats.org/drawingml/2006/main">
+          <a:srgbClr val="FFFFFF"/>
+        </a:solidFill>
+      </c:spPr>
+    </c:plotArea>
+    <c:plotVisOnly val="1"/>
+  </c:chart>
+  <c:spPr>
+    <a:solidFill xmlns:a="http://schemas.openxmlformats.org/drawingml/2006/main">
+      <a:srgbClr val="FFFFFF"/>
+    </a:solidFill>
+    <a:ln xmlns:a="http://schemas.openxmlformats.org/drawingml/2006/main" w="0">
+      <a:noFill/>
+    </a:ln>
+  </c:spPr>
+  <c:externalData r:id="rIdChartSnapshot1">
+    <c:autoUpdate val="0"/>
+  </c:externalData>
+</c:chartSpace>
+</file>
+
+<file path=ppt/slides/charts/chart12.xml><?xml version="1.0" encoding="utf-8"?>
+<c:chartSpace xmlns:c="http://schemas.openxmlformats.org/drawingml/2006/chart" xmlns:r="http://schemas.openxmlformats.org/officeDocument/2006/relationships">
+  <c:lang val="en-US"/>
+  <c:chart>
+    <c:plotArea>
+      <c:lineChart>
+        <c:grouping val="standard"/>
+        <c:varyColors val="0"/>
+        <c:ser>
+          <c:idx val="0"/>
+          <c:order val="0"/>
+          <c:tx>
+            <c:v>R1</c:v>
+          </c:tx>
+          <c:spPr>
+            <a:solidFill xmlns:a="http://schemas.openxmlformats.org/drawingml/2006/main">
+              <a:srgbClr val="176D8C"/>
+            </a:solidFill>
+            <a:ln xmlns:a="http://schemas.openxmlformats.org/drawingml/2006/main" w="19050">
+              <a:solidFill>
+                <a:srgbClr val="176D8C"/>
+              </a:solidFill>
+            </a:ln>
+          </c:spPr>
+          <c:marker>
+            <c:symbol val="circle"/>
+            <c:size val="4"/>
+          </c:marker>
+          <c:cat>
+            <c:numRef>
+              <c:f>'Chart Data'!$A$2:$A$7</c:f>
+              <c:numCache>
+                <c:formatCode>General</c:formatCode>
+                <c:ptCount val="6"/>
+                <c:pt idx="0">
+                  <c:v>25</c:v>
+                </c:pt>
+                <c:pt idx="1">
+                  <c:v>50</c:v>
+                </c:pt>
+                <c:pt idx="2">
+                  <c:v>75</c:v>
+                </c:pt>
+                <c:pt idx="3">
+                  <c:v>100</c:v>
+                </c:pt>
+                <c:pt idx="4">
+                  <c:v>125</c:v>
+                </c:pt>
+                <c:pt idx="5">
+                  <c:v>150</c:v>
+                </c:pt>
+              </c:numCache>
+            </c:numRef>
+          </c:cat>
+          <c:val>
+            <c:numRef>
+              <c:f>'Chart Data'!$B$2:$B$7</c:f>
+              <c:numCache>
+                <c:formatCode>General</c:formatCode>
+                <c:ptCount val="6"/>
+                <c:pt idx="0">
+                  <c:v>5113</c:v>
+                </c:pt>
+                <c:pt idx="1">
+                  <c:v>5346</c:v>
+                </c:pt>
+                <c:pt idx="2">
+                  <c:v>5272</c:v>
+                </c:pt>
+                <c:pt idx="3">
+                  <c:v>5164</c:v>
+                </c:pt>
+                <c:pt idx="4">
+                  <c:v>4804</c:v>
+                </c:pt>
+                <c:pt idx="5">
+                  <c:v>5254</c:v>
+                </c:pt>
+              </c:numCache>
+            </c:numRef>
+          </c:val>
+        </c:ser>
+        <c:ser>
+          <c:idx val="1"/>
+          <c:order val="1"/>
+          <c:tx>
+            <c:v>R2</c:v>
+          </c:tx>
+          <c:spPr>
+            <a:solidFill xmlns:a="http://schemas.openxmlformats.org/drawingml/2006/main">
+              <a:srgbClr val="D87945"/>
+            </a:solidFill>
+            <a:ln xmlns:a="http://schemas.openxmlformats.org/drawingml/2006/main" w="19050">
+              <a:solidFill>
+                <a:srgbClr val="D87945"/>
+              </a:solidFill>
+            </a:ln>
+          </c:spPr>
+          <c:marker>
+            <c:symbol val="circle"/>
+            <c:size val="4"/>
+          </c:marker>
+          <c:cat>
+            <c:numRef>
+              <c:f>'Chart Data'!$C$2:$C$7</c:f>
+              <c:numCache>
+                <c:formatCode>General</c:formatCode>
+                <c:ptCount val="6"/>
+                <c:pt idx="0">
+                  <c:v>25</c:v>
+                </c:pt>
+                <c:pt idx="1">
+                  <c:v>50</c:v>
+                </c:pt>
+                <c:pt idx="2">
+                  <c:v>75</c:v>
+                </c:pt>
+                <c:pt idx="3">
+                  <c:v>100</c:v>
+                </c:pt>
+                <c:pt idx="4">
+                  <c:v>125</c:v>
+                </c:pt>
+                <c:pt idx="5">
+                  <c:v>150</c:v>
+                </c:pt>
+              </c:numCache>
+            </c:numRef>
+          </c:cat>
+          <c:val>
+            <c:numRef>
+              <c:f>'Chart Data'!$D$2:$D$7</c:f>
+              <c:numCache>
+                <c:formatCode>General</c:formatCode>
+                <c:ptCount val="6"/>
+                <c:pt idx="0">
+                  <c:v>5398</c:v>
+                </c:pt>
+                <c:pt idx="1">
+                  <c:v>5952</c:v>
+                </c:pt>
+                <c:pt idx="2">
+                  <c:v>5713</c:v>
+                </c:pt>
+                <c:pt idx="3">
+                  <c:v>4831</c:v>
+                </c:pt>
+                <c:pt idx="4">
+                  <c:v>4848</c:v>
+                </c:pt>
+                <c:pt idx="5">
+                  <c:v>4542</c:v>
+                </c:pt>
+              </c:numCache>
+            </c:numRef>
+          </c:val>
+        </c:ser>
+        <c:ser>
+          <c:idx val="2"/>
+          <c:order val="2"/>
+          <c:tx>
+            <c:v>R3</c:v>
+          </c:tx>
+          <c:spPr>
+            <a:solidFill xmlns:a="http://schemas.openxmlformats.org/drawingml/2006/main">
+              <a:srgbClr val="269E91"/>
+            </a:solidFill>
+            <a:ln xmlns:a="http://schemas.openxmlformats.org/drawingml/2006/main" w="19050">
+              <a:solidFill>
+                <a:srgbClr val="269E91"/>
+              </a:solidFill>
+            </a:ln>
+          </c:spPr>
+          <c:marker>
+            <c:symbol val="circle"/>
+            <c:size val="4"/>
+          </c:marker>
+          <c:cat>
+            <c:numRef>
+              <c:f>'Chart Data'!$E$2:$E$7</c:f>
+              <c:numCache>
+                <c:formatCode>General</c:formatCode>
+                <c:ptCount val="6"/>
+                <c:pt idx="0">
+                  <c:v>25</c:v>
+                </c:pt>
+                <c:pt idx="1">
+                  <c:v>50</c:v>
+                </c:pt>
+                <c:pt idx="2">
+                  <c:v>75</c:v>
+                </c:pt>
+                <c:pt idx="3">
+                  <c:v>100</c:v>
+                </c:pt>
+                <c:pt idx="4">
+                  <c:v>125</c:v>
+                </c:pt>
+                <c:pt idx="5">
+                  <c:v>150</c:v>
+                </c:pt>
+              </c:numCache>
+            </c:numRef>
+          </c:cat>
+          <c:val>
+            <c:numRef>
+              <c:f>'Chart Data'!$F$2:$F$7</c:f>
+              <c:numCache>
+                <c:formatCode>General</c:formatCode>
+                <c:ptCount val="6"/>
+                <c:pt idx="0">
+                  <c:v>5307</c:v>
+                </c:pt>
+                <c:pt idx="1">
+                  <c:v>4719</c:v>
+                </c:pt>
+                <c:pt idx="2">
+                  <c:v>5483</c:v>
+                </c:pt>
+                <c:pt idx="3">
+                  <c:v>4986</c:v>
+                </c:pt>
+                <c:pt idx="4">
+                  <c:v>4432</c:v>
+                </c:pt>
+                <c:pt idx="5">
+                  <c:v>4919</c:v>
+                </c:pt>
+              </c:numCache>
+            </c:numRef>
+          </c:val>
+        </c:ser>
+        <c:ser>
+          <c:idx val="3"/>
+          <c:order val="3"/>
+          <c:tx>
+            <c:v>R4</c:v>
+          </c:tx>
+          <c:spPr>
+            <a:solidFill xmlns:a="http://schemas.openxmlformats.org/drawingml/2006/main">
+              <a:srgbClr val="7660A7"/>
+            </a:solidFill>
+            <a:ln xmlns:a="http://schemas.openxmlformats.org/drawingml/2006/main" w="19050">
+              <a:solidFill>
+                <a:srgbClr val="7660A7"/>
+              </a:solidFill>
+            </a:ln>
+          </c:spPr>
+          <c:marker>
+            <c:symbol val="circle"/>
+            <c:size val="4"/>
+          </c:marker>
+          <c:cat>
+            <c:numRef>
+              <c:f>'Chart Data'!$G$2:$G$7</c:f>
+              <c:numCache>
+                <c:formatCode>General</c:formatCode>
+                <c:ptCount val="6"/>
+                <c:pt idx="0">
+                  <c:v>25</c:v>
+                </c:pt>
+                <c:pt idx="1">
+                  <c:v>50</c:v>
+                </c:pt>
+                <c:pt idx="2">
+                  <c:v>75</c:v>
+                </c:pt>
+                <c:pt idx="3">
+                  <c:v>100</c:v>
+                </c:pt>
+                <c:pt idx="4">
+                  <c:v>125</c:v>
+                </c:pt>
+                <c:pt idx="5">
+                  <c:v>150</c:v>
+                </c:pt>
+              </c:numCache>
+            </c:numRef>
+          </c:cat>
+          <c:val>
+            <c:numRef>
+              <c:f>'Chart Data'!$H$2:$H$7</c:f>
+              <c:numCache>
+                <c:formatCode>General</c:formatCode>
+                <c:ptCount val="6"/>
+                <c:pt idx="0">
+                  <c:v>4678</c:v>
+                </c:pt>
+                <c:pt idx="1">
+                  <c:v>4264</c:v>
+                </c:pt>
+                <c:pt idx="2">
+                  <c:v>4749</c:v>
+                </c:pt>
+                <c:pt idx="3">
+                  <c:v>4410</c:v>
+                </c:pt>
+                <c:pt idx="4">
+                  <c:v>4748</c:v>
+                </c:pt>
+                <c:pt idx="5">
+                  <c:v>4098</c:v>
+                </c:pt>
+              </c:numCache>
+            </c:numRef>
+          </c:val>
+        </c:ser>
+        <c:dLbls>
+          <c:txPr>
+            <a:bodyPr xmlns:a="http://schemas.openxmlformats.org/drawingml/2006/main" anchorCtr="1"/>
+            <a:lstStyle xmlns:a="http://schemas.openxmlformats.org/drawingml/2006/main"/>
+            <a:p xmlns:a="http://schemas.openxmlformats.org/drawingml/2006/main">
+              <a:pPr>
+                <a:defRPr>
+                  <a:latin typeface="Arial"/>
+                  <a:ea typeface="Arial"/>
+                  <a:cs typeface="Arial"/>
+                </a:defRPr>
+              </a:pPr>
+            </a:p>
+          </c:txPr>
+          <c:showLegendKey val="0"/>
+          <c:showVal val="0"/>
+          <c:showCatName val="0"/>
+          <c:showSerName val="0"/>
+          <c:showPercent val="0"/>
+          <c:showBubbleSize val="0"/>
+          <c:showLeaderLines val="0"/>
+        </c:dLbls>
+        <c:axId val="48650112"/>
+        <c:axId val="48672768"/>
+      </c:lineChart>
+      <c:catAx>
+        <c:axId val="48650112"/>
+        <c:scaling>
+          <c:orientation val="minMax"/>
+        </c:scaling>
+        <c:delete val="0"/>
+        <c:axPos val="b"/>
+        <c:numFmt formatCode="General"/>
+        <c:majorTickMark val="none"/>
+        <c:minorTickMark val="none"/>
+        <c:spPr>
+          <a:ln xmlns:a="http://schemas.openxmlformats.org/drawingml/2006/main" w="9525">
+            <a:solidFill>
+              <a:srgbClr val="D4D4D4"/>
+            </a:solidFill>
+            <a:prstDash val="solid"/>
+          </a:ln>
+        </c:spPr>
+        <c:txPr>
+          <a:bodyPr xmlns:a="http://schemas.openxmlformats.org/drawingml/2006/main" anchorCtr="1"/>
+          <a:lstStyle xmlns:a="http://schemas.openxmlformats.org/drawingml/2006/main"/>
+          <a:p xmlns:a="http://schemas.openxmlformats.org/drawingml/2006/main">
+            <a:pPr>
+              <a:defRPr sz="1125">
+                <a:solidFill>
+                  <a:srgbClr val="666666"/>
+                </a:solidFill>
+                <a:latin typeface="Arial"/>
+                <a:ea typeface="Arial"/>
+                <a:cs typeface="Arial"/>
+              </a:defRPr>
+            </a:pPr>
+          </a:p>
+        </c:txPr>
+        <c:crossAx val="48672768"/>
+      </c:catAx>
+      <c:valAx>
+        <c:axId val="48672768"/>
+        <c:scaling>
+          <c:orientation val="minMax"/>
+          <c:max val="6000"/>
+          <c:min val="4000"/>
+        </c:scaling>
+        <c:delete val="0"/>
+        <c:axPos val="l"/>
+        <c:majorGridlines>
+          <c:spPr>
+            <a:ln xmlns:a="http://schemas.openxmlformats.org/drawingml/2006/main" w="9525">
+              <a:solidFill>
+                <a:srgbClr val="DFE7EB"/>
+              </a:solidFill>
+            </a:ln>
+          </c:spPr>
+        </c:majorGridlines>
+        <c:numFmt formatCode="General"/>
+        <c:majorTickMark val="none"/>
+        <c:minorTickMark val="none"/>
+        <c:spPr>
+          <a:ln xmlns:a="http://schemas.openxmlformats.org/drawingml/2006/main" w="9525">
+            <a:solidFill>
+              <a:srgbClr val="D4D4D4"/>
+            </a:solidFill>
+            <a:prstDash val="solid"/>
+          </a:ln>
+        </c:spPr>
+        <c:txPr>
+          <a:bodyPr xmlns:a="http://schemas.openxmlformats.org/drawingml/2006/main" anchorCtr="1"/>
+          <a:lstStyle xmlns:a="http://schemas.openxmlformats.org/drawingml/2006/main"/>
+          <a:p xmlns:a="http://schemas.openxmlformats.org/drawingml/2006/main">
+            <a:pPr>
+              <a:defRPr sz="1125">
+                <a:solidFill>
+                  <a:srgbClr val="666666"/>
+                </a:solidFill>
+                <a:latin typeface="Arial"/>
+                <a:ea typeface="Arial"/>
+                <a:cs typeface="Arial"/>
+              </a:defRPr>
+            </a:pPr>
+          </a:p>
+        </c:txPr>
+        <c:crossAx val="48650112"/>
+        <c:crossBetween val="between"/>
+        <c:majorUnit val="1000"/>
+      </c:valAx>
+      <c:spPr>
+        <a:solidFill xmlns:a="http://schemas.openxmlformats.org/drawingml/2006/main">
+          <a:srgbClr val="FFFFFF"/>
+        </a:solidFill>
+      </c:spPr>
+    </c:plotArea>
+    <c:legend>
+      <c:legendPos val="r"/>
+      <c:overlay val="0"/>
+      <c:txPr>
+        <a:bodyPr xmlns:a="http://schemas.openxmlformats.org/drawingml/2006/main" anchorCtr="1"/>
+        <a:lstStyle xmlns:a="http://schemas.openxmlformats.org/drawingml/2006/main"/>
+        <a:p xmlns:a="http://schemas.openxmlformats.org/drawingml/2006/main">
+          <a:pPr>
+            <a:defRPr sz="1125">
+              <a:latin typeface="Arial"/>
+              <a:ea typeface="Arial"/>
+              <a:cs typeface="Arial"/>
+            </a:defRPr>
+          </a:pPr>
+        </a:p>
+      </c:txPr>
+    </c:legend>
+    <c:plotVisOnly val="1"/>
+  </c:chart>
+  <c:spPr>
+    <a:solidFill xmlns:a="http://schemas.openxmlformats.org/drawingml/2006/main">
+      <a:srgbClr val="FFFFFF"/>
+    </a:solidFill>
+    <a:ln xmlns:a="http://schemas.openxmlformats.org/drawingml/2006/main" w="0">
+      <a:noFill/>
+    </a:ln>
+  </c:spPr>
+  <c:externalData r:id="rIdChartSnapshot1">
+    <c:autoUpdate val="0"/>
+  </c:externalData>
+</c:chartSpace>
+</file>
+
 <file path=ppt/slides/charts/chart2.xml><?xml version="1.0" encoding="utf-8"?>
 <c:chartSpace xmlns:c="http://schemas.openxmlformats.org/drawingml/2006/chart" xmlns:r="http://schemas.openxmlformats.org/officeDocument/2006/relationships">
   <c:lang val="en-US"/>
@@ -5292,6 +6335,696 @@
 </file>
 
 <file path=ppt/slides/charts/chart6.xml><?xml version="1.0" encoding="utf-8"?>
+<c:chartSpace xmlns:c="http://schemas.openxmlformats.org/drawingml/2006/chart" xmlns:r="http://schemas.openxmlformats.org/officeDocument/2006/relationships">
+  <c:lang val="en-US"/>
+  <c:chart>
+    <c:plotArea>
+      <c:barChart>
+        <c:barDir val="col"/>
+        <c:grouping val="clustered"/>
+        <c:varyColors val="0"/>
+        <c:ser>
+          <c:idx val="0"/>
+          <c:order val="0"/>
+          <c:tx>
+            <c:v>Mean BMI</c:v>
+          </c:tx>
+          <c:invertIfNegative val="0"/>
+          <c:dPt>
+            <c:idx val="0"/>
+            <c:invertIfNegative val="0"/>
+            <c:spPr>
+              <a:solidFill xmlns:a="http://schemas.openxmlformats.org/drawingml/2006/main">
+                <a:srgbClr val="176D8C"/>
+              </a:solidFill>
+            </c:spPr>
+          </c:dPt>
+          <c:dPt>
+            <c:idx val="1"/>
+            <c:invertIfNegative val="0"/>
+            <c:spPr>
+              <a:solidFill xmlns:a="http://schemas.openxmlformats.org/drawingml/2006/main">
+                <a:srgbClr val="D87945"/>
+              </a:solidFill>
+            </c:spPr>
+          </c:dPt>
+          <c:cat>
+            <c:strRef>
+              <c:f>'Chart Data'!$A$2:$A$3</c:f>
+              <c:strCache>
+                <c:ptCount val="2"/>
+                <c:pt idx="0">
+                  <c:v>Female</c:v>
+                </c:pt>
+                <c:pt idx="1">
+                  <c:v>Male</c:v>
+                </c:pt>
+              </c:strCache>
+            </c:strRef>
+          </c:cat>
+          <c:val>
+            <c:numRef>
+              <c:f>'Chart Data'!$B$2:$B$3</c:f>
+              <c:numCache>
+                <c:formatCode>General</c:formatCode>
+                <c:ptCount val="2"/>
+                <c:pt idx="0">
+                  <c:v>28.1098</c:v>
+                </c:pt>
+                <c:pt idx="1">
+                  <c:v>28.7592</c:v>
+                </c:pt>
+              </c:numCache>
+            </c:numRef>
+          </c:val>
+        </c:ser>
+        <c:dLbls>
+          <c:numFmt formatCode="0.00" sourceLinked="0"/>
+          <c:txPr>
+            <a:bodyPr xmlns:a="http://schemas.openxmlformats.org/drawingml/2006/main" anchorCtr="1"/>
+            <a:lstStyle xmlns:a="http://schemas.openxmlformats.org/drawingml/2006/main"/>
+            <a:p xmlns:a="http://schemas.openxmlformats.org/drawingml/2006/main">
+              <a:pPr>
+                <a:defRPr sz="1575">
+                  <a:latin typeface="Arial"/>
+                  <a:ea typeface="Arial"/>
+                  <a:cs typeface="Arial"/>
+                </a:defRPr>
+              </a:pPr>
+            </a:p>
+          </c:txPr>
+          <c:dLblPos val="outEnd"/>
+          <c:showLegendKey val="0"/>
+          <c:showVal val="1"/>
+          <c:showCatName val="0"/>
+          <c:showSerName val="0"/>
+          <c:showPercent val="0"/>
+          <c:showBubbleSize val="0"/>
+          <c:showLeaderLines val="0"/>
+        </c:dLbls>
+        <c:gapWidth val="65"/>
+        <c:axId val="48650112"/>
+        <c:axId val="48672768"/>
+      </c:barChart>
+      <c:catAx>
+        <c:axId val="48650112"/>
+        <c:scaling>
+          <c:orientation val="minMax"/>
+        </c:scaling>
+        <c:delete val="0"/>
+        <c:axPos val="b"/>
+        <c:numFmt formatCode="General"/>
+        <c:majorTickMark val="none"/>
+        <c:minorTickMark val="none"/>
+        <c:spPr>
+          <a:ln xmlns:a="http://schemas.openxmlformats.org/drawingml/2006/main" w="9525">
+            <a:solidFill>
+              <a:srgbClr val="AABCC6"/>
+            </a:solidFill>
+          </a:ln>
+        </c:spPr>
+        <c:txPr>
+          <a:bodyPr xmlns:a="http://schemas.openxmlformats.org/drawingml/2006/main" anchorCtr="1"/>
+          <a:lstStyle xmlns:a="http://schemas.openxmlformats.org/drawingml/2006/main"/>
+          <a:p xmlns:a="http://schemas.openxmlformats.org/drawingml/2006/main">
+            <a:pPr>
+              <a:defRPr sz="1275">
+                <a:solidFill>
+                  <a:srgbClr val="666666"/>
+                </a:solidFill>
+                <a:latin typeface="Arial"/>
+                <a:ea typeface="Arial"/>
+                <a:cs typeface="Arial"/>
+              </a:defRPr>
+            </a:pPr>
+          </a:p>
+        </c:txPr>
+        <c:crossAx val="48672768"/>
+      </c:catAx>
+      <c:valAx>
+        <c:axId val="48672768"/>
+        <c:scaling>
+          <c:orientation val="minMax"/>
+          <c:max val="35"/>
+          <c:min val="0"/>
+        </c:scaling>
+        <c:delete val="0"/>
+        <c:axPos val="l"/>
+        <c:majorGridlines>
+          <c:spPr>
+            <a:ln xmlns:a="http://schemas.openxmlformats.org/drawingml/2006/main" w="9525">
+              <a:solidFill>
+                <a:srgbClr val="DFE7EB"/>
+              </a:solidFill>
+            </a:ln>
+          </c:spPr>
+        </c:majorGridlines>
+        <c:title>
+          <c:tx>
+            <c:rich>
+              <a:bodyPr xmlns:a="http://schemas.openxmlformats.org/drawingml/2006/main"/>
+              <a:lstStyle xmlns:a="http://schemas.openxmlformats.org/drawingml/2006/main"/>
+              <a:p xmlns:a="http://schemas.openxmlformats.org/drawingml/2006/main">
+                <a:r>
+                  <a:rPr sz="1275">
+                    <a:latin typeface="Arial"/>
+                    <a:ea typeface="Arial"/>
+                    <a:cs typeface="Arial"/>
+                  </a:rPr>
+                  <a:t>Mean BMI</a:t>
+                </a:r>
+              </a:p>
+            </c:rich>
+          </c:tx>
+          <c:overlay val="0"/>
+          <c:txPr>
+            <a:bodyPr xmlns:a="http://schemas.openxmlformats.org/drawingml/2006/main" anchorCtr="1"/>
+            <a:lstStyle xmlns:a="http://schemas.openxmlformats.org/drawingml/2006/main"/>
+            <a:p xmlns:a="http://schemas.openxmlformats.org/drawingml/2006/main">
+              <a:pPr>
+                <a:defRPr sz="1275">
+                  <a:latin typeface="Arial"/>
+                  <a:ea typeface="Arial"/>
+                  <a:cs typeface="Arial"/>
+                </a:defRPr>
+              </a:pPr>
+            </a:p>
+          </c:txPr>
+        </c:title>
+        <c:numFmt formatCode="General"/>
+        <c:majorTickMark val="none"/>
+        <c:minorTickMark val="none"/>
+        <c:spPr>
+          <a:ln xmlns:a="http://schemas.openxmlformats.org/drawingml/2006/main" w="9525">
+            <a:solidFill>
+              <a:srgbClr val="D4D4D4"/>
+            </a:solidFill>
+            <a:prstDash val="solid"/>
+          </a:ln>
+        </c:spPr>
+        <c:txPr>
+          <a:bodyPr xmlns:a="http://schemas.openxmlformats.org/drawingml/2006/main" anchorCtr="1"/>
+          <a:lstStyle xmlns:a="http://schemas.openxmlformats.org/drawingml/2006/main"/>
+          <a:p xmlns:a="http://schemas.openxmlformats.org/drawingml/2006/main">
+            <a:pPr>
+              <a:defRPr sz="1275">
+                <a:solidFill>
+                  <a:srgbClr val="666666"/>
+                </a:solidFill>
+                <a:latin typeface="Arial"/>
+                <a:ea typeface="Arial"/>
+                <a:cs typeface="Arial"/>
+              </a:defRPr>
+            </a:pPr>
+          </a:p>
+        </c:txPr>
+        <c:crossAx val="48650112"/>
+        <c:crossBetween val="between"/>
+        <c:majorUnit val="10"/>
+      </c:valAx>
+      <c:spPr>
+        <a:solidFill xmlns:a="http://schemas.openxmlformats.org/drawingml/2006/main">
+          <a:srgbClr val="FFFFFF"/>
+        </a:solidFill>
+      </c:spPr>
+    </c:plotArea>
+    <c:plotVisOnly val="1"/>
+  </c:chart>
+  <c:spPr>
+    <a:solidFill xmlns:a="http://schemas.openxmlformats.org/drawingml/2006/main">
+      <a:srgbClr val="FFFFFF"/>
+    </a:solidFill>
+    <a:ln xmlns:a="http://schemas.openxmlformats.org/drawingml/2006/main" w="0">
+      <a:noFill/>
+    </a:ln>
+  </c:spPr>
+  <c:externalData r:id="rIdChartSnapshot1">
+    <c:autoUpdate val="0"/>
+  </c:externalData>
+</c:chartSpace>
+</file>
+
+<file path=ppt/slides/charts/chart7.xml><?xml version="1.0" encoding="utf-8"?>
+<c:chartSpace xmlns:c="http://schemas.openxmlformats.org/drawingml/2006/chart" xmlns:r="http://schemas.openxmlformats.org/officeDocument/2006/relationships">
+  <c:lang val="en-US"/>
+  <c:chart>
+    <c:plotArea>
+      <c:barChart>
+        <c:barDir val="col"/>
+        <c:grouping val="clustered"/>
+        <c:varyColors val="0"/>
+        <c:ser>
+          <c:idx val="0"/>
+          <c:order val="0"/>
+          <c:tx>
+            <c:v>Positive status (%)</c:v>
+          </c:tx>
+          <c:invertIfNegative val="0"/>
+          <c:dPt>
+            <c:idx val="0"/>
+            <c:invertIfNegative val="0"/>
+            <c:spPr>
+              <a:solidFill xmlns:a="http://schemas.openxmlformats.org/drawingml/2006/main">
+                <a:srgbClr val="176D8C"/>
+              </a:solidFill>
+            </c:spPr>
+          </c:dPt>
+          <c:dPt>
+            <c:idx val="1"/>
+            <c:invertIfNegative val="0"/>
+            <c:spPr>
+              <a:solidFill xmlns:a="http://schemas.openxmlformats.org/drawingml/2006/main">
+                <a:srgbClr val="D87945"/>
+              </a:solidFill>
+            </c:spPr>
+          </c:dPt>
+          <c:cat>
+            <c:strRef>
+              <c:f>'Chart Data'!$A$2:$A$3</c:f>
+              <c:strCache>
+                <c:ptCount val="2"/>
+                <c:pt idx="0">
+                  <c:v>Never 100 cigarettes</c:v>
+                </c:pt>
+                <c:pt idx="1">
+                  <c:v>Ever 100 cigarettes</c:v>
+                </c:pt>
+              </c:strCache>
+            </c:strRef>
+          </c:cat>
+          <c:val>
+            <c:numRef>
+              <c:f>'Chart Data'!$B$2:$B$3</c:f>
+              <c:numCache>
+                <c:formatCode>General</c:formatCode>
+                <c:ptCount val="2"/>
+                <c:pt idx="0">
+                  <c:v>14.0872</c:v>
+                </c:pt>
+                <c:pt idx="1">
+                  <c:v>17.3606</c:v>
+                </c:pt>
+              </c:numCache>
+            </c:numRef>
+          </c:val>
+        </c:ser>
+        <c:dLbls>
+          <c:numFmt formatCode="0.0&quot;%&quot;" sourceLinked="0"/>
+          <c:txPr>
+            <a:bodyPr xmlns:a="http://schemas.openxmlformats.org/drawingml/2006/main" anchorCtr="1"/>
+            <a:lstStyle xmlns:a="http://schemas.openxmlformats.org/drawingml/2006/main"/>
+            <a:p xmlns:a="http://schemas.openxmlformats.org/drawingml/2006/main">
+              <a:pPr>
+                <a:defRPr sz="1575">
+                  <a:latin typeface="Arial"/>
+                  <a:ea typeface="Arial"/>
+                  <a:cs typeface="Arial"/>
+                </a:defRPr>
+              </a:pPr>
+            </a:p>
+          </c:txPr>
+          <c:dLblPos val="outEnd"/>
+          <c:showLegendKey val="0"/>
+          <c:showVal val="1"/>
+          <c:showCatName val="0"/>
+          <c:showSerName val="0"/>
+          <c:showPercent val="0"/>
+          <c:showBubbleSize val="0"/>
+          <c:showLeaderLines val="0"/>
+        </c:dLbls>
+        <c:gapWidth val="65"/>
+        <c:axId val="48650112"/>
+        <c:axId val="48672768"/>
+      </c:barChart>
+      <c:catAx>
+        <c:axId val="48650112"/>
+        <c:scaling>
+          <c:orientation val="minMax"/>
+        </c:scaling>
+        <c:delete val="0"/>
+        <c:axPos val="b"/>
+        <c:numFmt formatCode="General"/>
+        <c:majorTickMark val="none"/>
+        <c:minorTickMark val="none"/>
+        <c:spPr>
+          <a:ln xmlns:a="http://schemas.openxmlformats.org/drawingml/2006/main" w="9525">
+            <a:solidFill>
+              <a:srgbClr val="AABCC6"/>
+            </a:solidFill>
+          </a:ln>
+        </c:spPr>
+        <c:txPr>
+          <a:bodyPr xmlns:a="http://schemas.openxmlformats.org/drawingml/2006/main" anchorCtr="1"/>
+          <a:lstStyle xmlns:a="http://schemas.openxmlformats.org/drawingml/2006/main"/>
+          <a:p xmlns:a="http://schemas.openxmlformats.org/drawingml/2006/main">
+            <a:pPr>
+              <a:defRPr sz="1275">
+                <a:solidFill>
+                  <a:srgbClr val="666666"/>
+                </a:solidFill>
+                <a:latin typeface="Arial"/>
+                <a:ea typeface="Arial"/>
+                <a:cs typeface="Arial"/>
+              </a:defRPr>
+            </a:pPr>
+          </a:p>
+        </c:txPr>
+        <c:crossAx val="48672768"/>
+      </c:catAx>
+      <c:valAx>
+        <c:axId val="48672768"/>
+        <c:scaling>
+          <c:orientation val="minMax"/>
+          <c:max val="25"/>
+          <c:min val="0"/>
+        </c:scaling>
+        <c:delete val="0"/>
+        <c:axPos val="l"/>
+        <c:majorGridlines>
+          <c:spPr>
+            <a:ln xmlns:a="http://schemas.openxmlformats.org/drawingml/2006/main" w="9525">
+              <a:solidFill>
+                <a:srgbClr val="DFE7EB"/>
+              </a:solidFill>
+            </a:ln>
+          </c:spPr>
+        </c:majorGridlines>
+        <c:title>
+          <c:tx>
+            <c:rich>
+              <a:bodyPr xmlns:a="http://schemas.openxmlformats.org/drawingml/2006/main"/>
+              <a:lstStyle xmlns:a="http://schemas.openxmlformats.org/drawingml/2006/main"/>
+              <a:p xmlns:a="http://schemas.openxmlformats.org/drawingml/2006/main">
+                <a:r>
+                  <a:rPr sz="1275">
+                    <a:latin typeface="Arial"/>
+                    <a:ea typeface="Arial"/>
+                    <a:cs typeface="Arial"/>
+                  </a:rPr>
+                  <a:t>Positive status (%)</a:t>
+                </a:r>
+              </a:p>
+            </c:rich>
+          </c:tx>
+          <c:overlay val="0"/>
+          <c:txPr>
+            <a:bodyPr xmlns:a="http://schemas.openxmlformats.org/drawingml/2006/main" anchorCtr="1"/>
+            <a:lstStyle xmlns:a="http://schemas.openxmlformats.org/drawingml/2006/main"/>
+            <a:p xmlns:a="http://schemas.openxmlformats.org/drawingml/2006/main">
+              <a:pPr>
+                <a:defRPr sz="1275">
+                  <a:latin typeface="Arial"/>
+                  <a:ea typeface="Arial"/>
+                  <a:cs typeface="Arial"/>
+                </a:defRPr>
+              </a:pPr>
+            </a:p>
+          </c:txPr>
+        </c:title>
+        <c:numFmt formatCode="General"/>
+        <c:majorTickMark val="none"/>
+        <c:minorTickMark val="none"/>
+        <c:spPr>
+          <a:ln xmlns:a="http://schemas.openxmlformats.org/drawingml/2006/main" w="9525">
+            <a:solidFill>
+              <a:srgbClr val="D4D4D4"/>
+            </a:solidFill>
+            <a:prstDash val="solid"/>
+          </a:ln>
+        </c:spPr>
+        <c:txPr>
+          <a:bodyPr xmlns:a="http://schemas.openxmlformats.org/drawingml/2006/main" anchorCtr="1"/>
+          <a:lstStyle xmlns:a="http://schemas.openxmlformats.org/drawingml/2006/main"/>
+          <a:p xmlns:a="http://schemas.openxmlformats.org/drawingml/2006/main">
+            <a:pPr>
+              <a:defRPr sz="1275">
+                <a:solidFill>
+                  <a:srgbClr val="666666"/>
+                </a:solidFill>
+                <a:latin typeface="Arial"/>
+                <a:ea typeface="Arial"/>
+                <a:cs typeface="Arial"/>
+              </a:defRPr>
+            </a:pPr>
+          </a:p>
+        </c:txPr>
+        <c:crossAx val="48650112"/>
+        <c:crossBetween val="between"/>
+        <c:majorUnit val="10"/>
+      </c:valAx>
+      <c:spPr>
+        <a:solidFill xmlns:a="http://schemas.openxmlformats.org/drawingml/2006/main">
+          <a:srgbClr val="FFFFFF"/>
+        </a:solidFill>
+      </c:spPr>
+    </c:plotArea>
+    <c:plotVisOnly val="1"/>
+  </c:chart>
+  <c:spPr>
+    <a:solidFill xmlns:a="http://schemas.openxmlformats.org/drawingml/2006/main">
+      <a:srgbClr val="FFFFFF"/>
+    </a:solidFill>
+    <a:ln xmlns:a="http://schemas.openxmlformats.org/drawingml/2006/main" w="0">
+      <a:noFill/>
+    </a:ln>
+  </c:spPr>
+  <c:externalData r:id="rIdChartSnapshot1">
+    <c:autoUpdate val="0"/>
+  </c:externalData>
+</c:chartSpace>
+</file>
+
+<file path=ppt/slides/charts/chart8.xml><?xml version="1.0" encoding="utf-8"?>
+<c:chartSpace xmlns:c="http://schemas.openxmlformats.org/drawingml/2006/chart" xmlns:r="http://schemas.openxmlformats.org/officeDocument/2006/relationships">
+  <c:lang val="en-US"/>
+  <c:chart>
+    <c:plotArea>
+      <c:barChart>
+        <c:barDir val="col"/>
+        <c:grouping val="clustered"/>
+        <c:varyColors val="0"/>
+        <c:ser>
+          <c:idx val="0"/>
+          <c:order val="0"/>
+          <c:tx>
+            <c:v>Mean physical poor-health days</c:v>
+          </c:tx>
+          <c:invertIfNegative val="0"/>
+          <c:dPt>
+            <c:idx val="0"/>
+            <c:invertIfNegative val="0"/>
+            <c:spPr>
+              <a:solidFill xmlns:a="http://schemas.openxmlformats.org/drawingml/2006/main">
+                <a:srgbClr val="176D8C"/>
+              </a:solidFill>
+            </c:spPr>
+          </c:dPt>
+          <c:dPt>
+            <c:idx val="1"/>
+            <c:invertIfNegative val="0"/>
+            <c:spPr>
+              <a:solidFill xmlns:a="http://schemas.openxmlformats.org/drawingml/2006/main">
+                <a:srgbClr val="D87945"/>
+              </a:solidFill>
+            </c:spPr>
+          </c:dPt>
+          <c:cat>
+            <c:strRef>
+              <c:f>'Chart Data'!$A$2:$A$3</c:f>
+              <c:strCache>
+                <c:ptCount val="2"/>
+                <c:pt idx="0">
+                  <c:v>Female</c:v>
+                </c:pt>
+                <c:pt idx="1">
+                  <c:v>Male</c:v>
+                </c:pt>
+              </c:strCache>
+            </c:strRef>
+          </c:cat>
+          <c:val>
+            <c:numRef>
+              <c:f>'Chart Data'!$B$2:$B$3</c:f>
+              <c:numCache>
+                <c:formatCode>General</c:formatCode>
+                <c:ptCount val="2"/>
+                <c:pt idx="0">
+                  <c:v>4.7055</c:v>
+                </c:pt>
+                <c:pt idx="1">
+                  <c:v>3.4591</c:v>
+                </c:pt>
+              </c:numCache>
+            </c:numRef>
+          </c:val>
+        </c:ser>
+        <c:dLbls>
+          <c:numFmt formatCode="0.00" sourceLinked="0"/>
+          <c:txPr>
+            <a:bodyPr xmlns:a="http://schemas.openxmlformats.org/drawingml/2006/main" anchorCtr="1"/>
+            <a:lstStyle xmlns:a="http://schemas.openxmlformats.org/drawingml/2006/main"/>
+            <a:p xmlns:a="http://schemas.openxmlformats.org/drawingml/2006/main">
+              <a:pPr>
+                <a:defRPr sz="1575">
+                  <a:latin typeface="Arial"/>
+                  <a:ea typeface="Arial"/>
+                  <a:cs typeface="Arial"/>
+                </a:defRPr>
+              </a:pPr>
+            </a:p>
+          </c:txPr>
+          <c:dLblPos val="outEnd"/>
+          <c:showLegendKey val="0"/>
+          <c:showVal val="1"/>
+          <c:showCatName val="0"/>
+          <c:showSerName val="0"/>
+          <c:showPercent val="0"/>
+          <c:showBubbleSize val="0"/>
+          <c:showLeaderLines val="0"/>
+        </c:dLbls>
+        <c:gapWidth val="65"/>
+        <c:axId val="48650112"/>
+        <c:axId val="48672768"/>
+      </c:barChart>
+      <c:catAx>
+        <c:axId val="48650112"/>
+        <c:scaling>
+          <c:orientation val="minMax"/>
+        </c:scaling>
+        <c:delete val="0"/>
+        <c:axPos val="b"/>
+        <c:numFmt formatCode="General"/>
+        <c:majorTickMark val="none"/>
+        <c:minorTickMark val="none"/>
+        <c:spPr>
+          <a:ln xmlns:a="http://schemas.openxmlformats.org/drawingml/2006/main" w="9525">
+            <a:solidFill>
+              <a:srgbClr val="AABCC6"/>
+            </a:solidFill>
+          </a:ln>
+        </c:spPr>
+        <c:txPr>
+          <a:bodyPr xmlns:a="http://schemas.openxmlformats.org/drawingml/2006/main" anchorCtr="1"/>
+          <a:lstStyle xmlns:a="http://schemas.openxmlformats.org/drawingml/2006/main"/>
+          <a:p xmlns:a="http://schemas.openxmlformats.org/drawingml/2006/main">
+            <a:pPr>
+              <a:defRPr sz="1275">
+                <a:solidFill>
+                  <a:srgbClr val="666666"/>
+                </a:solidFill>
+                <a:latin typeface="Arial"/>
+                <a:ea typeface="Arial"/>
+                <a:cs typeface="Arial"/>
+              </a:defRPr>
+            </a:pPr>
+          </a:p>
+        </c:txPr>
+        <c:crossAx val="48672768"/>
+      </c:catAx>
+      <c:valAx>
+        <c:axId val="48672768"/>
+        <c:scaling>
+          <c:orientation val="minMax"/>
+          <c:max val="6"/>
+          <c:min val="0"/>
+        </c:scaling>
+        <c:delete val="0"/>
+        <c:axPos val="l"/>
+        <c:majorGridlines>
+          <c:spPr>
+            <a:ln xmlns:a="http://schemas.openxmlformats.org/drawingml/2006/main" w="9525">
+              <a:solidFill>
+                <a:srgbClr val="DFE7EB"/>
+              </a:solidFill>
+            </a:ln>
+          </c:spPr>
+        </c:majorGridlines>
+        <c:title>
+          <c:tx>
+            <c:rich>
+              <a:bodyPr xmlns:a="http://schemas.openxmlformats.org/drawingml/2006/main"/>
+              <a:lstStyle xmlns:a="http://schemas.openxmlformats.org/drawingml/2006/main"/>
+              <a:p xmlns:a="http://schemas.openxmlformats.org/drawingml/2006/main">
+                <a:r>
+                  <a:rPr sz="1200">
+                    <a:latin typeface="Arial"/>
+                    <a:ea typeface="Arial"/>
+                    <a:cs typeface="Arial"/>
+                  </a:rPr>
+                  <a:t>Mean physical poor-health days</a:t>
+                </a:r>
+              </a:p>
+            </c:rich>
+          </c:tx>
+          <c:overlay val="0"/>
+          <c:txPr>
+            <a:bodyPr xmlns:a="http://schemas.openxmlformats.org/drawingml/2006/main" anchorCtr="1"/>
+            <a:lstStyle xmlns:a="http://schemas.openxmlformats.org/drawingml/2006/main"/>
+            <a:p xmlns:a="http://schemas.openxmlformats.org/drawingml/2006/main">
+              <a:pPr>
+                <a:defRPr sz="1200">
+                  <a:latin typeface="Arial"/>
+                  <a:ea typeface="Arial"/>
+                  <a:cs typeface="Arial"/>
+                </a:defRPr>
+              </a:pPr>
+            </a:p>
+          </c:txPr>
+        </c:title>
+        <c:numFmt formatCode="General"/>
+        <c:majorTickMark val="none"/>
+        <c:minorTickMark val="none"/>
+        <c:spPr>
+          <a:ln xmlns:a="http://schemas.openxmlformats.org/drawingml/2006/main" w="9525">
+            <a:solidFill>
+              <a:srgbClr val="D4D4D4"/>
+            </a:solidFill>
+            <a:prstDash val="solid"/>
+          </a:ln>
+        </c:spPr>
+        <c:txPr>
+          <a:bodyPr xmlns:a="http://schemas.openxmlformats.org/drawingml/2006/main" anchorCtr="1"/>
+          <a:lstStyle xmlns:a="http://schemas.openxmlformats.org/drawingml/2006/main"/>
+          <a:p xmlns:a="http://schemas.openxmlformats.org/drawingml/2006/main">
+            <a:pPr>
+              <a:defRPr sz="1275">
+                <a:solidFill>
+                  <a:srgbClr val="666666"/>
+                </a:solidFill>
+                <a:latin typeface="Arial"/>
+                <a:ea typeface="Arial"/>
+                <a:cs typeface="Arial"/>
+              </a:defRPr>
+            </a:pPr>
+          </a:p>
+        </c:txPr>
+        <c:crossAx val="48650112"/>
+        <c:crossBetween val="between"/>
+        <c:majorUnit val="2"/>
+      </c:valAx>
+      <c:spPr>
+        <a:solidFill xmlns:a="http://schemas.openxmlformats.org/drawingml/2006/main">
+          <a:srgbClr val="FFFFFF"/>
+        </a:solidFill>
+      </c:spPr>
+    </c:plotArea>
+    <c:plotVisOnly val="1"/>
+  </c:chart>
+  <c:spPr>
+    <a:solidFill xmlns:a="http://schemas.openxmlformats.org/drawingml/2006/main">
+      <a:srgbClr val="FFFFFF"/>
+    </a:solidFill>
+    <a:ln xmlns:a="http://schemas.openxmlformats.org/drawingml/2006/main" w="0">
+      <a:noFill/>
+    </a:ln>
+  </c:spPr>
+  <c:externalData r:id="rIdChartSnapshot1">
+    <c:autoUpdate val="0"/>
+  </c:externalData>
+</c:chartSpace>
+</file>
+
+<file path=ppt/slides/charts/chart9.xml><?xml version="1.0" encoding="utf-8"?>
 <c:chartSpace xmlns:c="http://schemas.openxmlformats.org/drawingml/2006/chart" xmlns:r="http://schemas.openxmlformats.org/officeDocument/2006/relationships">
   <c:lang val="en-US"/>
   <c:chart>
@@ -6764,242 +8497,12 @@
               <a:lstStyle xmlns:a="http://schemas.openxmlformats.org/drawingml/2006/main"/>
               <a:p xmlns:a="http://schemas.openxmlformats.org/drawingml/2006/main">
                 <a:r>
-                  <a:rPr sz="1200">
+                  <a:rPr sz="1275">
                     <a:latin typeface="Arial"/>
                     <a:ea typeface="Arial"/>
                     <a:cs typeface="Arial"/>
                   </a:rPr>
                   <a:t>Weight (lb)</a:t>
-                </a:r>
-              </a:p>
-            </c:rich>
-          </c:tx>
-          <c:overlay val="0"/>
-          <c:txPr>
-            <a:bodyPr xmlns:a="http://schemas.openxmlformats.org/drawingml/2006/main" anchorCtr="1"/>
-            <a:lstStyle xmlns:a="http://schemas.openxmlformats.org/drawingml/2006/main"/>
-            <a:p xmlns:a="http://schemas.openxmlformats.org/drawingml/2006/main">
-              <a:pPr>
-                <a:defRPr sz="1200">
-                  <a:latin typeface="Arial"/>
-                  <a:ea typeface="Arial"/>
-                  <a:cs typeface="Arial"/>
-                </a:defRPr>
-              </a:pPr>
-            </a:p>
-          </c:txPr>
-        </c:title>
-        <c:numFmt formatCode="General"/>
-        <c:majorTickMark val="none"/>
-        <c:minorTickMark val="none"/>
-        <c:spPr>
-          <a:ln xmlns:a="http://schemas.openxmlformats.org/drawingml/2006/main" w="9525">
-            <a:solidFill>
-              <a:srgbClr val="D4D4D4"/>
-            </a:solidFill>
-            <a:prstDash val="solid"/>
-          </a:ln>
-        </c:spPr>
-        <c:txPr>
-          <a:bodyPr xmlns:a="http://schemas.openxmlformats.org/drawingml/2006/main" anchorCtr="1"/>
-          <a:lstStyle xmlns:a="http://schemas.openxmlformats.org/drawingml/2006/main"/>
-          <a:p xmlns:a="http://schemas.openxmlformats.org/drawingml/2006/main">
-            <a:pPr>
-              <a:defRPr sz="1200">
-                <a:solidFill>
-                  <a:srgbClr val="666666"/>
-                </a:solidFill>
-                <a:latin typeface="Arial"/>
-                <a:ea typeface="Arial"/>
-                <a:cs typeface="Arial"/>
-              </a:defRPr>
-            </a:pPr>
-          </a:p>
-        </c:txPr>
-        <c:crossAx val="48650112"/>
-        <c:crossBetween val="between"/>
-        <c:majorUnit val="15"/>
-      </c:valAx>
-      <c:spPr>
-        <a:solidFill xmlns:a="http://schemas.openxmlformats.org/drawingml/2006/main">
-          <a:srgbClr val="FFFFFF"/>
-        </a:solidFill>
-      </c:spPr>
-    </c:plotArea>
-    <c:plotVisOnly val="1"/>
-  </c:chart>
-  <c:spPr>
-    <a:solidFill xmlns:a="http://schemas.openxmlformats.org/drawingml/2006/main">
-      <a:srgbClr val="FFFFFF"/>
-    </a:solidFill>
-    <a:ln xmlns:a="http://schemas.openxmlformats.org/drawingml/2006/main" w="0">
-      <a:noFill/>
-    </a:ln>
-  </c:spPr>
-  <c:externalData r:id="rIdChartSnapshot1">
-    <c:autoUpdate val="0"/>
-  </c:externalData>
-</c:chartSpace>
-</file>
-
-<file path=ppt/slides/charts/chart7.xml><?xml version="1.0" encoding="utf-8"?>
-<c:chartSpace xmlns:c="http://schemas.openxmlformats.org/drawingml/2006/chart" xmlns:r="http://schemas.openxmlformats.org/officeDocument/2006/relationships">
-  <c:lang val="en-US"/>
-  <c:chart>
-    <c:plotArea>
-      <c:barChart>
-        <c:barDir val="col"/>
-        <c:grouping val="clustered"/>
-        <c:varyColors val="0"/>
-        <c:ser>
-          <c:idx val="0"/>
-          <c:order val="0"/>
-          <c:tx>
-            <c:v>Positive status (%)</c:v>
-          </c:tx>
-          <c:invertIfNegative val="0"/>
-          <c:dPt>
-            <c:idx val="0"/>
-            <c:invertIfNegative val="0"/>
-            <c:spPr>
-              <a:solidFill xmlns:a="http://schemas.openxmlformats.org/drawingml/2006/main">
-                <a:srgbClr val="176D8C"/>
-              </a:solidFill>
-            </c:spPr>
-          </c:dPt>
-          <c:dPt>
-            <c:idx val="1"/>
-            <c:invertIfNegative val="0"/>
-            <c:spPr>
-              <a:solidFill xmlns:a="http://schemas.openxmlformats.org/drawingml/2006/main">
-                <a:srgbClr val="D87945"/>
-              </a:solidFill>
-            </c:spPr>
-          </c:dPt>
-          <c:cat>
-            <c:strRef>
-              <c:f>'Chart Data'!$A$2:$A$3</c:f>
-              <c:strCache>
-                <c:ptCount val="2"/>
-                <c:pt idx="0">
-                  <c:v>No high BP</c:v>
-                </c:pt>
-                <c:pt idx="1">
-                  <c:v>High BP</c:v>
-                </c:pt>
-              </c:strCache>
-            </c:strRef>
-          </c:cat>
-          <c:val>
-            <c:numRef>
-              <c:f>'Chart Data'!$B$2:$B$3</c:f>
-              <c:numCache>
-                <c:formatCode>General</c:formatCode>
-                <c:ptCount val="2"/>
-                <c:pt idx="0">
-                  <c:v>6.9289</c:v>
-                </c:pt>
-                <c:pt idx="1">
-                  <c:v>27.0625</c:v>
-                </c:pt>
-              </c:numCache>
-            </c:numRef>
-          </c:val>
-        </c:ser>
-        <c:dLbls>
-          <c:numFmt formatCode="0.0&quot;%&quot;" sourceLinked="0"/>
-          <c:txPr>
-            <a:bodyPr xmlns:a="http://schemas.openxmlformats.org/drawingml/2006/main" anchorCtr="1"/>
-            <a:lstStyle xmlns:a="http://schemas.openxmlformats.org/drawingml/2006/main"/>
-            <a:p xmlns:a="http://schemas.openxmlformats.org/drawingml/2006/main">
-              <a:pPr>
-                <a:defRPr sz="1575">
-                  <a:latin typeface="Arial"/>
-                  <a:ea typeface="Arial"/>
-                  <a:cs typeface="Arial"/>
-                </a:defRPr>
-              </a:pPr>
-            </a:p>
-          </c:txPr>
-          <c:dLblPos val="outEnd"/>
-          <c:showLegendKey val="0"/>
-          <c:showVal val="1"/>
-          <c:showCatName val="0"/>
-          <c:showSerName val="0"/>
-          <c:showPercent val="0"/>
-          <c:showBubbleSize val="0"/>
-          <c:showLeaderLines val="0"/>
-        </c:dLbls>
-        <c:gapWidth val="65"/>
-        <c:axId val="48650112"/>
-        <c:axId val="48672768"/>
-      </c:barChart>
-      <c:catAx>
-        <c:axId val="48650112"/>
-        <c:scaling>
-          <c:orientation val="minMax"/>
-        </c:scaling>
-        <c:delete val="0"/>
-        <c:axPos val="b"/>
-        <c:numFmt formatCode="General"/>
-        <c:majorTickMark val="none"/>
-        <c:minorTickMark val="none"/>
-        <c:spPr>
-          <a:ln xmlns:a="http://schemas.openxmlformats.org/drawingml/2006/main" w="9525">
-            <a:solidFill>
-              <a:srgbClr val="AABCC6"/>
-            </a:solidFill>
-          </a:ln>
-        </c:spPr>
-        <c:txPr>
-          <a:bodyPr xmlns:a="http://schemas.openxmlformats.org/drawingml/2006/main" anchorCtr="1"/>
-          <a:lstStyle xmlns:a="http://schemas.openxmlformats.org/drawingml/2006/main"/>
-          <a:p xmlns:a="http://schemas.openxmlformats.org/drawingml/2006/main">
-            <a:pPr>
-              <a:defRPr sz="1275">
-                <a:solidFill>
-                  <a:srgbClr val="666666"/>
-                </a:solidFill>
-                <a:latin typeface="Arial"/>
-                <a:ea typeface="Arial"/>
-                <a:cs typeface="Arial"/>
-              </a:defRPr>
-            </a:pPr>
-          </a:p>
-        </c:txPr>
-        <c:crossAx val="48672768"/>
-      </c:catAx>
-      <c:valAx>
-        <c:axId val="48672768"/>
-        <c:scaling>
-          <c:orientation val="minMax"/>
-          <c:max val="35"/>
-          <c:min val="0"/>
-        </c:scaling>
-        <c:delete val="0"/>
-        <c:axPos val="l"/>
-        <c:majorGridlines>
-          <c:spPr>
-            <a:ln xmlns:a="http://schemas.openxmlformats.org/drawingml/2006/main" w="9525">
-              <a:solidFill>
-                <a:srgbClr val="DFE7EB"/>
-              </a:solidFill>
-            </a:ln>
-          </c:spPr>
-        </c:majorGridlines>
-        <c:title>
-          <c:tx>
-            <c:rich>
-              <a:bodyPr xmlns:a="http://schemas.openxmlformats.org/drawingml/2006/main"/>
-              <a:lstStyle xmlns:a="http://schemas.openxmlformats.org/drawingml/2006/main"/>
-              <a:p xmlns:a="http://schemas.openxmlformats.org/drawingml/2006/main">
-                <a:r>
-                  <a:rPr sz="1275">
-                    <a:latin typeface="Arial"/>
-                    <a:ea typeface="Arial"/>
-                    <a:cs typeface="Arial"/>
-                  </a:rPr>
-                  <a:t>Positive status (%)</a:t>
                 </a:r>
               </a:p>
             </c:rich>
@@ -7048,7 +8551,7 @@
         </c:txPr>
         <c:crossAx val="48650112"/>
         <c:crossBetween val="between"/>
-        <c:majorUnit val="10"/>
+        <c:majorUnit val="15"/>
       </c:valAx>
       <c:spPr>
         <a:solidFill xmlns:a="http://schemas.openxmlformats.org/drawingml/2006/main">
@@ -7056,693 +8559,6 @@
         </a:solidFill>
       </c:spPr>
     </c:plotArea>
-    <c:plotVisOnly val="1"/>
-  </c:chart>
-  <c:spPr>
-    <a:solidFill xmlns:a="http://schemas.openxmlformats.org/drawingml/2006/main">
-      <a:srgbClr val="FFFFFF"/>
-    </a:solidFill>
-    <a:ln xmlns:a="http://schemas.openxmlformats.org/drawingml/2006/main" w="0">
-      <a:noFill/>
-    </a:ln>
-  </c:spPr>
-  <c:externalData r:id="rIdChartSnapshot1">
-    <c:autoUpdate val="0"/>
-  </c:externalData>
-</c:chartSpace>
-</file>
-
-<file path=ppt/slides/charts/chart8.xml><?xml version="1.0" encoding="utf-8"?>
-<c:chartSpace xmlns:c="http://schemas.openxmlformats.org/drawingml/2006/chart" xmlns:r="http://schemas.openxmlformats.org/officeDocument/2006/relationships">
-  <c:lang val="en-US"/>
-  <c:chart>
-    <c:plotArea>
-      <c:barChart>
-        <c:barDir val="col"/>
-        <c:grouping val="clustered"/>
-        <c:varyColors val="0"/>
-        <c:ser>
-          <c:idx val="0"/>
-          <c:order val="0"/>
-          <c:tx>
-            <c:v>Positive status (%)</c:v>
-          </c:tx>
-          <c:invertIfNegative val="0"/>
-          <c:dPt>
-            <c:idx val="0"/>
-            <c:invertIfNegative val="0"/>
-            <c:spPr>
-              <a:solidFill xmlns:a="http://schemas.openxmlformats.org/drawingml/2006/main">
-                <a:srgbClr val="176D8C"/>
-              </a:solidFill>
-            </c:spPr>
-          </c:dPt>
-          <c:dPt>
-            <c:idx val="1"/>
-            <c:invertIfNegative val="0"/>
-            <c:spPr>
-              <a:solidFill xmlns:a="http://schemas.openxmlformats.org/drawingml/2006/main">
-                <a:srgbClr val="D87945"/>
-              </a:solidFill>
-            </c:spPr>
-          </c:dPt>
-          <c:cat>
-            <c:strRef>
-              <c:f>'Chart Data'!$A$2:$A$3</c:f>
-              <c:strCache>
-                <c:ptCount val="2"/>
-                <c:pt idx="0">
-                  <c:v>Never 100 cigarettes</c:v>
-                </c:pt>
-                <c:pt idx="1">
-                  <c:v>Ever 100 cigarettes</c:v>
-                </c:pt>
-              </c:strCache>
-            </c:strRef>
-          </c:cat>
-          <c:val>
-            <c:numRef>
-              <c:f>'Chart Data'!$B$2:$B$3</c:f>
-              <c:numCache>
-                <c:formatCode>General</c:formatCode>
-                <c:ptCount val="2"/>
-                <c:pt idx="0">
-                  <c:v>14.0872</c:v>
-                </c:pt>
-                <c:pt idx="1">
-                  <c:v>17.3606</c:v>
-                </c:pt>
-              </c:numCache>
-            </c:numRef>
-          </c:val>
-        </c:ser>
-        <c:dLbls>
-          <c:numFmt formatCode="0.0&quot;%&quot;" sourceLinked="0"/>
-          <c:txPr>
-            <a:bodyPr xmlns:a="http://schemas.openxmlformats.org/drawingml/2006/main" anchorCtr="1"/>
-            <a:lstStyle xmlns:a="http://schemas.openxmlformats.org/drawingml/2006/main"/>
-            <a:p xmlns:a="http://schemas.openxmlformats.org/drawingml/2006/main">
-              <a:pPr>
-                <a:defRPr sz="1575">
-                  <a:latin typeface="Arial"/>
-                  <a:ea typeface="Arial"/>
-                  <a:cs typeface="Arial"/>
-                </a:defRPr>
-              </a:pPr>
-            </a:p>
-          </c:txPr>
-          <c:dLblPos val="outEnd"/>
-          <c:showLegendKey val="0"/>
-          <c:showVal val="1"/>
-          <c:showCatName val="0"/>
-          <c:showSerName val="0"/>
-          <c:showPercent val="0"/>
-          <c:showBubbleSize val="0"/>
-          <c:showLeaderLines val="0"/>
-        </c:dLbls>
-        <c:gapWidth val="65"/>
-        <c:axId val="48650112"/>
-        <c:axId val="48672768"/>
-      </c:barChart>
-      <c:catAx>
-        <c:axId val="48650112"/>
-        <c:scaling>
-          <c:orientation val="minMax"/>
-        </c:scaling>
-        <c:delete val="0"/>
-        <c:axPos val="b"/>
-        <c:numFmt formatCode="General"/>
-        <c:majorTickMark val="none"/>
-        <c:minorTickMark val="none"/>
-        <c:spPr>
-          <a:ln xmlns:a="http://schemas.openxmlformats.org/drawingml/2006/main" w="9525">
-            <a:solidFill>
-              <a:srgbClr val="AABCC6"/>
-            </a:solidFill>
-          </a:ln>
-        </c:spPr>
-        <c:txPr>
-          <a:bodyPr xmlns:a="http://schemas.openxmlformats.org/drawingml/2006/main" anchorCtr="1"/>
-          <a:lstStyle xmlns:a="http://schemas.openxmlformats.org/drawingml/2006/main"/>
-          <a:p xmlns:a="http://schemas.openxmlformats.org/drawingml/2006/main">
-            <a:pPr>
-              <a:defRPr sz="1275">
-                <a:solidFill>
-                  <a:srgbClr val="666666"/>
-                </a:solidFill>
-                <a:latin typeface="Arial"/>
-                <a:ea typeface="Arial"/>
-                <a:cs typeface="Arial"/>
-              </a:defRPr>
-            </a:pPr>
-          </a:p>
-        </c:txPr>
-        <c:crossAx val="48672768"/>
-      </c:catAx>
-      <c:valAx>
-        <c:axId val="48672768"/>
-        <c:scaling>
-          <c:orientation val="minMax"/>
-          <c:max val="35"/>
-          <c:min val="0"/>
-        </c:scaling>
-        <c:delete val="0"/>
-        <c:axPos val="l"/>
-        <c:majorGridlines>
-          <c:spPr>
-            <a:ln xmlns:a="http://schemas.openxmlformats.org/drawingml/2006/main" w="9525">
-              <a:solidFill>
-                <a:srgbClr val="DFE7EB"/>
-              </a:solidFill>
-            </a:ln>
-          </c:spPr>
-        </c:majorGridlines>
-        <c:title>
-          <c:tx>
-            <c:rich>
-              <a:bodyPr xmlns:a="http://schemas.openxmlformats.org/drawingml/2006/main"/>
-              <a:lstStyle xmlns:a="http://schemas.openxmlformats.org/drawingml/2006/main"/>
-              <a:p xmlns:a="http://schemas.openxmlformats.org/drawingml/2006/main">
-                <a:r>
-                  <a:rPr sz="1275">
-                    <a:latin typeface="Arial"/>
-                    <a:ea typeface="Arial"/>
-                    <a:cs typeface="Arial"/>
-                  </a:rPr>
-                  <a:t>Positive status (%)</a:t>
-                </a:r>
-              </a:p>
-            </c:rich>
-          </c:tx>
-          <c:overlay val="0"/>
-          <c:txPr>
-            <a:bodyPr xmlns:a="http://schemas.openxmlformats.org/drawingml/2006/main" anchorCtr="1"/>
-            <a:lstStyle xmlns:a="http://schemas.openxmlformats.org/drawingml/2006/main"/>
-            <a:p xmlns:a="http://schemas.openxmlformats.org/drawingml/2006/main">
-              <a:pPr>
-                <a:defRPr sz="1275">
-                  <a:latin typeface="Arial"/>
-                  <a:ea typeface="Arial"/>
-                  <a:cs typeface="Arial"/>
-                </a:defRPr>
-              </a:pPr>
-            </a:p>
-          </c:txPr>
-        </c:title>
-        <c:numFmt formatCode="General"/>
-        <c:majorTickMark val="none"/>
-        <c:minorTickMark val="none"/>
-        <c:spPr>
-          <a:ln xmlns:a="http://schemas.openxmlformats.org/drawingml/2006/main" w="9525">
-            <a:solidFill>
-              <a:srgbClr val="D4D4D4"/>
-            </a:solidFill>
-            <a:prstDash val="solid"/>
-          </a:ln>
-        </c:spPr>
-        <c:txPr>
-          <a:bodyPr xmlns:a="http://schemas.openxmlformats.org/drawingml/2006/main" anchorCtr="1"/>
-          <a:lstStyle xmlns:a="http://schemas.openxmlformats.org/drawingml/2006/main"/>
-          <a:p xmlns:a="http://schemas.openxmlformats.org/drawingml/2006/main">
-            <a:pPr>
-              <a:defRPr sz="1275">
-                <a:solidFill>
-                  <a:srgbClr val="666666"/>
-                </a:solidFill>
-                <a:latin typeface="Arial"/>
-                <a:ea typeface="Arial"/>
-                <a:cs typeface="Arial"/>
-              </a:defRPr>
-            </a:pPr>
-          </a:p>
-        </c:txPr>
-        <c:crossAx val="48650112"/>
-        <c:crossBetween val="between"/>
-        <c:majorUnit val="10"/>
-      </c:valAx>
-      <c:spPr>
-        <a:solidFill xmlns:a="http://schemas.openxmlformats.org/drawingml/2006/main">
-          <a:srgbClr val="FFFFFF"/>
-        </a:solidFill>
-      </c:spPr>
-    </c:plotArea>
-    <c:plotVisOnly val="1"/>
-  </c:chart>
-  <c:spPr>
-    <a:solidFill xmlns:a="http://schemas.openxmlformats.org/drawingml/2006/main">
-      <a:srgbClr val="FFFFFF"/>
-    </a:solidFill>
-    <a:ln xmlns:a="http://schemas.openxmlformats.org/drawingml/2006/main" w="0">
-      <a:noFill/>
-    </a:ln>
-  </c:spPr>
-  <c:externalData r:id="rIdChartSnapshot1">
-    <c:autoUpdate val="0"/>
-  </c:externalData>
-</c:chartSpace>
-</file>
-
-<file path=ppt/slides/charts/chart9.xml><?xml version="1.0" encoding="utf-8"?>
-<c:chartSpace xmlns:c="http://schemas.openxmlformats.org/drawingml/2006/chart" xmlns:r="http://schemas.openxmlformats.org/officeDocument/2006/relationships">
-  <c:lang val="en-US"/>
-  <c:chart>
-    <c:plotArea>
-      <c:lineChart>
-        <c:grouping val="standard"/>
-        <c:varyColors val="0"/>
-        <c:ser>
-          <c:idx val="0"/>
-          <c:order val="0"/>
-          <c:tx>
-            <c:v>R1</c:v>
-          </c:tx>
-          <c:spPr>
-            <a:solidFill xmlns:a="http://schemas.openxmlformats.org/drawingml/2006/main">
-              <a:srgbClr val="176D8C"/>
-            </a:solidFill>
-            <a:ln xmlns:a="http://schemas.openxmlformats.org/drawingml/2006/main" w="19050">
-              <a:solidFill>
-                <a:srgbClr val="176D8C"/>
-              </a:solidFill>
-            </a:ln>
-          </c:spPr>
-          <c:marker>
-            <c:symbol val="circle"/>
-            <c:size val="4"/>
-          </c:marker>
-          <c:cat>
-            <c:numRef>
-              <c:f>'Chart Data'!$A$2:$A$7</c:f>
-              <c:numCache>
-                <c:formatCode>General</c:formatCode>
-                <c:ptCount val="6"/>
-                <c:pt idx="0">
-                  <c:v>25</c:v>
-                </c:pt>
-                <c:pt idx="1">
-                  <c:v>50</c:v>
-                </c:pt>
-                <c:pt idx="2">
-                  <c:v>75</c:v>
-                </c:pt>
-                <c:pt idx="3">
-                  <c:v>100</c:v>
-                </c:pt>
-                <c:pt idx="4">
-                  <c:v>125</c:v>
-                </c:pt>
-                <c:pt idx="5">
-                  <c:v>150</c:v>
-                </c:pt>
-              </c:numCache>
-            </c:numRef>
-          </c:cat>
-          <c:val>
-            <c:numRef>
-              <c:f>'Chart Data'!$B$2:$B$7</c:f>
-              <c:numCache>
-                <c:formatCode>General</c:formatCode>
-                <c:ptCount val="6"/>
-                <c:pt idx="0">
-                  <c:v>5113</c:v>
-                </c:pt>
-                <c:pt idx="1">
-                  <c:v>5346</c:v>
-                </c:pt>
-                <c:pt idx="2">
-                  <c:v>5272</c:v>
-                </c:pt>
-                <c:pt idx="3">
-                  <c:v>5164</c:v>
-                </c:pt>
-                <c:pt idx="4">
-                  <c:v>4804</c:v>
-                </c:pt>
-                <c:pt idx="5">
-                  <c:v>5254</c:v>
-                </c:pt>
-              </c:numCache>
-            </c:numRef>
-          </c:val>
-        </c:ser>
-        <c:ser>
-          <c:idx val="1"/>
-          <c:order val="1"/>
-          <c:tx>
-            <c:v>R2</c:v>
-          </c:tx>
-          <c:spPr>
-            <a:solidFill xmlns:a="http://schemas.openxmlformats.org/drawingml/2006/main">
-              <a:srgbClr val="D87945"/>
-            </a:solidFill>
-            <a:ln xmlns:a="http://schemas.openxmlformats.org/drawingml/2006/main" w="19050">
-              <a:solidFill>
-                <a:srgbClr val="D87945"/>
-              </a:solidFill>
-            </a:ln>
-          </c:spPr>
-          <c:marker>
-            <c:symbol val="circle"/>
-            <c:size val="4"/>
-          </c:marker>
-          <c:cat>
-            <c:numRef>
-              <c:f>'Chart Data'!$C$2:$C$7</c:f>
-              <c:numCache>
-                <c:formatCode>General</c:formatCode>
-                <c:ptCount val="6"/>
-                <c:pt idx="0">
-                  <c:v>25</c:v>
-                </c:pt>
-                <c:pt idx="1">
-                  <c:v>50</c:v>
-                </c:pt>
-                <c:pt idx="2">
-                  <c:v>75</c:v>
-                </c:pt>
-                <c:pt idx="3">
-                  <c:v>100</c:v>
-                </c:pt>
-                <c:pt idx="4">
-                  <c:v>125</c:v>
-                </c:pt>
-                <c:pt idx="5">
-                  <c:v>150</c:v>
-                </c:pt>
-              </c:numCache>
-            </c:numRef>
-          </c:cat>
-          <c:val>
-            <c:numRef>
-              <c:f>'Chart Data'!$D$2:$D$7</c:f>
-              <c:numCache>
-                <c:formatCode>General</c:formatCode>
-                <c:ptCount val="6"/>
-                <c:pt idx="0">
-                  <c:v>5398</c:v>
-                </c:pt>
-                <c:pt idx="1">
-                  <c:v>5952</c:v>
-                </c:pt>
-                <c:pt idx="2">
-                  <c:v>5713</c:v>
-                </c:pt>
-                <c:pt idx="3">
-                  <c:v>4831</c:v>
-                </c:pt>
-                <c:pt idx="4">
-                  <c:v>4848</c:v>
-                </c:pt>
-                <c:pt idx="5">
-                  <c:v>4542</c:v>
-                </c:pt>
-              </c:numCache>
-            </c:numRef>
-          </c:val>
-        </c:ser>
-        <c:ser>
-          <c:idx val="2"/>
-          <c:order val="2"/>
-          <c:tx>
-            <c:v>R3</c:v>
-          </c:tx>
-          <c:spPr>
-            <a:solidFill xmlns:a="http://schemas.openxmlformats.org/drawingml/2006/main">
-              <a:srgbClr val="269E91"/>
-            </a:solidFill>
-            <a:ln xmlns:a="http://schemas.openxmlformats.org/drawingml/2006/main" w="19050">
-              <a:solidFill>
-                <a:srgbClr val="269E91"/>
-              </a:solidFill>
-            </a:ln>
-          </c:spPr>
-          <c:marker>
-            <c:symbol val="circle"/>
-            <c:size val="4"/>
-          </c:marker>
-          <c:cat>
-            <c:numRef>
-              <c:f>'Chart Data'!$E$2:$E$7</c:f>
-              <c:numCache>
-                <c:formatCode>General</c:formatCode>
-                <c:ptCount val="6"/>
-                <c:pt idx="0">
-                  <c:v>25</c:v>
-                </c:pt>
-                <c:pt idx="1">
-                  <c:v>50</c:v>
-                </c:pt>
-                <c:pt idx="2">
-                  <c:v>75</c:v>
-                </c:pt>
-                <c:pt idx="3">
-                  <c:v>100</c:v>
-                </c:pt>
-                <c:pt idx="4">
-                  <c:v>125</c:v>
-                </c:pt>
-                <c:pt idx="5">
-                  <c:v>150</c:v>
-                </c:pt>
-              </c:numCache>
-            </c:numRef>
-          </c:cat>
-          <c:val>
-            <c:numRef>
-              <c:f>'Chart Data'!$F$2:$F$7</c:f>
-              <c:numCache>
-                <c:formatCode>General</c:formatCode>
-                <c:ptCount val="6"/>
-                <c:pt idx="0">
-                  <c:v>5307</c:v>
-                </c:pt>
-                <c:pt idx="1">
-                  <c:v>4719</c:v>
-                </c:pt>
-                <c:pt idx="2">
-                  <c:v>5483</c:v>
-                </c:pt>
-                <c:pt idx="3">
-                  <c:v>4986</c:v>
-                </c:pt>
-                <c:pt idx="4">
-                  <c:v>4432</c:v>
-                </c:pt>
-                <c:pt idx="5">
-                  <c:v>4919</c:v>
-                </c:pt>
-              </c:numCache>
-            </c:numRef>
-          </c:val>
-        </c:ser>
-        <c:ser>
-          <c:idx val="3"/>
-          <c:order val="3"/>
-          <c:tx>
-            <c:v>R4</c:v>
-          </c:tx>
-          <c:spPr>
-            <a:solidFill xmlns:a="http://schemas.openxmlformats.org/drawingml/2006/main">
-              <a:srgbClr val="7660A7"/>
-            </a:solidFill>
-            <a:ln xmlns:a="http://schemas.openxmlformats.org/drawingml/2006/main" w="19050">
-              <a:solidFill>
-                <a:srgbClr val="7660A7"/>
-              </a:solidFill>
-            </a:ln>
-          </c:spPr>
-          <c:marker>
-            <c:symbol val="circle"/>
-            <c:size val="4"/>
-          </c:marker>
-          <c:cat>
-            <c:numRef>
-              <c:f>'Chart Data'!$G$2:$G$7</c:f>
-              <c:numCache>
-                <c:formatCode>General</c:formatCode>
-                <c:ptCount val="6"/>
-                <c:pt idx="0">
-                  <c:v>25</c:v>
-                </c:pt>
-                <c:pt idx="1">
-                  <c:v>50</c:v>
-                </c:pt>
-                <c:pt idx="2">
-                  <c:v>75</c:v>
-                </c:pt>
-                <c:pt idx="3">
-                  <c:v>100</c:v>
-                </c:pt>
-                <c:pt idx="4">
-                  <c:v>125</c:v>
-                </c:pt>
-                <c:pt idx="5">
-                  <c:v>150</c:v>
-                </c:pt>
-              </c:numCache>
-            </c:numRef>
-          </c:cat>
-          <c:val>
-            <c:numRef>
-              <c:f>'Chart Data'!$H$2:$H$7</c:f>
-              <c:numCache>
-                <c:formatCode>General</c:formatCode>
-                <c:ptCount val="6"/>
-                <c:pt idx="0">
-                  <c:v>4678</c:v>
-                </c:pt>
-                <c:pt idx="1">
-                  <c:v>4264</c:v>
-                </c:pt>
-                <c:pt idx="2">
-                  <c:v>4749</c:v>
-                </c:pt>
-                <c:pt idx="3">
-                  <c:v>4410</c:v>
-                </c:pt>
-                <c:pt idx="4">
-                  <c:v>4748</c:v>
-                </c:pt>
-                <c:pt idx="5">
-                  <c:v>4098</c:v>
-                </c:pt>
-              </c:numCache>
-            </c:numRef>
-          </c:val>
-        </c:ser>
-        <c:dLbls>
-          <c:txPr>
-            <a:bodyPr xmlns:a="http://schemas.openxmlformats.org/drawingml/2006/main" anchorCtr="1"/>
-            <a:lstStyle xmlns:a="http://schemas.openxmlformats.org/drawingml/2006/main"/>
-            <a:p xmlns:a="http://schemas.openxmlformats.org/drawingml/2006/main">
-              <a:pPr>
-                <a:defRPr>
-                  <a:latin typeface="Arial"/>
-                  <a:ea typeface="Arial"/>
-                  <a:cs typeface="Arial"/>
-                </a:defRPr>
-              </a:pPr>
-            </a:p>
-          </c:txPr>
-          <c:showLegendKey val="0"/>
-          <c:showVal val="0"/>
-          <c:showCatName val="0"/>
-          <c:showSerName val="0"/>
-          <c:showPercent val="0"/>
-          <c:showBubbleSize val="0"/>
-          <c:showLeaderLines val="0"/>
-        </c:dLbls>
-        <c:axId val="48650112"/>
-        <c:axId val="48672768"/>
-      </c:lineChart>
-      <c:catAx>
-        <c:axId val="48650112"/>
-        <c:scaling>
-          <c:orientation val="minMax"/>
-        </c:scaling>
-        <c:delete val="0"/>
-        <c:axPos val="b"/>
-        <c:numFmt formatCode="General"/>
-        <c:majorTickMark val="none"/>
-        <c:minorTickMark val="none"/>
-        <c:spPr>
-          <a:ln xmlns:a="http://schemas.openxmlformats.org/drawingml/2006/main" w="9525">
-            <a:solidFill>
-              <a:srgbClr val="D4D4D4"/>
-            </a:solidFill>
-            <a:prstDash val="solid"/>
-          </a:ln>
-        </c:spPr>
-        <c:txPr>
-          <a:bodyPr xmlns:a="http://schemas.openxmlformats.org/drawingml/2006/main" anchorCtr="1"/>
-          <a:lstStyle xmlns:a="http://schemas.openxmlformats.org/drawingml/2006/main"/>
-          <a:p xmlns:a="http://schemas.openxmlformats.org/drawingml/2006/main">
-            <a:pPr>
-              <a:defRPr sz="1125">
-                <a:solidFill>
-                  <a:srgbClr val="666666"/>
-                </a:solidFill>
-                <a:latin typeface="Arial"/>
-                <a:ea typeface="Arial"/>
-                <a:cs typeface="Arial"/>
-              </a:defRPr>
-            </a:pPr>
-          </a:p>
-        </c:txPr>
-        <c:crossAx val="48672768"/>
-      </c:catAx>
-      <c:valAx>
-        <c:axId val="48672768"/>
-        <c:scaling>
-          <c:orientation val="minMax"/>
-          <c:max val="6000"/>
-          <c:min val="4000"/>
-        </c:scaling>
-        <c:delete val="0"/>
-        <c:axPos val="l"/>
-        <c:majorGridlines>
-          <c:spPr>
-            <a:ln xmlns:a="http://schemas.openxmlformats.org/drawingml/2006/main" w="9525">
-              <a:solidFill>
-                <a:srgbClr val="DFE7EB"/>
-              </a:solidFill>
-            </a:ln>
-          </c:spPr>
-        </c:majorGridlines>
-        <c:numFmt formatCode="General"/>
-        <c:majorTickMark val="none"/>
-        <c:minorTickMark val="none"/>
-        <c:spPr>
-          <a:ln xmlns:a="http://schemas.openxmlformats.org/drawingml/2006/main" w="9525">
-            <a:solidFill>
-              <a:srgbClr val="D4D4D4"/>
-            </a:solidFill>
-            <a:prstDash val="solid"/>
-          </a:ln>
-        </c:spPr>
-        <c:txPr>
-          <a:bodyPr xmlns:a="http://schemas.openxmlformats.org/drawingml/2006/main" anchorCtr="1"/>
-          <a:lstStyle xmlns:a="http://schemas.openxmlformats.org/drawingml/2006/main"/>
-          <a:p xmlns:a="http://schemas.openxmlformats.org/drawingml/2006/main">
-            <a:pPr>
-              <a:defRPr sz="1125">
-                <a:solidFill>
-                  <a:srgbClr val="666666"/>
-                </a:solidFill>
-                <a:latin typeface="Arial"/>
-                <a:ea typeface="Arial"/>
-                <a:cs typeface="Arial"/>
-              </a:defRPr>
-            </a:pPr>
-          </a:p>
-        </c:txPr>
-        <c:crossAx val="48650112"/>
-        <c:crossBetween val="between"/>
-        <c:majorUnit val="1000"/>
-      </c:valAx>
-      <c:spPr>
-        <a:solidFill xmlns:a="http://schemas.openxmlformats.org/drawingml/2006/main">
-          <a:srgbClr val="FFFFFF"/>
-        </a:solidFill>
-      </c:spPr>
-    </c:plotArea>
-    <c:legend>
-      <c:legendPos val="r"/>
-      <c:overlay val="0"/>
-      <c:txPr>
-        <a:bodyPr xmlns:a="http://schemas.openxmlformats.org/drawingml/2006/main" anchorCtr="1"/>
-        <a:lstStyle xmlns:a="http://schemas.openxmlformats.org/drawingml/2006/main"/>
-        <a:p xmlns:a="http://schemas.openxmlformats.org/drawingml/2006/main">
-          <a:pPr>
-            <a:defRPr sz="1125">
-              <a:latin typeface="Arial"/>
-              <a:ea typeface="Arial"/>
-              <a:cs typeface="Arial"/>
-            </a:defRPr>
-          </a:pPr>
-        </a:p>
-      </c:txPr>
-    </c:legend>
     <c:plotVisOnly val="1"/>
   </c:chart>
   <c:spPr>
@@ -7783,7 +8599,7 @@
           <p:cNvPr id="8" name="">
             <a:extLst xmlns:a="http://schemas.openxmlformats.org/drawingml/2006/main">
               <a:ext uri="{FF2B5EF4-FFF2-40B4-BE49-F238E27FC236}">
-                <a16:creationId xmlns:a16="http://schemas.microsoft.com/office/drawing/2014/main" id="{CCA4EFC6-8003-48A0-8BE5-159F37B16A36}"/>
+                <a16:creationId xmlns:a16="http://schemas.microsoft.com/office/drawing/2014/main" id="{6BDBBF88-0200-4A64-A4D5-BED71C9F5D70}"/>
               </a:ext>
             </a:extLst>
           </p:cNvPr>
@@ -7813,7 +8629,7 @@
           <p:cNvPr id="2" name="text">
             <a:extLst xmlns:a="http://schemas.openxmlformats.org/drawingml/2006/main">
               <a:ext uri="{FF2B5EF4-FFF2-40B4-BE49-F238E27FC236}">
-                <a16:creationId xmlns:a16="http://schemas.microsoft.com/office/drawing/2014/main" id="{5244ED4B-74A0-4088-B91B-70381ADA80A8}"/>
+                <a16:creationId xmlns:a16="http://schemas.microsoft.com/office/drawing/2014/main" id="{0A9902CA-24E0-4442-AF0A-415BC3E5B66C}"/>
               </a:ext>
             </a:extLst>
           </p:cNvPr>
@@ -7904,7 +8720,7 @@
           <p:cNvPr id="3" name="text">
             <a:extLst xmlns:a="http://schemas.openxmlformats.org/drawingml/2006/main">
               <a:ext uri="{FF2B5EF4-FFF2-40B4-BE49-F238E27FC236}">
-                <a16:creationId xmlns:a16="http://schemas.microsoft.com/office/drawing/2014/main" id="{A85DBBDB-783F-45B2-9DB3-17FEC720BFC7}"/>
+                <a16:creationId xmlns:a16="http://schemas.microsoft.com/office/drawing/2014/main" id="{841D9D4E-98EC-47E8-ADAE-41B07EB41AB4}"/>
               </a:ext>
             </a:extLst>
           </p:cNvPr>
@@ -7972,7 +8788,7 @@
           <p:cNvPr id="4" name="text">
             <a:extLst xmlns:a="http://schemas.openxmlformats.org/drawingml/2006/main">
               <a:ext uri="{FF2B5EF4-FFF2-40B4-BE49-F238E27FC236}">
-                <a16:creationId xmlns:a16="http://schemas.microsoft.com/office/drawing/2014/main" id="{7E93C250-2B61-46A4-803B-962F81D50B21}"/>
+                <a16:creationId xmlns:a16="http://schemas.microsoft.com/office/drawing/2014/main" id="{660011D3-4F6B-4213-9293-DE2BBA04AC2C}"/>
               </a:ext>
             </a:extLst>
           </p:cNvPr>
@@ -8063,7 +8879,7 @@
           <p:cNvPr id="5" name="">
             <a:extLst xmlns:a="http://schemas.openxmlformats.org/drawingml/2006/main">
               <a:ext uri="{FF2B5EF4-FFF2-40B4-BE49-F238E27FC236}">
-                <a16:creationId xmlns:a16="http://schemas.microsoft.com/office/drawing/2014/main" id="{6ADEC2DC-8E83-42D6-8CB8-A6EFB2FE9804}"/>
+                <a16:creationId xmlns:a16="http://schemas.microsoft.com/office/drawing/2014/main" id="{FEFA117D-2EF0-483F-B796-4B8B6B81DF41}"/>
               </a:ext>
             </a:extLst>
           </p:cNvPr>
@@ -8093,7 +8909,7 @@
           <p:cNvPr id="6" name="text">
             <a:extLst xmlns:a="http://schemas.openxmlformats.org/drawingml/2006/main">
               <a:ext uri="{FF2B5EF4-FFF2-40B4-BE49-F238E27FC236}">
-                <a16:creationId xmlns:a16="http://schemas.microsoft.com/office/drawing/2014/main" id="{2F718761-C50B-4B69-9C5B-6019ED38DF0B}"/>
+                <a16:creationId xmlns:a16="http://schemas.microsoft.com/office/drawing/2014/main" id="{1FD01380-19B3-41F1-8343-29A45654D2E5}"/>
               </a:ext>
             </a:extLst>
           </p:cNvPr>
@@ -8230,7 +9046,7 @@
           <p:cNvPr id="7" name="text">
             <a:extLst xmlns:a="http://schemas.openxmlformats.org/drawingml/2006/main">
               <a:ext uri="{FF2B5EF4-FFF2-40B4-BE49-F238E27FC236}">
-                <a16:creationId xmlns:a16="http://schemas.microsoft.com/office/drawing/2014/main" id="{1E1CCCC3-802C-413F-902D-6A6FCBBD6B3B}"/>
+                <a16:creationId xmlns:a16="http://schemas.microsoft.com/office/drawing/2014/main" id="{01BFBE1D-5ECF-41EF-AFC1-A4298B4FBB6D}"/>
               </a:ext>
             </a:extLst>
           </p:cNvPr>
@@ -8296,7 +9112,7 @@
     </p:spTree>
     <p:extLst>
       <p:ext uri="{BB962C8B-B14F-4D97-AF65-F5344CB8AC3E}">
-        <p14:creationId xmlns:p14="http://schemas.microsoft.com/office/powerpoint/2010/main" val="780029217"/>
+        <p14:creationId xmlns:p14="http://schemas.microsoft.com/office/powerpoint/2010/main" val="1182745507"/>
       </p:ext>
     </p:extLst>
   </p:cSld>
@@ -8324,10 +9140,10 @@
       </p:grpSpPr>
       <p:sp>
         <p:nvSpPr>
-          <p:cNvPr id="15" name="text">
+          <p:cNvPr id="16" name="text">
             <a:extLst xmlns:a="http://schemas.openxmlformats.org/drawingml/2006/main">
               <a:ext uri="{FF2B5EF4-FFF2-40B4-BE49-F238E27FC236}">
-                <a16:creationId xmlns:a16="http://schemas.microsoft.com/office/drawing/2014/main" id="{C880E7D0-4ADD-4E6C-AA14-D4A673A1D152}"/>
+                <a16:creationId xmlns:a16="http://schemas.microsoft.com/office/drawing/2014/main" id="{FD06936B-4517-4EDB-BB75-B63A4DA78A12}"/>
               </a:ext>
             </a:extLst>
           </p:cNvPr>
@@ -8385,7 +9201,7 @@
                 <a:ea typeface="Arial"/>
                 <a:cs typeface="Arial"/>
               </a:rPr>
-              <a:t>LAB 10: Chi-square goodness of fit and contingency tables</a:t>
+              <a:t>LAB 9: Independent and dependent (paired) t-tests</a:t>
             </a:r>
           </a:p>
         </p:txBody>
@@ -8395,7 +9211,7 @@
           <p:cNvPr id="2" name="">
             <a:extLst xmlns:a="http://schemas.openxmlformats.org/drawingml/2006/main">
               <a:ext uri="{FF2B5EF4-FFF2-40B4-BE49-F238E27FC236}">
-                <a16:creationId xmlns:a16="http://schemas.microsoft.com/office/drawing/2014/main" id="{62F231FF-8E91-45BC-9789-F46B031143E8}"/>
+                <a16:creationId xmlns:a16="http://schemas.microsoft.com/office/drawing/2014/main" id="{05519CCA-60E6-4975-9D50-CF4DC6088D8B}"/>
               </a:ext>
             </a:extLst>
           </p:cNvPr>
@@ -8425,7 +9241,7 @@
           <p:cNvPr id="3" name="text">
             <a:extLst xmlns:a="http://schemas.openxmlformats.org/drawingml/2006/main">
               <a:ext uri="{FF2B5EF4-FFF2-40B4-BE49-F238E27FC236}">
-                <a16:creationId xmlns:a16="http://schemas.microsoft.com/office/drawing/2014/main" id="{3147DE41-BFDD-4847-B3A7-240D7200D909}"/>
+                <a16:creationId xmlns:a16="http://schemas.microsoft.com/office/drawing/2014/main" id="{37516679-06FB-47A7-A243-B5A0A378723B}"/>
               </a:ext>
             </a:extLst>
           </p:cNvPr>
@@ -8483,7 +9299,7 @@
                 <a:ea typeface="Arial"/>
                 <a:cs typeface="Arial"/>
               </a:rPr>
-              <a:t>Chi-square: category patterns and relationships</a:t>
+              <a:t>Independent and paired t-tests</a:t>
             </a:r>
           </a:p>
         </p:txBody>
@@ -8493,7 +9309,7 @@
           <p:cNvPr id="4" name="text">
             <a:extLst xmlns:a="http://schemas.openxmlformats.org/drawingml/2006/main">
               <a:ext uri="{FF2B5EF4-FFF2-40B4-BE49-F238E27FC236}">
-                <a16:creationId xmlns:a16="http://schemas.microsoft.com/office/drawing/2014/main" id="{DB9B5EEB-2C5A-46BA-ABB8-197EB95F3AF5}"/>
+                <a16:creationId xmlns:a16="http://schemas.microsoft.com/office/drawing/2014/main" id="{33B4D39C-FEBC-4B45-8AC4-B9B2DE24C248}"/>
               </a:ext>
             </a:extLst>
           </p:cNvPr>
@@ -8551,6 +9367,1565 @@
                 <a:ea typeface="Arial"/>
                 <a:cs typeface="Arial"/>
               </a:rPr>
+              <a:t>Independent tests compare different people. Paired tests compare the same person before and after.</a:t>
+            </a:r>
+          </a:p>
+        </p:txBody>
+      </p:sp>
+      <p:sp>
+        <p:nvSpPr>
+          <p:cNvPr id="5" name="text">
+            <a:extLst xmlns:a="http://schemas.openxmlformats.org/drawingml/2006/main">
+              <a:ext uri="{FF2B5EF4-FFF2-40B4-BE49-F238E27FC236}">
+                <a16:creationId xmlns:a16="http://schemas.microsoft.com/office/drawing/2014/main" id="{220A1BAD-ADEF-4B28-BE0E-5FC4C3AD6CB2}"/>
+              </a:ext>
+            </a:extLst>
+          </p:cNvPr>
+          <p:cNvSpPr>
+            <a:spLocks xmlns:a="http://schemas.openxmlformats.org/drawingml/2006/main" noGrp="1"/>
+          </p:cNvSpPr>
+          <p:nvPr/>
+        </p:nvSpPr>
+        <p:spPr>
+          <a:xfrm xmlns:a="http://schemas.openxmlformats.org/drawingml/2006/main">
+            <a:off x="400050" y="1581150"/>
+            <a:ext cx="5514975" cy="314325"/>
+          </a:xfrm>
+          <a:prstGeom xmlns:a="http://schemas.openxmlformats.org/drawingml/2006/main" prst="rect">
+            <a:avLst/>
+          </a:prstGeom>
+          <a:noFill xmlns:a="http://schemas.openxmlformats.org/drawingml/2006/main"/>
+          <a:ln xmlns:a="http://schemas.openxmlformats.org/drawingml/2006/main" w="0">
+            <a:noFill/>
+          </a:ln>
+        </p:spPr>
+        <p:txBody>
+          <a:bodyPr xmlns:a="http://schemas.openxmlformats.org/drawingml/2006/main">
+            <a:noAutofit/>
+          </a:bodyPr>
+          <a:lstStyle xmlns:a="http://schemas.openxmlformats.org/drawingml/2006/main">
+            <a:defPPr>
+              <a:defRPr sz="1800" b="1">
+                <a:solidFill>
+                  <a:srgbClr val="176D8C"/>
+                </a:solidFill>
+                <a:latin typeface="Arial"/>
+                <a:ea typeface="Arial"/>
+                <a:cs typeface="Arial"/>
+              </a:defRPr>
+            </a:defPPr>
+          </a:lstStyle>
+          <a:p xmlns:a="http://schemas.openxmlformats.org/drawingml/2006/main">
+            <a:pPr>
+              <a:defRPr sz="1800" b="1">
+                <a:solidFill>
+                  <a:srgbClr val="176D8C"/>
+                </a:solidFill>
+                <a:latin typeface="Arial"/>
+                <a:ea typeface="Arial"/>
+                <a:cs typeface="Arial"/>
+              </a:defRPr>
+            </a:pPr>
+            <a:r>
+              <a:rPr sz="1800" b="1">
+                <a:solidFill>
+                  <a:srgbClr val="176D8C"/>
+                </a:solidFill>
+                <a:latin typeface="Arial"/>
+                <a:ea typeface="Arial"/>
+                <a:cs typeface="Arial"/>
+              </a:rPr>
+              <a:t>Independent: different respondents</a:t>
+            </a:r>
+          </a:p>
+        </p:txBody>
+      </p:sp>
+      <p:sp>
+        <p:nvSpPr>
+          <p:cNvPr id="6" name="text">
+            <a:extLst xmlns:a="http://schemas.openxmlformats.org/drawingml/2006/main">
+              <a:ext uri="{FF2B5EF4-FFF2-40B4-BE49-F238E27FC236}">
+                <a16:creationId xmlns:a16="http://schemas.microsoft.com/office/drawing/2014/main" id="{21E8F5BC-4222-438B-924D-796A61258BE8}"/>
+              </a:ext>
+            </a:extLst>
+          </p:cNvPr>
+          <p:cNvSpPr>
+            <a:spLocks xmlns:a="http://schemas.openxmlformats.org/drawingml/2006/main" noGrp="1"/>
+          </p:cNvSpPr>
+          <p:nvPr/>
+        </p:nvSpPr>
+        <p:spPr>
+          <a:xfrm xmlns:a="http://schemas.openxmlformats.org/drawingml/2006/main">
+            <a:off x="6362700" y="1581150"/>
+            <a:ext cx="5448300" cy="314325"/>
+          </a:xfrm>
+          <a:prstGeom xmlns:a="http://schemas.openxmlformats.org/drawingml/2006/main" prst="rect">
+            <a:avLst/>
+          </a:prstGeom>
+          <a:noFill xmlns:a="http://schemas.openxmlformats.org/drawingml/2006/main"/>
+          <a:ln xmlns:a="http://schemas.openxmlformats.org/drawingml/2006/main" w="0">
+            <a:noFill/>
+          </a:ln>
+        </p:spPr>
+        <p:txBody>
+          <a:bodyPr xmlns:a="http://schemas.openxmlformats.org/drawingml/2006/main">
+            <a:noAutofit/>
+          </a:bodyPr>
+          <a:lstStyle xmlns:a="http://schemas.openxmlformats.org/drawingml/2006/main">
+            <a:defPPr>
+              <a:defRPr sz="1800" b="1">
+                <a:solidFill>
+                  <a:srgbClr val="176D8C"/>
+                </a:solidFill>
+                <a:latin typeface="Arial"/>
+                <a:ea typeface="Arial"/>
+                <a:cs typeface="Arial"/>
+              </a:defRPr>
+            </a:defPPr>
+          </a:lstStyle>
+          <a:p xmlns:a="http://schemas.openxmlformats.org/drawingml/2006/main">
+            <a:pPr>
+              <a:defRPr sz="1800" b="1">
+                <a:solidFill>
+                  <a:srgbClr val="176D8C"/>
+                </a:solidFill>
+                <a:latin typeface="Arial"/>
+                <a:ea typeface="Arial"/>
+                <a:cs typeface="Arial"/>
+              </a:defRPr>
+            </a:pPr>
+            <a:r>
+              <a:rPr sz="1800" b="1">
+                <a:solidFill>
+                  <a:srgbClr val="176D8C"/>
+                </a:solidFill>
+                <a:latin typeface="Arial"/>
+                <a:ea typeface="Arial"/>
+                <a:cs typeface="Arial"/>
+              </a:rPr>
+              <a:t>Paired: the same 29 CBT patients</a:t>
+            </a:r>
+          </a:p>
+        </p:txBody>
+      </p:sp>
+      <p:sp>
+        <p:nvSpPr>
+          <p:cNvPr id="7" name="text">
+            <a:extLst xmlns:a="http://schemas.openxmlformats.org/drawingml/2006/main">
+              <a:ext uri="{FF2B5EF4-FFF2-40B4-BE49-F238E27FC236}">
+                <a16:creationId xmlns:a16="http://schemas.microsoft.com/office/drawing/2014/main" id="{A66F50E2-2D1F-415E-8046-70C847C0A568}"/>
+              </a:ext>
+            </a:extLst>
+          </p:cNvPr>
+          <p:cNvSpPr>
+            <a:spLocks xmlns:a="http://schemas.openxmlformats.org/drawingml/2006/main" noGrp="1"/>
+          </p:cNvSpPr>
+          <p:nvPr/>
+        </p:nvSpPr>
+        <p:spPr>
+          <a:xfrm xmlns:a="http://schemas.openxmlformats.org/drawingml/2006/main">
+            <a:off x="400050" y="2009775"/>
+            <a:ext cx="5505450" cy="552450"/>
+          </a:xfrm>
+          <a:prstGeom xmlns:a="http://schemas.openxmlformats.org/drawingml/2006/main" prst="rect">
+            <a:avLst/>
+          </a:prstGeom>
+          <a:noFill xmlns:a="http://schemas.openxmlformats.org/drawingml/2006/main"/>
+          <a:ln xmlns:a="http://schemas.openxmlformats.org/drawingml/2006/main" w="0">
+            <a:noFill/>
+          </a:ln>
+        </p:spPr>
+        <p:txBody>
+          <a:bodyPr xmlns:a="http://schemas.openxmlformats.org/drawingml/2006/main">
+            <a:noAutofit/>
+          </a:bodyPr>
+          <a:lstStyle xmlns:a="http://schemas.openxmlformats.org/drawingml/2006/main">
+            <a:defPPr>
+              <a:defRPr sz="1575" b="0">
+                <a:solidFill>
+                  <a:srgbClr val="183044"/>
+                </a:solidFill>
+                <a:latin typeface="Arial"/>
+                <a:ea typeface="Arial"/>
+                <a:cs typeface="Arial"/>
+              </a:defRPr>
+            </a:defPPr>
+          </a:lstStyle>
+          <a:p xmlns:a="http://schemas.openxmlformats.org/drawingml/2006/main">
+            <a:pPr>
+              <a:defRPr sz="1575" b="0">
+                <a:solidFill>
+                  <a:srgbClr val="183044"/>
+                </a:solidFill>
+                <a:latin typeface="Arial"/>
+                <a:ea typeface="Arial"/>
+                <a:cs typeface="Arial"/>
+              </a:defRPr>
+            </a:pPr>
+            <a:r>
+              <a:rPr sz="1575" b="0">
+                <a:solidFill>
+                  <a:srgbClr val="183044"/>
+                </a:solidFill>
+                <a:latin typeface="Arial"/>
+                <a:ea typeface="Arial"/>
+                <a:cs typeface="Arial"/>
+              </a:rPr>
+              <a:t>BRFSS: 1,667 females and 1,333 males.</a:t>
+            </a:r>
+          </a:p>
+          <a:p xmlns:a="http://schemas.openxmlformats.org/drawingml/2006/main">
+            <a:pPr>
+              <a:defRPr sz="1575" b="0">
+                <a:solidFill>
+                  <a:srgbClr val="183044"/>
+                </a:solidFill>
+                <a:latin typeface="Arial"/>
+                <a:ea typeface="Arial"/>
+                <a:cs typeface="Arial"/>
+              </a:defRPr>
+            </a:pPr>
+            <a:r>
+              <a:rPr sz="1575" b="0">
+                <a:solidFill>
+                  <a:srgbClr val="183044"/>
+                </a:solidFill>
+                <a:latin typeface="Arial"/>
+                <a:ea typeface="Arial"/>
+                <a:cs typeface="Arial"/>
+              </a:rPr>
+              <a:t>Compare physical poor-health days.</a:t>
+            </a:r>
+          </a:p>
+        </p:txBody>
+      </p:sp>
+      <p:sp>
+        <p:nvSpPr>
+          <p:cNvPr id="8" name="text">
+            <a:extLst xmlns:a="http://schemas.openxmlformats.org/drawingml/2006/main">
+              <a:ext uri="{FF2B5EF4-FFF2-40B4-BE49-F238E27FC236}">
+                <a16:creationId xmlns:a16="http://schemas.microsoft.com/office/drawing/2014/main" id="{C0EB7475-83E7-4C43-B112-80B930E3FC27}"/>
+              </a:ext>
+            </a:extLst>
+          </p:cNvPr>
+          <p:cNvSpPr>
+            <a:spLocks xmlns:a="http://schemas.openxmlformats.org/drawingml/2006/main" noGrp="1"/>
+          </p:cNvSpPr>
+          <p:nvPr/>
+        </p:nvSpPr>
+        <p:spPr>
+          <a:xfrm xmlns:a="http://schemas.openxmlformats.org/drawingml/2006/main">
+            <a:off x="6362700" y="2009775"/>
+            <a:ext cx="5448300" cy="552450"/>
+          </a:xfrm>
+          <a:prstGeom xmlns:a="http://schemas.openxmlformats.org/drawingml/2006/main" prst="rect">
+            <a:avLst/>
+          </a:prstGeom>
+          <a:noFill xmlns:a="http://schemas.openxmlformats.org/drawingml/2006/main"/>
+          <a:ln xmlns:a="http://schemas.openxmlformats.org/drawingml/2006/main" w="0">
+            <a:noFill/>
+          </a:ln>
+        </p:spPr>
+        <p:txBody>
+          <a:bodyPr xmlns:a="http://schemas.openxmlformats.org/drawingml/2006/main">
+            <a:noAutofit/>
+          </a:bodyPr>
+          <a:lstStyle xmlns:a="http://schemas.openxmlformats.org/drawingml/2006/main">
+            <a:defPPr>
+              <a:defRPr sz="1575" b="0">
+                <a:solidFill>
+                  <a:srgbClr val="183044"/>
+                </a:solidFill>
+                <a:latin typeface="Arial"/>
+                <a:ea typeface="Arial"/>
+                <a:cs typeface="Arial"/>
+              </a:defRPr>
+            </a:defPPr>
+          </a:lstStyle>
+          <a:p xmlns:a="http://schemas.openxmlformats.org/drawingml/2006/main">
+            <a:pPr>
+              <a:defRPr sz="1575" b="0">
+                <a:solidFill>
+                  <a:srgbClr val="183044"/>
+                </a:solidFill>
+                <a:latin typeface="Arial"/>
+                <a:ea typeface="Arial"/>
+                <a:cs typeface="Arial"/>
+              </a:defRPr>
+            </a:pPr>
+            <a:r>
+              <a:rPr sz="1575" b="0">
+                <a:solidFill>
+                  <a:srgbClr val="183044"/>
+                </a:solidFill>
+                <a:latin typeface="Arial"/>
+                <a:ea typeface="Arial"/>
+                <a:cs typeface="Arial"/>
+              </a:rPr>
+              <a:t>MASS dataset: before/after weights (lb).</a:t>
+            </a:r>
+          </a:p>
+          <a:p xmlns:a="http://schemas.openxmlformats.org/drawingml/2006/main">
+            <a:pPr>
+              <a:defRPr sz="1575" b="0">
+                <a:solidFill>
+                  <a:srgbClr val="183044"/>
+                </a:solidFill>
+                <a:latin typeface="Arial"/>
+                <a:ea typeface="Arial"/>
+                <a:cs typeface="Arial"/>
+              </a:defRPr>
+            </a:pPr>
+            <a:r>
+              <a:rPr sz="1575" b="0">
+                <a:solidFill>
+                  <a:srgbClr val="183044"/>
+                </a:solidFill>
+                <a:latin typeface="Arial"/>
+                <a:ea typeface="Arial"/>
+                <a:cs typeface="Arial"/>
+              </a:rPr>
+              <a:t>Blue lines: patients. Orange line: mean.</a:t>
+            </a:r>
+          </a:p>
+        </p:txBody>
+      </p:sp>
+      <p:graphicFrame>
+        <p:nvGraphicFramePr>
+          <p:cNvPr id="9" name="Chart">
+            <a:extLst xmlns:a="http://schemas.openxmlformats.org/drawingml/2006/main">
+              <a:ext uri="{FF2B5EF4-FFF2-40B4-BE49-F238E27FC236}">
+                <a16:creationId xmlns:a16="http://schemas.microsoft.com/office/drawing/2014/main" id="{CD98437E-F195-48B5-B6E2-CEAB40202117}"/>
+              </a:ext>
+            </a:extLst>
+          </p:cNvPr>
+          <p:cNvGraphicFramePr/>
+          <p:nvPr/>
+        </p:nvGraphicFramePr>
+        <p:xfrm>
+          <a:off xmlns:a="http://schemas.openxmlformats.org/drawingml/2006/main" x="257175" y="2647950"/>
+          <a:ext xmlns:a="http://schemas.openxmlformats.org/drawingml/2006/main" cx="5572125" cy="1943100"/>
+        </p:xfrm>
+        <a:graphic xmlns:a="http://schemas.openxmlformats.org/drawingml/2006/main">
+          <a:graphicData uri="http://schemas.openxmlformats.org/drawingml/2006/chart">
+            <c:chart xmlns:r="http://schemas.openxmlformats.org/officeDocument/2006/relationships" xmlns:c="http://schemas.openxmlformats.org/drawingml/2006/chart" r:id="R8ef1cbb87e40451b"/>
+          </a:graphicData>
+        </a:graphic>
+      </p:graphicFrame>
+      <p:graphicFrame>
+        <p:nvGraphicFramePr>
+          <p:cNvPr id="10" name="Chart">
+            <a:extLst xmlns:a="http://schemas.openxmlformats.org/drawingml/2006/main">
+              <a:ext uri="{FF2B5EF4-FFF2-40B4-BE49-F238E27FC236}">
+                <a16:creationId xmlns:a16="http://schemas.microsoft.com/office/drawing/2014/main" id="{91B71E1E-22E3-48CF-B6AD-775BF161A310}"/>
+              </a:ext>
+            </a:extLst>
+          </p:cNvPr>
+          <p:cNvGraphicFramePr/>
+          <p:nvPr/>
+        </p:nvGraphicFramePr>
+        <p:xfrm>
+          <a:off xmlns:a="http://schemas.openxmlformats.org/drawingml/2006/main" x="6229350" y="2647950"/>
+          <a:ext xmlns:a="http://schemas.openxmlformats.org/drawingml/2006/main" cx="5572125" cy="1943100"/>
+        </p:xfrm>
+        <a:graphic xmlns:a="http://schemas.openxmlformats.org/drawingml/2006/main">
+          <a:graphicData uri="http://schemas.openxmlformats.org/drawingml/2006/chart">
+            <c:chart xmlns:r="http://schemas.openxmlformats.org/officeDocument/2006/relationships" xmlns:c="http://schemas.openxmlformats.org/drawingml/2006/chart" r:id="Rf75c1bba59374144"/>
+          </a:graphicData>
+        </a:graphic>
+      </p:graphicFrame>
+      <p:graphicFrame>
+        <p:nvGraphicFramePr>
+          <p:cNvPr id="11" name="">
+            <a:extLst xmlns:a="http://schemas.openxmlformats.org/drawingml/2006/main">
+              <a:ext uri="{FF2B5EF4-FFF2-40B4-BE49-F238E27FC236}">
+                <a16:creationId xmlns:a16="http://schemas.microsoft.com/office/drawing/2014/main" id="{D27C3A4F-DC5B-400A-9D16-9D2DFF613023}"/>
+              </a:ext>
+            </a:extLst>
+          </p:cNvPr>
+          <p:cNvGraphicFramePr/>
+          <p:nvPr/>
+        </p:nvGraphicFramePr>
+        <p:xfrm>
+          <a:off xmlns:a="http://schemas.openxmlformats.org/drawingml/2006/main" x="400050" y="4743450"/>
+          <a:ext xmlns:a="http://schemas.openxmlformats.org/drawingml/2006/main" cx="5486400" cy="1257300"/>
+        </p:xfrm>
+        <a:graphic xmlns:a="http://schemas.openxmlformats.org/drawingml/2006/main">
+          <a:graphicData uri="http://schemas.openxmlformats.org/drawingml/2006/table">
+            <a:tbl>
+              <a:tblPr/>
+              <a:tblGrid>
+                <a:gridCol w="2828925"/>
+                <a:gridCol w="2657475"/>
+              </a:tblGrid>
+              <a:tr h="314325">
+                <a:tc>
+                  <a:txBody>
+                    <a:bodyPr>
+                      <a:noAutofit/>
+                    </a:bodyPr>
+                    <a:lstStyle/>
+                    <a:p>
+                      <a:pPr algn="l"/>
+                      <a:r>
+                        <a:rPr sz="1500" b="1">
+                          <a:solidFill>
+                            <a:srgbClr val="FFFFFF"/>
+                          </a:solidFill>
+                          <a:latin typeface="Arial"/>
+                          <a:ea typeface="Arial"/>
+                          <a:cs typeface="Arial"/>
+                        </a:rPr>
+                        <a:t>Independent Welch t-test</a:t>
+                      </a:r>
+                    </a:p>
+                  </a:txBody>
+                  <a:tcPr marL="91440" marR="91440" marT="45720" marB="45720">
+                    <a:lnL w="9525">
+                      <a:solidFill>
+                        <a:srgbClr val="D6E0E5"/>
+                      </a:solidFill>
+                      <a:prstDash val="solid"/>
+                    </a:lnL>
+                    <a:lnR w="9525">
+                      <a:solidFill>
+                        <a:srgbClr val="D6E0E5"/>
+                      </a:solidFill>
+                      <a:prstDash val="solid"/>
+                    </a:lnR>
+                    <a:lnT w="9525">
+                      <a:solidFill>
+                        <a:srgbClr val="D6E0E5"/>
+                      </a:solidFill>
+                      <a:prstDash val="solid"/>
+                    </a:lnT>
+                    <a:lnB w="9525">
+                      <a:solidFill>
+                        <a:srgbClr val="D6E0E5"/>
+                      </a:solidFill>
+                      <a:prstDash val="solid"/>
+                    </a:lnB>
+                    <a:solidFill>
+                      <a:srgbClr val="176D8C"/>
+                    </a:solidFill>
+                  </a:tcPr>
+                </a:tc>
+                <a:tc>
+                  <a:txBody>
+                    <a:bodyPr>
+                      <a:noAutofit/>
+                    </a:bodyPr>
+                    <a:lstStyle/>
+                    <a:p>
+                      <a:pPr algn="ctr"/>
+                      <a:r>
+                        <a:rPr sz="1500" b="1">
+                          <a:solidFill>
+                            <a:srgbClr val="FFFFFF"/>
+                          </a:solidFill>
+                          <a:latin typeface="Arial"/>
+                          <a:ea typeface="Arial"/>
+                          <a:cs typeface="Arial"/>
+                        </a:rPr>
+                        <a:t>Result</a:t>
+                      </a:r>
+                    </a:p>
+                  </a:txBody>
+                  <a:tcPr marL="91440" marR="91440" marT="45720" marB="45720">
+                    <a:lnR w="9525">
+                      <a:solidFill>
+                        <a:srgbClr val="D6E0E5"/>
+                      </a:solidFill>
+                      <a:prstDash val="solid"/>
+                    </a:lnR>
+                    <a:lnT w="9525">
+                      <a:solidFill>
+                        <a:srgbClr val="D6E0E5"/>
+                      </a:solidFill>
+                      <a:prstDash val="solid"/>
+                    </a:lnT>
+                    <a:lnB w="9525">
+                      <a:solidFill>
+                        <a:srgbClr val="D6E0E5"/>
+                      </a:solidFill>
+                      <a:prstDash val="solid"/>
+                    </a:lnB>
+                    <a:solidFill>
+                      <a:srgbClr val="176D8C"/>
+                    </a:solidFill>
+                  </a:tcPr>
+                </a:tc>
+              </a:tr>
+              <a:tr h="314325">
+                <a:tc>
+                  <a:txBody>
+                    <a:bodyPr>
+                      <a:noAutofit/>
+                    </a:bodyPr>
+                    <a:lstStyle/>
+                    <a:p>
+                      <a:pPr algn="l"/>
+                      <a:r>
+                        <a:rPr sz="1500" b="0">
+                          <a:solidFill>
+                            <a:srgbClr val="183044"/>
+                          </a:solidFill>
+                          <a:latin typeface="Arial"/>
+                          <a:ea typeface="Arial"/>
+                          <a:cs typeface="Arial"/>
+                        </a:rPr>
+                        <a:t>Female − male</a:t>
+                      </a:r>
+                    </a:p>
+                  </a:txBody>
+                  <a:tcPr marL="91440" marR="91440" marT="45720" marB="45720">
+                    <a:lnL w="9525">
+                      <a:solidFill>
+                        <a:srgbClr val="D6E0E5"/>
+                      </a:solidFill>
+                      <a:prstDash val="solid"/>
+                    </a:lnL>
+                    <a:lnR w="9525">
+                      <a:solidFill>
+                        <a:srgbClr val="D6E0E5"/>
+                      </a:solidFill>
+                      <a:prstDash val="solid"/>
+                    </a:lnR>
+                    <a:lnB w="9525">
+                      <a:solidFill>
+                        <a:srgbClr val="D6E0E5"/>
+                      </a:solidFill>
+                      <a:prstDash val="solid"/>
+                    </a:lnB>
+                    <a:solidFill>
+                      <a:srgbClr val="FFFFFF"/>
+                    </a:solidFill>
+                  </a:tcPr>
+                </a:tc>
+                <a:tc>
+                  <a:txBody>
+                    <a:bodyPr>
+                      <a:noAutofit/>
+                    </a:bodyPr>
+                    <a:lstStyle/>
+                    <a:p>
+                      <a:pPr algn="ctr"/>
+                      <a:r>
+                        <a:rPr sz="1500" b="0">
+                          <a:solidFill>
+                            <a:srgbClr val="183044"/>
+                          </a:solidFill>
+                          <a:latin typeface="Arial"/>
+                          <a:ea typeface="Arial"/>
+                          <a:cs typeface="Arial"/>
+                        </a:rPr>
+                        <a:t>+1.25 days</a:t>
+                      </a:r>
+                    </a:p>
+                  </a:txBody>
+                  <a:tcPr marL="91440" marR="91440" marT="45720" marB="45720">
+                    <a:lnR w="9525">
+                      <a:solidFill>
+                        <a:srgbClr val="D6E0E5"/>
+                      </a:solidFill>
+                      <a:prstDash val="solid"/>
+                    </a:lnR>
+                    <a:lnB w="9525">
+                      <a:solidFill>
+                        <a:srgbClr val="D6E0E5"/>
+                      </a:solidFill>
+                      <a:prstDash val="solid"/>
+                    </a:lnB>
+                    <a:solidFill>
+                      <a:srgbClr val="FFFFFF"/>
+                    </a:solidFill>
+                  </a:tcPr>
+                </a:tc>
+              </a:tr>
+              <a:tr h="314325">
+                <a:tc>
+                  <a:txBody>
+                    <a:bodyPr>
+                      <a:noAutofit/>
+                    </a:bodyPr>
+                    <a:lstStyle/>
+                    <a:p>
+                      <a:pPr algn="l"/>
+                      <a:r>
+                        <a:rPr sz="1500" b="0">
+                          <a:solidFill>
+                            <a:srgbClr val="183044"/>
+                          </a:solidFill>
+                          <a:latin typeface="Arial"/>
+                          <a:ea typeface="Arial"/>
+                          <a:cs typeface="Arial"/>
+                        </a:rPr>
+                        <a:t>95% CI</a:t>
+                      </a:r>
+                    </a:p>
+                  </a:txBody>
+                  <a:tcPr marL="91440" marR="91440" marT="45720" marB="45720">
+                    <a:lnL w="9525">
+                      <a:solidFill>
+                        <a:srgbClr val="D6E0E5"/>
+                      </a:solidFill>
+                      <a:prstDash val="solid"/>
+                    </a:lnL>
+                    <a:lnR w="9525">
+                      <a:solidFill>
+                        <a:srgbClr val="D6E0E5"/>
+                      </a:solidFill>
+                      <a:prstDash val="solid"/>
+                    </a:lnR>
+                    <a:lnB w="9525">
+                      <a:solidFill>
+                        <a:srgbClr val="D6E0E5"/>
+                      </a:solidFill>
+                      <a:prstDash val="solid"/>
+                    </a:lnB>
+                    <a:solidFill>
+                      <a:srgbClr val="EAF2F5"/>
+                    </a:solidFill>
+                  </a:tcPr>
+                </a:tc>
+                <a:tc>
+                  <a:txBody>
+                    <a:bodyPr>
+                      <a:noAutofit/>
+                    </a:bodyPr>
+                    <a:lstStyle/>
+                    <a:p>
+                      <a:pPr algn="ctr"/>
+                      <a:r>
+                        <a:rPr sz="1500" b="0">
+                          <a:solidFill>
+                            <a:srgbClr val="183044"/>
+                          </a:solidFill>
+                          <a:latin typeface="Arial"/>
+                          <a:ea typeface="Arial"/>
+                          <a:cs typeface="Arial"/>
+                        </a:rPr>
+                        <a:t>+0.63 to +1.86 days</a:t>
+                      </a:r>
+                    </a:p>
+                  </a:txBody>
+                  <a:tcPr marL="91440" marR="91440" marT="45720" marB="45720">
+                    <a:lnR w="9525">
+                      <a:solidFill>
+                        <a:srgbClr val="D6E0E5"/>
+                      </a:solidFill>
+                      <a:prstDash val="solid"/>
+                    </a:lnR>
+                    <a:lnB w="9525">
+                      <a:solidFill>
+                        <a:srgbClr val="D6E0E5"/>
+                      </a:solidFill>
+                      <a:prstDash val="solid"/>
+                    </a:lnB>
+                    <a:solidFill>
+                      <a:srgbClr val="EAF2F5"/>
+                    </a:solidFill>
+                  </a:tcPr>
+                </a:tc>
+              </a:tr>
+              <a:tr h="314325">
+                <a:tc>
+                  <a:txBody>
+                    <a:bodyPr>
+                      <a:noAutofit/>
+                    </a:bodyPr>
+                    <a:lstStyle/>
+                    <a:p>
+                      <a:pPr algn="l"/>
+                      <a:r>
+                        <a:rPr sz="1500" b="0">
+                          <a:solidFill>
+                            <a:srgbClr val="183044"/>
+                          </a:solidFill>
+                          <a:latin typeface="Arial"/>
+                          <a:ea typeface="Arial"/>
+                          <a:cs typeface="Arial"/>
+                        </a:rPr>
+                        <a:t>p</a:t>
+                      </a:r>
+                    </a:p>
+                  </a:txBody>
+                  <a:tcPr marL="91440" marR="91440" marT="45720" marB="45720">
+                    <a:lnL w="9525">
+                      <a:solidFill>
+                        <a:srgbClr val="D6E0E5"/>
+                      </a:solidFill>
+                      <a:prstDash val="solid"/>
+                    </a:lnL>
+                    <a:lnR w="9525">
+                      <a:solidFill>
+                        <a:srgbClr val="D6E0E5"/>
+                      </a:solidFill>
+                      <a:prstDash val="solid"/>
+                    </a:lnR>
+                    <a:lnB w="9525">
+                      <a:solidFill>
+                        <a:srgbClr val="D6E0E5"/>
+                      </a:solidFill>
+                      <a:prstDash val="solid"/>
+                    </a:lnB>
+                    <a:solidFill>
+                      <a:srgbClr val="FFFFFF"/>
+                    </a:solidFill>
+                  </a:tcPr>
+                </a:tc>
+                <a:tc>
+                  <a:txBody>
+                    <a:bodyPr>
+                      <a:noAutofit/>
+                    </a:bodyPr>
+                    <a:lstStyle/>
+                    <a:p>
+                      <a:pPr algn="ctr"/>
+                      <a:r>
+                        <a:rPr sz="1500" b="0">
+                          <a:solidFill>
+                            <a:srgbClr val="183044"/>
+                          </a:solidFill>
+                          <a:latin typeface="Arial"/>
+                          <a:ea typeface="Arial"/>
+                          <a:cs typeface="Arial"/>
+                        </a:rPr>
+                        <a:t>&lt;0.001</a:t>
+                      </a:r>
+                    </a:p>
+                  </a:txBody>
+                  <a:tcPr marL="91440" marR="91440" marT="45720" marB="45720">
+                    <a:lnR w="9525">
+                      <a:solidFill>
+                        <a:srgbClr val="D6E0E5"/>
+                      </a:solidFill>
+                      <a:prstDash val="solid"/>
+                    </a:lnR>
+                    <a:lnB w="9525">
+                      <a:solidFill>
+                        <a:srgbClr val="D6E0E5"/>
+                      </a:solidFill>
+                      <a:prstDash val="solid"/>
+                    </a:lnB>
+                    <a:solidFill>
+                      <a:srgbClr val="FFFFFF"/>
+                    </a:solidFill>
+                  </a:tcPr>
+                </a:tc>
+              </a:tr>
+            </a:tbl>
+          </a:graphicData>
+        </a:graphic>
+      </p:graphicFrame>
+      <p:graphicFrame>
+        <p:nvGraphicFramePr>
+          <p:cNvPr id="12" name="">
+            <a:extLst xmlns:a="http://schemas.openxmlformats.org/drawingml/2006/main">
+              <a:ext uri="{FF2B5EF4-FFF2-40B4-BE49-F238E27FC236}">
+                <a16:creationId xmlns:a16="http://schemas.microsoft.com/office/drawing/2014/main" id="{928AF2E3-1D0E-434D-98A9-3616A222B181}"/>
+              </a:ext>
+            </a:extLst>
+          </p:cNvPr>
+          <p:cNvGraphicFramePr/>
+          <p:nvPr/>
+        </p:nvGraphicFramePr>
+        <p:xfrm>
+          <a:off xmlns:a="http://schemas.openxmlformats.org/drawingml/2006/main" x="6362700" y="4743450"/>
+          <a:ext xmlns:a="http://schemas.openxmlformats.org/drawingml/2006/main" cx="5448300" cy="1257300"/>
+        </p:xfrm>
+        <a:graphic xmlns:a="http://schemas.openxmlformats.org/drawingml/2006/main">
+          <a:graphicData uri="http://schemas.openxmlformats.org/drawingml/2006/table">
+            <a:tbl>
+              <a:tblPr/>
+              <a:tblGrid>
+                <a:gridCol w="2800350"/>
+                <a:gridCol w="2647950"/>
+              </a:tblGrid>
+              <a:tr h="314325">
+                <a:tc>
+                  <a:txBody>
+                    <a:bodyPr>
+                      <a:noAutofit/>
+                    </a:bodyPr>
+                    <a:lstStyle/>
+                    <a:p>
+                      <a:pPr algn="l"/>
+                      <a:r>
+                        <a:rPr sz="1500" b="1">
+                          <a:solidFill>
+                            <a:srgbClr val="FFFFFF"/>
+                          </a:solidFill>
+                          <a:latin typeface="Arial"/>
+                          <a:ea typeface="Arial"/>
+                          <a:cs typeface="Arial"/>
+                        </a:rPr>
+                        <a:t>Paired t-test: after − before</a:t>
+                      </a:r>
+                    </a:p>
+                  </a:txBody>
+                  <a:tcPr marL="91440" marR="91440" marT="45720" marB="45720">
+                    <a:lnL w="9525">
+                      <a:solidFill>
+                        <a:srgbClr val="D6E0E5"/>
+                      </a:solidFill>
+                      <a:prstDash val="solid"/>
+                    </a:lnL>
+                    <a:lnR w="9525">
+                      <a:solidFill>
+                        <a:srgbClr val="D6E0E5"/>
+                      </a:solidFill>
+                      <a:prstDash val="solid"/>
+                    </a:lnR>
+                    <a:lnT w="9525">
+                      <a:solidFill>
+                        <a:srgbClr val="D6E0E5"/>
+                      </a:solidFill>
+                      <a:prstDash val="solid"/>
+                    </a:lnT>
+                    <a:lnB w="9525">
+                      <a:solidFill>
+                        <a:srgbClr val="D6E0E5"/>
+                      </a:solidFill>
+                      <a:prstDash val="solid"/>
+                    </a:lnB>
+                    <a:solidFill>
+                      <a:srgbClr val="176D8C"/>
+                    </a:solidFill>
+                  </a:tcPr>
+                </a:tc>
+                <a:tc>
+                  <a:txBody>
+                    <a:bodyPr>
+                      <a:noAutofit/>
+                    </a:bodyPr>
+                    <a:lstStyle/>
+                    <a:p>
+                      <a:pPr algn="ctr"/>
+                      <a:r>
+                        <a:rPr sz="1500" b="1">
+                          <a:solidFill>
+                            <a:srgbClr val="FFFFFF"/>
+                          </a:solidFill>
+                          <a:latin typeface="Arial"/>
+                          <a:ea typeface="Arial"/>
+                          <a:cs typeface="Arial"/>
+                        </a:rPr>
+                        <a:t>Result</a:t>
+                      </a:r>
+                    </a:p>
+                  </a:txBody>
+                  <a:tcPr marL="91440" marR="91440" marT="45720" marB="45720">
+                    <a:lnR w="9525">
+                      <a:solidFill>
+                        <a:srgbClr val="D6E0E5"/>
+                      </a:solidFill>
+                      <a:prstDash val="solid"/>
+                    </a:lnR>
+                    <a:lnT w="9525">
+                      <a:solidFill>
+                        <a:srgbClr val="D6E0E5"/>
+                      </a:solidFill>
+                      <a:prstDash val="solid"/>
+                    </a:lnT>
+                    <a:lnB w="9525">
+                      <a:solidFill>
+                        <a:srgbClr val="D6E0E5"/>
+                      </a:solidFill>
+                      <a:prstDash val="solid"/>
+                    </a:lnB>
+                    <a:solidFill>
+                      <a:srgbClr val="176D8C"/>
+                    </a:solidFill>
+                  </a:tcPr>
+                </a:tc>
+              </a:tr>
+              <a:tr h="314325">
+                <a:tc>
+                  <a:txBody>
+                    <a:bodyPr>
+                      <a:noAutofit/>
+                    </a:bodyPr>
+                    <a:lstStyle/>
+                    <a:p>
+                      <a:pPr algn="l"/>
+                      <a:r>
+                        <a:rPr sz="1500" b="0">
+                          <a:solidFill>
+                            <a:srgbClr val="183044"/>
+                          </a:solidFill>
+                          <a:latin typeface="Arial"/>
+                          <a:ea typeface="Arial"/>
+                          <a:cs typeface="Arial"/>
+                        </a:rPr>
+                        <a:t>Mean change</a:t>
+                      </a:r>
+                    </a:p>
+                  </a:txBody>
+                  <a:tcPr marL="91440" marR="91440" marT="45720" marB="45720">
+                    <a:lnL w="9525">
+                      <a:solidFill>
+                        <a:srgbClr val="D6E0E5"/>
+                      </a:solidFill>
+                      <a:prstDash val="solid"/>
+                    </a:lnL>
+                    <a:lnR w="9525">
+                      <a:solidFill>
+                        <a:srgbClr val="D6E0E5"/>
+                      </a:solidFill>
+                      <a:prstDash val="solid"/>
+                    </a:lnR>
+                    <a:lnB w="9525">
+                      <a:solidFill>
+                        <a:srgbClr val="D6E0E5"/>
+                      </a:solidFill>
+                      <a:prstDash val="solid"/>
+                    </a:lnB>
+                    <a:solidFill>
+                      <a:srgbClr val="FFFFFF"/>
+                    </a:solidFill>
+                  </a:tcPr>
+                </a:tc>
+                <a:tc>
+                  <a:txBody>
+                    <a:bodyPr>
+                      <a:noAutofit/>
+                    </a:bodyPr>
+                    <a:lstStyle/>
+                    <a:p>
+                      <a:pPr algn="ctr"/>
+                      <a:r>
+                        <a:rPr sz="1500" b="0">
+                          <a:solidFill>
+                            <a:srgbClr val="183044"/>
+                          </a:solidFill>
+                          <a:latin typeface="Arial"/>
+                          <a:ea typeface="Arial"/>
+                          <a:cs typeface="Arial"/>
+                        </a:rPr>
+                        <a:t>+3.01 lb</a:t>
+                      </a:r>
+                    </a:p>
+                  </a:txBody>
+                  <a:tcPr marL="91440" marR="91440" marT="45720" marB="45720">
+                    <a:lnR w="9525">
+                      <a:solidFill>
+                        <a:srgbClr val="D6E0E5"/>
+                      </a:solidFill>
+                      <a:prstDash val="solid"/>
+                    </a:lnR>
+                    <a:lnB w="9525">
+                      <a:solidFill>
+                        <a:srgbClr val="D6E0E5"/>
+                      </a:solidFill>
+                      <a:prstDash val="solid"/>
+                    </a:lnB>
+                    <a:solidFill>
+                      <a:srgbClr val="FFFFFF"/>
+                    </a:solidFill>
+                  </a:tcPr>
+                </a:tc>
+              </a:tr>
+              <a:tr h="314325">
+                <a:tc>
+                  <a:txBody>
+                    <a:bodyPr>
+                      <a:noAutofit/>
+                    </a:bodyPr>
+                    <a:lstStyle/>
+                    <a:p>
+                      <a:pPr algn="l"/>
+                      <a:r>
+                        <a:rPr sz="1500" b="0">
+                          <a:solidFill>
+                            <a:srgbClr val="183044"/>
+                          </a:solidFill>
+                          <a:latin typeface="Arial"/>
+                          <a:ea typeface="Arial"/>
+                          <a:cs typeface="Arial"/>
+                        </a:rPr>
+                        <a:t>95% CI</a:t>
+                      </a:r>
+                    </a:p>
+                  </a:txBody>
+                  <a:tcPr marL="91440" marR="91440" marT="45720" marB="45720">
+                    <a:lnL w="9525">
+                      <a:solidFill>
+                        <a:srgbClr val="D6E0E5"/>
+                      </a:solidFill>
+                      <a:prstDash val="solid"/>
+                    </a:lnL>
+                    <a:lnR w="9525">
+                      <a:solidFill>
+                        <a:srgbClr val="D6E0E5"/>
+                      </a:solidFill>
+                      <a:prstDash val="solid"/>
+                    </a:lnR>
+                    <a:lnB w="9525">
+                      <a:solidFill>
+                        <a:srgbClr val="D6E0E5"/>
+                      </a:solidFill>
+                      <a:prstDash val="solid"/>
+                    </a:lnB>
+                    <a:solidFill>
+                      <a:srgbClr val="EAF2F5"/>
+                    </a:solidFill>
+                  </a:tcPr>
+                </a:tc>
+                <a:tc>
+                  <a:txBody>
+                    <a:bodyPr>
+                      <a:noAutofit/>
+                    </a:bodyPr>
+                    <a:lstStyle/>
+                    <a:p>
+                      <a:pPr algn="ctr"/>
+                      <a:r>
+                        <a:rPr sz="1500" b="0">
+                          <a:solidFill>
+                            <a:srgbClr val="183044"/>
+                          </a:solidFill>
+                          <a:latin typeface="Arial"/>
+                          <a:ea typeface="Arial"/>
+                          <a:cs typeface="Arial"/>
+                        </a:rPr>
+                        <a:t>+0.23 to +5.79 lb</a:t>
+                      </a:r>
+                    </a:p>
+                  </a:txBody>
+                  <a:tcPr marL="91440" marR="91440" marT="45720" marB="45720">
+                    <a:lnR w="9525">
+                      <a:solidFill>
+                        <a:srgbClr val="D6E0E5"/>
+                      </a:solidFill>
+                      <a:prstDash val="solid"/>
+                    </a:lnR>
+                    <a:lnB w="9525">
+                      <a:solidFill>
+                        <a:srgbClr val="D6E0E5"/>
+                      </a:solidFill>
+                      <a:prstDash val="solid"/>
+                    </a:lnB>
+                    <a:solidFill>
+                      <a:srgbClr val="EAF2F5"/>
+                    </a:solidFill>
+                  </a:tcPr>
+                </a:tc>
+              </a:tr>
+              <a:tr h="314325">
+                <a:tc>
+                  <a:txBody>
+                    <a:bodyPr>
+                      <a:noAutofit/>
+                    </a:bodyPr>
+                    <a:lstStyle/>
+                    <a:p>
+                      <a:pPr algn="l"/>
+                      <a:r>
+                        <a:rPr sz="1500" b="0">
+                          <a:solidFill>
+                            <a:srgbClr val="183044"/>
+                          </a:solidFill>
+                          <a:latin typeface="Arial"/>
+                          <a:ea typeface="Arial"/>
+                          <a:cs typeface="Arial"/>
+                        </a:rPr>
+                        <a:t>p</a:t>
+                      </a:r>
+                    </a:p>
+                  </a:txBody>
+                  <a:tcPr marL="91440" marR="91440" marT="45720" marB="45720">
+                    <a:lnL w="9525">
+                      <a:solidFill>
+                        <a:srgbClr val="D6E0E5"/>
+                      </a:solidFill>
+                      <a:prstDash val="solid"/>
+                    </a:lnL>
+                    <a:lnR w="9525">
+                      <a:solidFill>
+                        <a:srgbClr val="D6E0E5"/>
+                      </a:solidFill>
+                      <a:prstDash val="solid"/>
+                    </a:lnR>
+                    <a:lnB w="9525">
+                      <a:solidFill>
+                        <a:srgbClr val="D6E0E5"/>
+                      </a:solidFill>
+                      <a:prstDash val="solid"/>
+                    </a:lnB>
+                    <a:solidFill>
+                      <a:srgbClr val="FFFFFF"/>
+                    </a:solidFill>
+                  </a:tcPr>
+                </a:tc>
+                <a:tc>
+                  <a:txBody>
+                    <a:bodyPr>
+                      <a:noAutofit/>
+                    </a:bodyPr>
+                    <a:lstStyle/>
+                    <a:p>
+                      <a:pPr algn="ctr"/>
+                      <a:r>
+                        <a:rPr sz="1500" b="0">
+                          <a:solidFill>
+                            <a:srgbClr val="183044"/>
+                          </a:solidFill>
+                          <a:latin typeface="Arial"/>
+                          <a:ea typeface="Arial"/>
+                          <a:cs typeface="Arial"/>
+                        </a:rPr>
+                        <a:t>0.035</a:t>
+                      </a:r>
+                    </a:p>
+                  </a:txBody>
+                  <a:tcPr marL="91440" marR="91440" marT="45720" marB="45720">
+                    <a:lnR w="9525">
+                      <a:solidFill>
+                        <a:srgbClr val="D6E0E5"/>
+                      </a:solidFill>
+                      <a:prstDash val="solid"/>
+                    </a:lnR>
+                    <a:lnB w="9525">
+                      <a:solidFill>
+                        <a:srgbClr val="D6E0E5"/>
+                      </a:solidFill>
+                      <a:prstDash val="solid"/>
+                    </a:lnB>
+                    <a:solidFill>
+                      <a:srgbClr val="FFFFFF"/>
+                    </a:solidFill>
+                  </a:tcPr>
+                </a:tc>
+              </a:tr>
+            </a:tbl>
+          </a:graphicData>
+        </a:graphic>
+      </p:graphicFrame>
+      <p:sp>
+        <p:nvSpPr>
+          <p:cNvPr id="13" name="">
+            <a:extLst xmlns:a="http://schemas.openxmlformats.org/drawingml/2006/main">
+              <a:ext uri="{FF2B5EF4-FFF2-40B4-BE49-F238E27FC236}">
+                <a16:creationId xmlns:a16="http://schemas.microsoft.com/office/drawing/2014/main" id="{D5FD7C59-E4C0-4BA7-8452-57EBF7F41456}"/>
+              </a:ext>
+            </a:extLst>
+          </p:cNvPr>
+          <p:cNvSpPr>
+            <a:spLocks xmlns:a="http://schemas.openxmlformats.org/drawingml/2006/main" noGrp="1"/>
+          </p:cNvSpPr>
+          <p:nvPr/>
+        </p:nvSpPr>
+        <p:spPr>
+          <a:xfrm xmlns:a="http://schemas.openxmlformats.org/drawingml/2006/main">
+            <a:off x="400050" y="6153150"/>
+            <a:ext cx="11391900" cy="19050"/>
+          </a:xfrm>
+          <a:prstGeom xmlns:a="http://schemas.openxmlformats.org/drawingml/2006/main" prst="rect">
+            <a:avLst/>
+          </a:prstGeom>
+          <a:solidFill xmlns:a="http://schemas.openxmlformats.org/drawingml/2006/main">
+            <a:srgbClr val="176D8C"/>
+          </a:solidFill>
+          <a:ln xmlns:a="http://schemas.openxmlformats.org/drawingml/2006/main" w="0">
+            <a:noFill/>
+          </a:ln>
+        </p:spPr>
+      </p:sp>
+      <p:sp>
+        <p:nvSpPr>
+          <p:cNvPr id="14" name="text">
+            <a:extLst xmlns:a="http://schemas.openxmlformats.org/drawingml/2006/main">
+              <a:ext uri="{FF2B5EF4-FFF2-40B4-BE49-F238E27FC236}">
+                <a16:creationId xmlns:a16="http://schemas.microsoft.com/office/drawing/2014/main" id="{C923D5EE-6BB2-48E9-AB95-EC4457D7CFFC}"/>
+              </a:ext>
+            </a:extLst>
+          </p:cNvPr>
+          <p:cNvSpPr>
+            <a:spLocks xmlns:a="http://schemas.openxmlformats.org/drawingml/2006/main" noGrp="1"/>
+          </p:cNvSpPr>
+          <p:nvPr/>
+        </p:nvSpPr>
+        <p:spPr>
+          <a:xfrm xmlns:a="http://schemas.openxmlformats.org/drawingml/2006/main">
+            <a:off x="400050" y="6267450"/>
+            <a:ext cx="10953750" cy="438150"/>
+          </a:xfrm>
+          <a:prstGeom xmlns:a="http://schemas.openxmlformats.org/drawingml/2006/main" prst="rect">
+            <a:avLst/>
+          </a:prstGeom>
+          <a:noFill xmlns:a="http://schemas.openxmlformats.org/drawingml/2006/main"/>
+          <a:ln xmlns:a="http://schemas.openxmlformats.org/drawingml/2006/main" w="0">
+            <a:noFill/>
+          </a:ln>
+        </p:spPr>
+        <p:txBody>
+          <a:bodyPr xmlns:a="http://schemas.openxmlformats.org/drawingml/2006/main">
+            <a:noAutofit/>
+          </a:bodyPr>
+          <a:lstStyle xmlns:a="http://schemas.openxmlformats.org/drawingml/2006/main">
+            <a:defPPr>
+              <a:defRPr sz="1650" b="1">
+                <a:solidFill>
+                  <a:srgbClr val="176D8C"/>
+                </a:solidFill>
+                <a:latin typeface="Arial"/>
+                <a:ea typeface="Arial"/>
+                <a:cs typeface="Arial"/>
+              </a:defRPr>
+            </a:defPPr>
+          </a:lstStyle>
+          <a:p xmlns:a="http://schemas.openxmlformats.org/drawingml/2006/main">
+            <a:pPr>
+              <a:defRPr sz="1650" b="1">
+                <a:solidFill>
+                  <a:srgbClr val="176D8C"/>
+                </a:solidFill>
+                <a:latin typeface="Arial"/>
+                <a:ea typeface="Arial"/>
+                <a:cs typeface="Arial"/>
+              </a:defRPr>
+            </a:pPr>
+            <a:r>
+              <a:rPr sz="1650" b="1">
+                <a:solidFill>
+                  <a:srgbClr val="176D8C"/>
+                </a:solidFill>
+                <a:latin typeface="Arial"/>
+                <a:ea typeface="Arial"/>
+                <a:cs typeface="Arial"/>
+              </a:rPr>
+              <a:t>Females report more poor-health days on average. The paired average weight increases by 3.01 lb.</a:t>
+            </a:r>
+          </a:p>
+        </p:txBody>
+      </p:sp>
+      <p:sp>
+        <p:nvSpPr>
+          <p:cNvPr id="15" name="text">
+            <a:extLst xmlns:a="http://schemas.openxmlformats.org/drawingml/2006/main">
+              <a:ext uri="{FF2B5EF4-FFF2-40B4-BE49-F238E27FC236}">
+                <a16:creationId xmlns:a16="http://schemas.microsoft.com/office/drawing/2014/main" id="{641B181A-32E4-4296-9C99-A40ED5AB4C2E}"/>
+              </a:ext>
+            </a:extLst>
+          </p:cNvPr>
+          <p:cNvSpPr>
+            <a:spLocks xmlns:a="http://schemas.openxmlformats.org/drawingml/2006/main" noGrp="1"/>
+          </p:cNvSpPr>
+          <p:nvPr/>
+        </p:nvSpPr>
+        <p:spPr>
+          <a:xfrm xmlns:a="http://schemas.openxmlformats.org/drawingml/2006/main">
+            <a:off x="11353800" y="6581775"/>
+            <a:ext cx="657225" cy="209550"/>
+          </a:xfrm>
+          <a:prstGeom xmlns:a="http://schemas.openxmlformats.org/drawingml/2006/main" prst="rect">
+            <a:avLst/>
+          </a:prstGeom>
+          <a:noFill xmlns:a="http://schemas.openxmlformats.org/drawingml/2006/main"/>
+          <a:ln xmlns:a="http://schemas.openxmlformats.org/drawingml/2006/main" w="0">
+            <a:noFill/>
+          </a:ln>
+        </p:spPr>
+        <p:txBody>
+          <a:bodyPr xmlns:a="http://schemas.openxmlformats.org/drawingml/2006/main">
+            <a:noAutofit/>
+          </a:bodyPr>
+          <a:lstStyle xmlns:a="http://schemas.openxmlformats.org/drawingml/2006/main">
+            <a:defPPr>
+              <a:defRPr sz="1050" b="0">
+                <a:solidFill>
+                  <a:srgbClr val="415566"/>
+                </a:solidFill>
+                <a:latin typeface="Arial"/>
+                <a:ea typeface="Arial"/>
+                <a:cs typeface="Arial"/>
+              </a:defRPr>
+            </a:defPPr>
+          </a:lstStyle>
+          <a:p xmlns:a="http://schemas.openxmlformats.org/drawingml/2006/main">
+            <a:pPr>
+              <a:defRPr sz="1050" b="0">
+                <a:solidFill>
+                  <a:srgbClr val="415566"/>
+                </a:solidFill>
+                <a:latin typeface="Arial"/>
+                <a:ea typeface="Arial"/>
+                <a:cs typeface="Arial"/>
+              </a:defRPr>
+            </a:pPr>
+            <a:r>
+              <a:rPr sz="1050" b="0">
+                <a:solidFill>
+                  <a:srgbClr val="415566"/>
+                </a:solidFill>
+                <a:latin typeface="Arial"/>
+                <a:ea typeface="Arial"/>
+                <a:cs typeface="Arial"/>
+              </a:rPr>
+              <a:t>9 / 12</a:t>
+            </a:r>
+          </a:p>
+        </p:txBody>
+      </p:sp>
+    </p:spTree>
+    <p:extLst>
+      <p:ext uri="{BB962C8B-B14F-4D97-AF65-F5344CB8AC3E}">
+        <p14:creationId xmlns:p14="http://schemas.microsoft.com/office/powerpoint/2010/main" val="819970840"/>
+      </p:ext>
+    </p:extLst>
+  </p:cSld>
+</p:sld>
+</file>
+
+<file path=ppt/slides/slide11.xml><?xml version="1.0" encoding="utf-8"?>
+<p:sld xmlns:p="http://schemas.openxmlformats.org/presentationml/2006/main">
+  <p:cSld>
+    <p:bg>
+      <p:bgPr>
+        <a:solidFill xmlns:a="http://schemas.openxmlformats.org/drawingml/2006/main">
+          <a:srgbClr val="FFFFFF"/>
+        </a:solidFill>
+      </p:bgPr>
+    </p:bg>
+    <p:spTree>
+      <p:nvGrpSpPr>
+        <p:cNvPr id="1" name=""/>
+        <p:cNvGrpSpPr/>
+        <p:nvPr/>
+      </p:nvGrpSpPr>
+      <p:grpSpPr>
+        <a:xfrm xmlns:a="http://schemas.openxmlformats.org/drawingml/2006/main"/>
+      </p:grpSpPr>
+      <p:sp>
+        <p:nvSpPr>
+          <p:cNvPr id="15" name="text">
+            <a:extLst xmlns:a="http://schemas.openxmlformats.org/drawingml/2006/main">
+              <a:ext uri="{FF2B5EF4-FFF2-40B4-BE49-F238E27FC236}">
+                <a16:creationId xmlns:a16="http://schemas.microsoft.com/office/drawing/2014/main" id="{1FA8FD10-67C3-4E20-BF17-B3669E1FEF18}"/>
+              </a:ext>
+            </a:extLst>
+          </p:cNvPr>
+          <p:cNvSpPr>
+            <a:spLocks xmlns:a="http://schemas.openxmlformats.org/drawingml/2006/main" noGrp="1"/>
+          </p:cNvSpPr>
+          <p:nvPr/>
+        </p:nvSpPr>
+        <p:spPr>
+          <a:xfrm xmlns:a="http://schemas.openxmlformats.org/drawingml/2006/main">
+            <a:off x="590550" y="76200"/>
+            <a:ext cx="11220450" cy="247650"/>
+          </a:xfrm>
+          <a:prstGeom xmlns:a="http://schemas.openxmlformats.org/drawingml/2006/main" prst="rect">
+            <a:avLst/>
+          </a:prstGeom>
+          <a:noFill xmlns:a="http://schemas.openxmlformats.org/drawingml/2006/main"/>
+          <a:ln xmlns:a="http://schemas.openxmlformats.org/drawingml/2006/main" w="0">
+            <a:noFill/>
+          </a:ln>
+        </p:spPr>
+        <p:txBody>
+          <a:bodyPr xmlns:a="http://schemas.openxmlformats.org/drawingml/2006/main">
+            <a:noAutofit/>
+          </a:bodyPr>
+          <a:lstStyle xmlns:a="http://schemas.openxmlformats.org/drawingml/2006/main">
+            <a:defPPr>
+              <a:defRPr sz="1350" b="1">
+                <a:solidFill>
+                  <a:srgbClr val="176D8C"/>
+                </a:solidFill>
+                <a:latin typeface="Arial"/>
+                <a:ea typeface="Arial"/>
+                <a:cs typeface="Arial"/>
+              </a:defRPr>
+            </a:defPPr>
+          </a:lstStyle>
+          <a:p xmlns:a="http://schemas.openxmlformats.org/drawingml/2006/main">
+            <a:pPr>
+              <a:defRPr sz="1350" b="1">
+                <a:solidFill>
+                  <a:srgbClr val="176D8C"/>
+                </a:solidFill>
+                <a:latin typeface="Arial"/>
+                <a:ea typeface="Arial"/>
+                <a:cs typeface="Arial"/>
+              </a:defRPr>
+            </a:pPr>
+            <a:r>
+              <a:rPr sz="1350" b="1">
+                <a:solidFill>
+                  <a:srgbClr val="176D8C"/>
+                </a:solidFill>
+                <a:latin typeface="Arial"/>
+                <a:ea typeface="Arial"/>
+                <a:cs typeface="Arial"/>
+              </a:rPr>
+              <a:t>LAB 10: Chi-square goodness of fit and contingency tables</a:t>
+            </a:r>
+          </a:p>
+        </p:txBody>
+      </p:sp>
+      <p:sp>
+        <p:nvSpPr>
+          <p:cNvPr id="2" name="">
+            <a:extLst xmlns:a="http://schemas.openxmlformats.org/drawingml/2006/main">
+              <a:ext uri="{FF2B5EF4-FFF2-40B4-BE49-F238E27FC236}">
+                <a16:creationId xmlns:a16="http://schemas.microsoft.com/office/drawing/2014/main" id="{84471DC7-24A4-4F26-901F-899BFAE7490B}"/>
+              </a:ext>
+            </a:extLst>
+          </p:cNvPr>
+          <p:cNvSpPr>
+            <a:spLocks xmlns:a="http://schemas.openxmlformats.org/drawingml/2006/main" noGrp="1"/>
+          </p:cNvSpPr>
+          <p:nvPr/>
+        </p:nvSpPr>
+        <p:spPr>
+          <a:xfrm xmlns:a="http://schemas.openxmlformats.org/drawingml/2006/main">
+            <a:off x="381000" y="381000"/>
+            <a:ext cx="47625" cy="438150"/>
+          </a:xfrm>
+          <a:prstGeom xmlns:a="http://schemas.openxmlformats.org/drawingml/2006/main" prst="rect">
+            <a:avLst/>
+          </a:prstGeom>
+          <a:solidFill xmlns:a="http://schemas.openxmlformats.org/drawingml/2006/main">
+            <a:srgbClr val="176D8C"/>
+          </a:solidFill>
+          <a:ln xmlns:a="http://schemas.openxmlformats.org/drawingml/2006/main" w="0">
+            <a:noFill/>
+          </a:ln>
+        </p:spPr>
+      </p:sp>
+      <p:sp>
+        <p:nvSpPr>
+          <p:cNvPr id="3" name="text">
+            <a:extLst xmlns:a="http://schemas.openxmlformats.org/drawingml/2006/main">
+              <a:ext uri="{FF2B5EF4-FFF2-40B4-BE49-F238E27FC236}">
+                <a16:creationId xmlns:a16="http://schemas.microsoft.com/office/drawing/2014/main" id="{4B166ED9-B904-4B25-81AE-C27093C4789F}"/>
+              </a:ext>
+            </a:extLst>
+          </p:cNvPr>
+          <p:cNvSpPr>
+            <a:spLocks xmlns:a="http://schemas.openxmlformats.org/drawingml/2006/main" noGrp="1"/>
+          </p:cNvSpPr>
+          <p:nvPr/>
+        </p:nvSpPr>
+        <p:spPr>
+          <a:xfrm xmlns:a="http://schemas.openxmlformats.org/drawingml/2006/main">
+            <a:off x="590550" y="342900"/>
+            <a:ext cx="11220450" cy="552450"/>
+          </a:xfrm>
+          <a:prstGeom xmlns:a="http://schemas.openxmlformats.org/drawingml/2006/main" prst="rect">
+            <a:avLst/>
+          </a:prstGeom>
+          <a:noFill xmlns:a="http://schemas.openxmlformats.org/drawingml/2006/main"/>
+          <a:ln xmlns:a="http://schemas.openxmlformats.org/drawingml/2006/main" w="0">
+            <a:noFill/>
+          </a:ln>
+        </p:spPr>
+        <p:txBody>
+          <a:bodyPr xmlns:a="http://schemas.openxmlformats.org/drawingml/2006/main">
+            <a:noAutofit/>
+          </a:bodyPr>
+          <a:lstStyle xmlns:a="http://schemas.openxmlformats.org/drawingml/2006/main">
+            <a:defPPr>
+              <a:defRPr sz="2850" b="1">
+                <a:solidFill>
+                  <a:srgbClr val="183044"/>
+                </a:solidFill>
+                <a:latin typeface="Arial"/>
+                <a:ea typeface="Arial"/>
+                <a:cs typeface="Arial"/>
+              </a:defRPr>
+            </a:defPPr>
+          </a:lstStyle>
+          <a:p xmlns:a="http://schemas.openxmlformats.org/drawingml/2006/main">
+            <a:pPr>
+              <a:defRPr sz="2850" b="1">
+                <a:solidFill>
+                  <a:srgbClr val="183044"/>
+                </a:solidFill>
+                <a:latin typeface="Arial"/>
+                <a:ea typeface="Arial"/>
+                <a:cs typeface="Arial"/>
+              </a:defRPr>
+            </a:pPr>
+            <a:r>
+              <a:rPr sz="2850" b="1">
+                <a:solidFill>
+                  <a:srgbClr val="183044"/>
+                </a:solidFill>
+                <a:latin typeface="Arial"/>
+                <a:ea typeface="Arial"/>
+                <a:cs typeface="Arial"/>
+              </a:rPr>
+              <a:t>Chi-square: category patterns and relationships</a:t>
+            </a:r>
+          </a:p>
+        </p:txBody>
+      </p:sp>
+      <p:sp>
+        <p:nvSpPr>
+          <p:cNvPr id="4" name="text">
+            <a:extLst xmlns:a="http://schemas.openxmlformats.org/drawingml/2006/main">
+              <a:ext uri="{FF2B5EF4-FFF2-40B4-BE49-F238E27FC236}">
+                <a16:creationId xmlns:a16="http://schemas.microsoft.com/office/drawing/2014/main" id="{CEBEBE80-EFE9-4DC4-8DCD-58594DD0555B}"/>
+              </a:ext>
+            </a:extLst>
+          </p:cNvPr>
+          <p:cNvSpPr>
+            <a:spLocks xmlns:a="http://schemas.openxmlformats.org/drawingml/2006/main" noGrp="1"/>
+          </p:cNvSpPr>
+          <p:nvPr/>
+        </p:nvSpPr>
+        <p:spPr>
+          <a:xfrm xmlns:a="http://schemas.openxmlformats.org/drawingml/2006/main">
+            <a:off x="400050" y="971550"/>
+            <a:ext cx="11391900" cy="514350"/>
+          </a:xfrm>
+          <a:prstGeom xmlns:a="http://schemas.openxmlformats.org/drawingml/2006/main" prst="rect">
+            <a:avLst/>
+          </a:prstGeom>
+          <a:noFill xmlns:a="http://schemas.openxmlformats.org/drawingml/2006/main"/>
+          <a:ln xmlns:a="http://schemas.openxmlformats.org/drawingml/2006/main" w="0">
+            <a:noFill/>
+          </a:ln>
+        </p:spPr>
+        <p:txBody>
+          <a:bodyPr xmlns:a="http://schemas.openxmlformats.org/drawingml/2006/main">
+            <a:noAutofit/>
+          </a:bodyPr>
+          <a:lstStyle xmlns:a="http://schemas.openxmlformats.org/drawingml/2006/main">
+            <a:defPPr>
+              <a:defRPr sz="1725" b="0">
+                <a:solidFill>
+                  <a:srgbClr val="415566"/>
+                </a:solidFill>
+                <a:latin typeface="Arial"/>
+                <a:ea typeface="Arial"/>
+                <a:cs typeface="Arial"/>
+              </a:defRPr>
+            </a:defPPr>
+          </a:lstStyle>
+          <a:p xmlns:a="http://schemas.openxmlformats.org/drawingml/2006/main">
+            <a:pPr>
+              <a:defRPr sz="1725" b="0">
+                <a:solidFill>
+                  <a:srgbClr val="415566"/>
+                </a:solidFill>
+                <a:latin typeface="Arial"/>
+                <a:ea typeface="Arial"/>
+                <a:cs typeface="Arial"/>
+              </a:defRPr>
+            </a:pPr>
+            <a:r>
+              <a:rPr sz="1725" b="0">
+                <a:solidFill>
+                  <a:srgbClr val="415566"/>
+                </a:solidFill>
+                <a:latin typeface="Arial"/>
+                <a:ea typeface="Arial"/>
+                <a:cs typeface="Arial"/>
+              </a:rPr>
               <a:t>Goodness of fit checks category counts. Independence tests check whether two categories are related.</a:t>
             </a:r>
           </a:p>
@@ -8561,7 +10936,7 @@
           <p:cNvPr id="5" name="">
             <a:extLst xmlns:a="http://schemas.openxmlformats.org/drawingml/2006/main">
               <a:ext uri="{FF2B5EF4-FFF2-40B4-BE49-F238E27FC236}">
-                <a16:creationId xmlns:a16="http://schemas.microsoft.com/office/drawing/2014/main" id="{3AFD63C5-B440-4CF0-AAF2-109C0BE18D27}"/>
+                <a16:creationId xmlns:a16="http://schemas.microsoft.com/office/drawing/2014/main" id="{FE4766AA-AF0D-43F1-A709-F32BB0907435}"/>
               </a:ext>
             </a:extLst>
           </p:cNvPr>
@@ -9108,7 +11483,7 @@
           <p:cNvPr id="6" name="text">
             <a:extLst xmlns:a="http://schemas.openxmlformats.org/drawingml/2006/main">
               <a:ext uri="{FF2B5EF4-FFF2-40B4-BE49-F238E27FC236}">
-                <a16:creationId xmlns:a16="http://schemas.microsoft.com/office/drawing/2014/main" id="{6A3681AC-406C-4FDA-8948-96449836BE05}"/>
+                <a16:creationId xmlns:a16="http://schemas.microsoft.com/office/drawing/2014/main" id="{1FC8D7D2-EC62-444A-AB1A-730799EA5908}"/>
               </a:ext>
             </a:extLst>
           </p:cNvPr>
@@ -9176,7 +11551,7 @@
           <p:cNvPr id="7" name="text">
             <a:extLst xmlns:a="http://schemas.openxmlformats.org/drawingml/2006/main">
               <a:ext uri="{FF2B5EF4-FFF2-40B4-BE49-F238E27FC236}">
-                <a16:creationId xmlns:a16="http://schemas.microsoft.com/office/drawing/2014/main" id="{94344945-C51A-47A0-B6F9-38F291660020}"/>
+                <a16:creationId xmlns:a16="http://schemas.microsoft.com/office/drawing/2014/main" id="{E524B462-5682-474B-90E9-DD9F08B028A4}"/>
               </a:ext>
             </a:extLst>
           </p:cNvPr>
@@ -9244,7 +11619,7 @@
           <p:cNvPr id="8" name="Chart">
             <a:extLst xmlns:a="http://schemas.openxmlformats.org/drawingml/2006/main">
               <a:ext uri="{FF2B5EF4-FFF2-40B4-BE49-F238E27FC236}">
-                <a16:creationId xmlns:a16="http://schemas.microsoft.com/office/drawing/2014/main" id="{D678B5EC-6BE0-43E0-8EFF-08449139CDD3}"/>
+                <a16:creationId xmlns:a16="http://schemas.microsoft.com/office/drawing/2014/main" id="{D31D9517-DA31-42D9-83B1-BA0B75871664}"/>
               </a:ext>
             </a:extLst>
           </p:cNvPr>
@@ -9257,7 +11632,7 @@
         </p:xfrm>
         <a:graphic xmlns:a="http://schemas.openxmlformats.org/drawingml/2006/main">
           <a:graphicData uri="http://schemas.openxmlformats.org/drawingml/2006/chart">
-            <c:chart xmlns:r="http://schemas.openxmlformats.org/officeDocument/2006/relationships" xmlns:c="http://schemas.openxmlformats.org/drawingml/2006/chart" r:id="Rb0e2e8d7d8e04fc5"/>
+            <c:chart xmlns:r="http://schemas.openxmlformats.org/officeDocument/2006/relationships" xmlns:c="http://schemas.openxmlformats.org/drawingml/2006/chart" r:id="R8e28997408a7408c"/>
           </a:graphicData>
         </a:graphic>
       </p:graphicFrame>
@@ -9266,7 +11641,7 @@
           <p:cNvPr id="9" name="Chart">
             <a:extLst xmlns:a="http://schemas.openxmlformats.org/drawingml/2006/main">
               <a:ext uri="{FF2B5EF4-FFF2-40B4-BE49-F238E27FC236}">
-                <a16:creationId xmlns:a16="http://schemas.microsoft.com/office/drawing/2014/main" id="{E8ADBFCD-A98A-4F08-AA6B-A4C07FE85E15}"/>
+                <a16:creationId xmlns:a16="http://schemas.microsoft.com/office/drawing/2014/main" id="{17243387-7494-4427-924C-32CE9AA52178}"/>
               </a:ext>
             </a:extLst>
           </p:cNvPr>
@@ -9279,7 +11654,7 @@
         </p:xfrm>
         <a:graphic xmlns:a="http://schemas.openxmlformats.org/drawingml/2006/main">
           <a:graphicData uri="http://schemas.openxmlformats.org/drawingml/2006/chart">
-            <c:chart xmlns:r="http://schemas.openxmlformats.org/officeDocument/2006/relationships" xmlns:c="http://schemas.openxmlformats.org/drawingml/2006/chart" r:id="R10cca119f1d34fbe"/>
+            <c:chart xmlns:r="http://schemas.openxmlformats.org/officeDocument/2006/relationships" xmlns:c="http://schemas.openxmlformats.org/drawingml/2006/chart" r:id="R350332d95c46484a"/>
           </a:graphicData>
         </a:graphic>
       </p:graphicFrame>
@@ -9288,7 +11663,7 @@
           <p:cNvPr id="10" name="text">
             <a:extLst xmlns:a="http://schemas.openxmlformats.org/drawingml/2006/main">
               <a:ext uri="{FF2B5EF4-FFF2-40B4-BE49-F238E27FC236}">
-                <a16:creationId xmlns:a16="http://schemas.microsoft.com/office/drawing/2014/main" id="{CA4EAC31-A12A-4D20-ABF9-BAB46186BABA}"/>
+                <a16:creationId xmlns:a16="http://schemas.microsoft.com/office/drawing/2014/main" id="{A1C89BB9-A881-451E-8AAC-D95F99343DD3}"/>
               </a:ext>
             </a:extLst>
           </p:cNvPr>
@@ -9356,7 +11731,7 @@
           <p:cNvPr id="11" name="text">
             <a:extLst xmlns:a="http://schemas.openxmlformats.org/drawingml/2006/main">
               <a:ext uri="{FF2B5EF4-FFF2-40B4-BE49-F238E27FC236}">
-                <a16:creationId xmlns:a16="http://schemas.microsoft.com/office/drawing/2014/main" id="{572C3ACC-E92D-4F69-9AA2-EEB98FD5D011}"/>
+                <a16:creationId xmlns:a16="http://schemas.microsoft.com/office/drawing/2014/main" id="{E759D400-BC9C-41AA-8730-9720F9F8C8C9}"/>
               </a:ext>
             </a:extLst>
           </p:cNvPr>
@@ -9424,7 +11799,7 @@
           <p:cNvPr id="12" name="">
             <a:extLst xmlns:a="http://schemas.openxmlformats.org/drawingml/2006/main">
               <a:ext uri="{FF2B5EF4-FFF2-40B4-BE49-F238E27FC236}">
-                <a16:creationId xmlns:a16="http://schemas.microsoft.com/office/drawing/2014/main" id="{3F69786F-03E6-4E32-9E3B-84F00E9E83A2}"/>
+                <a16:creationId xmlns:a16="http://schemas.microsoft.com/office/drawing/2014/main" id="{CEADBAC1-C1D5-46C9-9239-57344A3494A0}"/>
               </a:ext>
             </a:extLst>
           </p:cNvPr>
@@ -9454,7 +11829,7 @@
           <p:cNvPr id="13" name="text">
             <a:extLst xmlns:a="http://schemas.openxmlformats.org/drawingml/2006/main">
               <a:ext uri="{FF2B5EF4-FFF2-40B4-BE49-F238E27FC236}">
-                <a16:creationId xmlns:a16="http://schemas.microsoft.com/office/drawing/2014/main" id="{132A384F-C9D5-4B9A-9407-27E4409BD85A}"/>
+                <a16:creationId xmlns:a16="http://schemas.microsoft.com/office/drawing/2014/main" id="{258C11C1-1B94-40B2-A388-D4B7CFEE0FA2}"/>
               </a:ext>
             </a:extLst>
           </p:cNvPr>
@@ -9522,7 +11897,7 @@
           <p:cNvPr id="14" name="text">
             <a:extLst xmlns:a="http://schemas.openxmlformats.org/drawingml/2006/main">
               <a:ext uri="{FF2B5EF4-FFF2-40B4-BE49-F238E27FC236}">
-                <a16:creationId xmlns:a16="http://schemas.microsoft.com/office/drawing/2014/main" id="{FC05FDFF-5D01-4006-ABEA-D13EFB5AD7AB}"/>
+                <a16:creationId xmlns:a16="http://schemas.microsoft.com/office/drawing/2014/main" id="{31996CF6-2B83-4D30-A362-403ECCAABDF2}"/>
               </a:ext>
             </a:extLst>
           </p:cNvPr>
@@ -9580,7 +11955,7 @@
                 <a:ea typeface="Arial"/>
                 <a:cs typeface="Arial"/>
               </a:rPr>
-              <a:t>9 / 11</a:t>
+              <a:t>10 / 12</a:t>
             </a:r>
           </a:p>
         </p:txBody>
@@ -9588,14 +11963,14 @@
     </p:spTree>
     <p:extLst>
       <p:ext uri="{BB962C8B-B14F-4D97-AF65-F5344CB8AC3E}">
-        <p14:creationId xmlns:p14="http://schemas.microsoft.com/office/powerpoint/2010/main" val="59019648"/>
+        <p14:creationId xmlns:p14="http://schemas.microsoft.com/office/powerpoint/2010/main" val="200325932"/>
       </p:ext>
     </p:extLst>
   </p:cSld>
 </p:sld>
 </file>
 
-<file path=ppt/slides/slide11.xml><?xml version="1.0" encoding="utf-8"?>
+<file path=ppt/slides/slide12.xml><?xml version="1.0" encoding="utf-8"?>
 <p:sld xmlns:p="http://schemas.openxmlformats.org/presentationml/2006/main">
   <p:cSld>
     <p:bg>
@@ -9619,7 +11994,7 @@
           <p:cNvPr id="22" name="text">
             <a:extLst xmlns:a="http://schemas.openxmlformats.org/drawingml/2006/main">
               <a:ext uri="{FF2B5EF4-FFF2-40B4-BE49-F238E27FC236}">
-                <a16:creationId xmlns:a16="http://schemas.microsoft.com/office/drawing/2014/main" id="{6182AE36-74F5-491F-ADBC-E59DE514F1D0}"/>
+                <a16:creationId xmlns:a16="http://schemas.microsoft.com/office/drawing/2014/main" id="{430AA9BE-970D-4043-AD08-0828E3C07B6C}"/>
               </a:ext>
             </a:extLst>
           </p:cNvPr>
@@ -9687,7 +12062,7 @@
           <p:cNvPr id="2" name="">
             <a:extLst xmlns:a="http://schemas.openxmlformats.org/drawingml/2006/main">
               <a:ext uri="{FF2B5EF4-FFF2-40B4-BE49-F238E27FC236}">
-                <a16:creationId xmlns:a16="http://schemas.microsoft.com/office/drawing/2014/main" id="{5B0E2C52-E1E3-4F37-9D12-735CF2F92CC2}"/>
+                <a16:creationId xmlns:a16="http://schemas.microsoft.com/office/drawing/2014/main" id="{0C691B33-0298-48C3-88B4-44667B807BFF}"/>
               </a:ext>
             </a:extLst>
           </p:cNvPr>
@@ -9717,7 +12092,7 @@
           <p:cNvPr id="3" name="text">
             <a:extLst xmlns:a="http://schemas.openxmlformats.org/drawingml/2006/main">
               <a:ext uri="{FF2B5EF4-FFF2-40B4-BE49-F238E27FC236}">
-                <a16:creationId xmlns:a16="http://schemas.microsoft.com/office/drawing/2014/main" id="{E68E140E-31AE-4E8B-BAC4-A26589E439E4}"/>
+                <a16:creationId xmlns:a16="http://schemas.microsoft.com/office/drawing/2014/main" id="{4CBA5822-99CC-4F46-BEEF-EFA771AAAEDC}"/>
               </a:ext>
             </a:extLst>
           </p:cNvPr>
@@ -9785,7 +12160,7 @@
           <p:cNvPr id="4" name="text">
             <a:extLst xmlns:a="http://schemas.openxmlformats.org/drawingml/2006/main">
               <a:ext uri="{FF2B5EF4-FFF2-40B4-BE49-F238E27FC236}">
-                <a16:creationId xmlns:a16="http://schemas.microsoft.com/office/drawing/2014/main" id="{08C2ACF6-F4C5-4E0D-906E-C3EBBE94CB59}"/>
+                <a16:creationId xmlns:a16="http://schemas.microsoft.com/office/drawing/2014/main" id="{CD9F7BAD-9769-4601-BFE8-852FF47DA922}"/>
               </a:ext>
             </a:extLst>
           </p:cNvPr>
@@ -9853,7 +12228,7 @@
           <p:cNvPr id="5" name="">
             <a:extLst xmlns:a="http://schemas.openxmlformats.org/drawingml/2006/main">
               <a:ext uri="{FF2B5EF4-FFF2-40B4-BE49-F238E27FC236}">
-                <a16:creationId xmlns:a16="http://schemas.microsoft.com/office/drawing/2014/main" id="{70569AD1-CEE2-446A-9457-917FE0D3D0BF}"/>
+                <a16:creationId xmlns:a16="http://schemas.microsoft.com/office/drawing/2014/main" id="{450D4E6C-7226-4F3D-BFFC-0E5EB7C77FD8}"/>
               </a:ext>
             </a:extLst>
           </p:cNvPr>
@@ -10275,7 +12650,7 @@
           <p:cNvPr id="6" name="text">
             <a:extLst xmlns:a="http://schemas.openxmlformats.org/drawingml/2006/main">
               <a:ext uri="{FF2B5EF4-FFF2-40B4-BE49-F238E27FC236}">
-                <a16:creationId xmlns:a16="http://schemas.microsoft.com/office/drawing/2014/main" id="{AB4DE23B-065E-49CB-8A89-C8A63AFE1077}"/>
+                <a16:creationId xmlns:a16="http://schemas.microsoft.com/office/drawing/2014/main" id="{A75C3CD1-4E1A-4B0D-AE41-BCA4A2C0971E}"/>
               </a:ext>
             </a:extLst>
           </p:cNvPr>
@@ -10366,7 +12741,7 @@
           <p:cNvPr id="7" name="text">
             <a:extLst xmlns:a="http://schemas.openxmlformats.org/drawingml/2006/main">
               <a:ext uri="{FF2B5EF4-FFF2-40B4-BE49-F238E27FC236}">
-                <a16:creationId xmlns:a16="http://schemas.microsoft.com/office/drawing/2014/main" id="{52D74986-42C0-4C10-9FC0-4414CEEFA3E1}"/>
+                <a16:creationId xmlns:a16="http://schemas.microsoft.com/office/drawing/2014/main" id="{9D0C8869-466B-49DB-A8DD-6F2ED4D93E72}"/>
               </a:ext>
             </a:extLst>
           </p:cNvPr>
@@ -10457,7 +12832,7 @@
           <p:cNvPr id="8" name="">
             <a:extLst xmlns:a="http://schemas.openxmlformats.org/drawingml/2006/main">
               <a:ext uri="{FF2B5EF4-FFF2-40B4-BE49-F238E27FC236}">
-                <a16:creationId xmlns:a16="http://schemas.microsoft.com/office/drawing/2014/main" id="{776E168C-6704-42F5-967A-9FEC3DBFFC70}"/>
+                <a16:creationId xmlns:a16="http://schemas.microsoft.com/office/drawing/2014/main" id="{9AAE154B-82F1-476E-80BE-790DC8EC1AC1}"/>
               </a:ext>
             </a:extLst>
           </p:cNvPr>
@@ -10487,7 +12862,7 @@
           <p:cNvPr id="9" name="text">
             <a:extLst xmlns:a="http://schemas.openxmlformats.org/drawingml/2006/main">
               <a:ext uri="{FF2B5EF4-FFF2-40B4-BE49-F238E27FC236}">
-                <a16:creationId xmlns:a16="http://schemas.microsoft.com/office/drawing/2014/main" id="{41635ECF-B937-4AAA-A95E-848920AB9FAD}"/>
+                <a16:creationId xmlns:a16="http://schemas.microsoft.com/office/drawing/2014/main" id="{3333130C-3819-4918-868F-5B4DFC9AE67B}"/>
               </a:ext>
             </a:extLst>
           </p:cNvPr>
@@ -10555,7 +12930,7 @@
           <p:cNvPr id="10" name="text">
             <a:extLst xmlns:a="http://schemas.openxmlformats.org/drawingml/2006/main">
               <a:ext uri="{FF2B5EF4-FFF2-40B4-BE49-F238E27FC236}">
-                <a16:creationId xmlns:a16="http://schemas.microsoft.com/office/drawing/2014/main" id="{DC5A34C7-E938-478B-A468-F0D8D189B663}"/>
+                <a16:creationId xmlns:a16="http://schemas.microsoft.com/office/drawing/2014/main" id="{86956113-5D67-4CFD-BAD8-90C36D7E23E5}"/>
               </a:ext>
             </a:extLst>
           </p:cNvPr>
@@ -10623,7 +12998,7 @@
           <p:cNvPr id="11" name="Chart">
             <a:extLst xmlns:a="http://schemas.openxmlformats.org/drawingml/2006/main">
               <a:ext uri="{FF2B5EF4-FFF2-40B4-BE49-F238E27FC236}">
-                <a16:creationId xmlns:a16="http://schemas.microsoft.com/office/drawing/2014/main" id="{BCDC3D7D-C82D-4A86-BDA6-0AB7D2E095CB}"/>
+                <a16:creationId xmlns:a16="http://schemas.microsoft.com/office/drawing/2014/main" id="{8A6211CF-91DD-4C8B-ADF4-A3B13337BBAC}"/>
               </a:ext>
             </a:extLst>
           </p:cNvPr>
@@ -10636,7 +13011,7 @@
         </p:xfrm>
         <a:graphic xmlns:a="http://schemas.openxmlformats.org/drawingml/2006/main">
           <a:graphicData uri="http://schemas.openxmlformats.org/drawingml/2006/chart">
-            <c:chart xmlns:r="http://schemas.openxmlformats.org/officeDocument/2006/relationships" xmlns:c="http://schemas.openxmlformats.org/drawingml/2006/chart" r:id="Rd057bec6a7cd48e4"/>
+            <c:chart xmlns:r="http://schemas.openxmlformats.org/officeDocument/2006/relationships" xmlns:c="http://schemas.openxmlformats.org/drawingml/2006/chart" r:id="Rd763d900ecf24c3d"/>
           </a:graphicData>
         </a:graphic>
       </p:graphicFrame>
@@ -10645,7 +13020,7 @@
           <p:cNvPr id="12" name="">
             <a:extLst xmlns:a="http://schemas.openxmlformats.org/drawingml/2006/main">
               <a:ext uri="{FF2B5EF4-FFF2-40B4-BE49-F238E27FC236}">
-                <a16:creationId xmlns:a16="http://schemas.microsoft.com/office/drawing/2014/main" id="{658684B0-9983-459E-86BF-5AC5C090A962}"/>
+                <a16:creationId xmlns:a16="http://schemas.microsoft.com/office/drawing/2014/main" id="{85C5E623-A319-42EE-8E5F-D1FF6F2ED5D0}"/>
               </a:ext>
             </a:extLst>
           </p:cNvPr>
@@ -11067,7 +13442,7 @@
           <p:cNvPr id="13" name="text">
             <a:extLst xmlns:a="http://schemas.openxmlformats.org/drawingml/2006/main">
               <a:ext uri="{FF2B5EF4-FFF2-40B4-BE49-F238E27FC236}">
-                <a16:creationId xmlns:a16="http://schemas.microsoft.com/office/drawing/2014/main" id="{E95F2A05-A61D-4F1F-ABE5-CFEC4EDDF131}"/>
+                <a16:creationId xmlns:a16="http://schemas.microsoft.com/office/drawing/2014/main" id="{F8D55BB6-486B-4147-A382-5A3003678F38}"/>
               </a:ext>
             </a:extLst>
           </p:cNvPr>
@@ -11158,7 +13533,7 @@
           <p:cNvPr id="14" name="text">
             <a:extLst xmlns:a="http://schemas.openxmlformats.org/drawingml/2006/main">
               <a:ext uri="{FF2B5EF4-FFF2-40B4-BE49-F238E27FC236}">
-                <a16:creationId xmlns:a16="http://schemas.microsoft.com/office/drawing/2014/main" id="{7956CB73-079B-47E0-8F8C-5ED0EA7DDDA5}"/>
+                <a16:creationId xmlns:a16="http://schemas.microsoft.com/office/drawing/2014/main" id="{90ABB4A8-285C-43A2-9095-FE72BC66925A}"/>
               </a:ext>
             </a:extLst>
           </p:cNvPr>
@@ -11226,7 +13601,7 @@
           <p:cNvPr id="15" name="">
             <a:extLst xmlns:a="http://schemas.openxmlformats.org/drawingml/2006/main">
               <a:ext uri="{FF2B5EF4-FFF2-40B4-BE49-F238E27FC236}">
-                <a16:creationId xmlns:a16="http://schemas.microsoft.com/office/drawing/2014/main" id="{DAAF6886-7024-46C3-BE5A-0B8BE37AA7AA}"/>
+                <a16:creationId xmlns:a16="http://schemas.microsoft.com/office/drawing/2014/main" id="{DB2B8861-70ED-46AE-85F0-A9E787B40B82}"/>
               </a:ext>
             </a:extLst>
           </p:cNvPr>
@@ -12302,7 +14677,7 @@
           <p:cNvPr id="16" name="text">
             <a:extLst xmlns:a="http://schemas.openxmlformats.org/drawingml/2006/main">
               <a:ext uri="{FF2B5EF4-FFF2-40B4-BE49-F238E27FC236}">
-                <a16:creationId xmlns:a16="http://schemas.microsoft.com/office/drawing/2014/main" id="{1671EF64-B51A-43D0-B97E-E1DD54AB7E4A}"/>
+                <a16:creationId xmlns:a16="http://schemas.microsoft.com/office/drawing/2014/main" id="{C72CFE92-7183-476B-8F3D-3812B5317110}"/>
               </a:ext>
             </a:extLst>
           </p:cNvPr>
@@ -12370,7 +14745,7 @@
           <p:cNvPr id="17" name="text">
             <a:extLst xmlns:a="http://schemas.openxmlformats.org/drawingml/2006/main">
               <a:ext uri="{FF2B5EF4-FFF2-40B4-BE49-F238E27FC236}">
-                <a16:creationId xmlns:a16="http://schemas.microsoft.com/office/drawing/2014/main" id="{DA52A6D0-2F90-4A70-A01B-08320FF9338D}"/>
+                <a16:creationId xmlns:a16="http://schemas.microsoft.com/office/drawing/2014/main" id="{63F30156-334B-450C-A433-665531398FEF}"/>
               </a:ext>
             </a:extLst>
           </p:cNvPr>
@@ -12438,7 +14813,7 @@
           <p:cNvPr id="18" name="text">
             <a:extLst xmlns:a="http://schemas.openxmlformats.org/drawingml/2006/main">
               <a:ext uri="{FF2B5EF4-FFF2-40B4-BE49-F238E27FC236}">
-                <a16:creationId xmlns:a16="http://schemas.microsoft.com/office/drawing/2014/main" id="{3828A982-31AC-4F2B-834D-5D533833A612}"/>
+                <a16:creationId xmlns:a16="http://schemas.microsoft.com/office/drawing/2014/main" id="{5425A212-07C7-4987-83BE-A8DE731D7A9A}"/>
               </a:ext>
             </a:extLst>
           </p:cNvPr>
@@ -12529,7 +14904,7 @@
           <p:cNvPr id="19" name="">
             <a:extLst xmlns:a="http://schemas.openxmlformats.org/drawingml/2006/main">
               <a:ext uri="{FF2B5EF4-FFF2-40B4-BE49-F238E27FC236}">
-                <a16:creationId xmlns:a16="http://schemas.microsoft.com/office/drawing/2014/main" id="{0EAF98C2-23E0-492A-AB29-39F33693B985}"/>
+                <a16:creationId xmlns:a16="http://schemas.microsoft.com/office/drawing/2014/main" id="{AFD2ED0E-D579-485E-846D-54105EB982D9}"/>
               </a:ext>
             </a:extLst>
           </p:cNvPr>
@@ -12559,7 +14934,7 @@
           <p:cNvPr id="20" name="text">
             <a:extLst xmlns:a="http://schemas.openxmlformats.org/drawingml/2006/main">
               <a:ext uri="{FF2B5EF4-FFF2-40B4-BE49-F238E27FC236}">
-                <a16:creationId xmlns:a16="http://schemas.microsoft.com/office/drawing/2014/main" id="{4DF41D8C-4A57-4C93-BEFB-C1E20A20AA52}"/>
+                <a16:creationId xmlns:a16="http://schemas.microsoft.com/office/drawing/2014/main" id="{D985220E-B964-44D8-8FAB-37A2236D1A4F}"/>
               </a:ext>
             </a:extLst>
           </p:cNvPr>
@@ -12627,7 +15002,7 @@
           <p:cNvPr id="21" name="text">
             <a:extLst xmlns:a="http://schemas.openxmlformats.org/drawingml/2006/main">
               <a:ext uri="{FF2B5EF4-FFF2-40B4-BE49-F238E27FC236}">
-                <a16:creationId xmlns:a16="http://schemas.microsoft.com/office/drawing/2014/main" id="{92C2153A-16B0-453B-BD02-780FF4947512}"/>
+                <a16:creationId xmlns:a16="http://schemas.microsoft.com/office/drawing/2014/main" id="{3C8F1752-96A4-4E1B-ADCE-1CBFE23975EB}"/>
               </a:ext>
             </a:extLst>
           </p:cNvPr>
@@ -12685,7 +15060,7 @@
                 <a:ea typeface="Arial"/>
                 <a:cs typeface="Arial"/>
               </a:rPr>
-              <a:t>10 / 11</a:t>
+              <a:t>11 / 12</a:t>
             </a:r>
           </a:p>
         </p:txBody>
@@ -12693,14 +15068,14 @@
     </p:spTree>
     <p:extLst>
       <p:ext uri="{BB962C8B-B14F-4D97-AF65-F5344CB8AC3E}">
-        <p14:creationId xmlns:p14="http://schemas.microsoft.com/office/powerpoint/2010/main" val="184143746"/>
+        <p14:creationId xmlns:p14="http://schemas.microsoft.com/office/powerpoint/2010/main" val="508784202"/>
       </p:ext>
     </p:extLst>
   </p:cSld>
 </p:sld>
 </file>
 
-<file path=ppt/slides/slide12.xml><?xml version="1.0" encoding="utf-8"?>
+<file path=ppt/slides/slide13.xml><?xml version="1.0" encoding="utf-8"?>
 <p:sld xmlns:p="http://schemas.openxmlformats.org/presentationml/2006/main">
   <p:cSld>
     <p:bg>
@@ -12724,7 +15099,7 @@
           <p:cNvPr id="25" name="text">
             <a:extLst xmlns:a="http://schemas.openxmlformats.org/drawingml/2006/main">
               <a:ext uri="{FF2B5EF4-FFF2-40B4-BE49-F238E27FC236}">
-                <a16:creationId xmlns:a16="http://schemas.microsoft.com/office/drawing/2014/main" id="{88E4227C-32DF-419E-A1E6-467FC60B024D}"/>
+                <a16:creationId xmlns:a16="http://schemas.microsoft.com/office/drawing/2014/main" id="{402CDFB7-0E69-4755-9E98-C85A7A02AEE0}"/>
               </a:ext>
             </a:extLst>
           </p:cNvPr>
@@ -12792,7 +15167,7 @@
           <p:cNvPr id="2" name="">
             <a:extLst xmlns:a="http://schemas.openxmlformats.org/drawingml/2006/main">
               <a:ext uri="{FF2B5EF4-FFF2-40B4-BE49-F238E27FC236}">
-                <a16:creationId xmlns:a16="http://schemas.microsoft.com/office/drawing/2014/main" id="{78F8BC27-2F7A-42BA-9644-B4EB50AD989F}"/>
+                <a16:creationId xmlns:a16="http://schemas.microsoft.com/office/drawing/2014/main" id="{D7206F07-DAEA-40CE-847D-104F0F3C1ADC}"/>
               </a:ext>
             </a:extLst>
           </p:cNvPr>
@@ -12822,7 +15197,7 @@
           <p:cNvPr id="3" name="text">
             <a:extLst xmlns:a="http://schemas.openxmlformats.org/drawingml/2006/main">
               <a:ext uri="{FF2B5EF4-FFF2-40B4-BE49-F238E27FC236}">
-                <a16:creationId xmlns:a16="http://schemas.microsoft.com/office/drawing/2014/main" id="{AD3A385F-142D-409A-8575-0D7188A9F44F}"/>
+                <a16:creationId xmlns:a16="http://schemas.microsoft.com/office/drawing/2014/main" id="{D7DF432E-9258-4C82-8E90-0334593DA74F}"/>
               </a:ext>
             </a:extLst>
           </p:cNvPr>
@@ -12890,7 +15265,7 @@
           <p:cNvPr id="4" name="text">
             <a:extLst xmlns:a="http://schemas.openxmlformats.org/drawingml/2006/main">
               <a:ext uri="{FF2B5EF4-FFF2-40B4-BE49-F238E27FC236}">
-                <a16:creationId xmlns:a16="http://schemas.microsoft.com/office/drawing/2014/main" id="{C7F3F9F0-1097-4A3B-A61F-F77EF0FFC6EC}"/>
+                <a16:creationId xmlns:a16="http://schemas.microsoft.com/office/drawing/2014/main" id="{9EB40B11-FD5D-4CB0-83A8-F0D946256E5F}"/>
               </a:ext>
             </a:extLst>
           </p:cNvPr>
@@ -12958,7 +15333,7 @@
           <p:cNvPr id="5" name="text">
             <a:extLst xmlns:a="http://schemas.openxmlformats.org/drawingml/2006/main">
               <a:ext uri="{FF2B5EF4-FFF2-40B4-BE49-F238E27FC236}">
-                <a16:creationId xmlns:a16="http://schemas.microsoft.com/office/drawing/2014/main" id="{0C84142A-9DA1-48A0-8FB1-67097B294AF6}"/>
+                <a16:creationId xmlns:a16="http://schemas.microsoft.com/office/drawing/2014/main" id="{4DDCC23B-DC35-43B6-817C-99A7F2D34E9B}"/>
               </a:ext>
             </a:extLst>
           </p:cNvPr>
@@ -13026,7 +15401,7 @@
           <p:cNvPr id="6" name="text">
             <a:extLst xmlns:a="http://schemas.openxmlformats.org/drawingml/2006/main">
               <a:ext uri="{FF2B5EF4-FFF2-40B4-BE49-F238E27FC236}">
-                <a16:creationId xmlns:a16="http://schemas.microsoft.com/office/drawing/2014/main" id="{2C13B10C-416C-4313-883F-3D786DCEA3AA}"/>
+                <a16:creationId xmlns:a16="http://schemas.microsoft.com/office/drawing/2014/main" id="{2FE5CA5F-C385-4D8F-8967-F8A9A4621852}"/>
               </a:ext>
             </a:extLst>
           </p:cNvPr>
@@ -13094,7 +15469,7 @@
           <p:cNvPr id="7" name="text">
             <a:extLst xmlns:a="http://schemas.openxmlformats.org/drawingml/2006/main">
               <a:ext uri="{FF2B5EF4-FFF2-40B4-BE49-F238E27FC236}">
-                <a16:creationId xmlns:a16="http://schemas.microsoft.com/office/drawing/2014/main" id="{E06CD85B-9EBE-46D2-A31C-CAD4A3B3D864}"/>
+                <a16:creationId xmlns:a16="http://schemas.microsoft.com/office/drawing/2014/main" id="{EF2AA9D6-EABB-46DA-AD23-122B15827940}"/>
               </a:ext>
             </a:extLst>
           </p:cNvPr>
@@ -13185,7 +15560,7 @@
           <p:cNvPr id="8" name="">
             <a:extLst xmlns:a="http://schemas.openxmlformats.org/drawingml/2006/main">
               <a:ext uri="{FF2B5EF4-FFF2-40B4-BE49-F238E27FC236}">
-                <a16:creationId xmlns:a16="http://schemas.microsoft.com/office/drawing/2014/main" id="{033DD777-4BE5-4D09-A28E-46181BE41539}"/>
+                <a16:creationId xmlns:a16="http://schemas.microsoft.com/office/drawing/2014/main" id="{90E3E35A-B258-41D9-B03F-21816C04EE96}"/>
               </a:ext>
             </a:extLst>
           </p:cNvPr>
@@ -13215,7 +15590,7 @@
           <p:cNvPr id="9" name="text">
             <a:extLst xmlns:a="http://schemas.openxmlformats.org/drawingml/2006/main">
               <a:ext uri="{FF2B5EF4-FFF2-40B4-BE49-F238E27FC236}">
-                <a16:creationId xmlns:a16="http://schemas.microsoft.com/office/drawing/2014/main" id="{DBC22C17-7E9F-4D3C-95C4-DA30674CF317}"/>
+                <a16:creationId xmlns:a16="http://schemas.microsoft.com/office/drawing/2014/main" id="{12494740-0211-4B5A-936F-A9C50551FA81}"/>
               </a:ext>
             </a:extLst>
           </p:cNvPr>
@@ -13283,7 +15658,7 @@
           <p:cNvPr id="10" name="text">
             <a:extLst xmlns:a="http://schemas.openxmlformats.org/drawingml/2006/main">
               <a:ext uri="{FF2B5EF4-FFF2-40B4-BE49-F238E27FC236}">
-                <a16:creationId xmlns:a16="http://schemas.microsoft.com/office/drawing/2014/main" id="{2E7D6ECE-6100-444A-89E9-69DBA423F14E}"/>
+                <a16:creationId xmlns:a16="http://schemas.microsoft.com/office/drawing/2014/main" id="{5BAFC932-0268-40BF-AA8C-7A0F7EDBEF2D}"/>
               </a:ext>
             </a:extLst>
           </p:cNvPr>
@@ -13374,7 +15749,7 @@
           <p:cNvPr id="11" name="">
             <a:extLst xmlns:a="http://schemas.openxmlformats.org/drawingml/2006/main">
               <a:ext uri="{FF2B5EF4-FFF2-40B4-BE49-F238E27FC236}">
-                <a16:creationId xmlns:a16="http://schemas.microsoft.com/office/drawing/2014/main" id="{B991BC40-F8FD-4A65-9E8A-A831E96CB446}"/>
+                <a16:creationId xmlns:a16="http://schemas.microsoft.com/office/drawing/2014/main" id="{14BC658F-45D6-4E07-8995-6371FD7986B1}"/>
               </a:ext>
             </a:extLst>
           </p:cNvPr>
@@ -13404,7 +15779,7 @@
           <p:cNvPr id="12" name="text">
             <a:extLst xmlns:a="http://schemas.openxmlformats.org/drawingml/2006/main">
               <a:ext uri="{FF2B5EF4-FFF2-40B4-BE49-F238E27FC236}">
-                <a16:creationId xmlns:a16="http://schemas.microsoft.com/office/drawing/2014/main" id="{479D24E6-6E5E-4B0E-870F-B0C4AF9C072B}"/>
+                <a16:creationId xmlns:a16="http://schemas.microsoft.com/office/drawing/2014/main" id="{3D5DE960-A535-4452-8712-A347B5F98212}"/>
               </a:ext>
             </a:extLst>
           </p:cNvPr>
@@ -13472,7 +15847,7 @@
           <p:cNvPr id="13" name="text">
             <a:extLst xmlns:a="http://schemas.openxmlformats.org/drawingml/2006/main">
               <a:ext uri="{FF2B5EF4-FFF2-40B4-BE49-F238E27FC236}">
-                <a16:creationId xmlns:a16="http://schemas.microsoft.com/office/drawing/2014/main" id="{143BC838-2DA6-40AB-8913-F10A750B04F2}"/>
+                <a16:creationId xmlns:a16="http://schemas.microsoft.com/office/drawing/2014/main" id="{0262DCC1-D798-42A9-B0E6-84BFB8D4B8E7}"/>
               </a:ext>
             </a:extLst>
           </p:cNvPr>
@@ -13563,7 +15938,7 @@
           <p:cNvPr id="14" name="">
             <a:extLst xmlns:a="http://schemas.openxmlformats.org/drawingml/2006/main">
               <a:ext uri="{FF2B5EF4-FFF2-40B4-BE49-F238E27FC236}">
-                <a16:creationId xmlns:a16="http://schemas.microsoft.com/office/drawing/2014/main" id="{16C84698-2081-49DB-BFF9-3A406A6368B2}"/>
+                <a16:creationId xmlns:a16="http://schemas.microsoft.com/office/drawing/2014/main" id="{2D40A5E3-2ECD-4D66-B323-A4C3883E5173}"/>
               </a:ext>
             </a:extLst>
           </p:cNvPr>
@@ -13593,7 +15968,7 @@
           <p:cNvPr id="15" name="text">
             <a:extLst xmlns:a="http://schemas.openxmlformats.org/drawingml/2006/main">
               <a:ext uri="{FF2B5EF4-FFF2-40B4-BE49-F238E27FC236}">
-                <a16:creationId xmlns:a16="http://schemas.microsoft.com/office/drawing/2014/main" id="{F00FAAB6-A4C2-4662-A163-BE293346C04F}"/>
+                <a16:creationId xmlns:a16="http://schemas.microsoft.com/office/drawing/2014/main" id="{B2BF0745-9D7A-4EBB-9A00-95B57A288099}"/>
               </a:ext>
             </a:extLst>
           </p:cNvPr>
@@ -13661,7 +16036,7 @@
           <p:cNvPr id="16" name="text">
             <a:extLst xmlns:a="http://schemas.openxmlformats.org/drawingml/2006/main">
               <a:ext uri="{FF2B5EF4-FFF2-40B4-BE49-F238E27FC236}">
-                <a16:creationId xmlns:a16="http://schemas.microsoft.com/office/drawing/2014/main" id="{4AA45633-3C80-40D4-A24C-772E229B9393}"/>
+                <a16:creationId xmlns:a16="http://schemas.microsoft.com/office/drawing/2014/main" id="{1AAF1245-4631-4FAE-B3E5-03DC013C6E2D}"/>
               </a:ext>
             </a:extLst>
           </p:cNvPr>
@@ -13752,7 +16127,7 @@
           <p:cNvPr id="17" name="">
             <a:extLst xmlns:a="http://schemas.openxmlformats.org/drawingml/2006/main">
               <a:ext uri="{FF2B5EF4-FFF2-40B4-BE49-F238E27FC236}">
-                <a16:creationId xmlns:a16="http://schemas.microsoft.com/office/drawing/2014/main" id="{991254F5-634F-44B6-9198-C63D8E82855D}"/>
+                <a16:creationId xmlns:a16="http://schemas.microsoft.com/office/drawing/2014/main" id="{31BBFB55-6D56-4184-9CC9-D819199E3FBD}"/>
               </a:ext>
             </a:extLst>
           </p:cNvPr>
@@ -13782,7 +16157,7 @@
           <p:cNvPr id="18" name="text">
             <a:extLst xmlns:a="http://schemas.openxmlformats.org/drawingml/2006/main">
               <a:ext uri="{FF2B5EF4-FFF2-40B4-BE49-F238E27FC236}">
-                <a16:creationId xmlns:a16="http://schemas.microsoft.com/office/drawing/2014/main" id="{372059CC-69D9-4928-86BE-0B58D54BD6BD}"/>
+                <a16:creationId xmlns:a16="http://schemas.microsoft.com/office/drawing/2014/main" id="{EAAD3B16-0C51-45EE-B7B0-DF9FD86474B5}"/>
               </a:ext>
             </a:extLst>
           </p:cNvPr>
@@ -13850,7 +16225,7 @@
           <p:cNvPr id="19" name="text">
             <a:extLst xmlns:a="http://schemas.openxmlformats.org/drawingml/2006/main">
               <a:ext uri="{FF2B5EF4-FFF2-40B4-BE49-F238E27FC236}">
-                <a16:creationId xmlns:a16="http://schemas.microsoft.com/office/drawing/2014/main" id="{BFB39869-E973-4F84-B6D3-6315A3E82A00}"/>
+                <a16:creationId xmlns:a16="http://schemas.microsoft.com/office/drawing/2014/main" id="{17630E17-A546-4635-9DDB-23F374704828}"/>
               </a:ext>
             </a:extLst>
           </p:cNvPr>
@@ -13987,7 +16362,7 @@
           <p:cNvPr id="20" name="text">
             <a:extLst xmlns:a="http://schemas.openxmlformats.org/drawingml/2006/main">
               <a:ext uri="{FF2B5EF4-FFF2-40B4-BE49-F238E27FC236}">
-                <a16:creationId xmlns:a16="http://schemas.microsoft.com/office/drawing/2014/main" id="{83DB21AD-E454-4514-9A76-DE9010273A87}"/>
+                <a16:creationId xmlns:a16="http://schemas.microsoft.com/office/drawing/2014/main" id="{60388A41-CC67-41E0-8575-F85780645148}"/>
               </a:ext>
             </a:extLst>
           </p:cNvPr>
@@ -14055,7 +16430,7 @@
           <p:cNvPr id="21" name="text">
             <a:extLst xmlns:a="http://schemas.openxmlformats.org/drawingml/2006/main">
               <a:ext uri="{FF2B5EF4-FFF2-40B4-BE49-F238E27FC236}">
-                <a16:creationId xmlns:a16="http://schemas.microsoft.com/office/drawing/2014/main" id="{DFFC96A9-776F-40E6-B68D-2BA29953C5A5}"/>
+                <a16:creationId xmlns:a16="http://schemas.microsoft.com/office/drawing/2014/main" id="{28E5D311-4C8A-4B6E-B55D-00AC35991F36}"/>
               </a:ext>
             </a:extLst>
           </p:cNvPr>
@@ -14192,7 +16567,7 @@
           <p:cNvPr id="22" name="">
             <a:extLst xmlns:a="http://schemas.openxmlformats.org/drawingml/2006/main">
               <a:ext uri="{FF2B5EF4-FFF2-40B4-BE49-F238E27FC236}">
-                <a16:creationId xmlns:a16="http://schemas.microsoft.com/office/drawing/2014/main" id="{23D20C93-156A-40B7-9201-C8E8B091DF6E}"/>
+                <a16:creationId xmlns:a16="http://schemas.microsoft.com/office/drawing/2014/main" id="{7CF622FD-464E-4014-9353-3644485338D2}"/>
               </a:ext>
             </a:extLst>
           </p:cNvPr>
@@ -14222,7 +16597,7 @@
           <p:cNvPr id="23" name="text">
             <a:extLst xmlns:a="http://schemas.openxmlformats.org/drawingml/2006/main">
               <a:ext uri="{FF2B5EF4-FFF2-40B4-BE49-F238E27FC236}">
-                <a16:creationId xmlns:a16="http://schemas.microsoft.com/office/drawing/2014/main" id="{A1BB844B-36C5-45BD-AD3E-FF2867FEB341}"/>
+                <a16:creationId xmlns:a16="http://schemas.microsoft.com/office/drawing/2014/main" id="{A47476D2-3839-46B6-8100-027A8EEB828A}"/>
               </a:ext>
             </a:extLst>
           </p:cNvPr>
@@ -14290,7 +16665,7 @@
           <p:cNvPr id="24" name="text">
             <a:extLst xmlns:a="http://schemas.openxmlformats.org/drawingml/2006/main">
               <a:ext uri="{FF2B5EF4-FFF2-40B4-BE49-F238E27FC236}">
-                <a16:creationId xmlns:a16="http://schemas.microsoft.com/office/drawing/2014/main" id="{C5001087-2F8C-4E4F-8EA2-8D032B375793}"/>
+                <a16:creationId xmlns:a16="http://schemas.microsoft.com/office/drawing/2014/main" id="{9842461C-E635-4DA8-A8E1-B7CB490E4087}"/>
               </a:ext>
             </a:extLst>
           </p:cNvPr>
@@ -14348,7 +16723,7 @@
                 <a:ea typeface="Arial"/>
                 <a:cs typeface="Arial"/>
               </a:rPr>
-              <a:t>11 / 11</a:t>
+              <a:t>12 / 12</a:t>
             </a:r>
           </a:p>
         </p:txBody>
@@ -14356,7 +16731,7 @@
     </p:spTree>
     <p:extLst>
       <p:ext uri="{BB962C8B-B14F-4D97-AF65-F5344CB8AC3E}">
-        <p14:creationId xmlns:p14="http://schemas.microsoft.com/office/powerpoint/2010/main" val="810615665"/>
+        <p14:creationId xmlns:p14="http://schemas.microsoft.com/office/powerpoint/2010/main" val="1368352135"/>
       </p:ext>
     </p:extLst>
   </p:cSld>
@@ -14387,7 +16762,7 @@
           <p:cNvPr id="20" name="text">
             <a:extLst xmlns:a="http://schemas.openxmlformats.org/drawingml/2006/main">
               <a:ext uri="{FF2B5EF4-FFF2-40B4-BE49-F238E27FC236}">
-                <a16:creationId xmlns:a16="http://schemas.microsoft.com/office/drawing/2014/main" id="{E6F7C154-B9DE-4A81-B1A7-D63BBED2DA74}"/>
+                <a16:creationId xmlns:a16="http://schemas.microsoft.com/office/drawing/2014/main" id="{B88AA237-9300-413A-8410-473B3C7C184A}"/>
               </a:ext>
             </a:extLst>
           </p:cNvPr>
@@ -14455,7 +16830,7 @@
           <p:cNvPr id="2" name="">
             <a:extLst xmlns:a="http://schemas.openxmlformats.org/drawingml/2006/main">
               <a:ext uri="{FF2B5EF4-FFF2-40B4-BE49-F238E27FC236}">
-                <a16:creationId xmlns:a16="http://schemas.microsoft.com/office/drawing/2014/main" id="{A11B1C1E-4C01-470C-9EDB-DF3E5B828450}"/>
+                <a16:creationId xmlns:a16="http://schemas.microsoft.com/office/drawing/2014/main" id="{33A55331-A90B-498E-AF32-119C93AF68E4}"/>
               </a:ext>
             </a:extLst>
           </p:cNvPr>
@@ -14485,7 +16860,7 @@
           <p:cNvPr id="3" name="text">
             <a:extLst xmlns:a="http://schemas.openxmlformats.org/drawingml/2006/main">
               <a:ext uri="{FF2B5EF4-FFF2-40B4-BE49-F238E27FC236}">
-                <a16:creationId xmlns:a16="http://schemas.microsoft.com/office/drawing/2014/main" id="{BD1937CF-D372-4F01-BBFE-A30896389886}"/>
+                <a16:creationId xmlns:a16="http://schemas.microsoft.com/office/drawing/2014/main" id="{F01A3CFA-BAFB-473C-BD13-7D24222056B8}"/>
               </a:ext>
             </a:extLst>
           </p:cNvPr>
@@ -14553,7 +16928,7 @@
           <p:cNvPr id="4" name="text">
             <a:extLst xmlns:a="http://schemas.openxmlformats.org/drawingml/2006/main">
               <a:ext uri="{FF2B5EF4-FFF2-40B4-BE49-F238E27FC236}">
-                <a16:creationId xmlns:a16="http://schemas.microsoft.com/office/drawing/2014/main" id="{F8964719-C844-4B8E-BEC8-28E9128F7595}"/>
+                <a16:creationId xmlns:a16="http://schemas.microsoft.com/office/drawing/2014/main" id="{5656E8A2-34FA-4416-BDBB-9C4D06757EAD}"/>
               </a:ext>
             </a:extLst>
           </p:cNvPr>
@@ -14621,7 +16996,7 @@
           <p:cNvPr id="5" name="text">
             <a:extLst xmlns:a="http://schemas.openxmlformats.org/drawingml/2006/main">
               <a:ext uri="{FF2B5EF4-FFF2-40B4-BE49-F238E27FC236}">
-                <a16:creationId xmlns:a16="http://schemas.microsoft.com/office/drawing/2014/main" id="{27D271FF-954C-4962-9E46-9809EF31BC88}"/>
+                <a16:creationId xmlns:a16="http://schemas.microsoft.com/office/drawing/2014/main" id="{12D266DF-1141-4979-8417-A913EF5A4114}"/>
               </a:ext>
             </a:extLst>
           </p:cNvPr>
@@ -14689,7 +17064,7 @@
           <p:cNvPr id="6" name="text">
             <a:extLst xmlns:a="http://schemas.openxmlformats.org/drawingml/2006/main">
               <a:ext uri="{FF2B5EF4-FFF2-40B4-BE49-F238E27FC236}">
-                <a16:creationId xmlns:a16="http://schemas.microsoft.com/office/drawing/2014/main" id="{A789D984-C6D5-47BA-BD10-E871946B1DDF}"/>
+                <a16:creationId xmlns:a16="http://schemas.microsoft.com/office/drawing/2014/main" id="{3E5EFC91-A56A-4F8B-8579-96E7CCBC1BEC}"/>
               </a:ext>
             </a:extLst>
           </p:cNvPr>
@@ -14757,7 +17132,7 @@
           <p:cNvPr id="7" name="text">
             <a:extLst xmlns:a="http://schemas.openxmlformats.org/drawingml/2006/main">
               <a:ext uri="{FF2B5EF4-FFF2-40B4-BE49-F238E27FC236}">
-                <a16:creationId xmlns:a16="http://schemas.microsoft.com/office/drawing/2014/main" id="{87ECCC90-C816-4C68-B167-700D80BA20A9}"/>
+                <a16:creationId xmlns:a16="http://schemas.microsoft.com/office/drawing/2014/main" id="{1F9FC16C-9892-4A44-99B4-9C677A45887E}"/>
               </a:ext>
             </a:extLst>
           </p:cNvPr>
@@ -14825,7 +17200,7 @@
           <p:cNvPr id="8" name="text">
             <a:extLst xmlns:a="http://schemas.openxmlformats.org/drawingml/2006/main">
               <a:ext uri="{FF2B5EF4-FFF2-40B4-BE49-F238E27FC236}">
-                <a16:creationId xmlns:a16="http://schemas.microsoft.com/office/drawing/2014/main" id="{99B9CFB6-9FEC-4D4F-B93C-60F47807C870}"/>
+                <a16:creationId xmlns:a16="http://schemas.microsoft.com/office/drawing/2014/main" id="{ACAE7129-8961-4CB6-B4A6-7F3A0A1EA835}"/>
               </a:ext>
             </a:extLst>
           </p:cNvPr>
@@ -14893,7 +17268,7 @@
           <p:cNvPr id="9" name="text">
             <a:extLst xmlns:a="http://schemas.openxmlformats.org/drawingml/2006/main">
               <a:ext uri="{FF2B5EF4-FFF2-40B4-BE49-F238E27FC236}">
-                <a16:creationId xmlns:a16="http://schemas.microsoft.com/office/drawing/2014/main" id="{FDCD1878-B6FF-49DD-9E33-0E7EC06447ED}"/>
+                <a16:creationId xmlns:a16="http://schemas.microsoft.com/office/drawing/2014/main" id="{801BB551-F5A7-4BDE-9D16-12112E6461B1}"/>
               </a:ext>
             </a:extLst>
           </p:cNvPr>
@@ -14961,7 +17336,7 @@
           <p:cNvPr id="10" name="text">
             <a:extLst xmlns:a="http://schemas.openxmlformats.org/drawingml/2006/main">
               <a:ext uri="{FF2B5EF4-FFF2-40B4-BE49-F238E27FC236}">
-                <a16:creationId xmlns:a16="http://schemas.microsoft.com/office/drawing/2014/main" id="{2A273433-89D7-4AA5-8EB4-CD25F140BB9F}"/>
+                <a16:creationId xmlns:a16="http://schemas.microsoft.com/office/drawing/2014/main" id="{CB56F897-B6B0-476C-A83C-1E0B7E550569}"/>
               </a:ext>
             </a:extLst>
           </p:cNvPr>
@@ -15029,7 +17404,7 @@
           <p:cNvPr id="11" name="">
             <a:extLst xmlns:a="http://schemas.openxmlformats.org/drawingml/2006/main">
               <a:ext uri="{FF2B5EF4-FFF2-40B4-BE49-F238E27FC236}">
-                <a16:creationId xmlns:a16="http://schemas.microsoft.com/office/drawing/2014/main" id="{DB6A339D-A6A6-485F-BB8A-901E435554DD}"/>
+                <a16:creationId xmlns:a16="http://schemas.microsoft.com/office/drawing/2014/main" id="{E1970EB0-1E52-4EF0-8821-1772F8D91160}"/>
               </a:ext>
             </a:extLst>
           </p:cNvPr>
@@ -15059,7 +17434,7 @@
           <p:cNvPr id="12" name="text">
             <a:extLst xmlns:a="http://schemas.openxmlformats.org/drawingml/2006/main">
               <a:ext uri="{FF2B5EF4-FFF2-40B4-BE49-F238E27FC236}">
-                <a16:creationId xmlns:a16="http://schemas.microsoft.com/office/drawing/2014/main" id="{06E33BF8-4A86-4FC7-912A-769899197AB6}"/>
+                <a16:creationId xmlns:a16="http://schemas.microsoft.com/office/drawing/2014/main" id="{83F93A84-0928-4977-BD82-82BD5DD11238}"/>
               </a:ext>
             </a:extLst>
           </p:cNvPr>
@@ -15127,7 +17502,7 @@
           <p:cNvPr id="13" name="Chart">
             <a:extLst xmlns:a="http://schemas.openxmlformats.org/drawingml/2006/main">
               <a:ext uri="{FF2B5EF4-FFF2-40B4-BE49-F238E27FC236}">
-                <a16:creationId xmlns:a16="http://schemas.microsoft.com/office/drawing/2014/main" id="{FD3058B1-7FF9-420F-93DE-FAAC39B824C9}"/>
+                <a16:creationId xmlns:a16="http://schemas.microsoft.com/office/drawing/2014/main" id="{FBE2E38D-6FDB-4EA1-B5E3-6BB30A0568B6}"/>
               </a:ext>
             </a:extLst>
           </p:cNvPr>
@@ -15140,7 +17515,7 @@
         </p:xfrm>
         <a:graphic xmlns:a="http://schemas.openxmlformats.org/drawingml/2006/main">
           <a:graphicData uri="http://schemas.openxmlformats.org/drawingml/2006/chart">
-            <c:chart xmlns:r="http://schemas.openxmlformats.org/officeDocument/2006/relationships" xmlns:c="http://schemas.openxmlformats.org/drawingml/2006/chart" r:id="R420fbd6dc42045cf"/>
+            <c:chart xmlns:r="http://schemas.openxmlformats.org/officeDocument/2006/relationships" xmlns:c="http://schemas.openxmlformats.org/drawingml/2006/chart" r:id="Rc282e3fab9db43d1"/>
           </a:graphicData>
         </a:graphic>
       </p:graphicFrame>
@@ -15149,7 +17524,7 @@
           <p:cNvPr id="14" name="text">
             <a:extLst xmlns:a="http://schemas.openxmlformats.org/drawingml/2006/main">
               <a:ext uri="{FF2B5EF4-FFF2-40B4-BE49-F238E27FC236}">
-                <a16:creationId xmlns:a16="http://schemas.microsoft.com/office/drawing/2014/main" id="{40F1477F-A895-4733-964C-4170E592601C}"/>
+                <a16:creationId xmlns:a16="http://schemas.microsoft.com/office/drawing/2014/main" id="{F0FA5E43-857E-477A-92F7-A11C31112330}"/>
               </a:ext>
             </a:extLst>
           </p:cNvPr>
@@ -15217,7 +17592,7 @@
           <p:cNvPr id="15" name="">
             <a:extLst xmlns:a="http://schemas.openxmlformats.org/drawingml/2006/main">
               <a:ext uri="{FF2B5EF4-FFF2-40B4-BE49-F238E27FC236}">
-                <a16:creationId xmlns:a16="http://schemas.microsoft.com/office/drawing/2014/main" id="{1BEF9FE1-F3BF-4FE5-ADF1-04D9A4B4831C}"/>
+                <a16:creationId xmlns:a16="http://schemas.microsoft.com/office/drawing/2014/main" id="{6C9390DC-901C-4CFD-A33A-58A8377E1818}"/>
               </a:ext>
             </a:extLst>
           </p:cNvPr>
@@ -15687,7 +18062,7 @@
           <p:cNvPr id="16" name="text">
             <a:extLst xmlns:a="http://schemas.openxmlformats.org/drawingml/2006/main">
               <a:ext uri="{FF2B5EF4-FFF2-40B4-BE49-F238E27FC236}">
-                <a16:creationId xmlns:a16="http://schemas.microsoft.com/office/drawing/2014/main" id="{018AEE17-C2EB-486F-A1C4-CDECEEB1C595}"/>
+                <a16:creationId xmlns:a16="http://schemas.microsoft.com/office/drawing/2014/main" id="{F0F98DDB-289B-4E9A-9230-A318B9670054}"/>
               </a:ext>
             </a:extLst>
           </p:cNvPr>
@@ -15755,7 +18130,7 @@
           <p:cNvPr id="17" name="">
             <a:extLst xmlns:a="http://schemas.openxmlformats.org/drawingml/2006/main">
               <a:ext uri="{FF2B5EF4-FFF2-40B4-BE49-F238E27FC236}">
-                <a16:creationId xmlns:a16="http://schemas.microsoft.com/office/drawing/2014/main" id="{62072A7D-1417-4790-A3D7-6FDE0FFDE13A}"/>
+                <a16:creationId xmlns:a16="http://schemas.microsoft.com/office/drawing/2014/main" id="{36EB406E-0AFA-4AB2-83D2-9A71001599EA}"/>
               </a:ext>
             </a:extLst>
           </p:cNvPr>
@@ -15785,7 +18160,7 @@
           <p:cNvPr id="18" name="text">
             <a:extLst xmlns:a="http://schemas.openxmlformats.org/drawingml/2006/main">
               <a:ext uri="{FF2B5EF4-FFF2-40B4-BE49-F238E27FC236}">
-                <a16:creationId xmlns:a16="http://schemas.microsoft.com/office/drawing/2014/main" id="{A79426A1-9F9C-4442-AD99-1A9F87E5A777}"/>
+                <a16:creationId xmlns:a16="http://schemas.microsoft.com/office/drawing/2014/main" id="{BA732739-5099-45FB-8D91-56DC5D8EF5E7}"/>
               </a:ext>
             </a:extLst>
           </p:cNvPr>
@@ -15853,7 +18228,7 @@
           <p:cNvPr id="19" name="text">
             <a:extLst xmlns:a="http://schemas.openxmlformats.org/drawingml/2006/main">
               <a:ext uri="{FF2B5EF4-FFF2-40B4-BE49-F238E27FC236}">
-                <a16:creationId xmlns:a16="http://schemas.microsoft.com/office/drawing/2014/main" id="{64475A23-4DC0-4697-BCC3-62E6D2BAE918}"/>
+                <a16:creationId xmlns:a16="http://schemas.microsoft.com/office/drawing/2014/main" id="{DE51494A-3055-4356-97B9-47B2756B87E2}"/>
               </a:ext>
             </a:extLst>
           </p:cNvPr>
@@ -15911,7 +18286,7 @@
                 <a:ea typeface="Arial"/>
                 <a:cs typeface="Arial"/>
               </a:rPr>
-              <a:t>1 / 11</a:t>
+              <a:t>1 / 12</a:t>
             </a:r>
           </a:p>
         </p:txBody>
@@ -15919,7 +18294,7 @@
     </p:spTree>
     <p:extLst>
       <p:ext uri="{BB962C8B-B14F-4D97-AF65-F5344CB8AC3E}">
-        <p14:creationId xmlns:p14="http://schemas.microsoft.com/office/powerpoint/2010/main" val="1894520685"/>
+        <p14:creationId xmlns:p14="http://schemas.microsoft.com/office/powerpoint/2010/main" val="1870032062"/>
       </p:ext>
     </p:extLst>
   </p:cSld>
@@ -15950,7 +18325,7 @@
           <p:cNvPr id="29" name="text">
             <a:extLst xmlns:a="http://schemas.openxmlformats.org/drawingml/2006/main">
               <a:ext uri="{FF2B5EF4-FFF2-40B4-BE49-F238E27FC236}">
-                <a16:creationId xmlns:a16="http://schemas.microsoft.com/office/drawing/2014/main" id="{58FCBA4B-13BE-4632-8D00-A3DEB43B4A61}"/>
+                <a16:creationId xmlns:a16="http://schemas.microsoft.com/office/drawing/2014/main" id="{69D93CC7-E457-4A1D-9BA4-79811710D80E}"/>
               </a:ext>
             </a:extLst>
           </p:cNvPr>
@@ -16018,7 +18393,7 @@
           <p:cNvPr id="2" name="">
             <a:extLst xmlns:a="http://schemas.openxmlformats.org/drawingml/2006/main">
               <a:ext uri="{FF2B5EF4-FFF2-40B4-BE49-F238E27FC236}">
-                <a16:creationId xmlns:a16="http://schemas.microsoft.com/office/drawing/2014/main" id="{33DF382F-DAFB-4F5D-831D-A82EAEC340C2}"/>
+                <a16:creationId xmlns:a16="http://schemas.microsoft.com/office/drawing/2014/main" id="{3E27F08C-E1DC-411C-B7B5-EF15DCA35A03}"/>
               </a:ext>
             </a:extLst>
           </p:cNvPr>
@@ -16048,7 +18423,7 @@
           <p:cNvPr id="3" name="text">
             <a:extLst xmlns:a="http://schemas.openxmlformats.org/drawingml/2006/main">
               <a:ext uri="{FF2B5EF4-FFF2-40B4-BE49-F238E27FC236}">
-                <a16:creationId xmlns:a16="http://schemas.microsoft.com/office/drawing/2014/main" id="{06894EAC-F017-437A-A6E0-0A6880B84F0D}"/>
+                <a16:creationId xmlns:a16="http://schemas.microsoft.com/office/drawing/2014/main" id="{B91F5532-76F6-40C3-AAAE-08172716A529}"/>
               </a:ext>
             </a:extLst>
           </p:cNvPr>
@@ -16116,7 +18491,7 @@
           <p:cNvPr id="4" name="text">
             <a:extLst xmlns:a="http://schemas.openxmlformats.org/drawingml/2006/main">
               <a:ext uri="{FF2B5EF4-FFF2-40B4-BE49-F238E27FC236}">
-                <a16:creationId xmlns:a16="http://schemas.microsoft.com/office/drawing/2014/main" id="{9DC96F1C-ACD8-47AE-8367-CF32F54AA292}"/>
+                <a16:creationId xmlns:a16="http://schemas.microsoft.com/office/drawing/2014/main" id="{FD69EAD5-5F0A-431E-8034-A810C5232063}"/>
               </a:ext>
             </a:extLst>
           </p:cNvPr>
@@ -16184,7 +18559,7 @@
           <p:cNvPr id="5" name="">
             <a:extLst xmlns:a="http://schemas.openxmlformats.org/drawingml/2006/main">
               <a:ext uri="{FF2B5EF4-FFF2-40B4-BE49-F238E27FC236}">
-                <a16:creationId xmlns:a16="http://schemas.microsoft.com/office/drawing/2014/main" id="{6AD807C3-AE8D-4D1C-A35D-F3AEF126FCA2}"/>
+                <a16:creationId xmlns:a16="http://schemas.microsoft.com/office/drawing/2014/main" id="{CAFF7992-ABC5-4F45-AE75-4BCE8075D5C6}"/>
               </a:ext>
             </a:extLst>
           </p:cNvPr>
@@ -16216,7 +18591,7 @@
           <p:cNvPr id="6" name="text">
             <a:extLst xmlns:a="http://schemas.openxmlformats.org/drawingml/2006/main">
               <a:ext uri="{FF2B5EF4-FFF2-40B4-BE49-F238E27FC236}">
-                <a16:creationId xmlns:a16="http://schemas.microsoft.com/office/drawing/2014/main" id="{B1BA5959-F8AB-47A5-80B7-104F9E8A0BA0}"/>
+                <a16:creationId xmlns:a16="http://schemas.microsoft.com/office/drawing/2014/main" id="{C2CDD8CB-5D73-4D65-8C5E-081F8073540E}"/>
               </a:ext>
             </a:extLst>
           </p:cNvPr>
@@ -16284,7 +18659,7 @@
           <p:cNvPr id="7" name="text">
             <a:extLst xmlns:a="http://schemas.openxmlformats.org/drawingml/2006/main">
               <a:ext uri="{FF2B5EF4-FFF2-40B4-BE49-F238E27FC236}">
-                <a16:creationId xmlns:a16="http://schemas.microsoft.com/office/drawing/2014/main" id="{B3E6963D-0CFB-4767-9405-E1C209080389}"/>
+                <a16:creationId xmlns:a16="http://schemas.microsoft.com/office/drawing/2014/main" id="{06B265FD-AE74-4A96-9B53-5994CAC602EA}"/>
               </a:ext>
             </a:extLst>
           </p:cNvPr>
@@ -16352,7 +18727,7 @@
           <p:cNvPr id="8" name="">
             <a:extLst xmlns:a="http://schemas.openxmlformats.org/drawingml/2006/main">
               <a:ext uri="{FF2B5EF4-FFF2-40B4-BE49-F238E27FC236}">
-                <a16:creationId xmlns:a16="http://schemas.microsoft.com/office/drawing/2014/main" id="{3248E189-87BD-4F54-A76A-26019CD8C298}"/>
+                <a16:creationId xmlns:a16="http://schemas.microsoft.com/office/drawing/2014/main" id="{11B8D6C3-3E70-4E99-A6A8-52D4784D565F}"/>
               </a:ext>
             </a:extLst>
           </p:cNvPr>
@@ -16382,7 +18757,7 @@
           <p:cNvPr id="9" name="">
             <a:extLst xmlns:a="http://schemas.openxmlformats.org/drawingml/2006/main">
               <a:ext uri="{FF2B5EF4-FFF2-40B4-BE49-F238E27FC236}">
-                <a16:creationId xmlns:a16="http://schemas.microsoft.com/office/drawing/2014/main" id="{C3DF1161-9FB0-4B3D-A9FC-BDD476621F63}"/>
+                <a16:creationId xmlns:a16="http://schemas.microsoft.com/office/drawing/2014/main" id="{1A036549-EDEC-4EB6-A0D4-80058A5FAFB1}"/>
               </a:ext>
             </a:extLst>
           </p:cNvPr>
@@ -16414,7 +18789,7 @@
           <p:cNvPr id="10" name="text">
             <a:extLst xmlns:a="http://schemas.openxmlformats.org/drawingml/2006/main">
               <a:ext uri="{FF2B5EF4-FFF2-40B4-BE49-F238E27FC236}">
-                <a16:creationId xmlns:a16="http://schemas.microsoft.com/office/drawing/2014/main" id="{4C7EEEEB-C5B7-4DFE-AA50-E09750727D30}"/>
+                <a16:creationId xmlns:a16="http://schemas.microsoft.com/office/drawing/2014/main" id="{F32A4E98-D0E3-4747-A856-6F20B9D9D0B8}"/>
               </a:ext>
             </a:extLst>
           </p:cNvPr>
@@ -16482,7 +18857,7 @@
           <p:cNvPr id="11" name="text">
             <a:extLst xmlns:a="http://schemas.openxmlformats.org/drawingml/2006/main">
               <a:ext uri="{FF2B5EF4-FFF2-40B4-BE49-F238E27FC236}">
-                <a16:creationId xmlns:a16="http://schemas.microsoft.com/office/drawing/2014/main" id="{8F03F664-A389-47D0-8A3B-6E1B8EF9D025}"/>
+                <a16:creationId xmlns:a16="http://schemas.microsoft.com/office/drawing/2014/main" id="{FF93EF6F-F8A9-4330-89C4-77C1298A739E}"/>
               </a:ext>
             </a:extLst>
           </p:cNvPr>
@@ -16550,7 +18925,7 @@
           <p:cNvPr id="12" name="">
             <a:extLst xmlns:a="http://schemas.openxmlformats.org/drawingml/2006/main">
               <a:ext uri="{FF2B5EF4-FFF2-40B4-BE49-F238E27FC236}">
-                <a16:creationId xmlns:a16="http://schemas.microsoft.com/office/drawing/2014/main" id="{EC4F2DB1-FFC1-4678-A224-053B2042172A}"/>
+                <a16:creationId xmlns:a16="http://schemas.microsoft.com/office/drawing/2014/main" id="{072CE9D1-027F-443F-B5F4-E42FC757CAEE}"/>
               </a:ext>
             </a:extLst>
           </p:cNvPr>
@@ -16580,7 +18955,7 @@
           <p:cNvPr id="13" name="">
             <a:extLst xmlns:a="http://schemas.openxmlformats.org/drawingml/2006/main">
               <a:ext uri="{FF2B5EF4-FFF2-40B4-BE49-F238E27FC236}">
-                <a16:creationId xmlns:a16="http://schemas.microsoft.com/office/drawing/2014/main" id="{A2D60FAC-C254-4124-A41E-5E109042096A}"/>
+                <a16:creationId xmlns:a16="http://schemas.microsoft.com/office/drawing/2014/main" id="{A037429B-5672-417D-96B6-B8223C78F769}"/>
               </a:ext>
             </a:extLst>
           </p:cNvPr>
@@ -16612,7 +18987,7 @@
           <p:cNvPr id="14" name="text">
             <a:extLst xmlns:a="http://schemas.openxmlformats.org/drawingml/2006/main">
               <a:ext uri="{FF2B5EF4-FFF2-40B4-BE49-F238E27FC236}">
-                <a16:creationId xmlns:a16="http://schemas.microsoft.com/office/drawing/2014/main" id="{5EB13D79-8251-4ED9-9FAE-B30953EF31D0}"/>
+                <a16:creationId xmlns:a16="http://schemas.microsoft.com/office/drawing/2014/main" id="{B099407E-6FAA-4B9C-9164-7C911D31A2D4}"/>
               </a:ext>
             </a:extLst>
           </p:cNvPr>
@@ -16680,7 +19055,7 @@
           <p:cNvPr id="15" name="text">
             <a:extLst xmlns:a="http://schemas.openxmlformats.org/drawingml/2006/main">
               <a:ext uri="{FF2B5EF4-FFF2-40B4-BE49-F238E27FC236}">
-                <a16:creationId xmlns:a16="http://schemas.microsoft.com/office/drawing/2014/main" id="{2DF447F9-BAE0-40D7-ABBA-216AC87EE41F}"/>
+                <a16:creationId xmlns:a16="http://schemas.microsoft.com/office/drawing/2014/main" id="{C4173FA1-40FC-4DD2-A139-7693DD31C5E9}"/>
               </a:ext>
             </a:extLst>
           </p:cNvPr>
@@ -16748,7 +19123,7 @@
           <p:cNvPr id="16" name="">
             <a:extLst xmlns:a="http://schemas.openxmlformats.org/drawingml/2006/main">
               <a:ext uri="{FF2B5EF4-FFF2-40B4-BE49-F238E27FC236}">
-                <a16:creationId xmlns:a16="http://schemas.microsoft.com/office/drawing/2014/main" id="{CE7B34C9-C56B-41A2-9FF2-A0A8860CE489}"/>
+                <a16:creationId xmlns:a16="http://schemas.microsoft.com/office/drawing/2014/main" id="{5874DA55-318A-41DE-8036-51B77256AD55}"/>
               </a:ext>
             </a:extLst>
           </p:cNvPr>
@@ -16778,7 +19153,7 @@
           <p:cNvPr id="17" name="">
             <a:extLst xmlns:a="http://schemas.openxmlformats.org/drawingml/2006/main">
               <a:ext uri="{FF2B5EF4-FFF2-40B4-BE49-F238E27FC236}">
-                <a16:creationId xmlns:a16="http://schemas.microsoft.com/office/drawing/2014/main" id="{8E47D7F7-EB31-4B94-9E90-2C0FBB768E11}"/>
+                <a16:creationId xmlns:a16="http://schemas.microsoft.com/office/drawing/2014/main" id="{2AE0BAA7-6E2D-4D29-92C8-ACF6FCACDE42}"/>
               </a:ext>
             </a:extLst>
           </p:cNvPr>
@@ -16810,7 +19185,7 @@
           <p:cNvPr id="18" name="text">
             <a:extLst xmlns:a="http://schemas.openxmlformats.org/drawingml/2006/main">
               <a:ext uri="{FF2B5EF4-FFF2-40B4-BE49-F238E27FC236}">
-                <a16:creationId xmlns:a16="http://schemas.microsoft.com/office/drawing/2014/main" id="{0BD3ECF4-C0E1-40C9-B8FA-79CD1B25B8A1}"/>
+                <a16:creationId xmlns:a16="http://schemas.microsoft.com/office/drawing/2014/main" id="{70D3E509-77D2-478E-A839-A7EEB2F073B7}"/>
               </a:ext>
             </a:extLst>
           </p:cNvPr>
@@ -16878,7 +19253,7 @@
           <p:cNvPr id="19" name="text">
             <a:extLst xmlns:a="http://schemas.openxmlformats.org/drawingml/2006/main">
               <a:ext uri="{FF2B5EF4-FFF2-40B4-BE49-F238E27FC236}">
-                <a16:creationId xmlns:a16="http://schemas.microsoft.com/office/drawing/2014/main" id="{80C1A40D-A822-44EA-A826-BDB11545DDD9}"/>
+                <a16:creationId xmlns:a16="http://schemas.microsoft.com/office/drawing/2014/main" id="{7B47B917-6D82-4525-AFCE-E4F4208570E6}"/>
               </a:ext>
             </a:extLst>
           </p:cNvPr>
@@ -16946,7 +19321,7 @@
           <p:cNvPr id="20" name="text">
             <a:extLst xmlns:a="http://schemas.openxmlformats.org/drawingml/2006/main">
               <a:ext uri="{FF2B5EF4-FFF2-40B4-BE49-F238E27FC236}">
-                <a16:creationId xmlns:a16="http://schemas.microsoft.com/office/drawing/2014/main" id="{5C2F1162-23F3-4F03-8846-CEFAEAEB8514}"/>
+                <a16:creationId xmlns:a16="http://schemas.microsoft.com/office/drawing/2014/main" id="{D1E0C7D4-0E86-431F-8120-D1F517FA3283}"/>
               </a:ext>
             </a:extLst>
           </p:cNvPr>
@@ -17014,7 +19389,7 @@
           <p:cNvPr id="21" name="text">
             <a:extLst xmlns:a="http://schemas.openxmlformats.org/drawingml/2006/main">
               <a:ext uri="{FF2B5EF4-FFF2-40B4-BE49-F238E27FC236}">
-                <a16:creationId xmlns:a16="http://schemas.microsoft.com/office/drawing/2014/main" id="{EAD2F822-E5DB-4553-BB7A-D6BA9E71B532}"/>
+                <a16:creationId xmlns:a16="http://schemas.microsoft.com/office/drawing/2014/main" id="{82BB44CB-DA5F-4B61-80B6-604CDBB76EE5}"/>
               </a:ext>
             </a:extLst>
           </p:cNvPr>
@@ -17082,7 +19457,7 @@
           <p:cNvPr id="22" name="">
             <a:extLst xmlns:a="http://schemas.openxmlformats.org/drawingml/2006/main">
               <a:ext uri="{FF2B5EF4-FFF2-40B4-BE49-F238E27FC236}">
-                <a16:creationId xmlns:a16="http://schemas.microsoft.com/office/drawing/2014/main" id="{B9BF07C5-EACC-4E2D-A21E-BF00BC21C68B}"/>
+                <a16:creationId xmlns:a16="http://schemas.microsoft.com/office/drawing/2014/main" id="{F5DC3C15-44E4-478C-9B2E-54890BBE5799}"/>
               </a:ext>
             </a:extLst>
           </p:cNvPr>
@@ -17466,7 +19841,7 @@
           <p:cNvPr id="23" name="">
             <a:extLst xmlns:a="http://schemas.openxmlformats.org/drawingml/2006/main">
               <a:ext uri="{FF2B5EF4-FFF2-40B4-BE49-F238E27FC236}">
-                <a16:creationId xmlns:a16="http://schemas.microsoft.com/office/drawing/2014/main" id="{AED94828-7266-4B7D-BA22-37F96ACF780D}"/>
+                <a16:creationId xmlns:a16="http://schemas.microsoft.com/office/drawing/2014/main" id="{4368C5CC-8B3E-48DD-8E1B-6827EEF10442}"/>
               </a:ext>
             </a:extLst>
           </p:cNvPr>
@@ -17936,7 +20311,7 @@
           <p:cNvPr id="24" name="">
             <a:extLst xmlns:a="http://schemas.openxmlformats.org/drawingml/2006/main">
               <a:ext uri="{FF2B5EF4-FFF2-40B4-BE49-F238E27FC236}">
-                <a16:creationId xmlns:a16="http://schemas.microsoft.com/office/drawing/2014/main" id="{994216A7-8118-49BE-969B-70EFBB056F3C}"/>
+                <a16:creationId xmlns:a16="http://schemas.microsoft.com/office/drawing/2014/main" id="{288C675D-5A41-4EF5-80EA-827C99A10201}"/>
               </a:ext>
             </a:extLst>
           </p:cNvPr>
@@ -17966,7 +20341,7 @@
           <p:cNvPr id="25" name="text">
             <a:extLst xmlns:a="http://schemas.openxmlformats.org/drawingml/2006/main">
               <a:ext uri="{FF2B5EF4-FFF2-40B4-BE49-F238E27FC236}">
-                <a16:creationId xmlns:a16="http://schemas.microsoft.com/office/drawing/2014/main" id="{31FF8DEF-DF17-40B1-A7F7-801DDFFC0FA3}"/>
+                <a16:creationId xmlns:a16="http://schemas.microsoft.com/office/drawing/2014/main" id="{91E3D806-1562-4B0D-B596-BE639B78DF69}"/>
               </a:ext>
             </a:extLst>
           </p:cNvPr>
@@ -18034,7 +20409,7 @@
           <p:cNvPr id="26" name="">
             <a:extLst xmlns:a="http://schemas.openxmlformats.org/drawingml/2006/main">
               <a:ext uri="{FF2B5EF4-FFF2-40B4-BE49-F238E27FC236}">
-                <a16:creationId xmlns:a16="http://schemas.microsoft.com/office/drawing/2014/main" id="{F0DD5341-C80A-4E59-878F-711EE6C2480C}"/>
+                <a16:creationId xmlns:a16="http://schemas.microsoft.com/office/drawing/2014/main" id="{731F2CCD-AADE-4069-BB56-D23006D419D4}"/>
               </a:ext>
             </a:extLst>
           </p:cNvPr>
@@ -18064,7 +20439,7 @@
           <p:cNvPr id="27" name="text">
             <a:extLst xmlns:a="http://schemas.openxmlformats.org/drawingml/2006/main">
               <a:ext uri="{FF2B5EF4-FFF2-40B4-BE49-F238E27FC236}">
-                <a16:creationId xmlns:a16="http://schemas.microsoft.com/office/drawing/2014/main" id="{0DD295D2-9D2C-4845-833C-A8B0D9F9EE8E}"/>
+                <a16:creationId xmlns:a16="http://schemas.microsoft.com/office/drawing/2014/main" id="{D177E518-C4F8-4F4E-9814-E066A1D2A726}"/>
               </a:ext>
             </a:extLst>
           </p:cNvPr>
@@ -18132,7 +20507,7 @@
           <p:cNvPr id="28" name="text">
             <a:extLst xmlns:a="http://schemas.openxmlformats.org/drawingml/2006/main">
               <a:ext uri="{FF2B5EF4-FFF2-40B4-BE49-F238E27FC236}">
-                <a16:creationId xmlns:a16="http://schemas.microsoft.com/office/drawing/2014/main" id="{F2D4BAAE-2C97-44C9-B599-4B42D9562BA5}"/>
+                <a16:creationId xmlns:a16="http://schemas.microsoft.com/office/drawing/2014/main" id="{74440455-E825-448D-98A6-292914489C22}"/>
               </a:ext>
             </a:extLst>
           </p:cNvPr>
@@ -18190,7 +20565,7 @@
                 <a:ea typeface="Arial"/>
                 <a:cs typeface="Arial"/>
               </a:rPr>
-              <a:t>2 / 11</a:t>
+              <a:t>2 / 12</a:t>
             </a:r>
           </a:p>
         </p:txBody>
@@ -18198,7 +20573,7 @@
     </p:spTree>
     <p:extLst>
       <p:ext uri="{BB962C8B-B14F-4D97-AF65-F5344CB8AC3E}">
-        <p14:creationId xmlns:p14="http://schemas.microsoft.com/office/powerpoint/2010/main" val="372603281"/>
+        <p14:creationId xmlns:p14="http://schemas.microsoft.com/office/powerpoint/2010/main" val="1343544049"/>
       </p:ext>
     </p:extLst>
   </p:cSld>
@@ -18229,7 +20604,7 @@
           <p:cNvPr id="13" name="text">
             <a:extLst xmlns:a="http://schemas.openxmlformats.org/drawingml/2006/main">
               <a:ext uri="{FF2B5EF4-FFF2-40B4-BE49-F238E27FC236}">
-                <a16:creationId xmlns:a16="http://schemas.microsoft.com/office/drawing/2014/main" id="{5ACD2350-903E-4F39-ABA5-68BEC352B1CF}"/>
+                <a16:creationId xmlns:a16="http://schemas.microsoft.com/office/drawing/2014/main" id="{FA7235B8-9CD9-46E1-B0D6-71CFF0476044}"/>
               </a:ext>
             </a:extLst>
           </p:cNvPr>
@@ -18297,7 +20672,7 @@
           <p:cNvPr id="2" name="">
             <a:extLst xmlns:a="http://schemas.openxmlformats.org/drawingml/2006/main">
               <a:ext uri="{FF2B5EF4-FFF2-40B4-BE49-F238E27FC236}">
-                <a16:creationId xmlns:a16="http://schemas.microsoft.com/office/drawing/2014/main" id="{8CEB2D68-5CEC-4F64-9C86-F4A17371C11A}"/>
+                <a16:creationId xmlns:a16="http://schemas.microsoft.com/office/drawing/2014/main" id="{1FD95958-0F28-42B1-B164-888F03348314}"/>
               </a:ext>
             </a:extLst>
           </p:cNvPr>
@@ -18327,7 +20702,7 @@
           <p:cNvPr id="3" name="text">
             <a:extLst xmlns:a="http://schemas.openxmlformats.org/drawingml/2006/main">
               <a:ext uri="{FF2B5EF4-FFF2-40B4-BE49-F238E27FC236}">
-                <a16:creationId xmlns:a16="http://schemas.microsoft.com/office/drawing/2014/main" id="{823D89F2-70E8-4E14-9384-0401326D66E8}"/>
+                <a16:creationId xmlns:a16="http://schemas.microsoft.com/office/drawing/2014/main" id="{2DAE9344-ED8B-49CB-B1D6-BFCB1D609D5A}"/>
               </a:ext>
             </a:extLst>
           </p:cNvPr>
@@ -18395,7 +20770,7 @@
           <p:cNvPr id="4" name="text">
             <a:extLst xmlns:a="http://schemas.openxmlformats.org/drawingml/2006/main">
               <a:ext uri="{FF2B5EF4-FFF2-40B4-BE49-F238E27FC236}">
-                <a16:creationId xmlns:a16="http://schemas.microsoft.com/office/drawing/2014/main" id="{45C666C2-71CD-4139-8AD1-405027C5EFA0}"/>
+                <a16:creationId xmlns:a16="http://schemas.microsoft.com/office/drawing/2014/main" id="{BAF99A6F-8CD8-4A3F-B724-C763CD1A1114}"/>
               </a:ext>
             </a:extLst>
           </p:cNvPr>
@@ -18463,7 +20838,7 @@
           <p:cNvPr id="5" name="text">
             <a:extLst xmlns:a="http://schemas.openxmlformats.org/drawingml/2006/main">
               <a:ext uri="{FF2B5EF4-FFF2-40B4-BE49-F238E27FC236}">
-                <a16:creationId xmlns:a16="http://schemas.microsoft.com/office/drawing/2014/main" id="{73A9B2B6-A8A8-43EC-B751-A9DFB3A7E900}"/>
+                <a16:creationId xmlns:a16="http://schemas.microsoft.com/office/drawing/2014/main" id="{9DAE8CAB-4B84-4B23-9C31-AC7FCE9558A3}"/>
               </a:ext>
             </a:extLst>
           </p:cNvPr>
@@ -18531,7 +20906,7 @@
           <p:cNvPr id="6" name="text">
             <a:extLst xmlns:a="http://schemas.openxmlformats.org/drawingml/2006/main">
               <a:ext uri="{FF2B5EF4-FFF2-40B4-BE49-F238E27FC236}">
-                <a16:creationId xmlns:a16="http://schemas.microsoft.com/office/drawing/2014/main" id="{F07E301C-FF6C-4C64-8AD4-10278A54DCBF}"/>
+                <a16:creationId xmlns:a16="http://schemas.microsoft.com/office/drawing/2014/main" id="{F78E1E99-4635-4497-87F5-DD1FE9990362}"/>
               </a:ext>
             </a:extLst>
           </p:cNvPr>
@@ -18599,7 +20974,7 @@
           <p:cNvPr id="7" name="">
             <a:extLst xmlns:a="http://schemas.openxmlformats.org/drawingml/2006/main">
               <a:ext uri="{FF2B5EF4-FFF2-40B4-BE49-F238E27FC236}">
-                <a16:creationId xmlns:a16="http://schemas.microsoft.com/office/drawing/2014/main" id="{AB5333B5-A6EB-4F78-A78E-21521B85C081}"/>
+                <a16:creationId xmlns:a16="http://schemas.microsoft.com/office/drawing/2014/main" id="{0438A0E3-2B85-4A18-8242-42B8D97CBAD6}"/>
               </a:ext>
             </a:extLst>
           </p:cNvPr>
@@ -18609,7 +20984,7 @@
           <p:nvPr/>
         </p:nvPicPr>
         <p:blipFill>
-          <a:blip xmlns:r="http://schemas.openxmlformats.org/officeDocument/2006/relationships" xmlns:a="http://schemas.openxmlformats.org/drawingml/2006/main" r:embed="R282e3770db784ef3"/>
+          <a:blip xmlns:r="http://schemas.openxmlformats.org/officeDocument/2006/relationships" xmlns:a="http://schemas.openxmlformats.org/drawingml/2006/main" r:embed="R3f4db761466745aa"/>
           <a:stretch xmlns:a="http://schemas.openxmlformats.org/drawingml/2006/main"/>
         </p:blipFill>
         <p:spPr>
@@ -18627,7 +21002,7 @@
           <p:cNvPr id="8" name="">
             <a:extLst xmlns:a="http://schemas.openxmlformats.org/drawingml/2006/main">
               <a:ext uri="{FF2B5EF4-FFF2-40B4-BE49-F238E27FC236}">
-                <a16:creationId xmlns:a16="http://schemas.microsoft.com/office/drawing/2014/main" id="{FC9B9B1A-70DB-4936-8083-6F537638D862}"/>
+                <a16:creationId xmlns:a16="http://schemas.microsoft.com/office/drawing/2014/main" id="{4FD8C091-B762-4319-A37B-ACD2F8F17121}"/>
               </a:ext>
             </a:extLst>
           </p:cNvPr>
@@ -18637,7 +21012,7 @@
           <p:nvPr/>
         </p:nvPicPr>
         <p:blipFill>
-          <a:blip xmlns:r="http://schemas.openxmlformats.org/officeDocument/2006/relationships" xmlns:a="http://schemas.openxmlformats.org/drawingml/2006/main" r:embed="Reab71137aaf14a11"/>
+          <a:blip xmlns:r="http://schemas.openxmlformats.org/officeDocument/2006/relationships" xmlns:a="http://schemas.openxmlformats.org/drawingml/2006/main" r:embed="R43f19b2b0d3e4bf3"/>
           <a:stretch xmlns:a="http://schemas.openxmlformats.org/drawingml/2006/main"/>
         </p:blipFill>
         <p:spPr>
@@ -18655,7 +21030,7 @@
           <p:cNvPr id="9" name="">
             <a:extLst xmlns:a="http://schemas.openxmlformats.org/drawingml/2006/main">
               <a:ext uri="{FF2B5EF4-FFF2-40B4-BE49-F238E27FC236}">
-                <a16:creationId xmlns:a16="http://schemas.microsoft.com/office/drawing/2014/main" id="{0F612DD8-7029-425B-9F08-3ACC27A55ACD}"/>
+                <a16:creationId xmlns:a16="http://schemas.microsoft.com/office/drawing/2014/main" id="{6A3D4B11-C779-40A8-81CA-A52BDBA900CB}"/>
               </a:ext>
             </a:extLst>
           </p:cNvPr>
@@ -19327,7 +21702,7 @@
           <p:cNvPr id="10" name="">
             <a:extLst xmlns:a="http://schemas.openxmlformats.org/drawingml/2006/main">
               <a:ext uri="{FF2B5EF4-FFF2-40B4-BE49-F238E27FC236}">
-                <a16:creationId xmlns:a16="http://schemas.microsoft.com/office/drawing/2014/main" id="{C6375025-AAF9-4971-B814-3A76A2557DE1}"/>
+                <a16:creationId xmlns:a16="http://schemas.microsoft.com/office/drawing/2014/main" id="{3D50D125-A0FA-4325-98D9-E5A7B930E17F}"/>
               </a:ext>
             </a:extLst>
           </p:cNvPr>
@@ -19357,7 +21732,7 @@
           <p:cNvPr id="11" name="text">
             <a:extLst xmlns:a="http://schemas.openxmlformats.org/drawingml/2006/main">
               <a:ext uri="{FF2B5EF4-FFF2-40B4-BE49-F238E27FC236}">
-                <a16:creationId xmlns:a16="http://schemas.microsoft.com/office/drawing/2014/main" id="{9E9A6DFC-65E4-4688-94C2-7FCE831966DE}"/>
+                <a16:creationId xmlns:a16="http://schemas.microsoft.com/office/drawing/2014/main" id="{95F69925-0513-4448-9F9C-52DAC1BBBDE7}"/>
               </a:ext>
             </a:extLst>
           </p:cNvPr>
@@ -19425,7 +21800,7 @@
           <p:cNvPr id="12" name="text">
             <a:extLst xmlns:a="http://schemas.openxmlformats.org/drawingml/2006/main">
               <a:ext uri="{FF2B5EF4-FFF2-40B4-BE49-F238E27FC236}">
-                <a16:creationId xmlns:a16="http://schemas.microsoft.com/office/drawing/2014/main" id="{6FC3C934-A13F-4019-9A68-BE993B679425}"/>
+                <a16:creationId xmlns:a16="http://schemas.microsoft.com/office/drawing/2014/main" id="{F23BE498-CC07-4A52-B57E-BB2139C02AAB}"/>
               </a:ext>
             </a:extLst>
           </p:cNvPr>
@@ -19483,7 +21858,7 @@
                 <a:ea typeface="Arial"/>
                 <a:cs typeface="Arial"/>
               </a:rPr>
-              <a:t>3 / 11</a:t>
+              <a:t>3 / 12</a:t>
             </a:r>
           </a:p>
         </p:txBody>
@@ -19491,7 +21866,7 @@
     </p:spTree>
     <p:extLst>
       <p:ext uri="{BB962C8B-B14F-4D97-AF65-F5344CB8AC3E}">
-        <p14:creationId xmlns:p14="http://schemas.microsoft.com/office/powerpoint/2010/main" val="328044010"/>
+        <p14:creationId xmlns:p14="http://schemas.microsoft.com/office/powerpoint/2010/main" val="1728026802"/>
       </p:ext>
     </p:extLst>
   </p:cSld>
@@ -19522,7 +21897,7 @@
           <p:cNvPr id="15" name="text">
             <a:extLst xmlns:a="http://schemas.openxmlformats.org/drawingml/2006/main">
               <a:ext uri="{FF2B5EF4-FFF2-40B4-BE49-F238E27FC236}">
-                <a16:creationId xmlns:a16="http://schemas.microsoft.com/office/drawing/2014/main" id="{30E4F046-4398-492B-B7E3-EE967DACB7B2}"/>
+                <a16:creationId xmlns:a16="http://schemas.microsoft.com/office/drawing/2014/main" id="{6015DC63-A509-401D-8C95-B0B937BDF898}"/>
               </a:ext>
             </a:extLst>
           </p:cNvPr>
@@ -19590,7 +21965,7 @@
           <p:cNvPr id="2" name="">
             <a:extLst xmlns:a="http://schemas.openxmlformats.org/drawingml/2006/main">
               <a:ext uri="{FF2B5EF4-FFF2-40B4-BE49-F238E27FC236}">
-                <a16:creationId xmlns:a16="http://schemas.microsoft.com/office/drawing/2014/main" id="{87943DB3-1A5B-4597-A5CB-3D368B09D117}"/>
+                <a16:creationId xmlns:a16="http://schemas.microsoft.com/office/drawing/2014/main" id="{BB7951EC-6FAD-45AE-AFCD-8EECF97890D9}"/>
               </a:ext>
             </a:extLst>
           </p:cNvPr>
@@ -19620,7 +21995,7 @@
           <p:cNvPr id="3" name="text">
             <a:extLst xmlns:a="http://schemas.openxmlformats.org/drawingml/2006/main">
               <a:ext uri="{FF2B5EF4-FFF2-40B4-BE49-F238E27FC236}">
-                <a16:creationId xmlns:a16="http://schemas.microsoft.com/office/drawing/2014/main" id="{A1713776-D44B-47DA-B72A-6D804B66CAFA}"/>
+                <a16:creationId xmlns:a16="http://schemas.microsoft.com/office/drawing/2014/main" id="{B0357CBB-3FBE-445C-9D91-6C1269402433}"/>
               </a:ext>
             </a:extLst>
           </p:cNvPr>
@@ -19688,7 +22063,7 @@
           <p:cNvPr id="4" name="text">
             <a:extLst xmlns:a="http://schemas.openxmlformats.org/drawingml/2006/main">
               <a:ext uri="{FF2B5EF4-FFF2-40B4-BE49-F238E27FC236}">
-                <a16:creationId xmlns:a16="http://schemas.microsoft.com/office/drawing/2014/main" id="{212E2BC1-EAF9-4388-A7EC-53D1D49CF470}"/>
+                <a16:creationId xmlns:a16="http://schemas.microsoft.com/office/drawing/2014/main" id="{F9BCAE12-1379-4A61-937D-CA3653116BB3}"/>
               </a:ext>
             </a:extLst>
           </p:cNvPr>
@@ -19756,7 +22131,7 @@
           <p:cNvPr id="5" name="">
             <a:extLst xmlns:a="http://schemas.openxmlformats.org/drawingml/2006/main">
               <a:ext uri="{FF2B5EF4-FFF2-40B4-BE49-F238E27FC236}">
-                <a16:creationId xmlns:a16="http://schemas.microsoft.com/office/drawing/2014/main" id="{E675489E-F66E-4EDD-8C91-CFDF334E4DF7}"/>
+                <a16:creationId xmlns:a16="http://schemas.microsoft.com/office/drawing/2014/main" id="{0D0C3559-03AA-44C2-B2EA-40C75A8E29E0}"/>
               </a:ext>
             </a:extLst>
           </p:cNvPr>
@@ -20629,7 +23004,7 @@
           <p:cNvPr id="6" name="text">
             <a:extLst xmlns:a="http://schemas.openxmlformats.org/drawingml/2006/main">
               <a:ext uri="{FF2B5EF4-FFF2-40B4-BE49-F238E27FC236}">
-                <a16:creationId xmlns:a16="http://schemas.microsoft.com/office/drawing/2014/main" id="{D96C1B41-3973-4C6E-BEC6-A5D24D48D65C}"/>
+                <a16:creationId xmlns:a16="http://schemas.microsoft.com/office/drawing/2014/main" id="{F6E1D1AE-5AEE-4F79-8B74-B310352E8348}"/>
               </a:ext>
             </a:extLst>
           </p:cNvPr>
@@ -20697,7 +23072,7 @@
           <p:cNvPr id="7" name="text">
             <a:extLst xmlns:a="http://schemas.openxmlformats.org/drawingml/2006/main">
               <a:ext uri="{FF2B5EF4-FFF2-40B4-BE49-F238E27FC236}">
-                <a16:creationId xmlns:a16="http://schemas.microsoft.com/office/drawing/2014/main" id="{53DBAE03-A716-42C1-A084-D14417B90492}"/>
+                <a16:creationId xmlns:a16="http://schemas.microsoft.com/office/drawing/2014/main" id="{A73E61DC-18A5-4F2D-9B08-487AC4A68076}"/>
               </a:ext>
             </a:extLst>
           </p:cNvPr>
@@ -20765,7 +23140,7 @@
           <p:cNvPr id="8" name="text">
             <a:extLst xmlns:a="http://schemas.openxmlformats.org/drawingml/2006/main">
               <a:ext uri="{FF2B5EF4-FFF2-40B4-BE49-F238E27FC236}">
-                <a16:creationId xmlns:a16="http://schemas.microsoft.com/office/drawing/2014/main" id="{16E100D5-C98D-4F0E-8619-F68A840DC92C}"/>
+                <a16:creationId xmlns:a16="http://schemas.microsoft.com/office/drawing/2014/main" id="{5F34F2B7-9773-45F8-B2C3-C79C678E44EE}"/>
               </a:ext>
             </a:extLst>
           </p:cNvPr>
@@ -20833,7 +23208,7 @@
           <p:cNvPr id="9" name="Chart">
             <a:extLst xmlns:a="http://schemas.openxmlformats.org/drawingml/2006/main">
               <a:ext uri="{FF2B5EF4-FFF2-40B4-BE49-F238E27FC236}">
-                <a16:creationId xmlns:a16="http://schemas.microsoft.com/office/drawing/2014/main" id="{D3A78061-389C-407B-8AA2-59392D93369C}"/>
+                <a16:creationId xmlns:a16="http://schemas.microsoft.com/office/drawing/2014/main" id="{CDB21306-B5A5-4B1D-8E09-8E5F056A2CFB}"/>
               </a:ext>
             </a:extLst>
           </p:cNvPr>
@@ -20846,7 +23221,7 @@
         </p:xfrm>
         <a:graphic xmlns:a="http://schemas.openxmlformats.org/drawingml/2006/main">
           <a:graphicData uri="http://schemas.openxmlformats.org/drawingml/2006/chart">
-            <c:chart xmlns:r="http://schemas.openxmlformats.org/officeDocument/2006/relationships" xmlns:c="http://schemas.openxmlformats.org/drawingml/2006/chart" r:id="Rdb444a748e434ad0"/>
+            <c:chart xmlns:r="http://schemas.openxmlformats.org/officeDocument/2006/relationships" xmlns:c="http://schemas.openxmlformats.org/drawingml/2006/chart" r:id="R69c30da51e244dd2"/>
           </a:graphicData>
         </a:graphic>
       </p:graphicFrame>
@@ -20855,7 +23230,7 @@
           <p:cNvPr id="10" name="Chart">
             <a:extLst xmlns:a="http://schemas.openxmlformats.org/drawingml/2006/main">
               <a:ext uri="{FF2B5EF4-FFF2-40B4-BE49-F238E27FC236}">
-                <a16:creationId xmlns:a16="http://schemas.microsoft.com/office/drawing/2014/main" id="{3F359E02-19CE-4E81-A0C0-A19E44281136}"/>
+                <a16:creationId xmlns:a16="http://schemas.microsoft.com/office/drawing/2014/main" id="{2A39FC19-D07B-464A-BE38-29A1220BD5F5}"/>
               </a:ext>
             </a:extLst>
           </p:cNvPr>
@@ -20868,7 +23243,7 @@
         </p:xfrm>
         <a:graphic xmlns:a="http://schemas.openxmlformats.org/drawingml/2006/main">
           <a:graphicData uri="http://schemas.openxmlformats.org/drawingml/2006/chart">
-            <c:chart xmlns:r="http://schemas.openxmlformats.org/officeDocument/2006/relationships" xmlns:c="http://schemas.openxmlformats.org/drawingml/2006/chart" r:id="R3b5c9f6f71db4ff0"/>
+            <c:chart xmlns:r="http://schemas.openxmlformats.org/officeDocument/2006/relationships" xmlns:c="http://schemas.openxmlformats.org/drawingml/2006/chart" r:id="R4055ce8fdd8640ae"/>
           </a:graphicData>
         </a:graphic>
       </p:graphicFrame>
@@ -20877,7 +23252,7 @@
           <p:cNvPr id="11" name="">
             <a:extLst xmlns:a="http://schemas.openxmlformats.org/drawingml/2006/main">
               <a:ext uri="{FF2B5EF4-FFF2-40B4-BE49-F238E27FC236}">
-                <a16:creationId xmlns:a16="http://schemas.microsoft.com/office/drawing/2014/main" id="{7801052B-6849-4BCF-BFF0-B9B6AE313D01}"/>
+                <a16:creationId xmlns:a16="http://schemas.microsoft.com/office/drawing/2014/main" id="{19147D6E-461D-4F84-8B22-E300A01F2692}"/>
               </a:ext>
             </a:extLst>
           </p:cNvPr>
@@ -20887,7 +23262,7 @@
           <p:nvPr/>
         </p:nvPicPr>
         <p:blipFill>
-          <a:blip xmlns:r="http://schemas.openxmlformats.org/officeDocument/2006/relationships" xmlns:a="http://schemas.openxmlformats.org/drawingml/2006/main" r:embed="R4a8af7934bda47dc"/>
+          <a:blip xmlns:r="http://schemas.openxmlformats.org/officeDocument/2006/relationships" xmlns:a="http://schemas.openxmlformats.org/drawingml/2006/main" r:embed="R32f04393c25d479b"/>
           <a:stretch xmlns:a="http://schemas.openxmlformats.org/drawingml/2006/main"/>
         </p:blipFill>
         <p:spPr>
@@ -20905,7 +23280,7 @@
           <p:cNvPr id="12" name="">
             <a:extLst xmlns:a="http://schemas.openxmlformats.org/drawingml/2006/main">
               <a:ext uri="{FF2B5EF4-FFF2-40B4-BE49-F238E27FC236}">
-                <a16:creationId xmlns:a16="http://schemas.microsoft.com/office/drawing/2014/main" id="{F8CCFEB7-62FD-40C1-93E0-3854F5D4DF35}"/>
+                <a16:creationId xmlns:a16="http://schemas.microsoft.com/office/drawing/2014/main" id="{82390ADB-A970-4ECE-B253-97EA5CE67218}"/>
               </a:ext>
             </a:extLst>
           </p:cNvPr>
@@ -20935,7 +23310,7 @@
           <p:cNvPr id="13" name="text">
             <a:extLst xmlns:a="http://schemas.openxmlformats.org/drawingml/2006/main">
               <a:ext uri="{FF2B5EF4-FFF2-40B4-BE49-F238E27FC236}">
-                <a16:creationId xmlns:a16="http://schemas.microsoft.com/office/drawing/2014/main" id="{773DD942-296B-4642-B17B-3623C8423CFC}"/>
+                <a16:creationId xmlns:a16="http://schemas.microsoft.com/office/drawing/2014/main" id="{C9508634-D460-4711-9C0C-9A9391C3B34D}"/>
               </a:ext>
             </a:extLst>
           </p:cNvPr>
@@ -21003,7 +23378,7 @@
           <p:cNvPr id="14" name="text">
             <a:extLst xmlns:a="http://schemas.openxmlformats.org/drawingml/2006/main">
               <a:ext uri="{FF2B5EF4-FFF2-40B4-BE49-F238E27FC236}">
-                <a16:creationId xmlns:a16="http://schemas.microsoft.com/office/drawing/2014/main" id="{1668FEE1-C6D3-499C-A6A5-FB277D3257AB}"/>
+                <a16:creationId xmlns:a16="http://schemas.microsoft.com/office/drawing/2014/main" id="{200001F3-3C66-40B7-AF74-1644C0401C78}"/>
               </a:ext>
             </a:extLst>
           </p:cNvPr>
@@ -21061,7 +23436,7 @@
                 <a:ea typeface="Arial"/>
                 <a:cs typeface="Arial"/>
               </a:rPr>
-              <a:t>4 / 11</a:t>
+              <a:t>4 / 12</a:t>
             </a:r>
           </a:p>
         </p:txBody>
@@ -21069,7 +23444,7 @@
     </p:spTree>
     <p:extLst>
       <p:ext uri="{BB962C8B-B14F-4D97-AF65-F5344CB8AC3E}">
-        <p14:creationId xmlns:p14="http://schemas.microsoft.com/office/powerpoint/2010/main" val="520614709"/>
+        <p14:creationId xmlns:p14="http://schemas.microsoft.com/office/powerpoint/2010/main" val="477712724"/>
       </p:ext>
     </p:extLst>
   </p:cSld>
@@ -21100,7 +23475,7 @@
           <p:cNvPr id="15" name="text">
             <a:extLst xmlns:a="http://schemas.openxmlformats.org/drawingml/2006/main">
               <a:ext uri="{FF2B5EF4-FFF2-40B4-BE49-F238E27FC236}">
-                <a16:creationId xmlns:a16="http://schemas.microsoft.com/office/drawing/2014/main" id="{9B7C9553-05A6-4BBF-9B11-7739617F5ED9}"/>
+                <a16:creationId xmlns:a16="http://schemas.microsoft.com/office/drawing/2014/main" id="{2A298C7D-82C3-44A8-9F65-11EA2C675716}"/>
               </a:ext>
             </a:extLst>
           </p:cNvPr>
@@ -21168,7 +23543,7 @@
           <p:cNvPr id="2" name="">
             <a:extLst xmlns:a="http://schemas.openxmlformats.org/drawingml/2006/main">
               <a:ext uri="{FF2B5EF4-FFF2-40B4-BE49-F238E27FC236}">
-                <a16:creationId xmlns:a16="http://schemas.microsoft.com/office/drawing/2014/main" id="{5F149007-2542-4A39-897D-DDA98015B6BC}"/>
+                <a16:creationId xmlns:a16="http://schemas.microsoft.com/office/drawing/2014/main" id="{F27B610A-6213-44F7-990E-9459E4AFDD02}"/>
               </a:ext>
             </a:extLst>
           </p:cNvPr>
@@ -21198,7 +23573,7 @@
           <p:cNvPr id="3" name="text">
             <a:extLst xmlns:a="http://schemas.openxmlformats.org/drawingml/2006/main">
               <a:ext uri="{FF2B5EF4-FFF2-40B4-BE49-F238E27FC236}">
-                <a16:creationId xmlns:a16="http://schemas.microsoft.com/office/drawing/2014/main" id="{C59C4FE0-CB8B-4ABB-80B5-5ADEE694D638}"/>
+                <a16:creationId xmlns:a16="http://schemas.microsoft.com/office/drawing/2014/main" id="{EA091E90-32CB-412D-883D-E559B68D0459}"/>
               </a:ext>
             </a:extLst>
           </p:cNvPr>
@@ -21266,7 +23641,7 @@
           <p:cNvPr id="4" name="text">
             <a:extLst xmlns:a="http://schemas.openxmlformats.org/drawingml/2006/main">
               <a:ext uri="{FF2B5EF4-FFF2-40B4-BE49-F238E27FC236}">
-                <a16:creationId xmlns:a16="http://schemas.microsoft.com/office/drawing/2014/main" id="{FE2B5297-539B-490C-A834-BA5DA33A552E}"/>
+                <a16:creationId xmlns:a16="http://schemas.microsoft.com/office/drawing/2014/main" id="{9DCFE636-6DA0-4A7E-8FA0-D16991910D43}"/>
               </a:ext>
             </a:extLst>
           </p:cNvPr>
@@ -21334,7 +23709,7 @@
           <p:cNvPr id="5" name="text">
             <a:extLst xmlns:a="http://schemas.openxmlformats.org/drawingml/2006/main">
               <a:ext uri="{FF2B5EF4-FFF2-40B4-BE49-F238E27FC236}">
-                <a16:creationId xmlns:a16="http://schemas.microsoft.com/office/drawing/2014/main" id="{80A80CA6-5B90-46A2-A151-674459939838}"/>
+                <a16:creationId xmlns:a16="http://schemas.microsoft.com/office/drawing/2014/main" id="{F70309A1-107F-463C-85CA-0C66E7844A52}"/>
               </a:ext>
             </a:extLst>
           </p:cNvPr>
@@ -21402,7 +23777,7 @@
           <p:cNvPr id="6" name="text">
             <a:extLst xmlns:a="http://schemas.openxmlformats.org/drawingml/2006/main">
               <a:ext uri="{FF2B5EF4-FFF2-40B4-BE49-F238E27FC236}">
-                <a16:creationId xmlns:a16="http://schemas.microsoft.com/office/drawing/2014/main" id="{2AB1AB66-27E8-4A2A-8E0A-E5908D0409CC}"/>
+                <a16:creationId xmlns:a16="http://schemas.microsoft.com/office/drawing/2014/main" id="{4E996D81-E12C-4532-923A-1DCFD3987F0F}"/>
               </a:ext>
             </a:extLst>
           </p:cNvPr>
@@ -21470,7 +23845,7 @@
           <p:cNvPr id="7" name="">
             <a:extLst xmlns:a="http://schemas.openxmlformats.org/drawingml/2006/main">
               <a:ext uri="{FF2B5EF4-FFF2-40B4-BE49-F238E27FC236}">
-                <a16:creationId xmlns:a16="http://schemas.microsoft.com/office/drawing/2014/main" id="{E966D5DA-B72A-4833-90DE-6C91481947CF}"/>
+                <a16:creationId xmlns:a16="http://schemas.microsoft.com/office/drawing/2014/main" id="{F11F004E-6D0E-4393-AB9B-CA7D886F2E92}"/>
               </a:ext>
             </a:extLst>
           </p:cNvPr>
@@ -21480,7 +23855,7 @@
           <p:nvPr/>
         </p:nvPicPr>
         <p:blipFill>
-          <a:blip xmlns:r="http://schemas.openxmlformats.org/officeDocument/2006/relationships" xmlns:a="http://schemas.openxmlformats.org/drawingml/2006/main" r:embed="Re1e14c5045cc4b7a"/>
+          <a:blip xmlns:r="http://schemas.openxmlformats.org/officeDocument/2006/relationships" xmlns:a="http://schemas.openxmlformats.org/drawingml/2006/main" r:embed="Raa203d5c4db341f1"/>
           <a:stretch xmlns:a="http://schemas.openxmlformats.org/drawingml/2006/main"/>
         </p:blipFill>
         <p:spPr>
@@ -21498,7 +23873,7 @@
           <p:cNvPr id="8" name="">
             <a:extLst xmlns:a="http://schemas.openxmlformats.org/drawingml/2006/main">
               <a:ext uri="{FF2B5EF4-FFF2-40B4-BE49-F238E27FC236}">
-                <a16:creationId xmlns:a16="http://schemas.microsoft.com/office/drawing/2014/main" id="{76E8A72A-0FD4-4F53-9671-635C9BCBD7E5}"/>
+                <a16:creationId xmlns:a16="http://schemas.microsoft.com/office/drawing/2014/main" id="{5FEF68E0-53E8-4B05-B873-32A3E3E654AA}"/>
               </a:ext>
             </a:extLst>
           </p:cNvPr>
@@ -21508,7 +23883,7 @@
           <p:nvPr/>
         </p:nvPicPr>
         <p:blipFill>
-          <a:blip xmlns:r="http://schemas.openxmlformats.org/officeDocument/2006/relationships" xmlns:a="http://schemas.openxmlformats.org/drawingml/2006/main" r:embed="Reac847d07a544aa3"/>
+          <a:blip xmlns:r="http://schemas.openxmlformats.org/officeDocument/2006/relationships" xmlns:a="http://schemas.openxmlformats.org/drawingml/2006/main" r:embed="Red83c470d01344a9"/>
           <a:stretch xmlns:a="http://schemas.openxmlformats.org/drawingml/2006/main"/>
         </p:blipFill>
         <p:spPr>
@@ -21526,7 +23901,7 @@
           <p:cNvPr id="9" name="">
             <a:extLst xmlns:a="http://schemas.openxmlformats.org/drawingml/2006/main">
               <a:ext uri="{FF2B5EF4-FFF2-40B4-BE49-F238E27FC236}">
-                <a16:creationId xmlns:a16="http://schemas.microsoft.com/office/drawing/2014/main" id="{B79A00FF-D94A-4BA3-8CE9-DD0110464A68}"/>
+                <a16:creationId xmlns:a16="http://schemas.microsoft.com/office/drawing/2014/main" id="{DF1721CE-9768-4980-929A-5531753B9605}"/>
               </a:ext>
             </a:extLst>
           </p:cNvPr>
@@ -21908,7 +24283,7 @@
           <p:cNvPr id="10" name="text">
             <a:extLst xmlns:a="http://schemas.openxmlformats.org/drawingml/2006/main">
               <a:ext uri="{FF2B5EF4-FFF2-40B4-BE49-F238E27FC236}">
-                <a16:creationId xmlns:a16="http://schemas.microsoft.com/office/drawing/2014/main" id="{49EB64FD-BE3C-4C08-9A61-291C79E14F1F}"/>
+                <a16:creationId xmlns:a16="http://schemas.microsoft.com/office/drawing/2014/main" id="{ADEDDF50-206B-4641-8D9D-3DB1F5E7B374}"/>
               </a:ext>
             </a:extLst>
           </p:cNvPr>
@@ -21976,7 +24351,7 @@
           <p:cNvPr id="11" name="">
             <a:extLst xmlns:a="http://schemas.openxmlformats.org/drawingml/2006/main">
               <a:ext uri="{FF2B5EF4-FFF2-40B4-BE49-F238E27FC236}">
-                <a16:creationId xmlns:a16="http://schemas.microsoft.com/office/drawing/2014/main" id="{2530059A-3707-451A-9D9E-0F40DAD99966}"/>
+                <a16:creationId xmlns:a16="http://schemas.microsoft.com/office/drawing/2014/main" id="{4AE3C1E7-1E37-48C2-B893-014D07C8DF32}"/>
               </a:ext>
             </a:extLst>
           </p:cNvPr>
@@ -22273,7 +24648,7 @@
           <p:cNvPr id="12" name="">
             <a:extLst xmlns:a="http://schemas.openxmlformats.org/drawingml/2006/main">
               <a:ext uri="{FF2B5EF4-FFF2-40B4-BE49-F238E27FC236}">
-                <a16:creationId xmlns:a16="http://schemas.microsoft.com/office/drawing/2014/main" id="{083222D6-8E30-4174-823A-A25E403317C1}"/>
+                <a16:creationId xmlns:a16="http://schemas.microsoft.com/office/drawing/2014/main" id="{CE0D0DF1-D093-44FA-886E-A619AE0CC694}"/>
               </a:ext>
             </a:extLst>
           </p:cNvPr>
@@ -22303,7 +24678,7 @@
           <p:cNvPr id="13" name="text">
             <a:extLst xmlns:a="http://schemas.openxmlformats.org/drawingml/2006/main">
               <a:ext uri="{FF2B5EF4-FFF2-40B4-BE49-F238E27FC236}">
-                <a16:creationId xmlns:a16="http://schemas.microsoft.com/office/drawing/2014/main" id="{24C850AE-A42F-4662-926C-DBCA0FBC6428}"/>
+                <a16:creationId xmlns:a16="http://schemas.microsoft.com/office/drawing/2014/main" id="{52D18026-F745-4AD5-BB23-3014C1FD16DE}"/>
               </a:ext>
             </a:extLst>
           </p:cNvPr>
@@ -22371,7 +24746,7 @@
           <p:cNvPr id="14" name="text">
             <a:extLst xmlns:a="http://schemas.openxmlformats.org/drawingml/2006/main">
               <a:ext uri="{FF2B5EF4-FFF2-40B4-BE49-F238E27FC236}">
-                <a16:creationId xmlns:a16="http://schemas.microsoft.com/office/drawing/2014/main" id="{CF51EBEC-86A5-465F-865B-19482A173561}"/>
+                <a16:creationId xmlns:a16="http://schemas.microsoft.com/office/drawing/2014/main" id="{AA4E72B4-4525-4A14-948B-721209E92D5C}"/>
               </a:ext>
             </a:extLst>
           </p:cNvPr>
@@ -22429,7 +24804,7 @@
                 <a:ea typeface="Arial"/>
                 <a:cs typeface="Arial"/>
               </a:rPr>
-              <a:t>5 / 11</a:t>
+              <a:t>5 / 12</a:t>
             </a:r>
           </a:p>
         </p:txBody>
@@ -22437,7 +24812,7 @@
     </p:spTree>
     <p:extLst>
       <p:ext uri="{BB962C8B-B14F-4D97-AF65-F5344CB8AC3E}">
-        <p14:creationId xmlns:p14="http://schemas.microsoft.com/office/powerpoint/2010/main" val="554153050"/>
+        <p14:creationId xmlns:p14="http://schemas.microsoft.com/office/powerpoint/2010/main" val="1615900468"/>
       </p:ext>
     </p:extLst>
   </p:cSld>
@@ -22468,7 +24843,7 @@
           <p:cNvPr id="17" name="text">
             <a:extLst xmlns:a="http://schemas.openxmlformats.org/drawingml/2006/main">
               <a:ext uri="{FF2B5EF4-FFF2-40B4-BE49-F238E27FC236}">
-                <a16:creationId xmlns:a16="http://schemas.microsoft.com/office/drawing/2014/main" id="{9B07981E-6F74-4D71-99F9-B690EF35C8F0}"/>
+                <a16:creationId xmlns:a16="http://schemas.microsoft.com/office/drawing/2014/main" id="{1650DEC2-5C12-4889-9179-803A866570F1}"/>
               </a:ext>
             </a:extLst>
           </p:cNvPr>
@@ -22536,7 +24911,7 @@
           <p:cNvPr id="2" name="">
             <a:extLst xmlns:a="http://schemas.openxmlformats.org/drawingml/2006/main">
               <a:ext uri="{FF2B5EF4-FFF2-40B4-BE49-F238E27FC236}">
-                <a16:creationId xmlns:a16="http://schemas.microsoft.com/office/drawing/2014/main" id="{2C113BF2-AEE4-4949-AC4A-80C5856F53D0}"/>
+                <a16:creationId xmlns:a16="http://schemas.microsoft.com/office/drawing/2014/main" id="{93B9F54F-5033-43E6-B7AE-FBE8C32A00FB}"/>
               </a:ext>
             </a:extLst>
           </p:cNvPr>
@@ -22566,7 +24941,7 @@
           <p:cNvPr id="3" name="text">
             <a:extLst xmlns:a="http://schemas.openxmlformats.org/drawingml/2006/main">
               <a:ext uri="{FF2B5EF4-FFF2-40B4-BE49-F238E27FC236}">
-                <a16:creationId xmlns:a16="http://schemas.microsoft.com/office/drawing/2014/main" id="{45770944-1872-4926-A190-94E3334251DA}"/>
+                <a16:creationId xmlns:a16="http://schemas.microsoft.com/office/drawing/2014/main" id="{42C59FBE-CC85-4E7F-B92F-E2311A1CFA53}"/>
               </a:ext>
             </a:extLst>
           </p:cNvPr>
@@ -22634,7 +25009,7 @@
           <p:cNvPr id="4" name="text">
             <a:extLst xmlns:a="http://schemas.openxmlformats.org/drawingml/2006/main">
               <a:ext uri="{FF2B5EF4-FFF2-40B4-BE49-F238E27FC236}">
-                <a16:creationId xmlns:a16="http://schemas.microsoft.com/office/drawing/2014/main" id="{FFE01F65-AA87-4002-9EB5-BEE66BF1CFEC}"/>
+                <a16:creationId xmlns:a16="http://schemas.microsoft.com/office/drawing/2014/main" id="{B61243EF-9749-469F-90BB-9BA5C33126B4}"/>
               </a:ext>
             </a:extLst>
           </p:cNvPr>
@@ -22702,7 +25077,7 @@
           <p:cNvPr id="5" name="text">
             <a:extLst xmlns:a="http://schemas.openxmlformats.org/drawingml/2006/main">
               <a:ext uri="{FF2B5EF4-FFF2-40B4-BE49-F238E27FC236}">
-                <a16:creationId xmlns:a16="http://schemas.microsoft.com/office/drawing/2014/main" id="{B886BE03-A382-4AE1-9ABA-CD1127EAFF76}"/>
+                <a16:creationId xmlns:a16="http://schemas.microsoft.com/office/drawing/2014/main" id="{2DAF2E03-C286-4A8D-89C9-98F2EF7CE8CE}"/>
               </a:ext>
             </a:extLst>
           </p:cNvPr>
@@ -22770,7 +25145,7 @@
           <p:cNvPr id="6" name="text">
             <a:extLst xmlns:a="http://schemas.openxmlformats.org/drawingml/2006/main">
               <a:ext uri="{FF2B5EF4-FFF2-40B4-BE49-F238E27FC236}">
-                <a16:creationId xmlns:a16="http://schemas.microsoft.com/office/drawing/2014/main" id="{8785E3BC-981E-47F1-8EB5-9349C1FE1D2B}"/>
+                <a16:creationId xmlns:a16="http://schemas.microsoft.com/office/drawing/2014/main" id="{80F2E65D-6E2E-45CB-B93D-054359A840EC}"/>
               </a:ext>
             </a:extLst>
           </p:cNvPr>
@@ -22838,7 +25213,7 @@
           <p:cNvPr id="7" name="text">
             <a:extLst xmlns:a="http://schemas.openxmlformats.org/drawingml/2006/main">
               <a:ext uri="{FF2B5EF4-FFF2-40B4-BE49-F238E27FC236}">
-                <a16:creationId xmlns:a16="http://schemas.microsoft.com/office/drawing/2014/main" id="{27515E3D-A2DC-48C2-8F4C-5CCDB513ED01}"/>
+                <a16:creationId xmlns:a16="http://schemas.microsoft.com/office/drawing/2014/main" id="{CA44863D-D803-4A7E-8028-9CF3D4858899}"/>
               </a:ext>
             </a:extLst>
           </p:cNvPr>
@@ -22906,7 +25281,7 @@
           <p:cNvPr id="8" name="text">
             <a:extLst xmlns:a="http://schemas.openxmlformats.org/drawingml/2006/main">
               <a:ext uri="{FF2B5EF4-FFF2-40B4-BE49-F238E27FC236}">
-                <a16:creationId xmlns:a16="http://schemas.microsoft.com/office/drawing/2014/main" id="{52612150-CB14-461C-9723-84B340E8607C}"/>
+                <a16:creationId xmlns:a16="http://schemas.microsoft.com/office/drawing/2014/main" id="{870E785A-DB08-4C7E-B869-9D65778ADD55}"/>
               </a:ext>
             </a:extLst>
           </p:cNvPr>
@@ -22974,7 +25349,7 @@
           <p:cNvPr id="9" name="text">
             <a:extLst xmlns:a="http://schemas.openxmlformats.org/drawingml/2006/main">
               <a:ext uri="{FF2B5EF4-FFF2-40B4-BE49-F238E27FC236}">
-                <a16:creationId xmlns:a16="http://schemas.microsoft.com/office/drawing/2014/main" id="{FC05767A-D37A-4769-8E36-1E35B5EFCB84}"/>
+                <a16:creationId xmlns:a16="http://schemas.microsoft.com/office/drawing/2014/main" id="{18CC942D-450D-4ED2-AC61-FD646D8C3009}"/>
               </a:ext>
             </a:extLst>
           </p:cNvPr>
@@ -23042,7 +25417,7 @@
           <p:cNvPr id="10" name="">
             <a:extLst xmlns:a="http://schemas.openxmlformats.org/drawingml/2006/main">
               <a:ext uri="{FF2B5EF4-FFF2-40B4-BE49-F238E27FC236}">
-                <a16:creationId xmlns:a16="http://schemas.microsoft.com/office/drawing/2014/main" id="{C589E22D-1A41-420D-AB89-C3A5762041F7}"/>
+                <a16:creationId xmlns:a16="http://schemas.microsoft.com/office/drawing/2014/main" id="{22C52390-405A-464A-954C-804662F16D3E}"/>
               </a:ext>
             </a:extLst>
           </p:cNvPr>
@@ -23839,7 +26214,7 @@
           <p:cNvPr id="11" name="text">
             <a:extLst xmlns:a="http://schemas.openxmlformats.org/drawingml/2006/main">
               <a:ext uri="{FF2B5EF4-FFF2-40B4-BE49-F238E27FC236}">
-                <a16:creationId xmlns:a16="http://schemas.microsoft.com/office/drawing/2014/main" id="{D021BD2B-3856-47BC-B4B4-904E2E92EC0E}"/>
+                <a16:creationId xmlns:a16="http://schemas.microsoft.com/office/drawing/2014/main" id="{41EA7CC1-A08F-420B-82FF-0022E7EDB3C0}"/>
               </a:ext>
             </a:extLst>
           </p:cNvPr>
@@ -23907,7 +26282,7 @@
           <p:cNvPr id="12" name="">
             <a:extLst xmlns:a="http://schemas.openxmlformats.org/drawingml/2006/main">
               <a:ext uri="{FF2B5EF4-FFF2-40B4-BE49-F238E27FC236}">
-                <a16:creationId xmlns:a16="http://schemas.microsoft.com/office/drawing/2014/main" id="{2D21F509-8477-45D5-9DE0-CCBE154E2B3A}"/>
+                <a16:creationId xmlns:a16="http://schemas.microsoft.com/office/drawing/2014/main" id="{2EED6018-8BEF-414D-8A7E-253529F87E3E}"/>
               </a:ext>
             </a:extLst>
           </p:cNvPr>
@@ -23917,7 +26292,7 @@
           <p:nvPr/>
         </p:nvPicPr>
         <p:blipFill>
-          <a:blip xmlns:r="http://schemas.openxmlformats.org/officeDocument/2006/relationships" xmlns:a="http://schemas.openxmlformats.org/drawingml/2006/main" r:embed="R2150c4b0b378461d"/>
+          <a:blip xmlns:r="http://schemas.openxmlformats.org/officeDocument/2006/relationships" xmlns:a="http://schemas.openxmlformats.org/drawingml/2006/main" r:embed="R225f8cec11b74a47"/>
           <a:stretch xmlns:a="http://schemas.openxmlformats.org/drawingml/2006/main"/>
         </p:blipFill>
         <p:spPr>
@@ -23935,7 +26310,7 @@
           <p:cNvPr id="13" name="text">
             <a:extLst xmlns:a="http://schemas.openxmlformats.org/drawingml/2006/main">
               <a:ext uri="{FF2B5EF4-FFF2-40B4-BE49-F238E27FC236}">
-                <a16:creationId xmlns:a16="http://schemas.microsoft.com/office/drawing/2014/main" id="{75ACFD29-3812-4C75-A4D1-9F5F1F7EA10E}"/>
+                <a16:creationId xmlns:a16="http://schemas.microsoft.com/office/drawing/2014/main" id="{429609F3-60EB-4C86-B3D7-10ED1BB12046}"/>
               </a:ext>
             </a:extLst>
           </p:cNvPr>
@@ -24003,7 +26378,7 @@
           <p:cNvPr id="14" name="">
             <a:extLst xmlns:a="http://schemas.openxmlformats.org/drawingml/2006/main">
               <a:ext uri="{FF2B5EF4-FFF2-40B4-BE49-F238E27FC236}">
-                <a16:creationId xmlns:a16="http://schemas.microsoft.com/office/drawing/2014/main" id="{DF9BB341-213E-440C-9F7F-F997D1F3F778}"/>
+                <a16:creationId xmlns:a16="http://schemas.microsoft.com/office/drawing/2014/main" id="{381A3443-E337-4718-B742-7B1199CAA198}"/>
               </a:ext>
             </a:extLst>
           </p:cNvPr>
@@ -24033,7 +26408,7 @@
           <p:cNvPr id="15" name="text">
             <a:extLst xmlns:a="http://schemas.openxmlformats.org/drawingml/2006/main">
               <a:ext uri="{FF2B5EF4-FFF2-40B4-BE49-F238E27FC236}">
-                <a16:creationId xmlns:a16="http://schemas.microsoft.com/office/drawing/2014/main" id="{6982102F-AEC4-4351-B521-C2EF4CFBC0D6}"/>
+                <a16:creationId xmlns:a16="http://schemas.microsoft.com/office/drawing/2014/main" id="{CECC568D-1911-4B14-A095-FF20B3AECB61}"/>
               </a:ext>
             </a:extLst>
           </p:cNvPr>
@@ -24101,7 +26476,7 @@
           <p:cNvPr id="16" name="text">
             <a:extLst xmlns:a="http://schemas.openxmlformats.org/drawingml/2006/main">
               <a:ext uri="{FF2B5EF4-FFF2-40B4-BE49-F238E27FC236}">
-                <a16:creationId xmlns:a16="http://schemas.microsoft.com/office/drawing/2014/main" id="{CF034340-76EC-4872-A098-57CEFD15B275}"/>
+                <a16:creationId xmlns:a16="http://schemas.microsoft.com/office/drawing/2014/main" id="{53A109DD-7DD4-4DC1-9E0B-E45E677EBC06}"/>
               </a:ext>
             </a:extLst>
           </p:cNvPr>
@@ -24159,7 +26534,7 @@
                 <a:ea typeface="Arial"/>
                 <a:cs typeface="Arial"/>
               </a:rPr>
-              <a:t>6 / 11</a:t>
+              <a:t>6 / 12</a:t>
             </a:r>
           </a:p>
         </p:txBody>
@@ -24167,7 +26542,7 @@
     </p:spTree>
     <p:extLst>
       <p:ext uri="{BB962C8B-B14F-4D97-AF65-F5344CB8AC3E}">
-        <p14:creationId xmlns:p14="http://schemas.microsoft.com/office/powerpoint/2010/main" val="564420159"/>
+        <p14:creationId xmlns:p14="http://schemas.microsoft.com/office/powerpoint/2010/main" val="1093279097"/>
       </p:ext>
     </p:extLst>
   </p:cSld>
@@ -24198,7 +26573,7 @@
           <p:cNvPr id="23" name="text">
             <a:extLst xmlns:a="http://schemas.openxmlformats.org/drawingml/2006/main">
               <a:ext uri="{FF2B5EF4-FFF2-40B4-BE49-F238E27FC236}">
-                <a16:creationId xmlns:a16="http://schemas.microsoft.com/office/drawing/2014/main" id="{C3359D34-1BE0-4CB7-8768-B0B633B1C8FA}"/>
+                <a16:creationId xmlns:a16="http://schemas.microsoft.com/office/drawing/2014/main" id="{B0821982-F68C-4597-9A50-2D62E4FDB1FC}"/>
               </a:ext>
             </a:extLst>
           </p:cNvPr>
@@ -24266,7 +26641,7 @@
           <p:cNvPr id="2" name="">
             <a:extLst xmlns:a="http://schemas.openxmlformats.org/drawingml/2006/main">
               <a:ext uri="{FF2B5EF4-FFF2-40B4-BE49-F238E27FC236}">
-                <a16:creationId xmlns:a16="http://schemas.microsoft.com/office/drawing/2014/main" id="{699E4512-4DB0-48B8-9B0C-4DA75C523C4B}"/>
+                <a16:creationId xmlns:a16="http://schemas.microsoft.com/office/drawing/2014/main" id="{01355D31-8CFC-4416-87D9-AAAF9D3515A0}"/>
               </a:ext>
             </a:extLst>
           </p:cNvPr>
@@ -24296,7 +26671,7 @@
           <p:cNvPr id="3" name="text">
             <a:extLst xmlns:a="http://schemas.openxmlformats.org/drawingml/2006/main">
               <a:ext uri="{FF2B5EF4-FFF2-40B4-BE49-F238E27FC236}">
-                <a16:creationId xmlns:a16="http://schemas.microsoft.com/office/drawing/2014/main" id="{10E084DE-9FDD-4601-ACF3-6BBF8AAAADC0}"/>
+                <a16:creationId xmlns:a16="http://schemas.microsoft.com/office/drawing/2014/main" id="{51562088-BB71-4245-8A41-31B139C54B58}"/>
               </a:ext>
             </a:extLst>
           </p:cNvPr>
@@ -24364,7 +26739,7 @@
           <p:cNvPr id="4" name="text">
             <a:extLst xmlns:a="http://schemas.openxmlformats.org/drawingml/2006/main">
               <a:ext uri="{FF2B5EF4-FFF2-40B4-BE49-F238E27FC236}">
-                <a16:creationId xmlns:a16="http://schemas.microsoft.com/office/drawing/2014/main" id="{260EF5CB-68E1-42DF-A017-EF7C5D2C9E8D}"/>
+                <a16:creationId xmlns:a16="http://schemas.microsoft.com/office/drawing/2014/main" id="{3164EF7D-6D52-4BF8-A871-1EAB7B64AC38}"/>
               </a:ext>
             </a:extLst>
           </p:cNvPr>
@@ -24432,7 +26807,7 @@
           <p:cNvPr id="5" name="text">
             <a:extLst xmlns:a="http://schemas.openxmlformats.org/drawingml/2006/main">
               <a:ext uri="{FF2B5EF4-FFF2-40B4-BE49-F238E27FC236}">
-                <a16:creationId xmlns:a16="http://schemas.microsoft.com/office/drawing/2014/main" id="{AD0E44F6-5745-4768-893C-6C2CC4DAB895}"/>
+                <a16:creationId xmlns:a16="http://schemas.microsoft.com/office/drawing/2014/main" id="{D720C90F-6D18-4B34-8240-46290D68E395}"/>
               </a:ext>
             </a:extLst>
           </p:cNvPr>
@@ -24500,7 +26875,7 @@
           <p:cNvPr id="6" name="text">
             <a:extLst xmlns:a="http://schemas.openxmlformats.org/drawingml/2006/main">
               <a:ext uri="{FF2B5EF4-FFF2-40B4-BE49-F238E27FC236}">
-                <a16:creationId xmlns:a16="http://schemas.microsoft.com/office/drawing/2014/main" id="{2E2143A5-6E45-47A8-A01D-28144DF92434}"/>
+                <a16:creationId xmlns:a16="http://schemas.microsoft.com/office/drawing/2014/main" id="{9AE30701-1C8E-4C6C-AACE-067257CAEED9}"/>
               </a:ext>
             </a:extLst>
           </p:cNvPr>
@@ -24591,7 +26966,7 @@
           <p:cNvPr id="7" name="text">
             <a:extLst xmlns:a="http://schemas.openxmlformats.org/drawingml/2006/main">
               <a:ext uri="{FF2B5EF4-FFF2-40B4-BE49-F238E27FC236}">
-                <a16:creationId xmlns:a16="http://schemas.microsoft.com/office/drawing/2014/main" id="{F359D018-1FB1-414D-8D1C-680C3371BC64}"/>
+                <a16:creationId xmlns:a16="http://schemas.microsoft.com/office/drawing/2014/main" id="{AACE7B4F-E4BD-401D-BAE0-B625EDADF117}"/>
               </a:ext>
             </a:extLst>
           </p:cNvPr>
@@ -24659,7 +27034,7 @@
           <p:cNvPr id="8" name="text">
             <a:extLst xmlns:a="http://schemas.openxmlformats.org/drawingml/2006/main">
               <a:ext uri="{FF2B5EF4-FFF2-40B4-BE49-F238E27FC236}">
-                <a16:creationId xmlns:a16="http://schemas.microsoft.com/office/drawing/2014/main" id="{F999F8FB-6F94-4DEA-8288-DBDB61359697}"/>
+                <a16:creationId xmlns:a16="http://schemas.microsoft.com/office/drawing/2014/main" id="{C6F6CC38-3D06-43DA-BFC0-8E53DAFD571D}"/>
               </a:ext>
             </a:extLst>
           </p:cNvPr>
@@ -24727,7 +27102,7 @@
           <p:cNvPr id="9" name="text">
             <a:extLst xmlns:a="http://schemas.openxmlformats.org/drawingml/2006/main">
               <a:ext uri="{FF2B5EF4-FFF2-40B4-BE49-F238E27FC236}">
-                <a16:creationId xmlns:a16="http://schemas.microsoft.com/office/drawing/2014/main" id="{49E64325-C8F5-4A3B-B79B-2B1F7A5C9159}"/>
+                <a16:creationId xmlns:a16="http://schemas.microsoft.com/office/drawing/2014/main" id="{2E0DD874-19C2-4832-A732-C630EE59E988}"/>
               </a:ext>
             </a:extLst>
           </p:cNvPr>
@@ -24795,7 +27170,7 @@
           <p:cNvPr id="10" name="text">
             <a:extLst xmlns:a="http://schemas.openxmlformats.org/drawingml/2006/main">
               <a:ext uri="{FF2B5EF4-FFF2-40B4-BE49-F238E27FC236}">
-                <a16:creationId xmlns:a16="http://schemas.microsoft.com/office/drawing/2014/main" id="{C91BBC6C-68C3-415A-9C80-C4EBF4499EBD}"/>
+                <a16:creationId xmlns:a16="http://schemas.microsoft.com/office/drawing/2014/main" id="{12C26ED9-0632-432B-BBD8-2002DBBB9139}"/>
               </a:ext>
             </a:extLst>
           </p:cNvPr>
@@ -24886,7 +27261,7 @@
           <p:cNvPr id="11" name="text">
             <a:extLst xmlns:a="http://schemas.openxmlformats.org/drawingml/2006/main">
               <a:ext uri="{FF2B5EF4-FFF2-40B4-BE49-F238E27FC236}">
-                <a16:creationId xmlns:a16="http://schemas.microsoft.com/office/drawing/2014/main" id="{6C4A5DA7-5766-41C3-B883-97F7E3F48346}"/>
+                <a16:creationId xmlns:a16="http://schemas.microsoft.com/office/drawing/2014/main" id="{AB7CD8DC-5193-437F-A6F9-EB5BDD965EC7}"/>
               </a:ext>
             </a:extLst>
           </p:cNvPr>
@@ -24954,7 +27329,7 @@
           <p:cNvPr id="12" name="text">
             <a:extLst xmlns:a="http://schemas.openxmlformats.org/drawingml/2006/main">
               <a:ext uri="{FF2B5EF4-FFF2-40B4-BE49-F238E27FC236}">
-                <a16:creationId xmlns:a16="http://schemas.microsoft.com/office/drawing/2014/main" id="{5122ABD6-CA57-4055-852E-7FF2F8C8C732}"/>
+                <a16:creationId xmlns:a16="http://schemas.microsoft.com/office/drawing/2014/main" id="{0A0EC5B6-46EA-4E0E-8973-81E728FB27D5}"/>
               </a:ext>
             </a:extLst>
           </p:cNvPr>
@@ -25022,7 +27397,7 @@
           <p:cNvPr id="13" name="text">
             <a:extLst xmlns:a="http://schemas.openxmlformats.org/drawingml/2006/main">
               <a:ext uri="{FF2B5EF4-FFF2-40B4-BE49-F238E27FC236}">
-                <a16:creationId xmlns:a16="http://schemas.microsoft.com/office/drawing/2014/main" id="{7672B808-66D1-4EFE-939F-B85A844D4F46}"/>
+                <a16:creationId xmlns:a16="http://schemas.microsoft.com/office/drawing/2014/main" id="{03815971-EBC0-447F-841D-74E1532524CC}"/>
               </a:ext>
             </a:extLst>
           </p:cNvPr>
@@ -25090,7 +27465,7 @@
           <p:cNvPr id="14" name="text">
             <a:extLst xmlns:a="http://schemas.openxmlformats.org/drawingml/2006/main">
               <a:ext uri="{FF2B5EF4-FFF2-40B4-BE49-F238E27FC236}">
-                <a16:creationId xmlns:a16="http://schemas.microsoft.com/office/drawing/2014/main" id="{3C1163A5-0D02-4ED6-B093-EF7765E813F4}"/>
+                <a16:creationId xmlns:a16="http://schemas.microsoft.com/office/drawing/2014/main" id="{0AD79AE1-FF52-402A-A343-61F6A66DBA7B}"/>
               </a:ext>
             </a:extLst>
           </p:cNvPr>
@@ -25181,7 +27556,7 @@
           <p:cNvPr id="15" name="text">
             <a:extLst xmlns:a="http://schemas.openxmlformats.org/drawingml/2006/main">
               <a:ext uri="{FF2B5EF4-FFF2-40B4-BE49-F238E27FC236}">
-                <a16:creationId xmlns:a16="http://schemas.microsoft.com/office/drawing/2014/main" id="{9890BCAF-7319-402C-82DE-4692D0EFBA1F}"/>
+                <a16:creationId xmlns:a16="http://schemas.microsoft.com/office/drawing/2014/main" id="{144946CD-F7CE-4012-B3BF-0F6906513665}"/>
               </a:ext>
             </a:extLst>
           </p:cNvPr>
@@ -25249,7 +27624,7 @@
           <p:cNvPr id="16" name="text">
             <a:extLst xmlns:a="http://schemas.openxmlformats.org/drawingml/2006/main">
               <a:ext uri="{FF2B5EF4-FFF2-40B4-BE49-F238E27FC236}">
-                <a16:creationId xmlns:a16="http://schemas.microsoft.com/office/drawing/2014/main" id="{BEEC5EE1-6290-4BB9-910C-E6AF2003E759}"/>
+                <a16:creationId xmlns:a16="http://schemas.microsoft.com/office/drawing/2014/main" id="{A82B58FE-8DEB-449D-A0D2-073EBDC89C9B}"/>
               </a:ext>
             </a:extLst>
           </p:cNvPr>
@@ -25317,7 +27692,7 @@
           <p:cNvPr id="17" name="Chart">
             <a:extLst xmlns:a="http://schemas.openxmlformats.org/drawingml/2006/main">
               <a:ext uri="{FF2B5EF4-FFF2-40B4-BE49-F238E27FC236}">
-                <a16:creationId xmlns:a16="http://schemas.microsoft.com/office/drawing/2014/main" id="{23577FDF-97A5-43E5-AC9A-7B81610C0662}"/>
+                <a16:creationId xmlns:a16="http://schemas.microsoft.com/office/drawing/2014/main" id="{3204407A-65C9-4295-9670-230AC87A77ED}"/>
               </a:ext>
             </a:extLst>
           </p:cNvPr>
@@ -25330,7 +27705,7 @@
         </p:xfrm>
         <a:graphic xmlns:a="http://schemas.openxmlformats.org/drawingml/2006/main">
           <a:graphicData uri="http://schemas.openxmlformats.org/drawingml/2006/chart">
-            <c:chart xmlns:r="http://schemas.openxmlformats.org/officeDocument/2006/relationships" xmlns:c="http://schemas.openxmlformats.org/drawingml/2006/chart" r:id="R9b05b54c6819467f"/>
+            <c:chart xmlns:r="http://schemas.openxmlformats.org/officeDocument/2006/relationships" xmlns:c="http://schemas.openxmlformats.org/drawingml/2006/chart" r:id="R0ab05b52c5df4144"/>
           </a:graphicData>
         </a:graphic>
       </p:graphicFrame>
@@ -25339,7 +27714,7 @@
           <p:cNvPr id="18" name="">
             <a:extLst xmlns:a="http://schemas.openxmlformats.org/drawingml/2006/main">
               <a:ext uri="{FF2B5EF4-FFF2-40B4-BE49-F238E27FC236}">
-                <a16:creationId xmlns:a16="http://schemas.microsoft.com/office/drawing/2014/main" id="{BB23E5FC-91E0-475A-8345-7B12A3D17085}"/>
+                <a16:creationId xmlns:a16="http://schemas.microsoft.com/office/drawing/2014/main" id="{86C5F6E2-4572-4FFC-BB5F-7DD1E17A5720}"/>
               </a:ext>
             </a:extLst>
           </p:cNvPr>
@@ -25349,7 +27724,7 @@
           <p:nvPr/>
         </p:nvPicPr>
         <p:blipFill>
-          <a:blip xmlns:r="http://schemas.openxmlformats.org/officeDocument/2006/relationships" xmlns:a="http://schemas.openxmlformats.org/drawingml/2006/main" r:embed="Rc2c69ee3790a43d4"/>
+          <a:blip xmlns:r="http://schemas.openxmlformats.org/officeDocument/2006/relationships" xmlns:a="http://schemas.openxmlformats.org/drawingml/2006/main" r:embed="Rff05c8fa60434d15"/>
           <a:stretch xmlns:a="http://schemas.openxmlformats.org/drawingml/2006/main"/>
         </p:blipFill>
         <p:spPr>
@@ -25367,7 +27742,7 @@
           <p:cNvPr id="19" name="Chart">
             <a:extLst xmlns:a="http://schemas.openxmlformats.org/drawingml/2006/main">
               <a:ext uri="{FF2B5EF4-FFF2-40B4-BE49-F238E27FC236}">
-                <a16:creationId xmlns:a16="http://schemas.microsoft.com/office/drawing/2014/main" id="{D91D0B08-CDC7-4ACC-B73F-1B2BDFACA343}"/>
+                <a16:creationId xmlns:a16="http://schemas.microsoft.com/office/drawing/2014/main" id="{4B9EBA86-E5A6-4344-B29C-FE061296877F}"/>
               </a:ext>
             </a:extLst>
           </p:cNvPr>
@@ -25380,7 +27755,7 @@
         </p:xfrm>
         <a:graphic xmlns:a="http://schemas.openxmlformats.org/drawingml/2006/main">
           <a:graphicData uri="http://schemas.openxmlformats.org/drawingml/2006/chart">
-            <c:chart xmlns:r="http://schemas.openxmlformats.org/officeDocument/2006/relationships" xmlns:c="http://schemas.openxmlformats.org/drawingml/2006/chart" r:id="R235f47ca5d5049e7"/>
+            <c:chart xmlns:r="http://schemas.openxmlformats.org/officeDocument/2006/relationships" xmlns:c="http://schemas.openxmlformats.org/drawingml/2006/chart" r:id="Rd95f25cffa184133"/>
           </a:graphicData>
         </a:graphic>
       </p:graphicFrame>
@@ -25389,7 +27764,7 @@
           <p:cNvPr id="20" name="">
             <a:extLst xmlns:a="http://schemas.openxmlformats.org/drawingml/2006/main">
               <a:ext uri="{FF2B5EF4-FFF2-40B4-BE49-F238E27FC236}">
-                <a16:creationId xmlns:a16="http://schemas.microsoft.com/office/drawing/2014/main" id="{04CF25DC-CEA3-4639-AE1D-F286EF40B363}"/>
+                <a16:creationId xmlns:a16="http://schemas.microsoft.com/office/drawing/2014/main" id="{79B9E904-6F28-4075-9855-1050F6CD7006}"/>
               </a:ext>
             </a:extLst>
           </p:cNvPr>
@@ -25419,7 +27794,7 @@
           <p:cNvPr id="21" name="text">
             <a:extLst xmlns:a="http://schemas.openxmlformats.org/drawingml/2006/main">
               <a:ext uri="{FF2B5EF4-FFF2-40B4-BE49-F238E27FC236}">
-                <a16:creationId xmlns:a16="http://schemas.microsoft.com/office/drawing/2014/main" id="{B4EDB6E7-A992-47D6-A5D1-FF02486D5BF6}"/>
+                <a16:creationId xmlns:a16="http://schemas.microsoft.com/office/drawing/2014/main" id="{FD77F09C-CEF4-4A51-9DBC-EE4C4181BCDE}"/>
               </a:ext>
             </a:extLst>
           </p:cNvPr>
@@ -25487,7 +27862,7 @@
           <p:cNvPr id="22" name="text">
             <a:extLst xmlns:a="http://schemas.openxmlformats.org/drawingml/2006/main">
               <a:ext uri="{FF2B5EF4-FFF2-40B4-BE49-F238E27FC236}">
-                <a16:creationId xmlns:a16="http://schemas.microsoft.com/office/drawing/2014/main" id="{513A3B3F-8E0A-44D0-8643-60DAF3D2A89B}"/>
+                <a16:creationId xmlns:a16="http://schemas.microsoft.com/office/drawing/2014/main" id="{78D2C1F9-4211-4CE5-AB28-99814961A794}"/>
               </a:ext>
             </a:extLst>
           </p:cNvPr>
@@ -25545,7 +27920,7 @@
                 <a:ea typeface="Arial"/>
                 <a:cs typeface="Arial"/>
               </a:rPr>
-              <a:t>7 / 11</a:t>
+              <a:t>7 / 12</a:t>
             </a:r>
           </a:p>
         </p:txBody>
@@ -25553,7 +27928,7 @@
     </p:spTree>
     <p:extLst>
       <p:ext uri="{BB962C8B-B14F-4D97-AF65-F5344CB8AC3E}">
-        <p14:creationId xmlns:p14="http://schemas.microsoft.com/office/powerpoint/2010/main" val="201049110"/>
+        <p14:creationId xmlns:p14="http://schemas.microsoft.com/office/powerpoint/2010/main" val="290144096"/>
       </p:ext>
     </p:extLst>
   </p:cSld>
@@ -25581,10 +27956,10 @@
       </p:grpSpPr>
       <p:sp>
         <p:nvSpPr>
-          <p:cNvPr id="14" name="text">
+          <p:cNvPr id="15" name="text">
             <a:extLst xmlns:a="http://schemas.openxmlformats.org/drawingml/2006/main">
               <a:ext uri="{FF2B5EF4-FFF2-40B4-BE49-F238E27FC236}">
-                <a16:creationId xmlns:a16="http://schemas.microsoft.com/office/drawing/2014/main" id="{7151D030-DF4A-447F-9ED3-47695B1F6CD8}"/>
+                <a16:creationId xmlns:a16="http://schemas.microsoft.com/office/drawing/2014/main" id="{16D4F2AE-413B-4191-90E5-8841304F2BD1}"/>
               </a:ext>
             </a:extLst>
           </p:cNvPr>
@@ -25642,7 +28017,7 @@
                 <a:ea typeface="Arial"/>
                 <a:cs typeface="Arial"/>
               </a:rPr>
-              <a:t>LAB 7: One-sample tests     LAB 8: Two-sample tests     LAB 9: Independent and paired t-tests</a:t>
+              <a:t>LAB 7: One-sample mean/proportion tests     LAB 8: Two-sample mean/proportion tests</a:t>
             </a:r>
           </a:p>
         </p:txBody>
@@ -25652,7 +28027,7 @@
           <p:cNvPr id="2" name="">
             <a:extLst xmlns:a="http://schemas.openxmlformats.org/drawingml/2006/main">
               <a:ext uri="{FF2B5EF4-FFF2-40B4-BE49-F238E27FC236}">
-                <a16:creationId xmlns:a16="http://schemas.microsoft.com/office/drawing/2014/main" id="{69E576C2-14FB-4351-AE4F-2A4FB03D6628}"/>
+                <a16:creationId xmlns:a16="http://schemas.microsoft.com/office/drawing/2014/main" id="{7CF3277A-09D2-404A-B1ED-8EA5AE9AE076}"/>
               </a:ext>
             </a:extLst>
           </p:cNvPr>
@@ -25682,7 +28057,7 @@
           <p:cNvPr id="3" name="text">
             <a:extLst xmlns:a="http://schemas.openxmlformats.org/drawingml/2006/main">
               <a:ext uri="{FF2B5EF4-FFF2-40B4-BE49-F238E27FC236}">
-                <a16:creationId xmlns:a16="http://schemas.microsoft.com/office/drawing/2014/main" id="{60F2FF9B-0B0E-41E4-831F-E3BA8A3233AE}"/>
+                <a16:creationId xmlns:a16="http://schemas.microsoft.com/office/drawing/2014/main" id="{8964B676-3653-4B75-9001-ED29047DECF2}"/>
               </a:ext>
             </a:extLst>
           </p:cNvPr>
@@ -25740,7 +28115,7 @@
                 <a:ea typeface="Arial"/>
                 <a:cs typeface="Arial"/>
               </a:rPr>
-              <a:t>Hypothesis tests and paired measurements</a:t>
+              <a:t>One- and two-sample hypothesis tests</a:t>
             </a:r>
           </a:p>
         </p:txBody>
@@ -25750,7 +28125,7 @@
           <p:cNvPr id="4" name="text">
             <a:extLst xmlns:a="http://schemas.openxmlformats.org/drawingml/2006/main">
               <a:ext uri="{FF2B5EF4-FFF2-40B4-BE49-F238E27FC236}">
-                <a16:creationId xmlns:a16="http://schemas.microsoft.com/office/drawing/2014/main" id="{4BA6C987-3724-4803-9899-EFE7BBA981AF}"/>
+                <a16:creationId xmlns:a16="http://schemas.microsoft.com/office/drawing/2014/main" id="{361888EE-C68C-4DB8-A3AF-AAFFE387855D}"/>
               </a:ext>
             </a:extLst>
           </p:cNvPr>
@@ -25808,85 +28183,17 @@
                 <a:ea typeface="Arial"/>
                 <a:cs typeface="Arial"/>
               </a:rPr>
-              <a:t>At α = 0.05, p &lt; 0.05 supports a difference. Read the size of the change too.</a:t>
-            </a:r>
-          </a:p>
-        </p:txBody>
-      </p:sp>
-      <p:sp>
-        <p:nvSpPr>
-          <p:cNvPr id="5" name="text">
-            <a:extLst xmlns:a="http://schemas.openxmlformats.org/drawingml/2006/main">
-              <a:ext uri="{FF2B5EF4-FFF2-40B4-BE49-F238E27FC236}">
-                <a16:creationId xmlns:a16="http://schemas.microsoft.com/office/drawing/2014/main" id="{9210FAAD-1FB3-4A6F-83C5-6D24897C4846}"/>
-              </a:ext>
-            </a:extLst>
-          </p:cNvPr>
-          <p:cNvSpPr>
-            <a:spLocks xmlns:a="http://schemas.openxmlformats.org/drawingml/2006/main" noGrp="1"/>
-          </p:cNvSpPr>
-          <p:nvPr/>
-        </p:nvSpPr>
-        <p:spPr>
-          <a:xfrm xmlns:a="http://schemas.openxmlformats.org/drawingml/2006/main">
-            <a:off x="400050" y="1533525"/>
-            <a:ext cx="7753350" cy="323850"/>
-          </a:xfrm>
-          <a:prstGeom xmlns:a="http://schemas.openxmlformats.org/drawingml/2006/main" prst="rect">
-            <a:avLst/>
-          </a:prstGeom>
-          <a:noFill xmlns:a="http://schemas.openxmlformats.org/drawingml/2006/main"/>
-          <a:ln xmlns:a="http://schemas.openxmlformats.org/drawingml/2006/main" w="0">
-            <a:noFill/>
-          </a:ln>
-        </p:spPr>
-        <p:txBody>
-          <a:bodyPr xmlns:a="http://schemas.openxmlformats.org/drawingml/2006/main">
-            <a:noAutofit/>
-          </a:bodyPr>
-          <a:lstStyle xmlns:a="http://schemas.openxmlformats.org/drawingml/2006/main">
-            <a:defPPr>
-              <a:defRPr sz="1875" b="1">
-                <a:solidFill>
-                  <a:srgbClr val="183044"/>
-                </a:solidFill>
-                <a:latin typeface="Arial"/>
-                <a:ea typeface="Arial"/>
-                <a:cs typeface="Arial"/>
-              </a:defRPr>
-            </a:defPPr>
-          </a:lstStyle>
-          <a:p xmlns:a="http://schemas.openxmlformats.org/drawingml/2006/main">
-            <a:pPr>
-              <a:defRPr sz="1875" b="1">
-                <a:solidFill>
-                  <a:srgbClr val="183044"/>
-                </a:solidFill>
-                <a:latin typeface="Arial"/>
-                <a:ea typeface="Arial"/>
-                <a:cs typeface="Arial"/>
-              </a:defRPr>
-            </a:pPr>
-            <a:r>
-              <a:rPr sz="1875" b="1">
-                <a:solidFill>
-                  <a:srgbClr val="183044"/>
-                </a:solidFill>
-                <a:latin typeface="Arial"/>
-                <a:ea typeface="Arial"/>
-                <a:cs typeface="Arial"/>
-              </a:rPr>
-              <a:t>Six questions, six test results</a:t>
+              <a:t>Lab 7 compares a sample with a reference. Lab 8 compares two groups. We use α = 0.05.</a:t>
             </a:r>
           </a:p>
         </p:txBody>
       </p:sp>
       <p:graphicFrame>
         <p:nvGraphicFramePr>
-          <p:cNvPr id="6" name="">
+          <p:cNvPr id="5" name="">
             <a:extLst xmlns:a="http://schemas.openxmlformats.org/drawingml/2006/main">
               <a:ext uri="{FF2B5EF4-FFF2-40B4-BE49-F238E27FC236}">
-                <a16:creationId xmlns:a16="http://schemas.microsoft.com/office/drawing/2014/main" id="{6561665E-6528-4D0F-A2E6-1E8159A25B63}"/>
+                <a16:creationId xmlns:a16="http://schemas.microsoft.com/office/drawing/2014/main" id="{CB3189B3-AA2D-4A8C-8B63-27E4C998F75D}"/>
               </a:ext>
             </a:extLst>
           </p:cNvPr>
@@ -25894,20 +28201,20 @@
           <p:nvPr/>
         </p:nvGraphicFramePr>
         <p:xfrm>
-          <a:off xmlns:a="http://schemas.openxmlformats.org/drawingml/2006/main" x="400050" y="2038350"/>
-          <a:ext xmlns:a="http://schemas.openxmlformats.org/drawingml/2006/main" cx="7762875" cy="3171825"/>
+          <a:off xmlns:a="http://schemas.openxmlformats.org/drawingml/2006/main" x="400050" y="1581150"/>
+          <a:ext xmlns:a="http://schemas.openxmlformats.org/drawingml/2006/main" cx="11391900" cy="2009775"/>
         </p:xfrm>
         <a:graphic xmlns:a="http://schemas.openxmlformats.org/drawingml/2006/main">
           <a:graphicData uri="http://schemas.openxmlformats.org/drawingml/2006/table">
             <a:tbl>
               <a:tblPr/>
               <a:tblGrid>
-                <a:gridCol w="3238500"/>
-                <a:gridCol w="1724025"/>
-                <a:gridCol w="1876425"/>
-                <a:gridCol w="923925"/>
+                <a:gridCol w="3705225"/>
+                <a:gridCol w="2314575"/>
+                <a:gridCol w="3905250"/>
+                <a:gridCol w="1466850"/>
               </a:tblGrid>
-              <a:tr h="453118">
+              <a:tr h="401955">
                 <a:tc>
                   <a:txBody>
                     <a:bodyPr>
@@ -25917,7 +28224,7 @@
                     <a:p>
                       <a:pPr algn="l"/>
                       <a:r>
-                        <a:rPr sz="1500" b="1">
+                        <a:rPr sz="1650" b="1">
                           <a:solidFill>
                             <a:srgbClr val="FFFFFF"/>
                           </a:solidFill>
@@ -25968,7 +28275,7 @@
                     <a:p>
                       <a:pPr algn="ctr"/>
                       <a:r>
-                        <a:rPr sz="1500" b="1">
+                        <a:rPr sz="1650" b="1">
                           <a:solidFill>
                             <a:srgbClr val="FFFFFF"/>
                           </a:solidFill>
@@ -26013,7 +28320,7 @@
                     <a:p>
                       <a:pPr algn="ctr"/>
                       <a:r>
-                        <a:rPr sz="1500" b="1">
+                        <a:rPr sz="1650" b="1">
                           <a:solidFill>
                             <a:srgbClr val="FFFFFF"/>
                           </a:solidFill>
@@ -26058,7 +28365,7 @@
                     <a:p>
                       <a:pPr algn="ctr"/>
                       <a:r>
-                        <a:rPr sz="1500" b="1">
+                        <a:rPr sz="1650" b="1">
                           <a:solidFill>
                             <a:srgbClr val="FFFFFF"/>
                           </a:solidFill>
@@ -26095,7 +28402,7 @@
                   </a:tcPr>
                 </a:tc>
               </a:tr>
-              <a:tr h="453118">
+              <a:tr h="401955">
                 <a:tc>
                   <a:txBody>
                     <a:bodyPr>
@@ -26105,7 +28412,7 @@
                     <a:p>
                       <a:pPr algn="l"/>
                       <a:r>
-                        <a:rPr sz="1500" b="0">
+                        <a:rPr sz="1650" b="0">
                           <a:solidFill>
                             <a:srgbClr val="183044"/>
                           </a:solidFill>
@@ -26150,7 +28457,7 @@
                     <a:p>
                       <a:pPr algn="ctr"/>
                       <a:r>
-                        <a:rPr sz="1500" b="0">
+                        <a:rPr sz="1650" b="0">
                           <a:solidFill>
                             <a:srgbClr val="183044"/>
                           </a:solidFill>
@@ -26189,7 +28496,7 @@
                     <a:p>
                       <a:pPr algn="ctr"/>
                       <a:r>
-                        <a:rPr sz="1500" b="0">
+                        <a:rPr sz="1650" b="0">
                           <a:solidFill>
                             <a:srgbClr val="183044"/>
                           </a:solidFill>
@@ -26197,7 +28504,7 @@
                           <a:ea typeface="Arial"/>
                           <a:cs typeface="Arial"/>
                         </a:rPr>
-                        <a:t>28.40</a:t>
+                        <a:t>28.40 (above 27)</a:t>
                       </a:r>
                     </a:p>
                   </a:txBody>
@@ -26228,7 +28535,7 @@
                     <a:p>
                       <a:pPr algn="ctr"/>
                       <a:r>
-                        <a:rPr sz="1500" b="0">
+                        <a:rPr sz="1650" b="0">
                           <a:solidFill>
                             <a:srgbClr val="183044"/>
                           </a:solidFill>
@@ -26259,7 +28566,7 @@
                   </a:tcPr>
                 </a:tc>
               </a:tr>
-              <a:tr h="453118">
+              <a:tr h="401955">
                 <a:tc>
                   <a:txBody>
                     <a:bodyPr>
@@ -26269,7 +28576,7 @@
                     <a:p>
                       <a:pPr algn="l"/>
                       <a:r>
-                        <a:rPr sz="1500" b="0">
+                        <a:rPr sz="1650" b="0">
                           <a:solidFill>
                             <a:srgbClr val="183044"/>
                           </a:solidFill>
@@ -26314,7 +28621,7 @@
                     <a:p>
                       <a:pPr algn="ctr"/>
                       <a:r>
-                        <a:rPr sz="1500" b="0">
+                        <a:rPr sz="1650" b="0">
                           <a:solidFill>
                             <a:srgbClr val="183044"/>
                           </a:solidFill>
@@ -26353,7 +28660,7 @@
                     <a:p>
                       <a:pPr algn="ctr"/>
                       <a:r>
-                        <a:rPr sz="1500" b="0">
+                        <a:rPr sz="1650" b="0">
                           <a:solidFill>
                             <a:srgbClr val="183044"/>
                           </a:solidFill>
@@ -26361,7 +28668,7 @@
                           <a:ea typeface="Arial"/>
                           <a:cs typeface="Arial"/>
                         </a:rPr>
-                        <a:t>15.63%</a:t>
+                        <a:t>15.63% (above 11%)</a:t>
                       </a:r>
                     </a:p>
                   </a:txBody>
@@ -26392,7 +28699,7 @@
                     <a:p>
                       <a:pPr algn="ctr"/>
                       <a:r>
-                        <a:rPr sz="1500" b="0">
+                        <a:rPr sz="1650" b="0">
                           <a:solidFill>
                             <a:srgbClr val="183044"/>
                           </a:solidFill>
@@ -26423,7 +28730,7 @@
                   </a:tcPr>
                 </a:tc>
               </a:tr>
-              <a:tr h="453118">
+              <a:tr h="401955">
                 <a:tc>
                   <a:txBody>
                     <a:bodyPr>
@@ -26433,7 +28740,7 @@
                     <a:p>
                       <a:pPr algn="l"/>
                       <a:r>
-                        <a:rPr sz="1500" b="0">
+                        <a:rPr sz="1650" b="0">
                           <a:solidFill>
                             <a:srgbClr val="183044"/>
                           </a:solidFill>
@@ -26478,7 +28785,7 @@
                     <a:p>
                       <a:pPr algn="ctr"/>
                       <a:r>
-                        <a:rPr sz="1500" b="0">
+                        <a:rPr sz="1650" b="0">
                           <a:solidFill>
                             <a:srgbClr val="183044"/>
                           </a:solidFill>
@@ -26517,7 +28824,7 @@
                     <a:p>
                       <a:pPr algn="ctr"/>
                       <a:r>
-                        <a:rPr sz="1500" b="0">
+                        <a:rPr sz="1650" b="0">
                           <a:solidFill>
                             <a:srgbClr val="183044"/>
                           </a:solidFill>
@@ -26525,7 +28832,7 @@
                           <a:ea typeface="Arial"/>
                           <a:cs typeface="Arial"/>
                         </a:rPr>
-                        <a:t>−0.65</a:t>
+                        <a:t>-0.65 BMI units</a:t>
                       </a:r>
                     </a:p>
                   </a:txBody>
@@ -26556,7 +28863,7 @@
                     <a:p>
                       <a:pPr algn="ctr"/>
                       <a:r>
-                        <a:rPr sz="1500" b="0">
+                        <a:rPr sz="1650" b="0">
                           <a:solidFill>
                             <a:srgbClr val="183044"/>
                           </a:solidFill>
@@ -26587,7 +28894,7 @@
                   </a:tcPr>
                 </a:tc>
               </a:tr>
-              <a:tr h="453118">
+              <a:tr h="401955">
                 <a:tc>
                   <a:txBody>
                     <a:bodyPr>
@@ -26597,7 +28904,7 @@
                     <a:p>
                       <a:pPr algn="l"/>
                       <a:r>
-                        <a:rPr sz="1500" b="0">
+                        <a:rPr sz="1650" b="0">
                           <a:solidFill>
                             <a:srgbClr val="183044"/>
                           </a:solidFill>
@@ -26642,7 +28949,7 @@
                     <a:p>
                       <a:pPr algn="ctr"/>
                       <a:r>
-                        <a:rPr sz="1500" b="0">
+                        <a:rPr sz="1650" b="0">
                           <a:solidFill>
                             <a:srgbClr val="183044"/>
                           </a:solidFill>
@@ -26681,7 +28988,7 @@
                     <a:p>
                       <a:pPr algn="ctr"/>
                       <a:r>
-                        <a:rPr sz="1500" b="0">
+                        <a:rPr sz="1650" b="0">
                           <a:solidFill>
                             <a:srgbClr val="183044"/>
                           </a:solidFill>
@@ -26720,7 +29027,7 @@
                     <a:p>
                       <a:pPr algn="ctr"/>
                       <a:r>
-                        <a:rPr sz="1500" b="0">
+                        <a:rPr sz="1650" b="0">
                           <a:solidFill>
                             <a:srgbClr val="183044"/>
                           </a:solidFill>
@@ -26751,344 +29058,16 @@
                   </a:tcPr>
                 </a:tc>
               </a:tr>
-              <a:tr h="453118">
-                <a:tc>
-                  <a:txBody>
-                    <a:bodyPr>
-                      <a:noAutofit/>
-                    </a:bodyPr>
-                    <a:lstStyle/>
-                    <a:p>
-                      <a:pPr algn="l"/>
-                      <a:r>
-                        <a:rPr sz="1500" b="0">
-                          <a:solidFill>
-                            <a:srgbClr val="183044"/>
-                          </a:solidFill>
-                          <a:latin typeface="Arial"/>
-                          <a:ea typeface="Arial"/>
-                          <a:cs typeface="Arial"/>
-                        </a:rPr>
-                        <a:t>Poor-health days: female − male</a:t>
-                      </a:r>
-                    </a:p>
-                  </a:txBody>
-                  <a:tcPr marL="91440" marR="91440" marT="45720" marB="45720">
-                    <a:lnL w="9525">
-                      <a:solidFill>
-                        <a:srgbClr val="D6E0E5"/>
-                      </a:solidFill>
-                      <a:prstDash val="solid"/>
-                    </a:lnL>
-                    <a:lnR w="9525">
-                      <a:solidFill>
-                        <a:srgbClr val="D6E0E5"/>
-                      </a:solidFill>
-                      <a:prstDash val="solid"/>
-                    </a:lnR>
-                    <a:lnB w="9525">
-                      <a:solidFill>
-                        <a:srgbClr val="D6E0E5"/>
-                      </a:solidFill>
-                      <a:prstDash val="solid"/>
-                    </a:lnB>
-                    <a:solidFill>
-                      <a:srgbClr val="FFFFFF"/>
-                    </a:solidFill>
-                  </a:tcPr>
-                </a:tc>
-                <a:tc>
-                  <a:txBody>
-                    <a:bodyPr>
-                      <a:noAutofit/>
-                    </a:bodyPr>
-                    <a:lstStyle/>
-                    <a:p>
-                      <a:pPr algn="ctr"/>
-                      <a:r>
-                        <a:rPr sz="1500" b="0">
-                          <a:solidFill>
-                            <a:srgbClr val="183044"/>
-                          </a:solidFill>
-                          <a:latin typeface="Arial"/>
-                          <a:ea typeface="Arial"/>
-                          <a:cs typeface="Arial"/>
-                        </a:rPr>
-                        <a:t>Independent t</a:t>
-                      </a:r>
-                    </a:p>
-                  </a:txBody>
-                  <a:tcPr marL="91440" marR="91440" marT="45720" marB="45720">
-                    <a:lnR w="9525">
-                      <a:solidFill>
-                        <a:srgbClr val="D6E0E5"/>
-                      </a:solidFill>
-                      <a:prstDash val="solid"/>
-                    </a:lnR>
-                    <a:lnB w="9525">
-                      <a:solidFill>
-                        <a:srgbClr val="D6E0E5"/>
-                      </a:solidFill>
-                      <a:prstDash val="solid"/>
-                    </a:lnB>
-                    <a:solidFill>
-                      <a:srgbClr val="FFFFFF"/>
-                    </a:solidFill>
-                  </a:tcPr>
-                </a:tc>
-                <a:tc>
-                  <a:txBody>
-                    <a:bodyPr>
-                      <a:noAutofit/>
-                    </a:bodyPr>
-                    <a:lstStyle/>
-                    <a:p>
-                      <a:pPr algn="ctr"/>
-                      <a:r>
-                        <a:rPr sz="1500" b="0">
-                          <a:solidFill>
-                            <a:srgbClr val="183044"/>
-                          </a:solidFill>
-                          <a:latin typeface="Arial"/>
-                          <a:ea typeface="Arial"/>
-                          <a:cs typeface="Arial"/>
-                        </a:rPr>
-                        <a:t>+1.25 days</a:t>
-                      </a:r>
-                    </a:p>
-                  </a:txBody>
-                  <a:tcPr marL="91440" marR="91440" marT="45720" marB="45720">
-                    <a:lnR w="9525">
-                      <a:solidFill>
-                        <a:srgbClr val="D6E0E5"/>
-                      </a:solidFill>
-                      <a:prstDash val="solid"/>
-                    </a:lnR>
-                    <a:lnB w="9525">
-                      <a:solidFill>
-                        <a:srgbClr val="D6E0E5"/>
-                      </a:solidFill>
-                      <a:prstDash val="solid"/>
-                    </a:lnB>
-                    <a:solidFill>
-                      <a:srgbClr val="FFFFFF"/>
-                    </a:solidFill>
-                  </a:tcPr>
-                </a:tc>
-                <a:tc>
-                  <a:txBody>
-                    <a:bodyPr>
-                      <a:noAutofit/>
-                    </a:bodyPr>
-                    <a:lstStyle/>
-                    <a:p>
-                      <a:pPr algn="ctr"/>
-                      <a:r>
-                        <a:rPr sz="1500" b="0">
-                          <a:solidFill>
-                            <a:srgbClr val="183044"/>
-                          </a:solidFill>
-                          <a:latin typeface="Arial"/>
-                          <a:ea typeface="Arial"/>
-                          <a:cs typeface="Arial"/>
-                        </a:rPr>
-                        <a:t>&lt;0.001</a:t>
-                      </a:r>
-                    </a:p>
-                  </a:txBody>
-                  <a:tcPr marL="91440" marR="91440" marT="45720" marB="45720">
-                    <a:lnR w="9525">
-                      <a:solidFill>
-                        <a:srgbClr val="D6E0E5"/>
-                      </a:solidFill>
-                      <a:prstDash val="solid"/>
-                    </a:lnR>
-                    <a:lnB w="9525">
-                      <a:solidFill>
-                        <a:srgbClr val="D6E0E5"/>
-                      </a:solidFill>
-                      <a:prstDash val="solid"/>
-                    </a:lnB>
-                    <a:solidFill>
-                      <a:srgbClr val="FFFFFF"/>
-                    </a:solidFill>
-                  </a:tcPr>
-                </a:tc>
-              </a:tr>
-              <a:tr h="453118">
-                <a:tc>
-                  <a:txBody>
-                    <a:bodyPr>
-                      <a:noAutofit/>
-                    </a:bodyPr>
-                    <a:lstStyle/>
-                    <a:p>
-                      <a:pPr algn="l"/>
-                      <a:r>
-                        <a:rPr sz="1500" b="0">
-                          <a:solidFill>
-                            <a:srgbClr val="183044"/>
-                          </a:solidFill>
-                          <a:latin typeface="Arial"/>
-                          <a:ea typeface="Arial"/>
-                          <a:cs typeface="Arial"/>
-                        </a:rPr>
-                        <a:t>Weight: after − before</a:t>
-                      </a:r>
-                    </a:p>
-                  </a:txBody>
-                  <a:tcPr marL="91440" marR="91440" marT="45720" marB="45720">
-                    <a:lnL w="9525">
-                      <a:solidFill>
-                        <a:srgbClr val="D6E0E5"/>
-                      </a:solidFill>
-                      <a:prstDash val="solid"/>
-                    </a:lnL>
-                    <a:lnR w="9525">
-                      <a:solidFill>
-                        <a:srgbClr val="D6E0E5"/>
-                      </a:solidFill>
-                      <a:prstDash val="solid"/>
-                    </a:lnR>
-                    <a:lnB w="9525">
-                      <a:solidFill>
-                        <a:srgbClr val="D6E0E5"/>
-                      </a:solidFill>
-                      <a:prstDash val="solid"/>
-                    </a:lnB>
-                    <a:solidFill>
-                      <a:srgbClr val="EAF2F5"/>
-                    </a:solidFill>
-                  </a:tcPr>
-                </a:tc>
-                <a:tc>
-                  <a:txBody>
-                    <a:bodyPr>
-                      <a:noAutofit/>
-                    </a:bodyPr>
-                    <a:lstStyle/>
-                    <a:p>
-                      <a:pPr algn="ctr"/>
-                      <a:r>
-                        <a:rPr sz="1500" b="0">
-                          <a:solidFill>
-                            <a:srgbClr val="183044"/>
-                          </a:solidFill>
-                          <a:latin typeface="Arial"/>
-                          <a:ea typeface="Arial"/>
-                          <a:cs typeface="Arial"/>
-                        </a:rPr>
-                        <a:t>Paired t</a:t>
-                      </a:r>
-                    </a:p>
-                  </a:txBody>
-                  <a:tcPr marL="91440" marR="91440" marT="45720" marB="45720">
-                    <a:lnR w="9525">
-                      <a:solidFill>
-                        <a:srgbClr val="D6E0E5"/>
-                      </a:solidFill>
-                      <a:prstDash val="solid"/>
-                    </a:lnR>
-                    <a:lnB w="9525">
-                      <a:solidFill>
-                        <a:srgbClr val="D6E0E5"/>
-                      </a:solidFill>
-                      <a:prstDash val="solid"/>
-                    </a:lnB>
-                    <a:solidFill>
-                      <a:srgbClr val="EAF2F5"/>
-                    </a:solidFill>
-                  </a:tcPr>
-                </a:tc>
-                <a:tc>
-                  <a:txBody>
-                    <a:bodyPr>
-                      <a:noAutofit/>
-                    </a:bodyPr>
-                    <a:lstStyle/>
-                    <a:p>
-                      <a:pPr algn="ctr"/>
-                      <a:r>
-                        <a:rPr sz="1500" b="0">
-                          <a:solidFill>
-                            <a:srgbClr val="183044"/>
-                          </a:solidFill>
-                          <a:latin typeface="Arial"/>
-                          <a:ea typeface="Arial"/>
-                          <a:cs typeface="Arial"/>
-                        </a:rPr>
-                        <a:t>+3.01 lb</a:t>
-                      </a:r>
-                    </a:p>
-                  </a:txBody>
-                  <a:tcPr marL="91440" marR="91440" marT="45720" marB="45720">
-                    <a:lnR w="9525">
-                      <a:solidFill>
-                        <a:srgbClr val="D6E0E5"/>
-                      </a:solidFill>
-                      <a:prstDash val="solid"/>
-                    </a:lnR>
-                    <a:lnB w="9525">
-                      <a:solidFill>
-                        <a:srgbClr val="D6E0E5"/>
-                      </a:solidFill>
-                      <a:prstDash val="solid"/>
-                    </a:lnB>
-                    <a:solidFill>
-                      <a:srgbClr val="EAF2F5"/>
-                    </a:solidFill>
-                  </a:tcPr>
-                </a:tc>
-                <a:tc>
-                  <a:txBody>
-                    <a:bodyPr>
-                      <a:noAutofit/>
-                    </a:bodyPr>
-                    <a:lstStyle/>
-                    <a:p>
-                      <a:pPr algn="ctr"/>
-                      <a:r>
-                        <a:rPr sz="1500" b="0">
-                          <a:solidFill>
-                            <a:srgbClr val="183044"/>
-                          </a:solidFill>
-                          <a:latin typeface="Arial"/>
-                          <a:ea typeface="Arial"/>
-                          <a:cs typeface="Arial"/>
-                        </a:rPr>
-                        <a:t>0.035</a:t>
-                      </a:r>
-                    </a:p>
-                  </a:txBody>
-                  <a:tcPr marL="91440" marR="91440" marT="45720" marB="45720">
-                    <a:lnR w="9525">
-                      <a:solidFill>
-                        <a:srgbClr val="D6E0E5"/>
-                      </a:solidFill>
-                      <a:prstDash val="solid"/>
-                    </a:lnR>
-                    <a:lnB w="9525">
-                      <a:solidFill>
-                        <a:srgbClr val="D6E0E5"/>
-                      </a:solidFill>
-                      <a:prstDash val="solid"/>
-                    </a:lnB>
-                    <a:solidFill>
-                      <a:srgbClr val="EAF2F5"/>
-                    </a:solidFill>
-                  </a:tcPr>
-                </a:tc>
-              </a:tr>
             </a:tbl>
           </a:graphicData>
         </a:graphic>
       </p:graphicFrame>
       <p:sp>
         <p:nvSpPr>
-          <p:cNvPr id="7" name="text">
+          <p:cNvPr id="6" name="text">
             <a:extLst xmlns:a="http://schemas.openxmlformats.org/drawingml/2006/main">
               <a:ext uri="{FF2B5EF4-FFF2-40B4-BE49-F238E27FC236}">
-                <a16:creationId xmlns:a16="http://schemas.microsoft.com/office/drawing/2014/main" id="{DFCC22D6-C273-4F3D-8440-49538D624F65}"/>
+                <a16:creationId xmlns:a16="http://schemas.microsoft.com/office/drawing/2014/main" id="{C9730753-980E-4AD9-8626-857C141A9D85}"/>
               </a:ext>
             </a:extLst>
           </p:cNvPr>
@@ -27099,98 +29078,8 @@
         </p:nvSpPr>
         <p:spPr>
           <a:xfrm xmlns:a="http://schemas.openxmlformats.org/drawingml/2006/main">
-            <a:off x="8448675" y="1533525"/>
-            <a:ext cx="3333750" cy="542925"/>
-          </a:xfrm>
-          <a:prstGeom xmlns:a="http://schemas.openxmlformats.org/drawingml/2006/main" prst="rect">
-            <a:avLst/>
-          </a:prstGeom>
-          <a:noFill xmlns:a="http://schemas.openxmlformats.org/drawingml/2006/main"/>
-          <a:ln xmlns:a="http://schemas.openxmlformats.org/drawingml/2006/main" w="0">
-            <a:noFill/>
-          </a:ln>
-        </p:spPr>
-        <p:txBody>
-          <a:bodyPr xmlns:a="http://schemas.openxmlformats.org/drawingml/2006/main">
-            <a:noAutofit/>
-          </a:bodyPr>
-          <a:lstStyle xmlns:a="http://schemas.openxmlformats.org/drawingml/2006/main">
-            <a:defPPr>
-              <a:defRPr sz="1800" b="1">
-                <a:solidFill>
-                  <a:srgbClr val="183044"/>
-                </a:solidFill>
-                <a:latin typeface="Arial"/>
-                <a:ea typeface="Arial"/>
-                <a:cs typeface="Arial"/>
-              </a:defRPr>
-            </a:defPPr>
-          </a:lstStyle>
-          <a:p xmlns:a="http://schemas.openxmlformats.org/drawingml/2006/main">
-            <a:pPr>
-              <a:defRPr sz="1800" b="1">
-                <a:solidFill>
-                  <a:srgbClr val="183044"/>
-                </a:solidFill>
-                <a:latin typeface="Arial"/>
-                <a:ea typeface="Arial"/>
-                <a:cs typeface="Arial"/>
-              </a:defRPr>
-            </a:pPr>
-            <a:r>
-              <a:rPr sz="1800" b="1">
-                <a:solidFill>
-                  <a:srgbClr val="183044"/>
-                </a:solidFill>
-                <a:latin typeface="Arial"/>
-                <a:ea typeface="Arial"/>
-                <a:cs typeface="Arial"/>
-              </a:rPr>
-              <a:t>Paired example: same 29 patients</a:t>
-            </a:r>
-          </a:p>
-        </p:txBody>
-      </p:sp>
-      <p:graphicFrame>
-        <p:nvGraphicFramePr>
-          <p:cNvPr id="8" name="Chart">
-            <a:extLst xmlns:a="http://schemas.openxmlformats.org/drawingml/2006/main">
-              <a:ext uri="{FF2B5EF4-FFF2-40B4-BE49-F238E27FC236}">
-                <a16:creationId xmlns:a16="http://schemas.microsoft.com/office/drawing/2014/main" id="{D11CD604-4149-4B39-B5CD-F2895215B1BC}"/>
-              </a:ext>
-            </a:extLst>
-          </p:cNvPr>
-          <p:cNvGraphicFramePr/>
-          <p:nvPr/>
-        </p:nvGraphicFramePr>
-        <p:xfrm>
-          <a:off xmlns:a="http://schemas.openxmlformats.org/drawingml/2006/main" x="8334375" y="2276475"/>
-          <a:ext xmlns:a="http://schemas.openxmlformats.org/drawingml/2006/main" cx="3457575" cy="2714625"/>
-        </p:xfrm>
-        <a:graphic xmlns:a="http://schemas.openxmlformats.org/drawingml/2006/main">
-          <a:graphicData uri="http://schemas.openxmlformats.org/drawingml/2006/chart">
-            <c:chart xmlns:r="http://schemas.openxmlformats.org/officeDocument/2006/relationships" xmlns:c="http://schemas.openxmlformats.org/drawingml/2006/chart" r:id="R52d85346903c4bd3"/>
-          </a:graphicData>
-        </a:graphic>
-      </p:graphicFrame>
-      <p:sp>
-        <p:nvSpPr>
-          <p:cNvPr id="9" name="text">
-            <a:extLst xmlns:a="http://schemas.openxmlformats.org/drawingml/2006/main">
-              <a:ext uri="{FF2B5EF4-FFF2-40B4-BE49-F238E27FC236}">
-                <a16:creationId xmlns:a16="http://schemas.microsoft.com/office/drawing/2014/main" id="{D53CE73D-0FCC-4A47-B3BC-E09895A610FE}"/>
-              </a:ext>
-            </a:extLst>
-          </p:cNvPr>
-          <p:cNvSpPr>
-            <a:spLocks xmlns:a="http://schemas.openxmlformats.org/drawingml/2006/main" noGrp="1"/>
-          </p:cNvSpPr>
-          <p:nvPr/>
-        </p:nvSpPr>
-        <p:spPr>
-          <a:xfrm xmlns:a="http://schemas.openxmlformats.org/drawingml/2006/main">
-            <a:off x="8448675" y="5181600"/>
-            <a:ext cx="3333750" cy="619125"/>
+            <a:off x="400050" y="3752850"/>
+            <a:ext cx="5505450" cy="314325"/>
           </a:xfrm>
           <a:prstGeom xmlns:a="http://schemas.openxmlformats.org/drawingml/2006/main" prst="rect">
             <a:avLst/>
@@ -27236,40 +29125,17 @@
                 <a:ea typeface="Arial"/>
                 <a:cs typeface="Arial"/>
               </a:rPr>
-              <a:t>Mean gain: +3.01 lb</a:t>
-            </a:r>
-          </a:p>
-          <a:p xmlns:a="http://schemas.openxmlformats.org/drawingml/2006/main">
-            <a:pPr>
-              <a:defRPr sz="1725" b="1">
-                <a:solidFill>
-                  <a:srgbClr val="176D8C"/>
-                </a:solidFill>
-                <a:latin typeface="Arial"/>
-                <a:ea typeface="Arial"/>
-                <a:cs typeface="Arial"/>
-              </a:defRPr>
-            </a:pPr>
-            <a:r>
-              <a:rPr sz="1725" b="1">
-                <a:solidFill>
-                  <a:srgbClr val="176D8C"/>
-                </a:solidFill>
-                <a:latin typeface="Arial"/>
-                <a:ea typeface="Arial"/>
-                <a:cs typeface="Arial"/>
-              </a:rPr>
-              <a:t>95% CI: +0.23 to +5.79 lb</a:t>
+              <a:t>BMI: compare female and male means</a:t>
             </a:r>
           </a:p>
         </p:txBody>
       </p:sp>
       <p:sp>
         <p:nvSpPr>
-          <p:cNvPr id="10" name="text">
+          <p:cNvPr id="7" name="text">
             <a:extLst xmlns:a="http://schemas.openxmlformats.org/drawingml/2006/main">
               <a:ext uri="{FF2B5EF4-FFF2-40B4-BE49-F238E27FC236}">
-                <a16:creationId xmlns:a16="http://schemas.microsoft.com/office/drawing/2014/main" id="{A05F0091-08A0-41F9-8B54-AA3B74B36A06}"/>
+                <a16:creationId xmlns:a16="http://schemas.microsoft.com/office/drawing/2014/main" id="{10E8E932-1655-480A-8F66-7AB26A27FE3B}"/>
               </a:ext>
             </a:extLst>
           </p:cNvPr>
@@ -27280,8 +29146,8 @@
         </p:nvSpPr>
         <p:spPr>
           <a:xfrm xmlns:a="http://schemas.openxmlformats.org/drawingml/2006/main">
-            <a:off x="400050" y="5486400"/>
-            <a:ext cx="7724775" cy="447675"/>
+            <a:off x="6362700" y="3752850"/>
+            <a:ext cx="5448300" cy="314325"/>
           </a:xfrm>
           <a:prstGeom xmlns:a="http://schemas.openxmlformats.org/drawingml/2006/main" prst="rect">
             <a:avLst/>
@@ -27297,9 +29163,9 @@
           </a:bodyPr>
           <a:lstStyle xmlns:a="http://schemas.openxmlformats.org/drawingml/2006/main">
             <a:defPPr>
-              <a:defRPr sz="1575" b="0">
-                <a:solidFill>
-                  <a:srgbClr val="415566"/>
+              <a:defRPr sz="1725" b="1">
+                <a:solidFill>
+                  <a:srgbClr val="176D8C"/>
                 </a:solidFill>
                 <a:latin typeface="Arial"/>
                 <a:ea typeface="Arial"/>
@@ -27309,9 +29175,9 @@
           </a:lstStyle>
           <a:p xmlns:a="http://schemas.openxmlformats.org/drawingml/2006/main">
             <a:pPr>
-              <a:defRPr sz="1575" b="0">
-                <a:solidFill>
-                  <a:srgbClr val="415566"/>
+              <a:defRPr sz="1725" b="1">
+                <a:solidFill>
+                  <a:srgbClr val="176D8C"/>
                 </a:solidFill>
                 <a:latin typeface="Arial"/>
                 <a:ea typeface="Arial"/>
@@ -27319,25 +29185,251 @@
               </a:defRPr>
             </a:pPr>
             <a:r>
-              <a:rPr sz="1575" b="0">
-                <a:solidFill>
-                  <a:srgbClr val="415566"/>
+              <a:rPr sz="1725" b="1">
+                <a:solidFill>
+                  <a:srgbClr val="176D8C"/>
                 </a:solidFill>
                 <a:latin typeface="Arial"/>
                 <a:ea typeface="Arial"/>
                 <a:cs typeface="Arial"/>
               </a:rPr>
-              <a:t>Reference values 27 and 11% are classroom assumptions.</a:t>
+              <a:t>Positive status: compare smoking groups</a:t>
+            </a:r>
+          </a:p>
+        </p:txBody>
+      </p:sp>
+      <p:graphicFrame>
+        <p:nvGraphicFramePr>
+          <p:cNvPr id="8" name="Chart">
+            <a:extLst xmlns:a="http://schemas.openxmlformats.org/drawingml/2006/main">
+              <a:ext uri="{FF2B5EF4-FFF2-40B4-BE49-F238E27FC236}">
+                <a16:creationId xmlns:a16="http://schemas.microsoft.com/office/drawing/2014/main" id="{21EC13C8-921D-4715-9107-AF708D9EDBA7}"/>
+              </a:ext>
+            </a:extLst>
+          </p:cNvPr>
+          <p:cNvGraphicFramePr/>
+          <p:nvPr/>
+        </p:nvGraphicFramePr>
+        <p:xfrm>
+          <a:off xmlns:a="http://schemas.openxmlformats.org/drawingml/2006/main" x="257175" y="4086225"/>
+          <a:ext xmlns:a="http://schemas.openxmlformats.org/drawingml/2006/main" cx="5572125" cy="1495425"/>
+        </p:xfrm>
+        <a:graphic xmlns:a="http://schemas.openxmlformats.org/drawingml/2006/main">
+          <a:graphicData uri="http://schemas.openxmlformats.org/drawingml/2006/chart">
+            <c:chart xmlns:r="http://schemas.openxmlformats.org/officeDocument/2006/relationships" xmlns:c="http://schemas.openxmlformats.org/drawingml/2006/chart" r:id="Rb018e4c5a85448e4"/>
+          </a:graphicData>
+        </a:graphic>
+      </p:graphicFrame>
+      <p:graphicFrame>
+        <p:nvGraphicFramePr>
+          <p:cNvPr id="9" name="Chart">
+            <a:extLst xmlns:a="http://schemas.openxmlformats.org/drawingml/2006/main">
+              <a:ext uri="{FF2B5EF4-FFF2-40B4-BE49-F238E27FC236}">
+                <a16:creationId xmlns:a16="http://schemas.microsoft.com/office/drawing/2014/main" id="{81ED09CE-42C1-41B4-B135-B9106861F560}"/>
+              </a:ext>
+            </a:extLst>
+          </p:cNvPr>
+          <p:cNvGraphicFramePr/>
+          <p:nvPr/>
+        </p:nvGraphicFramePr>
+        <p:xfrm>
+          <a:off xmlns:a="http://schemas.openxmlformats.org/drawingml/2006/main" x="6229350" y="4086225"/>
+          <a:ext xmlns:a="http://schemas.openxmlformats.org/drawingml/2006/main" cx="5572125" cy="1495425"/>
+        </p:xfrm>
+        <a:graphic xmlns:a="http://schemas.openxmlformats.org/drawingml/2006/main">
+          <a:graphicData uri="http://schemas.openxmlformats.org/drawingml/2006/chart">
+            <c:chart xmlns:r="http://schemas.openxmlformats.org/officeDocument/2006/relationships" xmlns:c="http://schemas.openxmlformats.org/drawingml/2006/chart" r:id="R9c3a92a8c6cc4bf6"/>
+          </a:graphicData>
+        </a:graphic>
+      </p:graphicFrame>
+      <p:sp>
+        <p:nvSpPr>
+          <p:cNvPr id="10" name="text">
+            <a:extLst xmlns:a="http://schemas.openxmlformats.org/drawingml/2006/main">
+              <a:ext uri="{FF2B5EF4-FFF2-40B4-BE49-F238E27FC236}">
+                <a16:creationId xmlns:a16="http://schemas.microsoft.com/office/drawing/2014/main" id="{8F8BCD11-B3E1-43CA-BE33-A20806014D46}"/>
+              </a:ext>
+            </a:extLst>
+          </p:cNvPr>
+          <p:cNvSpPr>
+            <a:spLocks xmlns:a="http://schemas.openxmlformats.org/drawingml/2006/main" noGrp="1"/>
+          </p:cNvSpPr>
+          <p:nvPr/>
+        </p:nvSpPr>
+        <p:spPr>
+          <a:xfrm xmlns:a="http://schemas.openxmlformats.org/drawingml/2006/main">
+            <a:off x="400050" y="5600700"/>
+            <a:ext cx="5524500" cy="457200"/>
+          </a:xfrm>
+          <a:prstGeom xmlns:a="http://schemas.openxmlformats.org/drawingml/2006/main" prst="rect">
+            <a:avLst/>
+          </a:prstGeom>
+          <a:noFill xmlns:a="http://schemas.openxmlformats.org/drawingml/2006/main"/>
+          <a:ln xmlns:a="http://schemas.openxmlformats.org/drawingml/2006/main" w="0">
+            <a:noFill/>
+          </a:ln>
+        </p:spPr>
+        <p:txBody>
+          <a:bodyPr xmlns:a="http://schemas.openxmlformats.org/drawingml/2006/main">
+            <a:noAutofit/>
+          </a:bodyPr>
+          <a:lstStyle xmlns:a="http://schemas.openxmlformats.org/drawingml/2006/main">
+            <a:defPPr>
+              <a:defRPr sz="1500" b="0">
+                <a:solidFill>
+                  <a:srgbClr val="183044"/>
+                </a:solidFill>
+                <a:latin typeface="Arial"/>
+                <a:ea typeface="Arial"/>
+                <a:cs typeface="Arial"/>
+              </a:defRPr>
+            </a:defPPr>
+          </a:lstStyle>
+          <a:p xmlns:a="http://schemas.openxmlformats.org/drawingml/2006/main">
+            <a:pPr>
+              <a:defRPr sz="1500" b="0">
+                <a:solidFill>
+                  <a:srgbClr val="183044"/>
+                </a:solidFill>
+                <a:latin typeface="Arial"/>
+                <a:ea typeface="Arial"/>
+                <a:cs typeface="Arial"/>
+              </a:defRPr>
+            </a:pPr>
+            <a:r>
+              <a:rPr sz="1500" b="0">
+                <a:solidFill>
+                  <a:srgbClr val="183044"/>
+                </a:solidFill>
+                <a:latin typeface="Arial"/>
+                <a:ea typeface="Arial"/>
+                <a:cs typeface="Arial"/>
+              </a:rPr>
+              <a:t>Female − male: -0.65 BMI units.</a:t>
+            </a:r>
+          </a:p>
+          <a:p xmlns:a="http://schemas.openxmlformats.org/drawingml/2006/main">
+            <a:pPr>
+              <a:defRPr sz="1500" b="0">
+                <a:solidFill>
+                  <a:srgbClr val="183044"/>
+                </a:solidFill>
+                <a:latin typeface="Arial"/>
+                <a:ea typeface="Arial"/>
+                <a:cs typeface="Arial"/>
+              </a:defRPr>
+            </a:pPr>
+            <a:r>
+              <a:rPr sz="1500" b="0">
+                <a:solidFill>
+                  <a:srgbClr val="183044"/>
+                </a:solidFill>
+                <a:latin typeface="Arial"/>
+                <a:ea typeface="Arial"/>
+                <a:cs typeface="Arial"/>
+              </a:rPr>
+              <a:t>95% CI: -1.10 to -0.20.</a:t>
             </a:r>
           </a:p>
         </p:txBody>
       </p:sp>
       <p:sp>
         <p:nvSpPr>
-          <p:cNvPr id="11" name="">
+          <p:cNvPr id="11" name="text">
             <a:extLst xmlns:a="http://schemas.openxmlformats.org/drawingml/2006/main">
               <a:ext uri="{FF2B5EF4-FFF2-40B4-BE49-F238E27FC236}">
-                <a16:creationId xmlns:a16="http://schemas.microsoft.com/office/drawing/2014/main" id="{DCDE190B-5844-4A08-988F-A187FFE78902}"/>
+                <a16:creationId xmlns:a16="http://schemas.microsoft.com/office/drawing/2014/main" id="{CEFDBDC1-5578-4F64-A83A-7C8C7CE44102}"/>
+              </a:ext>
+            </a:extLst>
+          </p:cNvPr>
+          <p:cNvSpPr>
+            <a:spLocks xmlns:a="http://schemas.openxmlformats.org/drawingml/2006/main" noGrp="1"/>
+          </p:cNvSpPr>
+          <p:nvPr/>
+        </p:nvSpPr>
+        <p:spPr>
+          <a:xfrm xmlns:a="http://schemas.openxmlformats.org/drawingml/2006/main">
+            <a:off x="6362700" y="5600700"/>
+            <a:ext cx="5448300" cy="457200"/>
+          </a:xfrm>
+          <a:prstGeom xmlns:a="http://schemas.openxmlformats.org/drawingml/2006/main" prst="rect">
+            <a:avLst/>
+          </a:prstGeom>
+          <a:noFill xmlns:a="http://schemas.openxmlformats.org/drawingml/2006/main"/>
+          <a:ln xmlns:a="http://schemas.openxmlformats.org/drawingml/2006/main" w="0">
+            <a:noFill/>
+          </a:ln>
+        </p:spPr>
+        <p:txBody>
+          <a:bodyPr xmlns:a="http://schemas.openxmlformats.org/drawingml/2006/main">
+            <a:noAutofit/>
+          </a:bodyPr>
+          <a:lstStyle xmlns:a="http://schemas.openxmlformats.org/drawingml/2006/main">
+            <a:defPPr>
+              <a:defRPr sz="1500" b="0">
+                <a:solidFill>
+                  <a:srgbClr val="183044"/>
+                </a:solidFill>
+                <a:latin typeface="Arial"/>
+                <a:ea typeface="Arial"/>
+                <a:cs typeface="Arial"/>
+              </a:defRPr>
+            </a:defPPr>
+          </a:lstStyle>
+          <a:p xmlns:a="http://schemas.openxmlformats.org/drawingml/2006/main">
+            <a:pPr>
+              <a:defRPr sz="1500" b="0">
+                <a:solidFill>
+                  <a:srgbClr val="183044"/>
+                </a:solidFill>
+                <a:latin typeface="Arial"/>
+                <a:ea typeface="Arial"/>
+                <a:cs typeface="Arial"/>
+              </a:defRPr>
+            </a:pPr>
+            <a:r>
+              <a:rPr sz="1500" b="0">
+                <a:solidFill>
+                  <a:srgbClr val="183044"/>
+                </a:solidFill>
+                <a:latin typeface="Arial"/>
+                <a:ea typeface="Arial"/>
+                <a:cs typeface="Arial"/>
+              </a:rPr>
+              <a:t>Never − ever: -3.27 percentage points.</a:t>
+            </a:r>
+          </a:p>
+          <a:p xmlns:a="http://schemas.openxmlformats.org/drawingml/2006/main">
+            <a:pPr>
+              <a:defRPr sz="1500" b="0">
+                <a:solidFill>
+                  <a:srgbClr val="183044"/>
+                </a:solidFill>
+                <a:latin typeface="Arial"/>
+                <a:ea typeface="Arial"/>
+                <a:cs typeface="Arial"/>
+              </a:defRPr>
+            </a:pPr>
+            <a:r>
+              <a:rPr sz="1500" b="0">
+                <a:solidFill>
+                  <a:srgbClr val="183044"/>
+                </a:solidFill>
+                <a:latin typeface="Arial"/>
+                <a:ea typeface="Arial"/>
+                <a:cs typeface="Arial"/>
+              </a:rPr>
+              <a:t>95% CI: -5.95 to -0.59 points.</a:t>
+            </a:r>
+          </a:p>
+        </p:txBody>
+      </p:sp>
+      <p:sp>
+        <p:nvSpPr>
+          <p:cNvPr id="12" name="">
+            <a:extLst xmlns:a="http://schemas.openxmlformats.org/drawingml/2006/main">
+              <a:ext uri="{FF2B5EF4-FFF2-40B4-BE49-F238E27FC236}">
+                <a16:creationId xmlns:a16="http://schemas.microsoft.com/office/drawing/2014/main" id="{1A46B5CD-D818-44AF-B422-70D6D844043D}"/>
               </a:ext>
             </a:extLst>
           </p:cNvPr>
@@ -27364,10 +29456,10 @@
       </p:sp>
       <p:sp>
         <p:nvSpPr>
-          <p:cNvPr id="12" name="text">
+          <p:cNvPr id="13" name="text">
             <a:extLst xmlns:a="http://schemas.openxmlformats.org/drawingml/2006/main">
               <a:ext uri="{FF2B5EF4-FFF2-40B4-BE49-F238E27FC236}">
-                <a16:creationId xmlns:a16="http://schemas.microsoft.com/office/drawing/2014/main" id="{F411BE6D-E3F3-40C9-9963-56BF3D5F5A2A}"/>
+                <a16:creationId xmlns:a16="http://schemas.microsoft.com/office/drawing/2014/main" id="{1B379733-C18B-4C0B-8156-FE8919FF5E2C}"/>
               </a:ext>
             </a:extLst>
           </p:cNvPr>
@@ -27425,17 +29517,17 @@
                 <a:ea typeface="Arial"/>
                 <a:cs typeface="Arial"/>
               </a:rPr>
-              <a:t>Paired tests compare the same people twice. Independent tests compare different groups.</a:t>
+              <a:t>All four tests find differences at p &lt; 0.05. References 27 and 11% are classroom assumptions.</a:t>
             </a:r>
           </a:p>
         </p:txBody>
       </p:sp>
       <p:sp>
         <p:nvSpPr>
-          <p:cNvPr id="13" name="text">
+          <p:cNvPr id="14" name="text">
             <a:extLst xmlns:a="http://schemas.openxmlformats.org/drawingml/2006/main">
               <a:ext uri="{FF2B5EF4-FFF2-40B4-BE49-F238E27FC236}">
-                <a16:creationId xmlns:a16="http://schemas.microsoft.com/office/drawing/2014/main" id="{581FA16E-2B40-404B-810D-465508B1A43B}"/>
+                <a16:creationId xmlns:a16="http://schemas.microsoft.com/office/drawing/2014/main" id="{4566213D-B919-4D39-8A45-C48F2019D5CF}"/>
               </a:ext>
             </a:extLst>
           </p:cNvPr>
@@ -27493,7 +29585,7 @@
                 <a:ea typeface="Arial"/>
                 <a:cs typeface="Arial"/>
               </a:rPr>
-              <a:t>8 / 11</a:t>
+              <a:t>8 / 12</a:t>
             </a:r>
           </a:p>
         </p:txBody>
@@ -27501,7 +29593,7 @@
     </p:spTree>
     <p:extLst>
       <p:ext uri="{BB962C8B-B14F-4D97-AF65-F5344CB8AC3E}">
-        <p14:creationId xmlns:p14="http://schemas.microsoft.com/office/powerpoint/2010/main" val="1215282883"/>
+        <p14:creationId xmlns:p14="http://schemas.microsoft.com/office/powerpoint/2010/main" val="755091194"/>
       </p:ext>
     </p:extLst>
   </p:cSld>

--- a/submission/Diabetes_Statistics_Presentation.pptx
+++ b/submission/Diabetes_Statistics_Presentation.pptx
@@ -2,25 +2,25 @@
 <file path=ppt/presentation.xml><?xml version="1.0" encoding="utf-8"?>
 <p:presentation xmlns:p="http://schemas.openxmlformats.org/presentationml/2006/main">
   <p:sldMasterIdLst>
-    <p:sldMasterId xmlns:r="http://schemas.openxmlformats.org/officeDocument/2006/relationships" id="2147483648" r:id="Rd46a8a1e917745f2"/>
+    <p:sldMasterId xmlns:r="http://schemas.openxmlformats.org/officeDocument/2006/relationships" id="2147483648" r:id="R5dfdd3ee8284462f"/>
   </p:sldMasterIdLst>
   <p:notesMasterIdLst>
-    <p:notesMasterId xmlns:r="http://schemas.openxmlformats.org/officeDocument/2006/relationships" r:id="R4454d24151aa4079"/>
+    <p:notesMasterId xmlns:r="http://schemas.openxmlformats.org/officeDocument/2006/relationships" r:id="Rab66ff16346a4e09"/>
   </p:notesMasterIdLst>
   <p:sldIdLst>
-    <p:sldId xmlns:r="http://schemas.openxmlformats.org/officeDocument/2006/relationships" id="256" r:id="Rf516ea4fde85476c"/>
-    <p:sldId xmlns:r="http://schemas.openxmlformats.org/officeDocument/2006/relationships" id="257" r:id="R20dd35349a324db1"/>
-    <p:sldId xmlns:r="http://schemas.openxmlformats.org/officeDocument/2006/relationships" id="258" r:id="R83cd2c4d9020450d"/>
-    <p:sldId xmlns:r="http://schemas.openxmlformats.org/officeDocument/2006/relationships" id="259" r:id="Ree590c06e93e4134"/>
-    <p:sldId xmlns:r="http://schemas.openxmlformats.org/officeDocument/2006/relationships" id="260" r:id="R23259eee1a914b98"/>
-    <p:sldId xmlns:r="http://schemas.openxmlformats.org/officeDocument/2006/relationships" id="261" r:id="R18c4286989ba4c8c"/>
-    <p:sldId xmlns:r="http://schemas.openxmlformats.org/officeDocument/2006/relationships" id="262" r:id="R7325a8d7d6bf4111"/>
-    <p:sldId xmlns:r="http://schemas.openxmlformats.org/officeDocument/2006/relationships" id="263" r:id="R94968a0b0b484374"/>
-    <p:sldId xmlns:r="http://schemas.openxmlformats.org/officeDocument/2006/relationships" id="264" r:id="R9936bd10539243df"/>
-    <p:sldId xmlns:r="http://schemas.openxmlformats.org/officeDocument/2006/relationships" id="265" r:id="R10a154c06622453d"/>
-    <p:sldId xmlns:r="http://schemas.openxmlformats.org/officeDocument/2006/relationships" id="266" r:id="R46ba7fef87a04e1a"/>
-    <p:sldId xmlns:r="http://schemas.openxmlformats.org/officeDocument/2006/relationships" id="267" r:id="R0a1a580112bf4565"/>
-    <p:sldId xmlns:r="http://schemas.openxmlformats.org/officeDocument/2006/relationships" id="268" r:id="R2f9030ab96094b3c"/>
+    <p:sldId xmlns:r="http://schemas.openxmlformats.org/officeDocument/2006/relationships" id="256" r:id="Rff0e763b924e4e5c"/>
+    <p:sldId xmlns:r="http://schemas.openxmlformats.org/officeDocument/2006/relationships" id="257" r:id="Ra55840b4b39e4c5b"/>
+    <p:sldId xmlns:r="http://schemas.openxmlformats.org/officeDocument/2006/relationships" id="258" r:id="R295f3effca124dda"/>
+    <p:sldId xmlns:r="http://schemas.openxmlformats.org/officeDocument/2006/relationships" id="259" r:id="R38498b8238bb47aa"/>
+    <p:sldId xmlns:r="http://schemas.openxmlformats.org/officeDocument/2006/relationships" id="260" r:id="Rf662ea2871894291"/>
+    <p:sldId xmlns:r="http://schemas.openxmlformats.org/officeDocument/2006/relationships" id="261" r:id="Re354156334e14b77"/>
+    <p:sldId xmlns:r="http://schemas.openxmlformats.org/officeDocument/2006/relationships" id="262" r:id="R950982e6afd34152"/>
+    <p:sldId xmlns:r="http://schemas.openxmlformats.org/officeDocument/2006/relationships" id="263" r:id="Re74ab520fb9b4e30"/>
+    <p:sldId xmlns:r="http://schemas.openxmlformats.org/officeDocument/2006/relationships" id="264" r:id="R6840e570c5f44f5f"/>
+    <p:sldId xmlns:r="http://schemas.openxmlformats.org/officeDocument/2006/relationships" id="265" r:id="R6d0579074657446c"/>
+    <p:sldId xmlns:r="http://schemas.openxmlformats.org/officeDocument/2006/relationships" id="266" r:id="Rf4124247a42a46e1"/>
+    <p:sldId xmlns:r="http://schemas.openxmlformats.org/officeDocument/2006/relationships" id="267" r:id="R670690ead42f4cbf"/>
+    <p:sldId xmlns:r="http://schemas.openxmlformats.org/officeDocument/2006/relationships" id="268" r:id="Rc6c08d708a9b4a90"/>
   </p:sldIdLst>
   <p:sldSz cx="12192000" cy="6858000"/>
   <p:notesSz cx="6858000" cy="9144000"/>
@@ -829,7 +829,7 @@
           <a:lstStyle xmlns:a="http://schemas.openxmlformats.org/drawingml/2006/main"/>
           <a:p xmlns:a="http://schemas.openxmlformats.org/drawingml/2006/main">
             <a:r>
-              <a:t>Course Experiment 11. BMI by education is observational ANOVA, F14.4064,p&lt;.001,eta-square .02349. Unequal variances motivate Welch p .000351 and Holm separate-variance pair comparisons. Genuine Cochran potato CRD:32 plots,7 sulfur treatments,F3.6081,p .010262; control8 replicates,others4 each; Tukey control-minus-F12 difference16.875 percentage points,p .005965. Gomez rice complete-block design:24 plots,6 rates,4 blocks. Block F5.8622,p .007416; rate F2.1678,p .112809. Residual MSE decreases from200152 to110558,44.76%. Goulden wheat Latin Square:5 treatments in5 rows and5 columns. Row p .01328,column p .26343,treatment F21.0321,p .00002366; Cweeklydusting mean13.12 exceeds each other treatment with Tukey adjustment. Yield units unspecified for wheat, kg/ha for rice. Models are additive with negligible interaction assumed; genuine published designs are separate from survey data. Suggested time: 145 seconds.</a:t>
+              <a:t>Course Experiment 11 using only observed BRFSS data. CRD-form one-way BMI~Education uses all3000 records and6education groups: F14.4064,df5,2994,p&lt;.001. Education was observed, not randomly assigned. RBD-structure subset uses4age blocks (18-39,40-54,55-69,70+) and4education groups (Some high school,High school,Some college,College graduate),10actualrespondents per age×education cell,n160. Seed10111 selects within eligible cells without examining BMI. Model BMI~age_block+Education, education partial F3.13766,df3,153,p .027183. Latin matched layout uses4age rows and4income columns (&lt;20k,20-35k,35-75k,75k+). Cyclic letters A/B/C/D represent those4education groups, each once in each row/column. Seed10112 selects one actual respondent per required age×income×education cell, n16, no duplicates. Model BMI~age_block+income_block+Education, education F3.28448,df3,6,p .100227. The small Latin example does not reject equal adjusted education means at .05. No BMI values are fabricated; matching/selection uses category membership, not the outcome. Balanced layouts are retrospective illustrations, not randomized experiments or causal estimates. Full-sample Welch ANOVA p .000351; separate-variance Holm comparisons graduate-minus-high-school−2.3097BMI and graduate-minus-some-college−1.4903BMI bothp&lt;.001. These checks concern the full-sample comparison, not the matched subsets. Source-row ledgers and balance checks are saved. Suggested time: 145 seconds.</a:t>
             </a:r>
           </a:p>
           <a:p xmlns:a="http://schemas.openxmlformats.org/drawingml/2006/main">
@@ -2056,7 +2056,7 @@
           <p:cNvPr id="3" name="Title">
             <a:extLst xmlns:a="http://schemas.openxmlformats.org/drawingml/2006/main">
               <a:ext uri="{FF2B5EF4-FFF2-40B4-BE49-F238E27FC236}">
-                <a16:creationId xmlns:a16="http://schemas.microsoft.com/office/drawing/2014/main" id="{15F2FDB9-DDB1-4860-9A30-3F5F1E1EC4C7}"/>
+                <a16:creationId xmlns:a16="http://schemas.microsoft.com/office/drawing/2014/main" id="{979A6725-6014-46AB-BE1D-94129A5C3526}"/>
               </a:ext>
             </a:extLst>
           </p:cNvPr>
@@ -2213,7 +2213,7 @@
           <p:cNvPr id="2" name="Subtitle">
             <a:extLst xmlns:a="http://schemas.openxmlformats.org/drawingml/2006/main">
               <a:ext uri="{FF2B5EF4-FFF2-40B4-BE49-F238E27FC236}">
-                <a16:creationId xmlns:a16="http://schemas.microsoft.com/office/drawing/2014/main" id="{0B27ECE4-9F91-4C2B-891C-6636437E0476}"/>
+                <a16:creationId xmlns:a16="http://schemas.microsoft.com/office/drawing/2014/main" id="{AA5D385F-6A7B-4574-84CE-A0CCC9E46AD2}"/>
               </a:ext>
             </a:extLst>
           </p:cNvPr>
@@ -2387,7 +2387,7 @@
           <p:cNvPr id="2" name="Section title">
             <a:extLst xmlns:a="http://schemas.openxmlformats.org/drawingml/2006/main">
               <a:ext uri="{FF2B5EF4-FFF2-40B4-BE49-F238E27FC236}">
-                <a16:creationId xmlns:a16="http://schemas.microsoft.com/office/drawing/2014/main" id="{E9430536-90DE-42C4-9F63-063DC68C7855}"/>
+                <a16:creationId xmlns:a16="http://schemas.microsoft.com/office/drawing/2014/main" id="{A7E7CFD2-BD02-4B10-BE18-A699CBB1C32D}"/>
               </a:ext>
             </a:extLst>
           </p:cNvPr>
@@ -2561,7 +2561,7 @@
           <p:cNvPr id="3" name="Title">
             <a:extLst xmlns:a="http://schemas.openxmlformats.org/drawingml/2006/main">
               <a:ext uri="{FF2B5EF4-FFF2-40B4-BE49-F238E27FC236}">
-                <a16:creationId xmlns:a16="http://schemas.microsoft.com/office/drawing/2014/main" id="{777F2F77-BDE7-4492-BFB8-2D14061188A6}"/>
+                <a16:creationId xmlns:a16="http://schemas.microsoft.com/office/drawing/2014/main" id="{FC171091-1C91-4EC4-A6F7-B29AEE5AB93F}"/>
               </a:ext>
             </a:extLst>
           </p:cNvPr>
@@ -2718,7 +2718,7 @@
           <p:cNvPr id="2" name="Body">
             <a:extLst xmlns:a="http://schemas.openxmlformats.org/drawingml/2006/main">
               <a:ext uri="{FF2B5EF4-FFF2-40B4-BE49-F238E27FC236}">
-                <a16:creationId xmlns:a16="http://schemas.microsoft.com/office/drawing/2014/main" id="{3D3F2B60-AB2E-4241-973F-DADB80A05F2C}"/>
+                <a16:creationId xmlns:a16="http://schemas.microsoft.com/office/drawing/2014/main" id="{1E0B7EC2-6FA0-482A-A352-65CE8A881C62}"/>
               </a:ext>
             </a:extLst>
           </p:cNvPr>
@@ -2892,7 +2892,7 @@
           <p:cNvPr id="4" name="Title">
             <a:extLst xmlns:a="http://schemas.openxmlformats.org/drawingml/2006/main">
               <a:ext uri="{FF2B5EF4-FFF2-40B4-BE49-F238E27FC236}">
-                <a16:creationId xmlns:a16="http://schemas.microsoft.com/office/drawing/2014/main" id="{EB54C296-BD40-48B5-8E68-66F1D74C453D}"/>
+                <a16:creationId xmlns:a16="http://schemas.microsoft.com/office/drawing/2014/main" id="{2615CAE9-F407-48AF-A4C0-3DCF29CCE21A}"/>
               </a:ext>
             </a:extLst>
           </p:cNvPr>
@@ -3049,7 +3049,7 @@
           <p:cNvPr id="2" name="Left column">
             <a:extLst xmlns:a="http://schemas.openxmlformats.org/drawingml/2006/main">
               <a:ext uri="{FF2B5EF4-FFF2-40B4-BE49-F238E27FC236}">
-                <a16:creationId xmlns:a16="http://schemas.microsoft.com/office/drawing/2014/main" id="{760B2F3C-F111-4FC0-B146-CD346EAE8C69}"/>
+                <a16:creationId xmlns:a16="http://schemas.microsoft.com/office/drawing/2014/main" id="{41411C9E-DC4D-499C-84A6-2497C8209A0F}"/>
               </a:ext>
             </a:extLst>
           </p:cNvPr>
@@ -3206,7 +3206,7 @@
           <p:cNvPr id="3" name="Right column">
             <a:extLst xmlns:a="http://schemas.openxmlformats.org/drawingml/2006/main">
               <a:ext uri="{FF2B5EF4-FFF2-40B4-BE49-F238E27FC236}">
-                <a16:creationId xmlns:a16="http://schemas.microsoft.com/office/drawing/2014/main" id="{4C1FF995-7097-40E9-A7FE-FF95460743AF}"/>
+                <a16:creationId xmlns:a16="http://schemas.microsoft.com/office/drawing/2014/main" id="{933D3415-46D5-46A7-8847-4AE145B49510}"/>
               </a:ext>
             </a:extLst>
           </p:cNvPr>
@@ -3380,7 +3380,7 @@
           <p:cNvPr id="3" name="Title">
             <a:extLst xmlns:a="http://schemas.openxmlformats.org/drawingml/2006/main">
               <a:ext uri="{FF2B5EF4-FFF2-40B4-BE49-F238E27FC236}">
-                <a16:creationId xmlns:a16="http://schemas.microsoft.com/office/drawing/2014/main" id="{35C0BB59-84AE-4938-B527-D108C3353A85}"/>
+                <a16:creationId xmlns:a16="http://schemas.microsoft.com/office/drawing/2014/main" id="{4A27DD0D-DCFA-4223-BA7F-85A226499309}"/>
               </a:ext>
             </a:extLst>
           </p:cNvPr>
@@ -3537,7 +3537,7 @@
           <p:cNvPr id="2" name="Left column">
             <a:extLst xmlns:a="http://schemas.openxmlformats.org/drawingml/2006/main">
               <a:ext uri="{FF2B5EF4-FFF2-40B4-BE49-F238E27FC236}">
-                <a16:creationId xmlns:a16="http://schemas.microsoft.com/office/drawing/2014/main" id="{EBEAD80B-177D-486C-9826-9FC24460231B}"/>
+                <a16:creationId xmlns:a16="http://schemas.microsoft.com/office/drawing/2014/main" id="{879A40D1-A21E-4719-ABC4-4EDF1813927C}"/>
               </a:ext>
             </a:extLst>
           </p:cNvPr>
@@ -3732,12 +3732,12 @@
   </p:cSld>
   <p:clrMap bg1="lt1" tx1="dk1" bg2="lt2" tx2="dk2" accent1="accent1" accent2="accent2" accent3="accent3" accent4="accent4" accent5="accent5" accent6="accent6" hlink="hlink" folHlink="folHlink"/>
   <p:sldLayoutIdLst>
-    <p:sldLayoutId xmlns:r="http://schemas.openxmlformats.org/officeDocument/2006/relationships" id="2147483649" r:id="R20b7da9f41c74563"/>
-    <p:sldLayoutId xmlns:r="http://schemas.openxmlformats.org/officeDocument/2006/relationships" id="2147483650" r:id="R650def1fd99442f3"/>
-    <p:sldLayoutId xmlns:r="http://schemas.openxmlformats.org/officeDocument/2006/relationships" id="2147483651" r:id="Rd965106ed74147be"/>
-    <p:sldLayoutId xmlns:r="http://schemas.openxmlformats.org/officeDocument/2006/relationships" id="2147483652" r:id="R9c56f456e6324f29"/>
-    <p:sldLayoutId xmlns:r="http://schemas.openxmlformats.org/officeDocument/2006/relationships" id="2147483653" r:id="Re4ee6324d8fb4c23"/>
-    <p:sldLayoutId xmlns:r="http://schemas.openxmlformats.org/officeDocument/2006/relationships" id="2147483654" r:id="R78357283b62c4a0f"/>
+    <p:sldLayoutId xmlns:r="http://schemas.openxmlformats.org/officeDocument/2006/relationships" id="2147483649" r:id="R89b80a8aaf314a22"/>
+    <p:sldLayoutId xmlns:r="http://schemas.openxmlformats.org/officeDocument/2006/relationships" id="2147483650" r:id="Rf6ef98732df34e79"/>
+    <p:sldLayoutId xmlns:r="http://schemas.openxmlformats.org/officeDocument/2006/relationships" id="2147483651" r:id="R7168afa61ac64bc7"/>
+    <p:sldLayoutId xmlns:r="http://schemas.openxmlformats.org/officeDocument/2006/relationships" id="2147483652" r:id="Ra0330c0d3da14b16"/>
+    <p:sldLayoutId xmlns:r="http://schemas.openxmlformats.org/officeDocument/2006/relationships" id="2147483653" r:id="R2ccf59f48dc04a24"/>
+    <p:sldLayoutId xmlns:r="http://schemas.openxmlformats.org/officeDocument/2006/relationships" id="2147483654" r:id="R7c7f587f463c4f25"/>
   </p:sldLayoutIdLst>
   <p:txStyles>
     <p:titleStyle>
@@ -4953,7 +4953,7 @@
           <c:idx val="0"/>
           <c:order val="0"/>
           <c:tx>
-            <c:v>R1</c:v>
+            <c:v>Some HS</c:v>
           </c:tx>
           <c:spPr>
             <a:solidFill xmlns:a="http://schemas.openxmlformats.org/drawingml/2006/main">
@@ -4970,55 +4970,42 @@
             <c:size val="4"/>
           </c:marker>
           <c:cat>
-            <c:numRef>
-              <c:f>'Chart Data'!$A$2:$A$7</c:f>
-              <c:numCache>
-                <c:formatCode>General</c:formatCode>
-                <c:ptCount val="6"/>
+            <c:strRef>
+              <c:f>'Chart Data'!$A$2:$A$5</c:f>
+              <c:strCache>
+                <c:ptCount val="4"/>
                 <c:pt idx="0">
-                  <c:v>25</c:v>
+                  <c:v>18-39</c:v>
                 </c:pt>
                 <c:pt idx="1">
-                  <c:v>50</c:v>
+                  <c:v>40-54</c:v>
                 </c:pt>
                 <c:pt idx="2">
-                  <c:v>75</c:v>
+                  <c:v>55-69</c:v>
                 </c:pt>
                 <c:pt idx="3">
-                  <c:v>100</c:v>
+                  <c:v>70+</c:v>
                 </c:pt>
-                <c:pt idx="4">
-                  <c:v>125</c:v>
-                </c:pt>
-                <c:pt idx="5">
-                  <c:v>150</c:v>
-                </c:pt>
-              </c:numCache>
-            </c:numRef>
+              </c:strCache>
+            </c:strRef>
           </c:cat>
           <c:val>
             <c:numRef>
-              <c:f>'Chart Data'!$B$2:$B$7</c:f>
+              <c:f>'Chart Data'!$B$2:$B$5</c:f>
               <c:numCache>
                 <c:formatCode>General</c:formatCode>
-                <c:ptCount val="6"/>
+                <c:ptCount val="4"/>
                 <c:pt idx="0">
-                  <c:v>5113</c:v>
+                  <c:v>27</c:v>
                 </c:pt>
                 <c:pt idx="1">
-                  <c:v>5346</c:v>
+                  <c:v>29.8</c:v>
                 </c:pt>
                 <c:pt idx="2">
-                  <c:v>5272</c:v>
+                  <c:v>28</c:v>
                 </c:pt>
                 <c:pt idx="3">
-                  <c:v>5164</c:v>
-                </c:pt>
-                <c:pt idx="4">
-                  <c:v>4804</c:v>
-                </c:pt>
-                <c:pt idx="5">
-                  <c:v>5254</c:v>
+                  <c:v>27.3</c:v>
                 </c:pt>
               </c:numCache>
             </c:numRef>
@@ -5028,7 +5015,7 @@
           <c:idx val="1"/>
           <c:order val="1"/>
           <c:tx>
-            <c:v>R2</c:v>
+            <c:v>High school</c:v>
           </c:tx>
           <c:spPr>
             <a:solidFill xmlns:a="http://schemas.openxmlformats.org/drawingml/2006/main">
@@ -5045,55 +5032,42 @@
             <c:size val="4"/>
           </c:marker>
           <c:cat>
-            <c:numRef>
-              <c:f>'Chart Data'!$C$2:$C$7</c:f>
-              <c:numCache>
-                <c:formatCode>General</c:formatCode>
-                <c:ptCount val="6"/>
+            <c:strRef>
+              <c:f>'Chart Data'!$C$2:$C$5</c:f>
+              <c:strCache>
+                <c:ptCount val="4"/>
                 <c:pt idx="0">
-                  <c:v>25</c:v>
+                  <c:v>18-39</c:v>
                 </c:pt>
                 <c:pt idx="1">
-                  <c:v>50</c:v>
+                  <c:v>40-54</c:v>
                 </c:pt>
                 <c:pt idx="2">
-                  <c:v>75</c:v>
+                  <c:v>55-69</c:v>
                 </c:pt>
                 <c:pt idx="3">
-                  <c:v>100</c:v>
+                  <c:v>70+</c:v>
                 </c:pt>
-                <c:pt idx="4">
-                  <c:v>125</c:v>
-                </c:pt>
-                <c:pt idx="5">
-                  <c:v>150</c:v>
-                </c:pt>
-              </c:numCache>
-            </c:numRef>
+              </c:strCache>
+            </c:strRef>
           </c:cat>
           <c:val>
             <c:numRef>
-              <c:f>'Chart Data'!$D$2:$D$7</c:f>
+              <c:f>'Chart Data'!$D$2:$D$5</c:f>
               <c:numCache>
                 <c:formatCode>General</c:formatCode>
-                <c:ptCount val="6"/>
+                <c:ptCount val="4"/>
                 <c:pt idx="0">
-                  <c:v>5398</c:v>
+                  <c:v>32.6</c:v>
                 </c:pt>
                 <c:pt idx="1">
-                  <c:v>5952</c:v>
+                  <c:v>29.6</c:v>
                 </c:pt>
                 <c:pt idx="2">
-                  <c:v>5713</c:v>
+                  <c:v>33.2</c:v>
                 </c:pt>
                 <c:pt idx="3">
-                  <c:v>4831</c:v>
-                </c:pt>
-                <c:pt idx="4">
-                  <c:v>4848</c:v>
-                </c:pt>
-                <c:pt idx="5">
-                  <c:v>4542</c:v>
+                  <c:v>30.3</c:v>
                 </c:pt>
               </c:numCache>
             </c:numRef>
@@ -5103,7 +5077,7 @@
           <c:idx val="2"/>
           <c:order val="2"/>
           <c:tx>
-            <c:v>R3</c:v>
+            <c:v>Some college</c:v>
           </c:tx>
           <c:spPr>
             <a:solidFill xmlns:a="http://schemas.openxmlformats.org/drawingml/2006/main">
@@ -5120,55 +5094,42 @@
             <c:size val="4"/>
           </c:marker>
           <c:cat>
-            <c:numRef>
-              <c:f>'Chart Data'!$E$2:$E$7</c:f>
-              <c:numCache>
-                <c:formatCode>General</c:formatCode>
-                <c:ptCount val="6"/>
+            <c:strRef>
+              <c:f>'Chart Data'!$E$2:$E$5</c:f>
+              <c:strCache>
+                <c:ptCount val="4"/>
                 <c:pt idx="0">
-                  <c:v>25</c:v>
+                  <c:v>18-39</c:v>
                 </c:pt>
                 <c:pt idx="1">
-                  <c:v>50</c:v>
+                  <c:v>40-54</c:v>
                 </c:pt>
                 <c:pt idx="2">
-                  <c:v>75</c:v>
+                  <c:v>55-69</c:v>
                 </c:pt>
                 <c:pt idx="3">
-                  <c:v>100</c:v>
+                  <c:v>70+</c:v>
                 </c:pt>
-                <c:pt idx="4">
-                  <c:v>125</c:v>
-                </c:pt>
-                <c:pt idx="5">
-                  <c:v>150</c:v>
-                </c:pt>
-              </c:numCache>
-            </c:numRef>
+              </c:strCache>
+            </c:strRef>
           </c:cat>
           <c:val>
             <c:numRef>
-              <c:f>'Chart Data'!$F$2:$F$7</c:f>
+              <c:f>'Chart Data'!$F$2:$F$5</c:f>
               <c:numCache>
                 <c:formatCode>General</c:formatCode>
-                <c:ptCount val="6"/>
+                <c:ptCount val="4"/>
                 <c:pt idx="0">
-                  <c:v>5307</c:v>
+                  <c:v>30.5</c:v>
                 </c:pt>
                 <c:pt idx="1">
-                  <c:v>4719</c:v>
+                  <c:v>31.9</c:v>
                 </c:pt>
                 <c:pt idx="2">
-                  <c:v>5483</c:v>
+                  <c:v>32.8</c:v>
                 </c:pt>
                 <c:pt idx="3">
-                  <c:v>4986</c:v>
-                </c:pt>
-                <c:pt idx="4">
-                  <c:v>4432</c:v>
-                </c:pt>
-                <c:pt idx="5">
-                  <c:v>4919</c:v>
+                  <c:v>27.6</c:v>
                 </c:pt>
               </c:numCache>
             </c:numRef>
@@ -5178,7 +5139,7 @@
           <c:idx val="3"/>
           <c:order val="3"/>
           <c:tx>
-            <c:v>R4</c:v>
+            <c:v>Graduate</c:v>
           </c:tx>
           <c:spPr>
             <a:solidFill xmlns:a="http://schemas.openxmlformats.org/drawingml/2006/main">
@@ -5195,55 +5156,42 @@
             <c:size val="4"/>
           </c:marker>
           <c:cat>
-            <c:numRef>
-              <c:f>'Chart Data'!$G$2:$G$7</c:f>
-              <c:numCache>
-                <c:formatCode>General</c:formatCode>
-                <c:ptCount val="6"/>
+            <c:strRef>
+              <c:f>'Chart Data'!$G$2:$G$5</c:f>
+              <c:strCache>
+                <c:ptCount val="4"/>
                 <c:pt idx="0">
-                  <c:v>25</c:v>
+                  <c:v>18-39</c:v>
                 </c:pt>
                 <c:pt idx="1">
-                  <c:v>50</c:v>
+                  <c:v>40-54</c:v>
                 </c:pt>
                 <c:pt idx="2">
-                  <c:v>75</c:v>
+                  <c:v>55-69</c:v>
                 </c:pt>
                 <c:pt idx="3">
-                  <c:v>100</c:v>
+                  <c:v>70+</c:v>
                 </c:pt>
-                <c:pt idx="4">
-                  <c:v>125</c:v>
-                </c:pt>
-                <c:pt idx="5">
-                  <c:v>150</c:v>
-                </c:pt>
-              </c:numCache>
-            </c:numRef>
+              </c:strCache>
+            </c:strRef>
           </c:cat>
           <c:val>
             <c:numRef>
-              <c:f>'Chart Data'!$H$2:$H$7</c:f>
+              <c:f>'Chart Data'!$H$2:$H$5</c:f>
               <c:numCache>
                 <c:formatCode>General</c:formatCode>
-                <c:ptCount val="6"/>
+                <c:ptCount val="4"/>
                 <c:pt idx="0">
-                  <c:v>4678</c:v>
+                  <c:v>28.3</c:v>
                 </c:pt>
                 <c:pt idx="1">
-                  <c:v>4264</c:v>
+                  <c:v>27.9</c:v>
                 </c:pt>
                 <c:pt idx="2">
-                  <c:v>4749</c:v>
+                  <c:v>29</c:v>
                 </c:pt>
                 <c:pt idx="3">
-                  <c:v>4410</c:v>
-                </c:pt>
-                <c:pt idx="4">
-                  <c:v>4748</c:v>
-                </c:pt>
-                <c:pt idx="5">
-                  <c:v>4098</c:v>
+                  <c:v>25.5</c:v>
                 </c:pt>
               </c:numCache>
             </c:numRef>
@@ -5297,7 +5245,7 @@
           <a:lstStyle xmlns:a="http://schemas.openxmlformats.org/drawingml/2006/main"/>
           <a:p xmlns:a="http://schemas.openxmlformats.org/drawingml/2006/main">
             <a:pPr>
-              <a:defRPr sz="1125">
+              <a:defRPr sz="1200">
                 <a:solidFill>
                   <a:srgbClr val="666666"/>
                 </a:solidFill>
@@ -5314,8 +5262,8 @@
         <c:axId val="48672768"/>
         <c:scaling>
           <c:orientation val="minMax"/>
-          <c:max val="6000"/>
-          <c:min val="4000"/>
+          <c:max val="35"/>
+          <c:min val="25"/>
         </c:scaling>
         <c:delete val="0"/>
         <c:axPos val="l"/>
@@ -5328,6 +5276,38 @@
             </a:ln>
           </c:spPr>
         </c:majorGridlines>
+        <c:title>
+          <c:tx>
+            <c:rich>
+              <a:bodyPr xmlns:a="http://schemas.openxmlformats.org/drawingml/2006/main"/>
+              <a:lstStyle xmlns:a="http://schemas.openxmlformats.org/drawingml/2006/main"/>
+              <a:p xmlns:a="http://schemas.openxmlformats.org/drawingml/2006/main">
+                <a:r>
+                  <a:rPr sz="1275">
+                    <a:latin typeface="Arial"/>
+                    <a:ea typeface="Arial"/>
+                    <a:cs typeface="Arial"/>
+                  </a:rPr>
+                  <a:t>Mean BMI</a:t>
+                </a:r>
+              </a:p>
+            </c:rich>
+          </c:tx>
+          <c:overlay val="0"/>
+          <c:txPr>
+            <a:bodyPr xmlns:a="http://schemas.openxmlformats.org/drawingml/2006/main" anchorCtr="1"/>
+            <a:lstStyle xmlns:a="http://schemas.openxmlformats.org/drawingml/2006/main"/>
+            <a:p xmlns:a="http://schemas.openxmlformats.org/drawingml/2006/main">
+              <a:pPr>
+                <a:defRPr sz="1275">
+                  <a:latin typeface="Arial"/>
+                  <a:ea typeface="Arial"/>
+                  <a:cs typeface="Arial"/>
+                </a:defRPr>
+              </a:pPr>
+            </a:p>
+          </c:txPr>
+        </c:title>
         <c:numFmt formatCode="General"/>
         <c:majorTickMark val="none"/>
         <c:minorTickMark val="none"/>
@@ -5344,7 +5324,7 @@
           <a:lstStyle xmlns:a="http://schemas.openxmlformats.org/drawingml/2006/main"/>
           <a:p xmlns:a="http://schemas.openxmlformats.org/drawingml/2006/main">
             <a:pPr>
-              <a:defRPr sz="1125">
+              <a:defRPr sz="1200">
                 <a:solidFill>
                   <a:srgbClr val="666666"/>
                 </a:solidFill>
@@ -5357,7 +5337,7 @@
         </c:txPr>
         <c:crossAx val="48650112"/>
         <c:crossBetween val="between"/>
-        <c:majorUnit val="1000"/>
+        <c:majorUnit val="5"/>
       </c:valAx>
       <c:spPr>
         <a:solidFill xmlns:a="http://schemas.openxmlformats.org/drawingml/2006/main">
@@ -5366,7 +5346,7 @@
       </c:spPr>
     </c:plotArea>
     <c:legend>
-      <c:legendPos val="r"/>
+      <c:legendPos val="b"/>
       <c:overlay val="0"/>
       <c:txPr>
         <a:bodyPr xmlns:a="http://schemas.openxmlformats.org/drawingml/2006/main" anchorCtr="1"/>
@@ -8599,7 +8579,7 @@
           <p:cNvPr id="8" name="">
             <a:extLst xmlns:a="http://schemas.openxmlformats.org/drawingml/2006/main">
               <a:ext uri="{FF2B5EF4-FFF2-40B4-BE49-F238E27FC236}">
-                <a16:creationId xmlns:a16="http://schemas.microsoft.com/office/drawing/2014/main" id="{6BDBBF88-0200-4A64-A4D5-BED71C9F5D70}"/>
+                <a16:creationId xmlns:a16="http://schemas.microsoft.com/office/drawing/2014/main" id="{F1815E4F-FCAF-45E1-A1EB-7D2D3848FE74}"/>
               </a:ext>
             </a:extLst>
           </p:cNvPr>
@@ -8629,7 +8609,7 @@
           <p:cNvPr id="2" name="text">
             <a:extLst xmlns:a="http://schemas.openxmlformats.org/drawingml/2006/main">
               <a:ext uri="{FF2B5EF4-FFF2-40B4-BE49-F238E27FC236}">
-                <a16:creationId xmlns:a16="http://schemas.microsoft.com/office/drawing/2014/main" id="{0A9902CA-24E0-4442-AF0A-415BC3E5B66C}"/>
+                <a16:creationId xmlns:a16="http://schemas.microsoft.com/office/drawing/2014/main" id="{C2F81F5C-78FE-49FA-9E0B-77D2C971AA5C}"/>
               </a:ext>
             </a:extLst>
           </p:cNvPr>
@@ -8720,7 +8700,7 @@
           <p:cNvPr id="3" name="text">
             <a:extLst xmlns:a="http://schemas.openxmlformats.org/drawingml/2006/main">
               <a:ext uri="{FF2B5EF4-FFF2-40B4-BE49-F238E27FC236}">
-                <a16:creationId xmlns:a16="http://schemas.microsoft.com/office/drawing/2014/main" id="{841D9D4E-98EC-47E8-ADAE-41B07EB41AB4}"/>
+                <a16:creationId xmlns:a16="http://schemas.microsoft.com/office/drawing/2014/main" id="{B1E5906A-6485-40A8-8470-255DEE3B5815}"/>
               </a:ext>
             </a:extLst>
           </p:cNvPr>
@@ -8788,7 +8768,7 @@
           <p:cNvPr id="4" name="text">
             <a:extLst xmlns:a="http://schemas.openxmlformats.org/drawingml/2006/main">
               <a:ext uri="{FF2B5EF4-FFF2-40B4-BE49-F238E27FC236}">
-                <a16:creationId xmlns:a16="http://schemas.microsoft.com/office/drawing/2014/main" id="{660011D3-4F6B-4213-9293-DE2BBA04AC2C}"/>
+                <a16:creationId xmlns:a16="http://schemas.microsoft.com/office/drawing/2014/main" id="{12D5D9B9-7B78-45F9-982C-6FFC07EABF0E}"/>
               </a:ext>
             </a:extLst>
           </p:cNvPr>
@@ -8879,7 +8859,7 @@
           <p:cNvPr id="5" name="">
             <a:extLst xmlns:a="http://schemas.openxmlformats.org/drawingml/2006/main">
               <a:ext uri="{FF2B5EF4-FFF2-40B4-BE49-F238E27FC236}">
-                <a16:creationId xmlns:a16="http://schemas.microsoft.com/office/drawing/2014/main" id="{FEFA117D-2EF0-483F-B796-4B8B6B81DF41}"/>
+                <a16:creationId xmlns:a16="http://schemas.microsoft.com/office/drawing/2014/main" id="{66570A40-6E29-49AA-B51D-9EB53115DD0C}"/>
               </a:ext>
             </a:extLst>
           </p:cNvPr>
@@ -8909,7 +8889,7 @@
           <p:cNvPr id="6" name="text">
             <a:extLst xmlns:a="http://schemas.openxmlformats.org/drawingml/2006/main">
               <a:ext uri="{FF2B5EF4-FFF2-40B4-BE49-F238E27FC236}">
-                <a16:creationId xmlns:a16="http://schemas.microsoft.com/office/drawing/2014/main" id="{1FD01380-19B3-41F1-8343-29A45654D2E5}"/>
+                <a16:creationId xmlns:a16="http://schemas.microsoft.com/office/drawing/2014/main" id="{CB7CA830-1A2E-41A4-B64C-D4C4A5A4BC1C}"/>
               </a:ext>
             </a:extLst>
           </p:cNvPr>
@@ -9046,7 +9026,7 @@
           <p:cNvPr id="7" name="text">
             <a:extLst xmlns:a="http://schemas.openxmlformats.org/drawingml/2006/main">
               <a:ext uri="{FF2B5EF4-FFF2-40B4-BE49-F238E27FC236}">
-                <a16:creationId xmlns:a16="http://schemas.microsoft.com/office/drawing/2014/main" id="{01BFBE1D-5ECF-41EF-AFC1-A4298B4FBB6D}"/>
+                <a16:creationId xmlns:a16="http://schemas.microsoft.com/office/drawing/2014/main" id="{D0E4A3E4-4E22-4E4D-B7E5-9EBFD84B0747}"/>
               </a:ext>
             </a:extLst>
           </p:cNvPr>
@@ -9112,7 +9092,7 @@
     </p:spTree>
     <p:extLst>
       <p:ext uri="{BB962C8B-B14F-4D97-AF65-F5344CB8AC3E}">
-        <p14:creationId xmlns:p14="http://schemas.microsoft.com/office/powerpoint/2010/main" val="1182745507"/>
+        <p14:creationId xmlns:p14="http://schemas.microsoft.com/office/powerpoint/2010/main" val="1641536681"/>
       </p:ext>
     </p:extLst>
   </p:cSld>
@@ -9143,7 +9123,7 @@
           <p:cNvPr id="16" name="text">
             <a:extLst xmlns:a="http://schemas.openxmlformats.org/drawingml/2006/main">
               <a:ext uri="{FF2B5EF4-FFF2-40B4-BE49-F238E27FC236}">
-                <a16:creationId xmlns:a16="http://schemas.microsoft.com/office/drawing/2014/main" id="{FD06936B-4517-4EDB-BB75-B63A4DA78A12}"/>
+                <a16:creationId xmlns:a16="http://schemas.microsoft.com/office/drawing/2014/main" id="{79C0DFA0-6201-4B0A-A137-4B9B5A3DF8ED}"/>
               </a:ext>
             </a:extLst>
           </p:cNvPr>
@@ -9211,7 +9191,7 @@
           <p:cNvPr id="2" name="">
             <a:extLst xmlns:a="http://schemas.openxmlformats.org/drawingml/2006/main">
               <a:ext uri="{FF2B5EF4-FFF2-40B4-BE49-F238E27FC236}">
-                <a16:creationId xmlns:a16="http://schemas.microsoft.com/office/drawing/2014/main" id="{05519CCA-60E6-4975-9D50-CF4DC6088D8B}"/>
+                <a16:creationId xmlns:a16="http://schemas.microsoft.com/office/drawing/2014/main" id="{FC65B5FA-577B-4AFE-96B8-2C7F8BAFAC72}"/>
               </a:ext>
             </a:extLst>
           </p:cNvPr>
@@ -9241,7 +9221,7 @@
           <p:cNvPr id="3" name="text">
             <a:extLst xmlns:a="http://schemas.openxmlformats.org/drawingml/2006/main">
               <a:ext uri="{FF2B5EF4-FFF2-40B4-BE49-F238E27FC236}">
-                <a16:creationId xmlns:a16="http://schemas.microsoft.com/office/drawing/2014/main" id="{37516679-06FB-47A7-A243-B5A0A378723B}"/>
+                <a16:creationId xmlns:a16="http://schemas.microsoft.com/office/drawing/2014/main" id="{60FA32F6-215A-4EF6-8D23-C69FBC88746E}"/>
               </a:ext>
             </a:extLst>
           </p:cNvPr>
@@ -9309,7 +9289,7 @@
           <p:cNvPr id="4" name="text">
             <a:extLst xmlns:a="http://schemas.openxmlformats.org/drawingml/2006/main">
               <a:ext uri="{FF2B5EF4-FFF2-40B4-BE49-F238E27FC236}">
-                <a16:creationId xmlns:a16="http://schemas.microsoft.com/office/drawing/2014/main" id="{33B4D39C-FEBC-4B45-8AC4-B9B2DE24C248}"/>
+                <a16:creationId xmlns:a16="http://schemas.microsoft.com/office/drawing/2014/main" id="{E99C7607-45DD-4400-AC88-67DAEC754171}"/>
               </a:ext>
             </a:extLst>
           </p:cNvPr>
@@ -9377,7 +9357,7 @@
           <p:cNvPr id="5" name="text">
             <a:extLst xmlns:a="http://schemas.openxmlformats.org/drawingml/2006/main">
               <a:ext uri="{FF2B5EF4-FFF2-40B4-BE49-F238E27FC236}">
-                <a16:creationId xmlns:a16="http://schemas.microsoft.com/office/drawing/2014/main" id="{220A1BAD-ADEF-4B28-BE0E-5FC4C3AD6CB2}"/>
+                <a16:creationId xmlns:a16="http://schemas.microsoft.com/office/drawing/2014/main" id="{D12E9587-EB2A-46AE-A13C-402AE3D9FE84}"/>
               </a:ext>
             </a:extLst>
           </p:cNvPr>
@@ -9445,7 +9425,7 @@
           <p:cNvPr id="6" name="text">
             <a:extLst xmlns:a="http://schemas.openxmlformats.org/drawingml/2006/main">
               <a:ext uri="{FF2B5EF4-FFF2-40B4-BE49-F238E27FC236}">
-                <a16:creationId xmlns:a16="http://schemas.microsoft.com/office/drawing/2014/main" id="{21E8F5BC-4222-438B-924D-796A61258BE8}"/>
+                <a16:creationId xmlns:a16="http://schemas.microsoft.com/office/drawing/2014/main" id="{2BABFF2E-8518-42B9-83D5-34DFAC8D71AC}"/>
               </a:ext>
             </a:extLst>
           </p:cNvPr>
@@ -9513,7 +9493,7 @@
           <p:cNvPr id="7" name="text">
             <a:extLst xmlns:a="http://schemas.openxmlformats.org/drawingml/2006/main">
               <a:ext uri="{FF2B5EF4-FFF2-40B4-BE49-F238E27FC236}">
-                <a16:creationId xmlns:a16="http://schemas.microsoft.com/office/drawing/2014/main" id="{A66F50E2-2D1F-415E-8046-70C847C0A568}"/>
+                <a16:creationId xmlns:a16="http://schemas.microsoft.com/office/drawing/2014/main" id="{9B25D049-95A6-48FE-A3CC-35B93EB487A3}"/>
               </a:ext>
             </a:extLst>
           </p:cNvPr>
@@ -9604,7 +9584,7 @@
           <p:cNvPr id="8" name="text">
             <a:extLst xmlns:a="http://schemas.openxmlformats.org/drawingml/2006/main">
               <a:ext uri="{FF2B5EF4-FFF2-40B4-BE49-F238E27FC236}">
-                <a16:creationId xmlns:a16="http://schemas.microsoft.com/office/drawing/2014/main" id="{C0EB7475-83E7-4C43-B112-80B930E3FC27}"/>
+                <a16:creationId xmlns:a16="http://schemas.microsoft.com/office/drawing/2014/main" id="{65933F61-7BF5-4F7F-A486-D3EE21C187E5}"/>
               </a:ext>
             </a:extLst>
           </p:cNvPr>
@@ -9695,7 +9675,7 @@
           <p:cNvPr id="9" name="Chart">
             <a:extLst xmlns:a="http://schemas.openxmlformats.org/drawingml/2006/main">
               <a:ext uri="{FF2B5EF4-FFF2-40B4-BE49-F238E27FC236}">
-                <a16:creationId xmlns:a16="http://schemas.microsoft.com/office/drawing/2014/main" id="{CD98437E-F195-48B5-B6E2-CEAB40202117}"/>
+                <a16:creationId xmlns:a16="http://schemas.microsoft.com/office/drawing/2014/main" id="{A888EE45-C91D-4C66-9D7A-7826A444BF8B}"/>
               </a:ext>
             </a:extLst>
           </p:cNvPr>
@@ -9708,7 +9688,7 @@
         </p:xfrm>
         <a:graphic xmlns:a="http://schemas.openxmlformats.org/drawingml/2006/main">
           <a:graphicData uri="http://schemas.openxmlformats.org/drawingml/2006/chart">
-            <c:chart xmlns:r="http://schemas.openxmlformats.org/officeDocument/2006/relationships" xmlns:c="http://schemas.openxmlformats.org/drawingml/2006/chart" r:id="R8ef1cbb87e40451b"/>
+            <c:chart xmlns:r="http://schemas.openxmlformats.org/officeDocument/2006/relationships" xmlns:c="http://schemas.openxmlformats.org/drawingml/2006/chart" r:id="R5e9bd1732b304e27"/>
           </a:graphicData>
         </a:graphic>
       </p:graphicFrame>
@@ -9717,7 +9697,7 @@
           <p:cNvPr id="10" name="Chart">
             <a:extLst xmlns:a="http://schemas.openxmlformats.org/drawingml/2006/main">
               <a:ext uri="{FF2B5EF4-FFF2-40B4-BE49-F238E27FC236}">
-                <a16:creationId xmlns:a16="http://schemas.microsoft.com/office/drawing/2014/main" id="{91B71E1E-22E3-48CF-B6AD-775BF161A310}"/>
+                <a16:creationId xmlns:a16="http://schemas.microsoft.com/office/drawing/2014/main" id="{874CE457-7EAF-4715-950B-18D291887976}"/>
               </a:ext>
             </a:extLst>
           </p:cNvPr>
@@ -9730,7 +9710,7 @@
         </p:xfrm>
         <a:graphic xmlns:a="http://schemas.openxmlformats.org/drawingml/2006/main">
           <a:graphicData uri="http://schemas.openxmlformats.org/drawingml/2006/chart">
-            <c:chart xmlns:r="http://schemas.openxmlformats.org/officeDocument/2006/relationships" xmlns:c="http://schemas.openxmlformats.org/drawingml/2006/chart" r:id="Rf75c1bba59374144"/>
+            <c:chart xmlns:r="http://schemas.openxmlformats.org/officeDocument/2006/relationships" xmlns:c="http://schemas.openxmlformats.org/drawingml/2006/chart" r:id="Rbb22eb425ef54c93"/>
           </a:graphicData>
         </a:graphic>
       </p:graphicFrame>
@@ -9739,7 +9719,7 @@
           <p:cNvPr id="11" name="">
             <a:extLst xmlns:a="http://schemas.openxmlformats.org/drawingml/2006/main">
               <a:ext uri="{FF2B5EF4-FFF2-40B4-BE49-F238E27FC236}">
-                <a16:creationId xmlns:a16="http://schemas.microsoft.com/office/drawing/2014/main" id="{D27C3A4F-DC5B-400A-9D16-9D2DFF613023}"/>
+                <a16:creationId xmlns:a16="http://schemas.microsoft.com/office/drawing/2014/main" id="{DE376977-0CA6-4D78-BC5B-A04DA9327F8F}"/>
               </a:ext>
             </a:extLst>
           </p:cNvPr>
@@ -10123,7 +10103,7 @@
           <p:cNvPr id="12" name="">
             <a:extLst xmlns:a="http://schemas.openxmlformats.org/drawingml/2006/main">
               <a:ext uri="{FF2B5EF4-FFF2-40B4-BE49-F238E27FC236}">
-                <a16:creationId xmlns:a16="http://schemas.microsoft.com/office/drawing/2014/main" id="{928AF2E3-1D0E-434D-98A9-3616A222B181}"/>
+                <a16:creationId xmlns:a16="http://schemas.microsoft.com/office/drawing/2014/main" id="{ABA14E95-31E1-4E7B-8B69-F98A3CF36FC1}"/>
               </a:ext>
             </a:extLst>
           </p:cNvPr>
@@ -10507,7 +10487,7 @@
           <p:cNvPr id="13" name="">
             <a:extLst xmlns:a="http://schemas.openxmlformats.org/drawingml/2006/main">
               <a:ext uri="{FF2B5EF4-FFF2-40B4-BE49-F238E27FC236}">
-                <a16:creationId xmlns:a16="http://schemas.microsoft.com/office/drawing/2014/main" id="{D5FD7C59-E4C0-4BA7-8452-57EBF7F41456}"/>
+                <a16:creationId xmlns:a16="http://schemas.microsoft.com/office/drawing/2014/main" id="{EC869672-6A95-4EC2-A374-119FDAE17F57}"/>
               </a:ext>
             </a:extLst>
           </p:cNvPr>
@@ -10537,7 +10517,7 @@
           <p:cNvPr id="14" name="text">
             <a:extLst xmlns:a="http://schemas.openxmlformats.org/drawingml/2006/main">
               <a:ext uri="{FF2B5EF4-FFF2-40B4-BE49-F238E27FC236}">
-                <a16:creationId xmlns:a16="http://schemas.microsoft.com/office/drawing/2014/main" id="{C923D5EE-6BB2-48E9-AB95-EC4457D7CFFC}"/>
+                <a16:creationId xmlns:a16="http://schemas.microsoft.com/office/drawing/2014/main" id="{D744B79D-6661-43BE-9878-C43F27099D4C}"/>
               </a:ext>
             </a:extLst>
           </p:cNvPr>
@@ -10605,7 +10585,7 @@
           <p:cNvPr id="15" name="text">
             <a:extLst xmlns:a="http://schemas.openxmlformats.org/drawingml/2006/main">
               <a:ext uri="{FF2B5EF4-FFF2-40B4-BE49-F238E27FC236}">
-                <a16:creationId xmlns:a16="http://schemas.microsoft.com/office/drawing/2014/main" id="{641B181A-32E4-4296-9C99-A40ED5AB4C2E}"/>
+                <a16:creationId xmlns:a16="http://schemas.microsoft.com/office/drawing/2014/main" id="{19E8ED7A-B7CC-45E0-8FB2-776BB3E1CF11}"/>
               </a:ext>
             </a:extLst>
           </p:cNvPr>
@@ -10671,7 +10651,7 @@
     </p:spTree>
     <p:extLst>
       <p:ext uri="{BB962C8B-B14F-4D97-AF65-F5344CB8AC3E}">
-        <p14:creationId xmlns:p14="http://schemas.microsoft.com/office/powerpoint/2010/main" val="819970840"/>
+        <p14:creationId xmlns:p14="http://schemas.microsoft.com/office/powerpoint/2010/main" val="462896351"/>
       </p:ext>
     </p:extLst>
   </p:cSld>
@@ -10702,7 +10682,7 @@
           <p:cNvPr id="15" name="text">
             <a:extLst xmlns:a="http://schemas.openxmlformats.org/drawingml/2006/main">
               <a:ext uri="{FF2B5EF4-FFF2-40B4-BE49-F238E27FC236}">
-                <a16:creationId xmlns:a16="http://schemas.microsoft.com/office/drawing/2014/main" id="{1FA8FD10-67C3-4E20-BF17-B3669E1FEF18}"/>
+                <a16:creationId xmlns:a16="http://schemas.microsoft.com/office/drawing/2014/main" id="{A916BE59-6900-42CE-98BA-9C42003B2963}"/>
               </a:ext>
             </a:extLst>
           </p:cNvPr>
@@ -10770,7 +10750,7 @@
           <p:cNvPr id="2" name="">
             <a:extLst xmlns:a="http://schemas.openxmlformats.org/drawingml/2006/main">
               <a:ext uri="{FF2B5EF4-FFF2-40B4-BE49-F238E27FC236}">
-                <a16:creationId xmlns:a16="http://schemas.microsoft.com/office/drawing/2014/main" id="{84471DC7-24A4-4F26-901F-899BFAE7490B}"/>
+                <a16:creationId xmlns:a16="http://schemas.microsoft.com/office/drawing/2014/main" id="{B29009FB-76B1-4066-A0E7-DCD5E3A8FF40}"/>
               </a:ext>
             </a:extLst>
           </p:cNvPr>
@@ -10800,7 +10780,7 @@
           <p:cNvPr id="3" name="text">
             <a:extLst xmlns:a="http://schemas.openxmlformats.org/drawingml/2006/main">
               <a:ext uri="{FF2B5EF4-FFF2-40B4-BE49-F238E27FC236}">
-                <a16:creationId xmlns:a16="http://schemas.microsoft.com/office/drawing/2014/main" id="{4B166ED9-B904-4B25-81AE-C27093C4789F}"/>
+                <a16:creationId xmlns:a16="http://schemas.microsoft.com/office/drawing/2014/main" id="{5BA0DE5D-E526-4B86-96AA-AAF545765C05}"/>
               </a:ext>
             </a:extLst>
           </p:cNvPr>
@@ -10868,7 +10848,7 @@
           <p:cNvPr id="4" name="text">
             <a:extLst xmlns:a="http://schemas.openxmlformats.org/drawingml/2006/main">
               <a:ext uri="{FF2B5EF4-FFF2-40B4-BE49-F238E27FC236}">
-                <a16:creationId xmlns:a16="http://schemas.microsoft.com/office/drawing/2014/main" id="{CEBEBE80-EFE9-4DC4-8DCD-58594DD0555B}"/>
+                <a16:creationId xmlns:a16="http://schemas.microsoft.com/office/drawing/2014/main" id="{CAB3574C-BC59-47B1-866B-468F5FF7B065}"/>
               </a:ext>
             </a:extLst>
           </p:cNvPr>
@@ -10936,7 +10916,7 @@
           <p:cNvPr id="5" name="">
             <a:extLst xmlns:a="http://schemas.openxmlformats.org/drawingml/2006/main">
               <a:ext uri="{FF2B5EF4-FFF2-40B4-BE49-F238E27FC236}">
-                <a16:creationId xmlns:a16="http://schemas.microsoft.com/office/drawing/2014/main" id="{FE4766AA-AF0D-43F1-A709-F32BB0907435}"/>
+                <a16:creationId xmlns:a16="http://schemas.microsoft.com/office/drawing/2014/main" id="{3D1A69DC-88FA-4858-9A84-0E2DD5467A55}"/>
               </a:ext>
             </a:extLst>
           </p:cNvPr>
@@ -11483,7 +11463,7 @@
           <p:cNvPr id="6" name="text">
             <a:extLst xmlns:a="http://schemas.openxmlformats.org/drawingml/2006/main">
               <a:ext uri="{FF2B5EF4-FFF2-40B4-BE49-F238E27FC236}">
-                <a16:creationId xmlns:a16="http://schemas.microsoft.com/office/drawing/2014/main" id="{1FC8D7D2-EC62-444A-AB1A-730799EA5908}"/>
+                <a16:creationId xmlns:a16="http://schemas.microsoft.com/office/drawing/2014/main" id="{4457BF2C-77C5-4EAE-90B6-EEF117144CB1}"/>
               </a:ext>
             </a:extLst>
           </p:cNvPr>
@@ -11551,7 +11531,7 @@
           <p:cNvPr id="7" name="text">
             <a:extLst xmlns:a="http://schemas.openxmlformats.org/drawingml/2006/main">
               <a:ext uri="{FF2B5EF4-FFF2-40B4-BE49-F238E27FC236}">
-                <a16:creationId xmlns:a16="http://schemas.microsoft.com/office/drawing/2014/main" id="{E524B462-5682-474B-90E9-DD9F08B028A4}"/>
+                <a16:creationId xmlns:a16="http://schemas.microsoft.com/office/drawing/2014/main" id="{B5ACA52F-0CC0-4612-BD65-2F5C143B6BC8}"/>
               </a:ext>
             </a:extLst>
           </p:cNvPr>
@@ -11619,7 +11599,7 @@
           <p:cNvPr id="8" name="Chart">
             <a:extLst xmlns:a="http://schemas.openxmlformats.org/drawingml/2006/main">
               <a:ext uri="{FF2B5EF4-FFF2-40B4-BE49-F238E27FC236}">
-                <a16:creationId xmlns:a16="http://schemas.microsoft.com/office/drawing/2014/main" id="{D31D9517-DA31-42D9-83B1-BA0B75871664}"/>
+                <a16:creationId xmlns:a16="http://schemas.microsoft.com/office/drawing/2014/main" id="{D8B8B8BE-7C4D-4E01-A831-A169EBBEEEDD}"/>
               </a:ext>
             </a:extLst>
           </p:cNvPr>
@@ -11632,7 +11612,7 @@
         </p:xfrm>
         <a:graphic xmlns:a="http://schemas.openxmlformats.org/drawingml/2006/main">
           <a:graphicData uri="http://schemas.openxmlformats.org/drawingml/2006/chart">
-            <c:chart xmlns:r="http://schemas.openxmlformats.org/officeDocument/2006/relationships" xmlns:c="http://schemas.openxmlformats.org/drawingml/2006/chart" r:id="R8e28997408a7408c"/>
+            <c:chart xmlns:r="http://schemas.openxmlformats.org/officeDocument/2006/relationships" xmlns:c="http://schemas.openxmlformats.org/drawingml/2006/chart" r:id="Rb41f3ec505b74251"/>
           </a:graphicData>
         </a:graphic>
       </p:graphicFrame>
@@ -11641,7 +11621,7 @@
           <p:cNvPr id="9" name="Chart">
             <a:extLst xmlns:a="http://schemas.openxmlformats.org/drawingml/2006/main">
               <a:ext uri="{FF2B5EF4-FFF2-40B4-BE49-F238E27FC236}">
-                <a16:creationId xmlns:a16="http://schemas.microsoft.com/office/drawing/2014/main" id="{17243387-7494-4427-924C-32CE9AA52178}"/>
+                <a16:creationId xmlns:a16="http://schemas.microsoft.com/office/drawing/2014/main" id="{C2C1303B-3A04-4B96-9793-DC651BFE7D54}"/>
               </a:ext>
             </a:extLst>
           </p:cNvPr>
@@ -11654,7 +11634,7 @@
         </p:xfrm>
         <a:graphic xmlns:a="http://schemas.openxmlformats.org/drawingml/2006/main">
           <a:graphicData uri="http://schemas.openxmlformats.org/drawingml/2006/chart">
-            <c:chart xmlns:r="http://schemas.openxmlformats.org/officeDocument/2006/relationships" xmlns:c="http://schemas.openxmlformats.org/drawingml/2006/chart" r:id="R350332d95c46484a"/>
+            <c:chart xmlns:r="http://schemas.openxmlformats.org/officeDocument/2006/relationships" xmlns:c="http://schemas.openxmlformats.org/drawingml/2006/chart" r:id="R82ef118aeb77453d"/>
           </a:graphicData>
         </a:graphic>
       </p:graphicFrame>
@@ -11663,7 +11643,7 @@
           <p:cNvPr id="10" name="text">
             <a:extLst xmlns:a="http://schemas.openxmlformats.org/drawingml/2006/main">
               <a:ext uri="{FF2B5EF4-FFF2-40B4-BE49-F238E27FC236}">
-                <a16:creationId xmlns:a16="http://schemas.microsoft.com/office/drawing/2014/main" id="{A1C89BB9-A881-451E-8AAC-D95F99343DD3}"/>
+                <a16:creationId xmlns:a16="http://schemas.microsoft.com/office/drawing/2014/main" id="{36C63494-83D6-4C82-BE29-9281449F4656}"/>
               </a:ext>
             </a:extLst>
           </p:cNvPr>
@@ -11731,7 +11711,7 @@
           <p:cNvPr id="11" name="text">
             <a:extLst xmlns:a="http://schemas.openxmlformats.org/drawingml/2006/main">
               <a:ext uri="{FF2B5EF4-FFF2-40B4-BE49-F238E27FC236}">
-                <a16:creationId xmlns:a16="http://schemas.microsoft.com/office/drawing/2014/main" id="{E759D400-BC9C-41AA-8730-9720F9F8C8C9}"/>
+                <a16:creationId xmlns:a16="http://schemas.microsoft.com/office/drawing/2014/main" id="{A22894D4-79D9-4D7E-ACDB-263B6771C5D2}"/>
               </a:ext>
             </a:extLst>
           </p:cNvPr>
@@ -11799,7 +11779,7 @@
           <p:cNvPr id="12" name="">
             <a:extLst xmlns:a="http://schemas.openxmlformats.org/drawingml/2006/main">
               <a:ext uri="{FF2B5EF4-FFF2-40B4-BE49-F238E27FC236}">
-                <a16:creationId xmlns:a16="http://schemas.microsoft.com/office/drawing/2014/main" id="{CEADBAC1-C1D5-46C9-9239-57344A3494A0}"/>
+                <a16:creationId xmlns:a16="http://schemas.microsoft.com/office/drawing/2014/main" id="{283841FA-BBDC-47CC-A76F-0557A3C14721}"/>
               </a:ext>
             </a:extLst>
           </p:cNvPr>
@@ -11829,7 +11809,7 @@
           <p:cNvPr id="13" name="text">
             <a:extLst xmlns:a="http://schemas.openxmlformats.org/drawingml/2006/main">
               <a:ext uri="{FF2B5EF4-FFF2-40B4-BE49-F238E27FC236}">
-                <a16:creationId xmlns:a16="http://schemas.microsoft.com/office/drawing/2014/main" id="{258C11C1-1B94-40B2-A388-D4B7CFEE0FA2}"/>
+                <a16:creationId xmlns:a16="http://schemas.microsoft.com/office/drawing/2014/main" id="{7D32BE5C-8A6D-41DC-9EBD-40A6CA12E448}"/>
               </a:ext>
             </a:extLst>
           </p:cNvPr>
@@ -11897,7 +11877,7 @@
           <p:cNvPr id="14" name="text">
             <a:extLst xmlns:a="http://schemas.openxmlformats.org/drawingml/2006/main">
               <a:ext uri="{FF2B5EF4-FFF2-40B4-BE49-F238E27FC236}">
-                <a16:creationId xmlns:a16="http://schemas.microsoft.com/office/drawing/2014/main" id="{31996CF6-2B83-4D30-A362-403ECCAABDF2}"/>
+                <a16:creationId xmlns:a16="http://schemas.microsoft.com/office/drawing/2014/main" id="{176ADA65-C452-47BD-96CA-CCABEB679D75}"/>
               </a:ext>
             </a:extLst>
           </p:cNvPr>
@@ -11963,7 +11943,7 @@
     </p:spTree>
     <p:extLst>
       <p:ext uri="{BB962C8B-B14F-4D97-AF65-F5344CB8AC3E}">
-        <p14:creationId xmlns:p14="http://schemas.microsoft.com/office/powerpoint/2010/main" val="200325932"/>
+        <p14:creationId xmlns:p14="http://schemas.microsoft.com/office/powerpoint/2010/main" val="1096323673"/>
       </p:ext>
     </p:extLst>
   </p:cSld>
@@ -11991,10 +11971,10 @@
       </p:grpSpPr>
       <p:sp>
         <p:nvSpPr>
-          <p:cNvPr id="22" name="text">
+          <p:cNvPr id="26" name="text">
             <a:extLst xmlns:a="http://schemas.openxmlformats.org/drawingml/2006/main">
               <a:ext uri="{FF2B5EF4-FFF2-40B4-BE49-F238E27FC236}">
-                <a16:creationId xmlns:a16="http://schemas.microsoft.com/office/drawing/2014/main" id="{430AA9BE-970D-4043-AD08-0828E3C07B6C}"/>
+                <a16:creationId xmlns:a16="http://schemas.microsoft.com/office/drawing/2014/main" id="{DCD5A546-CB2D-4AB5-9556-38B9A3661259}"/>
               </a:ext>
             </a:extLst>
           </p:cNvPr>
@@ -12052,7 +12032,7 @@
                 <a:ea typeface="Arial"/>
                 <a:cs typeface="Arial"/>
               </a:rPr>
-              <a:t>LAB 11: ANOVA in completely randomized designs, randomized blocks and Latin Square</a:t>
+              <a:t>LAB 11: CRD, RBD and Latin Square analysis (observational illustrations)</a:t>
             </a:r>
           </a:p>
         </p:txBody>
@@ -12062,7 +12042,7 @@
           <p:cNvPr id="2" name="">
             <a:extLst xmlns:a="http://schemas.openxmlformats.org/drawingml/2006/main">
               <a:ext uri="{FF2B5EF4-FFF2-40B4-BE49-F238E27FC236}">
-                <a16:creationId xmlns:a16="http://schemas.microsoft.com/office/drawing/2014/main" id="{0C691B33-0298-48C3-88B4-44667B807BFF}"/>
+                <a16:creationId xmlns:a16="http://schemas.microsoft.com/office/drawing/2014/main" id="{B2FB1B1A-9ED2-432E-B300-8E3BB88AB296}"/>
               </a:ext>
             </a:extLst>
           </p:cNvPr>
@@ -12092,7 +12072,7 @@
           <p:cNvPr id="3" name="text">
             <a:extLst xmlns:a="http://schemas.openxmlformats.org/drawingml/2006/main">
               <a:ext uri="{FF2B5EF4-FFF2-40B4-BE49-F238E27FC236}">
-                <a16:creationId xmlns:a16="http://schemas.microsoft.com/office/drawing/2014/main" id="{4CBA5822-99CC-4F46-BEEF-EFA771AAAEDC}"/>
+                <a16:creationId xmlns:a16="http://schemas.microsoft.com/office/drawing/2014/main" id="{A7EE8045-3519-40E4-80F8-1051015D85E3}"/>
               </a:ext>
             </a:extLst>
           </p:cNvPr>
@@ -12150,7 +12130,7 @@
                 <a:ea typeface="Arial"/>
                 <a:cs typeface="Arial"/>
               </a:rPr>
-              <a:t>ANOVA and experimental designs</a:t>
+              <a:t>CRD, RBD and Latin Square using health records</a:t>
             </a:r>
           </a:p>
         </p:txBody>
@@ -12160,7 +12140,7 @@
           <p:cNvPr id="4" name="text">
             <a:extLst xmlns:a="http://schemas.openxmlformats.org/drawingml/2006/main">
               <a:ext uri="{FF2B5EF4-FFF2-40B4-BE49-F238E27FC236}">
-                <a16:creationId xmlns:a16="http://schemas.microsoft.com/office/drawing/2014/main" id="{CD9F7BAD-9769-4601-BFE8-852FF47DA922}"/>
+                <a16:creationId xmlns:a16="http://schemas.microsoft.com/office/drawing/2014/main" id="{B5558757-4097-4581-A719-8823A9E706A8}"/>
               </a:ext>
             </a:extLst>
           </p:cNvPr>
@@ -12218,7 +12198,7 @@
                 <a:ea typeface="Arial"/>
                 <a:cs typeface="Arial"/>
               </a:rPr>
-              <a:t>ANOVA compares means. CRD has no blocks. RBD controls one factor and Latin Square controls two.</a:t>
+              <a:t>BMI is the response. Education is the group factor. Age and income form blocks in matched subsets.</a:t>
             </a:r>
           </a:p>
         </p:txBody>
@@ -12228,7 +12208,7 @@
           <p:cNvPr id="5" name="">
             <a:extLst xmlns:a="http://schemas.openxmlformats.org/drawingml/2006/main">
               <a:ext uri="{FF2B5EF4-FFF2-40B4-BE49-F238E27FC236}">
-                <a16:creationId xmlns:a16="http://schemas.microsoft.com/office/drawing/2014/main" id="{450D4E6C-7226-4F3D-BFFC-0E5EB7C77FD8}"/>
+                <a16:creationId xmlns:a16="http://schemas.microsoft.com/office/drawing/2014/main" id="{33DE3E1E-1491-4357-9E6A-4F72F15F4BEF}"/>
               </a:ext>
             </a:extLst>
           </p:cNvPr>
@@ -12236,19 +12216,20 @@
           <p:nvPr/>
         </p:nvGraphicFramePr>
         <p:xfrm>
-          <a:off xmlns:a="http://schemas.openxmlformats.org/drawingml/2006/main" x="400050" y="1571625"/>
-          <a:ext xmlns:a="http://schemas.openxmlformats.org/drawingml/2006/main" cx="11391900" cy="1143000"/>
+          <a:off xmlns:a="http://schemas.openxmlformats.org/drawingml/2006/main" x="400050" y="1581150"/>
+          <a:ext xmlns:a="http://schemas.openxmlformats.org/drawingml/2006/main" cx="11391900" cy="1400175"/>
         </p:xfrm>
         <a:graphic xmlns:a="http://schemas.openxmlformats.org/drawingml/2006/main">
           <a:graphicData uri="http://schemas.openxmlformats.org/drawingml/2006/table">
             <a:tbl>
               <a:tblPr/>
               <a:tblGrid>
-                <a:gridCol w="7905750"/>
-                <a:gridCol w="1743075"/>
-                <a:gridCol w="1743075"/>
+                <a:gridCol w="6581775"/>
+                <a:gridCol w="1438275"/>
+                <a:gridCol w="1771650"/>
+                <a:gridCol w="1600200"/>
               </a:tblGrid>
-              <a:tr h="381000">
+              <a:tr h="350044">
                 <a:tc>
                   <a:txBody>
                     <a:bodyPr>
@@ -12258,7 +12239,7 @@
                     <a:p>
                       <a:pPr algn="l"/>
                       <a:r>
-                        <a:rPr sz="1725" b="1">
+                        <a:rPr sz="1650" b="1">
                           <a:solidFill>
                             <a:srgbClr val="FFFFFF"/>
                           </a:solidFill>
@@ -12266,7 +12247,7 @@
                           <a:ea typeface="Arial"/>
                           <a:cs typeface="Arial"/>
                         </a:rPr>
-                        <a:t>Comparison</a:t>
+                        <a:t>Analysis of education groups</a:t>
                       </a:r>
                     </a:p>
                   </a:txBody>
@@ -12309,7 +12290,7 @@
                     <a:p>
                       <a:pPr algn="ctr"/>
                       <a:r>
-                        <a:rPr sz="1725" b="1">
+                        <a:rPr sz="1650" b="1">
                           <a:solidFill>
                             <a:srgbClr val="FFFFFF"/>
                           </a:solidFill>
@@ -12317,7 +12298,7 @@
                           <a:ea typeface="Arial"/>
                           <a:cs typeface="Arial"/>
                         </a:rPr>
-                        <a:t>F</a:t>
+                        <a:t>Rows</a:t>
                       </a:r>
                     </a:p>
                   </a:txBody>
@@ -12354,7 +12335,52 @@
                     <a:p>
                       <a:pPr algn="ctr"/>
                       <a:r>
-                        <a:rPr sz="1725" b="1">
+                        <a:rPr sz="1650" b="1">
+                          <a:solidFill>
+                            <a:srgbClr val="FFFFFF"/>
+                          </a:solidFill>
+                          <a:latin typeface="Arial"/>
+                          <a:ea typeface="Arial"/>
+                          <a:cs typeface="Arial"/>
+                        </a:rPr>
+                        <a:t>F</a:t>
+                      </a:r>
+                    </a:p>
+                  </a:txBody>
+                  <a:tcPr marL="91440" marR="91440" marT="45720" marB="45720">
+                    <a:lnR w="9525">
+                      <a:solidFill>
+                        <a:srgbClr val="D6E0E5"/>
+                      </a:solidFill>
+                      <a:prstDash val="solid"/>
+                    </a:lnR>
+                    <a:lnT w="9525">
+                      <a:solidFill>
+                        <a:srgbClr val="D6E0E5"/>
+                      </a:solidFill>
+                      <a:prstDash val="solid"/>
+                    </a:lnT>
+                    <a:lnB w="9525">
+                      <a:solidFill>
+                        <a:srgbClr val="D6E0E5"/>
+                      </a:solidFill>
+                      <a:prstDash val="solid"/>
+                    </a:lnB>
+                    <a:solidFill>
+                      <a:srgbClr val="176D8C"/>
+                    </a:solidFill>
+                  </a:tcPr>
+                </a:tc>
+                <a:tc>
+                  <a:txBody>
+                    <a:bodyPr>
+                      <a:noAutofit/>
+                    </a:bodyPr>
+                    <a:lstStyle/>
+                    <a:p>
+                      <a:pPr algn="ctr"/>
+                      <a:r>
+                        <a:rPr sz="1650" b="1">
                           <a:solidFill>
                             <a:srgbClr val="FFFFFF"/>
                           </a:solidFill>
@@ -12391,7 +12417,7 @@
                   </a:tcPr>
                 </a:tc>
               </a:tr>
-              <a:tr h="381000">
+              <a:tr h="350044">
                 <a:tc>
                   <a:txBody>
                     <a:bodyPr>
@@ -12401,7 +12427,7 @@
                     <a:p>
                       <a:pPr algn="l"/>
                       <a:r>
-                        <a:rPr sz="1725" b="0">
+                        <a:rPr sz="1650" b="0">
                           <a:solidFill>
                             <a:srgbClr val="183044"/>
                           </a:solidFill>
@@ -12409,7 +12435,7 @@
                           <a:ea typeface="Arial"/>
                           <a:cs typeface="Arial"/>
                         </a:rPr>
-                        <a:t>BMI by education (survey)</a:t>
+                        <a:t>CRD-form: one-way ANOVA</a:t>
                       </a:r>
                     </a:p>
                   </a:txBody>
@@ -12446,7 +12472,7 @@
                     <a:p>
                       <a:pPr algn="ctr"/>
                       <a:r>
-                        <a:rPr sz="1725" b="0">
+                        <a:rPr sz="1650" b="0">
                           <a:solidFill>
                             <a:srgbClr val="183044"/>
                           </a:solidFill>
@@ -12454,7 +12480,7 @@
                           <a:ea typeface="Arial"/>
                           <a:cs typeface="Arial"/>
                         </a:rPr>
-                        <a:t>14.41</a:t>
+                        <a:t>3000</a:t>
                       </a:r>
                     </a:p>
                   </a:txBody>
@@ -12485,7 +12511,46 @@
                     <a:p>
                       <a:pPr algn="ctr"/>
                       <a:r>
-                        <a:rPr sz="1725" b="0">
+                        <a:rPr sz="1650" b="0">
+                          <a:solidFill>
+                            <a:srgbClr val="183044"/>
+                          </a:solidFill>
+                          <a:latin typeface="Arial"/>
+                          <a:ea typeface="Arial"/>
+                          <a:cs typeface="Arial"/>
+                        </a:rPr>
+                        <a:t>14.41</a:t>
+                      </a:r>
+                    </a:p>
+                  </a:txBody>
+                  <a:tcPr marL="91440" marR="91440" marT="45720" marB="45720">
+                    <a:lnR w="9525">
+                      <a:solidFill>
+                        <a:srgbClr val="D6E0E5"/>
+                      </a:solidFill>
+                      <a:prstDash val="solid"/>
+                    </a:lnR>
+                    <a:lnB w="9525">
+                      <a:solidFill>
+                        <a:srgbClr val="D6E0E5"/>
+                      </a:solidFill>
+                      <a:prstDash val="solid"/>
+                    </a:lnB>
+                    <a:solidFill>
+                      <a:srgbClr val="FFFFFF"/>
+                    </a:solidFill>
+                  </a:tcPr>
+                </a:tc>
+                <a:tc>
+                  <a:txBody>
+                    <a:bodyPr>
+                      <a:noAutofit/>
+                    </a:bodyPr>
+                    <a:lstStyle/>
+                    <a:p>
+                      <a:pPr algn="ctr"/>
+                      <a:r>
+                        <a:rPr sz="1650" b="0">
                           <a:solidFill>
                             <a:srgbClr val="183044"/>
                           </a:solidFill>
@@ -12516,7 +12581,7 @@
                   </a:tcPr>
                 </a:tc>
               </a:tr>
-              <a:tr h="381000">
+              <a:tr h="350044">
                 <a:tc>
                   <a:txBody>
                     <a:bodyPr>
@@ -12526,7 +12591,7 @@
                     <a:p>
                       <a:pPr algn="l"/>
                       <a:r>
-                        <a:rPr sz="1725" b="0">
+                        <a:rPr sz="1650" b="0">
                           <a:solidFill>
                             <a:srgbClr val="183044"/>
                           </a:solidFill>
@@ -12534,7 +12599,7 @@
                           <a:ea typeface="Arial"/>
                           <a:cs typeface="Arial"/>
                         </a:rPr>
-                        <a:t>Potato CRD: 32 plots, 7 groups</a:t>
+                        <a:t>RBD layout: account for age</a:t>
                       </a:r>
                     </a:p>
                   </a:txBody>
@@ -12571,7 +12636,7 @@
                     <a:p>
                       <a:pPr algn="ctr"/>
                       <a:r>
-                        <a:rPr sz="1725" b="0">
+                        <a:rPr sz="1650" b="0">
                           <a:solidFill>
                             <a:srgbClr val="183044"/>
                           </a:solidFill>
@@ -12579,7 +12644,7 @@
                           <a:ea typeface="Arial"/>
                           <a:cs typeface="Arial"/>
                         </a:rPr>
-                        <a:t>3.61</a:t>
+                        <a:t>160</a:t>
                       </a:r>
                     </a:p>
                   </a:txBody>
@@ -12610,7 +12675,7 @@
                     <a:p>
                       <a:pPr algn="ctr"/>
                       <a:r>
-                        <a:rPr sz="1725" b="0">
+                        <a:rPr sz="1650" b="0">
                           <a:solidFill>
                             <a:srgbClr val="183044"/>
                           </a:solidFill>
@@ -12618,7 +12683,7 @@
                           <a:ea typeface="Arial"/>
                           <a:cs typeface="Arial"/>
                         </a:rPr>
-                        <a:t>0.010</a:t>
+                        <a:t>3.14</a:t>
                       </a:r>
                     </a:p>
                   </a:txBody>
@@ -12637,6 +12702,209 @@
                     </a:lnB>
                     <a:solidFill>
                       <a:srgbClr val="EAF2F5"/>
+                    </a:solidFill>
+                  </a:tcPr>
+                </a:tc>
+                <a:tc>
+                  <a:txBody>
+                    <a:bodyPr>
+                      <a:noAutofit/>
+                    </a:bodyPr>
+                    <a:lstStyle/>
+                    <a:p>
+                      <a:pPr algn="ctr"/>
+                      <a:r>
+                        <a:rPr sz="1650" b="0">
+                          <a:solidFill>
+                            <a:srgbClr val="183044"/>
+                          </a:solidFill>
+                          <a:latin typeface="Arial"/>
+                          <a:ea typeface="Arial"/>
+                          <a:cs typeface="Arial"/>
+                        </a:rPr>
+                        <a:t>0.027</a:t>
+                      </a:r>
+                    </a:p>
+                  </a:txBody>
+                  <a:tcPr marL="91440" marR="91440" marT="45720" marB="45720">
+                    <a:lnR w="9525">
+                      <a:solidFill>
+                        <a:srgbClr val="D6E0E5"/>
+                      </a:solidFill>
+                      <a:prstDash val="solid"/>
+                    </a:lnR>
+                    <a:lnB w="9525">
+                      <a:solidFill>
+                        <a:srgbClr val="D6E0E5"/>
+                      </a:solidFill>
+                      <a:prstDash val="solid"/>
+                    </a:lnB>
+                    <a:solidFill>
+                      <a:srgbClr val="EAF2F5"/>
+                    </a:solidFill>
+                  </a:tcPr>
+                </a:tc>
+              </a:tr>
+              <a:tr h="350044">
+                <a:tc>
+                  <a:txBody>
+                    <a:bodyPr>
+                      <a:noAutofit/>
+                    </a:bodyPr>
+                    <a:lstStyle/>
+                    <a:p>
+                      <a:pPr algn="l"/>
+                      <a:r>
+                        <a:rPr sz="1650" b="0">
+                          <a:solidFill>
+                            <a:srgbClr val="183044"/>
+                          </a:solidFill>
+                          <a:latin typeface="Arial"/>
+                          <a:ea typeface="Arial"/>
+                          <a:cs typeface="Arial"/>
+                        </a:rPr>
+                        <a:t>Latin Square layout: age + income</a:t>
+                      </a:r>
+                    </a:p>
+                  </a:txBody>
+                  <a:tcPr marL="91440" marR="91440" marT="45720" marB="45720">
+                    <a:lnL w="9525">
+                      <a:solidFill>
+                        <a:srgbClr val="D6E0E5"/>
+                      </a:solidFill>
+                      <a:prstDash val="solid"/>
+                    </a:lnL>
+                    <a:lnR w="9525">
+                      <a:solidFill>
+                        <a:srgbClr val="D6E0E5"/>
+                      </a:solidFill>
+                      <a:prstDash val="solid"/>
+                    </a:lnR>
+                    <a:lnB w="9525">
+                      <a:solidFill>
+                        <a:srgbClr val="D6E0E5"/>
+                      </a:solidFill>
+                      <a:prstDash val="solid"/>
+                    </a:lnB>
+                    <a:solidFill>
+                      <a:srgbClr val="FFFFFF"/>
+                    </a:solidFill>
+                  </a:tcPr>
+                </a:tc>
+                <a:tc>
+                  <a:txBody>
+                    <a:bodyPr>
+                      <a:noAutofit/>
+                    </a:bodyPr>
+                    <a:lstStyle/>
+                    <a:p>
+                      <a:pPr algn="ctr"/>
+                      <a:r>
+                        <a:rPr sz="1650" b="0">
+                          <a:solidFill>
+                            <a:srgbClr val="183044"/>
+                          </a:solidFill>
+                          <a:latin typeface="Arial"/>
+                          <a:ea typeface="Arial"/>
+                          <a:cs typeface="Arial"/>
+                        </a:rPr>
+                        <a:t>16</a:t>
+                      </a:r>
+                    </a:p>
+                  </a:txBody>
+                  <a:tcPr marL="91440" marR="91440" marT="45720" marB="45720">
+                    <a:lnR w="9525">
+                      <a:solidFill>
+                        <a:srgbClr val="D6E0E5"/>
+                      </a:solidFill>
+                      <a:prstDash val="solid"/>
+                    </a:lnR>
+                    <a:lnB w="9525">
+                      <a:solidFill>
+                        <a:srgbClr val="D6E0E5"/>
+                      </a:solidFill>
+                      <a:prstDash val="solid"/>
+                    </a:lnB>
+                    <a:solidFill>
+                      <a:srgbClr val="FFFFFF"/>
+                    </a:solidFill>
+                  </a:tcPr>
+                </a:tc>
+                <a:tc>
+                  <a:txBody>
+                    <a:bodyPr>
+                      <a:noAutofit/>
+                    </a:bodyPr>
+                    <a:lstStyle/>
+                    <a:p>
+                      <a:pPr algn="ctr"/>
+                      <a:r>
+                        <a:rPr sz="1650" b="0">
+                          <a:solidFill>
+                            <a:srgbClr val="183044"/>
+                          </a:solidFill>
+                          <a:latin typeface="Arial"/>
+                          <a:ea typeface="Arial"/>
+                          <a:cs typeface="Arial"/>
+                        </a:rPr>
+                        <a:t>3.28</a:t>
+                      </a:r>
+                    </a:p>
+                  </a:txBody>
+                  <a:tcPr marL="91440" marR="91440" marT="45720" marB="45720">
+                    <a:lnR w="9525">
+                      <a:solidFill>
+                        <a:srgbClr val="D6E0E5"/>
+                      </a:solidFill>
+                      <a:prstDash val="solid"/>
+                    </a:lnR>
+                    <a:lnB w="9525">
+                      <a:solidFill>
+                        <a:srgbClr val="D6E0E5"/>
+                      </a:solidFill>
+                      <a:prstDash val="solid"/>
+                    </a:lnB>
+                    <a:solidFill>
+                      <a:srgbClr val="FFFFFF"/>
+                    </a:solidFill>
+                  </a:tcPr>
+                </a:tc>
+                <a:tc>
+                  <a:txBody>
+                    <a:bodyPr>
+                      <a:noAutofit/>
+                    </a:bodyPr>
+                    <a:lstStyle/>
+                    <a:p>
+                      <a:pPr algn="ctr"/>
+                      <a:r>
+                        <a:rPr sz="1650" b="0">
+                          <a:solidFill>
+                            <a:srgbClr val="183044"/>
+                          </a:solidFill>
+                          <a:latin typeface="Arial"/>
+                          <a:ea typeface="Arial"/>
+                          <a:cs typeface="Arial"/>
+                        </a:rPr>
+                        <a:t>0.100</a:t>
+                      </a:r>
+                    </a:p>
+                  </a:txBody>
+                  <a:tcPr marL="91440" marR="91440" marT="45720" marB="45720">
+                    <a:lnR w="9525">
+                      <a:solidFill>
+                        <a:srgbClr val="D6E0E5"/>
+                      </a:solidFill>
+                      <a:prstDash val="solid"/>
+                    </a:lnR>
+                    <a:lnB w="9525">
+                      <a:solidFill>
+                        <a:srgbClr val="D6E0E5"/>
+                      </a:solidFill>
+                      <a:prstDash val="solid"/>
+                    </a:lnB>
+                    <a:solidFill>
+                      <a:srgbClr val="FFFFFF"/>
                     </a:solidFill>
                   </a:tcPr>
                 </a:tc>
@@ -12650,7 +12918,7 @@
           <p:cNvPr id="6" name="text">
             <a:extLst xmlns:a="http://schemas.openxmlformats.org/drawingml/2006/main">
               <a:ext uri="{FF2B5EF4-FFF2-40B4-BE49-F238E27FC236}">
-                <a16:creationId xmlns:a16="http://schemas.microsoft.com/office/drawing/2014/main" id="{A75C3CD1-4E1A-4B0D-AE41-BCA4A2C0971E}"/>
+                <a16:creationId xmlns:a16="http://schemas.microsoft.com/office/drawing/2014/main" id="{CD558C6C-E6C0-4C82-8E11-BDB50A95FC48}"/>
               </a:ext>
             </a:extLst>
           </p:cNvPr>
@@ -12661,8 +12929,8 @@
         </p:nvSpPr>
         <p:spPr>
           <a:xfrm xmlns:a="http://schemas.openxmlformats.org/drawingml/2006/main">
-            <a:off x="400050" y="2847975"/>
-            <a:ext cx="5648325" cy="571500"/>
+            <a:off x="400050" y="3152775"/>
+            <a:ext cx="11391900" cy="304800"/>
           </a:xfrm>
           <a:prstGeom xmlns:a="http://schemas.openxmlformats.org/drawingml/2006/main" prst="rect">
             <a:avLst/>
@@ -12678,7 +12946,7 @@
           </a:bodyPr>
           <a:lstStyle xmlns:a="http://schemas.openxmlformats.org/drawingml/2006/main">
             <a:defPPr>
-              <a:defRPr sz="1575" b="0">
+              <a:defRPr sz="1500" b="0">
                 <a:solidFill>
                   <a:srgbClr val="183044"/>
                 </a:solidFill>
@@ -12690,7 +12958,7 @@
           </a:lstStyle>
           <a:p xmlns:a="http://schemas.openxmlformats.org/drawingml/2006/main">
             <a:pPr>
-              <a:defRPr sz="1575" b="0">
+              <a:defRPr sz="1500" b="0">
                 <a:solidFill>
                   <a:srgbClr val="183044"/>
                 </a:solidFill>
@@ -12700,7 +12968,7 @@
               </a:defRPr>
             </a:pPr>
             <a:r>
-              <a:rPr sz="1575" b="0">
+              <a:rPr sz="1500" b="0">
                 <a:solidFill>
                   <a:srgbClr val="183044"/>
                 </a:solidFill>
@@ -12708,40 +12976,17 @@
                 <a:ea typeface="Arial"/>
                 <a:cs typeface="Arial"/>
               </a:rPr>
-              <a:t>Education: existing survey groups.</a:t>
-            </a:r>
-          </a:p>
-          <a:p xmlns:a="http://schemas.openxmlformats.org/drawingml/2006/main">
-            <a:pPr>
-              <a:defRPr sz="1575" b="0">
-                <a:solidFill>
-                  <a:srgbClr val="183044"/>
-                </a:solidFill>
-                <a:latin typeface="Arial"/>
-                <a:ea typeface="Arial"/>
-                <a:cs typeface="Arial"/>
-              </a:defRPr>
-            </a:pPr>
-            <a:r>
-              <a:rPr sz="1575" b="0">
-                <a:solidFill>
-                  <a:srgbClr val="183044"/>
-                </a:solidFill>
-                <a:latin typeface="Arial"/>
-                <a:ea typeface="Arial"/>
-                <a:cs typeface="Arial"/>
-              </a:rPr>
-              <a:t>CRD: 32 randomized plots, 7 sulfur treatments.</a:t>
+              <a:t>Full-sample checks: Welch p &lt; 0.001. Holm: graduates differ from high school and some college (p &lt; 0.001).</a:t>
             </a:r>
           </a:p>
         </p:txBody>
       </p:sp>
       <p:sp>
         <p:nvSpPr>
-          <p:cNvPr id="7" name="text">
+          <p:cNvPr id="7" name="">
             <a:extLst xmlns:a="http://schemas.openxmlformats.org/drawingml/2006/main">
               <a:ext uri="{FF2B5EF4-FFF2-40B4-BE49-F238E27FC236}">
-                <a16:creationId xmlns:a16="http://schemas.microsoft.com/office/drawing/2014/main" id="{9D0C8869-466B-49DB-A8DD-6F2ED4D93E72}"/>
+                <a16:creationId xmlns:a16="http://schemas.microsoft.com/office/drawing/2014/main" id="{F24920CA-8EA7-44D1-BC72-6DC68CE8B24A}"/>
               </a:ext>
             </a:extLst>
           </p:cNvPr>
@@ -12752,98 +12997,7 @@
         </p:nvSpPr>
         <p:spPr>
           <a:xfrm xmlns:a="http://schemas.openxmlformats.org/drawingml/2006/main">
-            <a:off x="6362700" y="2847975"/>
-            <a:ext cx="5419725" cy="571500"/>
-          </a:xfrm>
-          <a:prstGeom xmlns:a="http://schemas.openxmlformats.org/drawingml/2006/main" prst="rect">
-            <a:avLst/>
-          </a:prstGeom>
-          <a:noFill xmlns:a="http://schemas.openxmlformats.org/drawingml/2006/main"/>
-          <a:ln xmlns:a="http://schemas.openxmlformats.org/drawingml/2006/main" w="0">
-            <a:noFill/>
-          </a:ln>
-        </p:spPr>
-        <p:txBody>
-          <a:bodyPr xmlns:a="http://schemas.openxmlformats.org/drawingml/2006/main">
-            <a:noAutofit/>
-          </a:bodyPr>
-          <a:lstStyle xmlns:a="http://schemas.openxmlformats.org/drawingml/2006/main">
-            <a:defPPr>
-              <a:defRPr sz="1575" b="0">
-                <a:solidFill>
-                  <a:srgbClr val="183044"/>
-                </a:solidFill>
-                <a:latin typeface="Arial"/>
-                <a:ea typeface="Arial"/>
-                <a:cs typeface="Arial"/>
-              </a:defRPr>
-            </a:defPPr>
-          </a:lstStyle>
-          <a:p xmlns:a="http://schemas.openxmlformats.org/drawingml/2006/main">
-            <a:pPr>
-              <a:defRPr sz="1575" b="0">
-                <a:solidFill>
-                  <a:srgbClr val="183044"/>
-                </a:solidFill>
-                <a:latin typeface="Arial"/>
-                <a:ea typeface="Arial"/>
-                <a:cs typeface="Arial"/>
-              </a:defRPr>
-            </a:pPr>
-            <a:r>
-              <a:rPr sz="1575" b="0">
-                <a:solidFill>
-                  <a:srgbClr val="183044"/>
-                </a:solidFill>
-                <a:latin typeface="Arial"/>
-                <a:ea typeface="Arial"/>
-                <a:cs typeface="Arial"/>
-              </a:rPr>
-              <a:t>Both tests detect a difference between means.</a:t>
-            </a:r>
-          </a:p>
-          <a:p xmlns:a="http://schemas.openxmlformats.org/drawingml/2006/main">
-            <a:pPr>
-              <a:defRPr sz="1575" b="0">
-                <a:solidFill>
-                  <a:srgbClr val="183044"/>
-                </a:solidFill>
-                <a:latin typeface="Arial"/>
-                <a:ea typeface="Arial"/>
-                <a:cs typeface="Arial"/>
-              </a:defRPr>
-            </a:pPr>
-            <a:r>
-              <a:rPr sz="1575" b="0">
-                <a:solidFill>
-                  <a:srgbClr val="183044"/>
-                </a:solidFill>
-                <a:latin typeface="Arial"/>
-                <a:ea typeface="Arial"/>
-                <a:cs typeface="Arial"/>
-              </a:rPr>
-              <a:t>F does not identify every differing pair.</a:t>
-            </a:r>
-          </a:p>
-        </p:txBody>
-      </p:sp>
-      <p:sp>
-        <p:nvSpPr>
-          <p:cNvPr id="8" name="">
-            <a:extLst xmlns:a="http://schemas.openxmlformats.org/drawingml/2006/main">
-              <a:ext uri="{FF2B5EF4-FFF2-40B4-BE49-F238E27FC236}">
-                <a16:creationId xmlns:a16="http://schemas.microsoft.com/office/drawing/2014/main" id="{9AAE154B-82F1-476E-80BE-790DC8EC1AC1}"/>
-              </a:ext>
-            </a:extLst>
-          </p:cNvPr>
-          <p:cNvSpPr>
-            <a:spLocks xmlns:a="http://schemas.openxmlformats.org/drawingml/2006/main" noGrp="1"/>
-          </p:cNvSpPr>
-          <p:nvPr/>
-        </p:nvSpPr>
-        <p:spPr>
-          <a:xfrm xmlns:a="http://schemas.openxmlformats.org/drawingml/2006/main">
-            <a:off x="400050" y="3476625"/>
+            <a:off x="400050" y="3514725"/>
             <a:ext cx="11391900" cy="19050"/>
           </a:xfrm>
           <a:prstGeom xmlns:a="http://schemas.openxmlformats.org/drawingml/2006/main" prst="rect">
@@ -12859,10 +13013,10 @@
       </p:sp>
       <p:sp>
         <p:nvSpPr>
-          <p:cNvPr id="9" name="text">
+          <p:cNvPr id="8" name="text">
             <a:extLst xmlns:a="http://schemas.openxmlformats.org/drawingml/2006/main">
               <a:ext uri="{FF2B5EF4-FFF2-40B4-BE49-F238E27FC236}">
-                <a16:creationId xmlns:a16="http://schemas.microsoft.com/office/drawing/2014/main" id="{3333130C-3819-4918-868F-5B4DFC9AE67B}"/>
+                <a16:creationId xmlns:a16="http://schemas.microsoft.com/office/drawing/2014/main" id="{D1C10E86-86CE-4EB4-9C23-A354EFD56C72}"/>
               </a:ext>
             </a:extLst>
           </p:cNvPr>
@@ -12873,8 +13027,8 @@
         </p:nvSpPr>
         <p:spPr>
           <a:xfrm xmlns:a="http://schemas.openxmlformats.org/drawingml/2006/main">
-            <a:off x="400050" y="3648075"/>
-            <a:ext cx="5429250" cy="304800"/>
+            <a:off x="400050" y="3667125"/>
+            <a:ext cx="5476875" cy="323850"/>
           </a:xfrm>
           <a:prstGeom xmlns:a="http://schemas.openxmlformats.org/drawingml/2006/main" prst="rect">
             <a:avLst/>
@@ -12920,17 +13074,17 @@
                 <a:ea typeface="Arial"/>
                 <a:cs typeface="Arial"/>
               </a:rPr>
-              <a:t>RBD: one blocking factor (rice)</a:t>
+              <a:t>RBD layout: four age blocks</a:t>
             </a:r>
           </a:p>
         </p:txBody>
       </p:sp>
       <p:sp>
         <p:nvSpPr>
-          <p:cNvPr id="10" name="text">
+          <p:cNvPr id="9" name="text">
             <a:extLst xmlns:a="http://schemas.openxmlformats.org/drawingml/2006/main">
               <a:ext uri="{FF2B5EF4-FFF2-40B4-BE49-F238E27FC236}">
-                <a16:creationId xmlns:a16="http://schemas.microsoft.com/office/drawing/2014/main" id="{86956113-5D67-4CFD-BAD8-90C36D7E23E5}"/>
+                <a16:creationId xmlns:a16="http://schemas.microsoft.com/office/drawing/2014/main" id="{5818AC06-9787-47EB-8A64-139D87557251}"/>
               </a:ext>
             </a:extLst>
           </p:cNvPr>
@@ -12941,8 +13095,8 @@
         </p:nvSpPr>
         <p:spPr>
           <a:xfrm xmlns:a="http://schemas.openxmlformats.org/drawingml/2006/main">
-            <a:off x="6362700" y="3648075"/>
-            <a:ext cx="5429250" cy="304800"/>
+            <a:off x="6362700" y="3667125"/>
+            <a:ext cx="5448300" cy="323850"/>
           </a:xfrm>
           <a:prstGeom xmlns:a="http://schemas.openxmlformats.org/drawingml/2006/main" prst="rect">
             <a:avLst/>
@@ -12988,17 +13142,17 @@
                 <a:ea typeface="Arial"/>
                 <a:cs typeface="Arial"/>
               </a:rPr>
-              <a:t>Latin Square: rows and columns</a:t>
+              <a:t>Latin Square: age and income blocks</a:t>
             </a:r>
           </a:p>
         </p:txBody>
       </p:sp>
       <p:graphicFrame>
         <p:nvGraphicFramePr>
-          <p:cNvPr id="11" name="Chart">
+          <p:cNvPr id="10" name="Chart">
             <a:extLst xmlns:a="http://schemas.openxmlformats.org/drawingml/2006/main">
               <a:ext uri="{FF2B5EF4-FFF2-40B4-BE49-F238E27FC236}">
-                <a16:creationId xmlns:a16="http://schemas.microsoft.com/office/drawing/2014/main" id="{8A6211CF-91DD-4C8B-ADF4-A3B13337BBAC}"/>
+                <a16:creationId xmlns:a16="http://schemas.microsoft.com/office/drawing/2014/main" id="{F0C93F1F-FCAD-4D2D-B7CE-438E2A7CA26B}"/>
               </a:ext>
             </a:extLst>
           </p:cNvPr>
@@ -13006,21 +13160,701 @@
           <p:nvPr/>
         </p:nvGraphicFramePr>
         <p:xfrm>
-          <a:off xmlns:a="http://schemas.openxmlformats.org/drawingml/2006/main" x="257175" y="4152900"/>
-          <a:ext xmlns:a="http://schemas.openxmlformats.org/drawingml/2006/main" cx="3371850" cy="1752600"/>
+          <a:off xmlns:a="http://schemas.openxmlformats.org/drawingml/2006/main" x="257175" y="4124325"/>
+          <a:ext xmlns:a="http://schemas.openxmlformats.org/drawingml/2006/main" cx="5572125" cy="1590675"/>
         </p:xfrm>
         <a:graphic xmlns:a="http://schemas.openxmlformats.org/drawingml/2006/main">
           <a:graphicData uri="http://schemas.openxmlformats.org/drawingml/2006/chart">
-            <c:chart xmlns:r="http://schemas.openxmlformats.org/officeDocument/2006/relationships" xmlns:c="http://schemas.openxmlformats.org/drawingml/2006/chart" r:id="Rd763d900ecf24c3d"/>
+            <c:chart xmlns:r="http://schemas.openxmlformats.org/officeDocument/2006/relationships" xmlns:c="http://schemas.openxmlformats.org/drawingml/2006/chart" r:id="R9f79c71bbdea4082"/>
           </a:graphicData>
         </a:graphic>
       </p:graphicFrame>
+      <p:sp>
+        <p:nvSpPr>
+          <p:cNvPr id="11" name="text">
+            <a:extLst xmlns:a="http://schemas.openxmlformats.org/drawingml/2006/main">
+              <a:ext uri="{FF2B5EF4-FFF2-40B4-BE49-F238E27FC236}">
+                <a16:creationId xmlns:a16="http://schemas.microsoft.com/office/drawing/2014/main" id="{45B9CFC9-9928-49A5-9129-BF0219CBAC10}"/>
+              </a:ext>
+            </a:extLst>
+          </p:cNvPr>
+          <p:cNvSpPr>
+            <a:spLocks xmlns:a="http://schemas.openxmlformats.org/drawingml/2006/main" noGrp="1"/>
+          </p:cNvSpPr>
+          <p:nvPr/>
+        </p:nvSpPr>
+        <p:spPr>
+          <a:xfrm xmlns:a="http://schemas.openxmlformats.org/drawingml/2006/main">
+            <a:off x="400050" y="5857875"/>
+            <a:ext cx="5476875" cy="257175"/>
+          </a:xfrm>
+          <a:prstGeom xmlns:a="http://schemas.openxmlformats.org/drawingml/2006/main" prst="rect">
+            <a:avLst/>
+          </a:prstGeom>
+          <a:noFill xmlns:a="http://schemas.openxmlformats.org/drawingml/2006/main"/>
+          <a:ln xmlns:a="http://schemas.openxmlformats.org/drawingml/2006/main" w="0">
+            <a:noFill/>
+          </a:ln>
+        </p:spPr>
+        <p:txBody>
+          <a:bodyPr xmlns:a="http://schemas.openxmlformats.org/drawingml/2006/main">
+            <a:noAutofit/>
+          </a:bodyPr>
+          <a:lstStyle xmlns:a="http://schemas.openxmlformats.org/drawingml/2006/main">
+            <a:defPPr>
+              <a:defRPr sz="1500" b="0">
+                <a:solidFill>
+                  <a:srgbClr val="183044"/>
+                </a:solidFill>
+                <a:latin typeface="Arial"/>
+                <a:ea typeface="Arial"/>
+                <a:cs typeface="Arial"/>
+              </a:defRPr>
+            </a:defPPr>
+          </a:lstStyle>
+          <a:p xmlns:a="http://schemas.openxmlformats.org/drawingml/2006/main">
+            <a:pPr>
+              <a:defRPr sz="1500" b="0">
+                <a:solidFill>
+                  <a:srgbClr val="183044"/>
+                </a:solidFill>
+                <a:latin typeface="Arial"/>
+                <a:ea typeface="Arial"/>
+                <a:cs typeface="Arial"/>
+              </a:defRPr>
+            </a:pPr>
+            <a:r>
+              <a:rPr sz="1500" b="0">
+                <a:solidFill>
+                  <a:srgbClr val="183044"/>
+                </a:solidFill>
+                <a:latin typeface="Arial"/>
+                <a:ea typeface="Arial"/>
+                <a:cs typeface="Arial"/>
+              </a:rPr>
+              <a:t>10 respondents in every age × education cell.</a:t>
+            </a:r>
+          </a:p>
+        </p:txBody>
+      </p:sp>
+      <p:sp>
+        <p:nvSpPr>
+          <p:cNvPr id="12" name="text">
+            <a:extLst xmlns:a="http://schemas.openxmlformats.org/drawingml/2006/main">
+              <a:ext uri="{FF2B5EF4-FFF2-40B4-BE49-F238E27FC236}">
+                <a16:creationId xmlns:a16="http://schemas.microsoft.com/office/drawing/2014/main" id="{42ADF299-5FBA-4DEF-B843-893BD50A979B}"/>
+              </a:ext>
+            </a:extLst>
+          </p:cNvPr>
+          <p:cNvSpPr>
+            <a:spLocks xmlns:a="http://schemas.openxmlformats.org/drawingml/2006/main" noGrp="1"/>
+          </p:cNvSpPr>
+          <p:nvPr/>
+        </p:nvSpPr>
+        <p:spPr>
+          <a:xfrm xmlns:a="http://schemas.openxmlformats.org/drawingml/2006/main">
+            <a:off x="6362700" y="4086225"/>
+            <a:ext cx="1143000" cy="238125"/>
+          </a:xfrm>
+          <a:prstGeom xmlns:a="http://schemas.openxmlformats.org/drawingml/2006/main" prst="rect">
+            <a:avLst/>
+          </a:prstGeom>
+          <a:noFill xmlns:a="http://schemas.openxmlformats.org/drawingml/2006/main"/>
+          <a:ln xmlns:a="http://schemas.openxmlformats.org/drawingml/2006/main" w="0">
+            <a:noFill/>
+          </a:ln>
+        </p:spPr>
+        <p:txBody>
+          <a:bodyPr xmlns:a="http://schemas.openxmlformats.org/drawingml/2006/main">
+            <a:noAutofit/>
+          </a:bodyPr>
+          <a:lstStyle xmlns:a="http://schemas.openxmlformats.org/drawingml/2006/main">
+            <a:defPPr>
+              <a:defRPr sz="1350" b="1">
+                <a:solidFill>
+                  <a:srgbClr val="183044"/>
+                </a:solidFill>
+                <a:latin typeface="Arial"/>
+                <a:ea typeface="Arial"/>
+                <a:cs typeface="Arial"/>
+              </a:defRPr>
+            </a:defPPr>
+          </a:lstStyle>
+          <a:p xmlns:a="http://schemas.openxmlformats.org/drawingml/2006/main">
+            <a:pPr>
+              <a:defRPr sz="1350" b="1">
+                <a:solidFill>
+                  <a:srgbClr val="183044"/>
+                </a:solidFill>
+                <a:latin typeface="Arial"/>
+                <a:ea typeface="Arial"/>
+                <a:cs typeface="Arial"/>
+              </a:defRPr>
+            </a:pPr>
+            <a:r>
+              <a:rPr sz="1350" b="1">
+                <a:solidFill>
+                  <a:srgbClr val="183044"/>
+                </a:solidFill>
+                <a:latin typeface="Arial"/>
+                <a:ea typeface="Arial"/>
+                <a:cs typeface="Arial"/>
+              </a:rPr>
+              <a:t>Age</a:t>
+            </a:r>
+          </a:p>
+        </p:txBody>
+      </p:sp>
+      <p:sp>
+        <p:nvSpPr>
+          <p:cNvPr id="13" name="text">
+            <a:extLst xmlns:a="http://schemas.openxmlformats.org/drawingml/2006/main">
+              <a:ext uri="{FF2B5EF4-FFF2-40B4-BE49-F238E27FC236}">
+                <a16:creationId xmlns:a16="http://schemas.microsoft.com/office/drawing/2014/main" id="{34E0FD9B-6145-48DC-B695-0F413AD68DE1}"/>
+              </a:ext>
+            </a:extLst>
+          </p:cNvPr>
+          <p:cNvSpPr>
+            <a:spLocks xmlns:a="http://schemas.openxmlformats.org/drawingml/2006/main" noGrp="1"/>
+          </p:cNvSpPr>
+          <p:nvPr/>
+        </p:nvSpPr>
+        <p:spPr>
+          <a:xfrm xmlns:a="http://schemas.openxmlformats.org/drawingml/2006/main">
+            <a:off x="7620000" y="4086225"/>
+            <a:ext cx="952500" cy="238125"/>
+          </a:xfrm>
+          <a:prstGeom xmlns:a="http://schemas.openxmlformats.org/drawingml/2006/main" prst="rect">
+            <a:avLst/>
+          </a:prstGeom>
+          <a:noFill xmlns:a="http://schemas.openxmlformats.org/drawingml/2006/main"/>
+          <a:ln xmlns:a="http://schemas.openxmlformats.org/drawingml/2006/main" w="0">
+            <a:noFill/>
+          </a:ln>
+        </p:spPr>
+        <p:txBody>
+          <a:bodyPr xmlns:a="http://schemas.openxmlformats.org/drawingml/2006/main">
+            <a:noAutofit/>
+          </a:bodyPr>
+          <a:lstStyle xmlns:a="http://schemas.openxmlformats.org/drawingml/2006/main">
+            <a:defPPr>
+              <a:defRPr sz="1275" b="1">
+                <a:solidFill>
+                  <a:srgbClr val="183044"/>
+                </a:solidFill>
+                <a:latin typeface="Arial"/>
+                <a:ea typeface="Arial"/>
+                <a:cs typeface="Arial"/>
+              </a:defRPr>
+            </a:defPPr>
+          </a:lstStyle>
+          <a:p xmlns:a="http://schemas.openxmlformats.org/drawingml/2006/main">
+            <a:pPr>
+              <a:defRPr sz="1275" b="1">
+                <a:solidFill>
+                  <a:srgbClr val="183044"/>
+                </a:solidFill>
+                <a:latin typeface="Arial"/>
+                <a:ea typeface="Arial"/>
+                <a:cs typeface="Arial"/>
+              </a:defRPr>
+            </a:pPr>
+            <a:r>
+              <a:rPr sz="1275" b="1">
+                <a:solidFill>
+                  <a:srgbClr val="183044"/>
+                </a:solidFill>
+                <a:latin typeface="Arial"/>
+                <a:ea typeface="Arial"/>
+                <a:cs typeface="Arial"/>
+              </a:rPr>
+              <a:t>&lt;20k</a:t>
+            </a:r>
+          </a:p>
+        </p:txBody>
+      </p:sp>
+      <p:sp>
+        <p:nvSpPr>
+          <p:cNvPr id="14" name="text">
+            <a:extLst xmlns:a="http://schemas.openxmlformats.org/drawingml/2006/main">
+              <a:ext uri="{FF2B5EF4-FFF2-40B4-BE49-F238E27FC236}">
+                <a16:creationId xmlns:a16="http://schemas.microsoft.com/office/drawing/2014/main" id="{DF835DA1-4B86-4E7D-B24B-89586F2B9267}"/>
+              </a:ext>
+            </a:extLst>
+          </p:cNvPr>
+          <p:cNvSpPr>
+            <a:spLocks xmlns:a="http://schemas.openxmlformats.org/drawingml/2006/main" noGrp="1"/>
+          </p:cNvSpPr>
+          <p:nvPr/>
+        </p:nvSpPr>
+        <p:spPr>
+          <a:xfrm xmlns:a="http://schemas.openxmlformats.org/drawingml/2006/main">
+            <a:off x="8572500" y="4086225"/>
+            <a:ext cx="952500" cy="238125"/>
+          </a:xfrm>
+          <a:prstGeom xmlns:a="http://schemas.openxmlformats.org/drawingml/2006/main" prst="rect">
+            <a:avLst/>
+          </a:prstGeom>
+          <a:noFill xmlns:a="http://schemas.openxmlformats.org/drawingml/2006/main"/>
+          <a:ln xmlns:a="http://schemas.openxmlformats.org/drawingml/2006/main" w="0">
+            <a:noFill/>
+          </a:ln>
+        </p:spPr>
+        <p:txBody>
+          <a:bodyPr xmlns:a="http://schemas.openxmlformats.org/drawingml/2006/main">
+            <a:noAutofit/>
+          </a:bodyPr>
+          <a:lstStyle xmlns:a="http://schemas.openxmlformats.org/drawingml/2006/main">
+            <a:defPPr>
+              <a:defRPr sz="1275" b="1">
+                <a:solidFill>
+                  <a:srgbClr val="183044"/>
+                </a:solidFill>
+                <a:latin typeface="Arial"/>
+                <a:ea typeface="Arial"/>
+                <a:cs typeface="Arial"/>
+              </a:defRPr>
+            </a:defPPr>
+          </a:lstStyle>
+          <a:p xmlns:a="http://schemas.openxmlformats.org/drawingml/2006/main">
+            <a:pPr>
+              <a:defRPr sz="1275" b="1">
+                <a:solidFill>
+                  <a:srgbClr val="183044"/>
+                </a:solidFill>
+                <a:latin typeface="Arial"/>
+                <a:ea typeface="Arial"/>
+                <a:cs typeface="Arial"/>
+              </a:defRPr>
+            </a:pPr>
+            <a:r>
+              <a:rPr sz="1275" b="1">
+                <a:solidFill>
+                  <a:srgbClr val="183044"/>
+                </a:solidFill>
+                <a:latin typeface="Arial"/>
+                <a:ea typeface="Arial"/>
+                <a:cs typeface="Arial"/>
+              </a:rPr>
+              <a:t>20–35k</a:t>
+            </a:r>
+          </a:p>
+        </p:txBody>
+      </p:sp>
+      <p:sp>
+        <p:nvSpPr>
+          <p:cNvPr id="15" name="text">
+            <a:extLst xmlns:a="http://schemas.openxmlformats.org/drawingml/2006/main">
+              <a:ext uri="{FF2B5EF4-FFF2-40B4-BE49-F238E27FC236}">
+                <a16:creationId xmlns:a16="http://schemas.microsoft.com/office/drawing/2014/main" id="{E87CBD1C-46B2-4444-B735-F62391640F3C}"/>
+              </a:ext>
+            </a:extLst>
+          </p:cNvPr>
+          <p:cNvSpPr>
+            <a:spLocks xmlns:a="http://schemas.openxmlformats.org/drawingml/2006/main" noGrp="1"/>
+          </p:cNvSpPr>
+          <p:nvPr/>
+        </p:nvSpPr>
+        <p:spPr>
+          <a:xfrm xmlns:a="http://schemas.openxmlformats.org/drawingml/2006/main">
+            <a:off x="9525000" y="4086225"/>
+            <a:ext cx="952500" cy="238125"/>
+          </a:xfrm>
+          <a:prstGeom xmlns:a="http://schemas.openxmlformats.org/drawingml/2006/main" prst="rect">
+            <a:avLst/>
+          </a:prstGeom>
+          <a:noFill xmlns:a="http://schemas.openxmlformats.org/drawingml/2006/main"/>
+          <a:ln xmlns:a="http://schemas.openxmlformats.org/drawingml/2006/main" w="0">
+            <a:noFill/>
+          </a:ln>
+        </p:spPr>
+        <p:txBody>
+          <a:bodyPr xmlns:a="http://schemas.openxmlformats.org/drawingml/2006/main">
+            <a:noAutofit/>
+          </a:bodyPr>
+          <a:lstStyle xmlns:a="http://schemas.openxmlformats.org/drawingml/2006/main">
+            <a:defPPr>
+              <a:defRPr sz="1275" b="1">
+                <a:solidFill>
+                  <a:srgbClr val="183044"/>
+                </a:solidFill>
+                <a:latin typeface="Arial"/>
+                <a:ea typeface="Arial"/>
+                <a:cs typeface="Arial"/>
+              </a:defRPr>
+            </a:defPPr>
+          </a:lstStyle>
+          <a:p xmlns:a="http://schemas.openxmlformats.org/drawingml/2006/main">
+            <a:pPr>
+              <a:defRPr sz="1275" b="1">
+                <a:solidFill>
+                  <a:srgbClr val="183044"/>
+                </a:solidFill>
+                <a:latin typeface="Arial"/>
+                <a:ea typeface="Arial"/>
+                <a:cs typeface="Arial"/>
+              </a:defRPr>
+            </a:pPr>
+            <a:r>
+              <a:rPr sz="1275" b="1">
+                <a:solidFill>
+                  <a:srgbClr val="183044"/>
+                </a:solidFill>
+                <a:latin typeface="Arial"/>
+                <a:ea typeface="Arial"/>
+                <a:cs typeface="Arial"/>
+              </a:rPr>
+              <a:t>35–75k</a:t>
+            </a:r>
+          </a:p>
+        </p:txBody>
+      </p:sp>
+      <p:sp>
+        <p:nvSpPr>
+          <p:cNvPr id="16" name="text">
+            <a:extLst xmlns:a="http://schemas.openxmlformats.org/drawingml/2006/main">
+              <a:ext uri="{FF2B5EF4-FFF2-40B4-BE49-F238E27FC236}">
+                <a16:creationId xmlns:a16="http://schemas.microsoft.com/office/drawing/2014/main" id="{B853CD73-EA91-40DD-8915-71A26D4AC666}"/>
+              </a:ext>
+            </a:extLst>
+          </p:cNvPr>
+          <p:cNvSpPr>
+            <a:spLocks xmlns:a="http://schemas.openxmlformats.org/drawingml/2006/main" noGrp="1"/>
+          </p:cNvSpPr>
+          <p:nvPr/>
+        </p:nvSpPr>
+        <p:spPr>
+          <a:xfrm xmlns:a="http://schemas.openxmlformats.org/drawingml/2006/main">
+            <a:off x="10477500" y="4086225"/>
+            <a:ext cx="952500" cy="238125"/>
+          </a:xfrm>
+          <a:prstGeom xmlns:a="http://schemas.openxmlformats.org/drawingml/2006/main" prst="rect">
+            <a:avLst/>
+          </a:prstGeom>
+          <a:noFill xmlns:a="http://schemas.openxmlformats.org/drawingml/2006/main"/>
+          <a:ln xmlns:a="http://schemas.openxmlformats.org/drawingml/2006/main" w="0">
+            <a:noFill/>
+          </a:ln>
+        </p:spPr>
+        <p:txBody>
+          <a:bodyPr xmlns:a="http://schemas.openxmlformats.org/drawingml/2006/main">
+            <a:noAutofit/>
+          </a:bodyPr>
+          <a:lstStyle xmlns:a="http://schemas.openxmlformats.org/drawingml/2006/main">
+            <a:defPPr>
+              <a:defRPr sz="1275" b="1">
+                <a:solidFill>
+                  <a:srgbClr val="183044"/>
+                </a:solidFill>
+                <a:latin typeface="Arial"/>
+                <a:ea typeface="Arial"/>
+                <a:cs typeface="Arial"/>
+              </a:defRPr>
+            </a:defPPr>
+          </a:lstStyle>
+          <a:p xmlns:a="http://schemas.openxmlformats.org/drawingml/2006/main">
+            <a:pPr>
+              <a:defRPr sz="1275" b="1">
+                <a:solidFill>
+                  <a:srgbClr val="183044"/>
+                </a:solidFill>
+                <a:latin typeface="Arial"/>
+                <a:ea typeface="Arial"/>
+                <a:cs typeface="Arial"/>
+              </a:defRPr>
+            </a:pPr>
+            <a:r>
+              <a:rPr sz="1275" b="1">
+                <a:solidFill>
+                  <a:srgbClr val="183044"/>
+                </a:solidFill>
+                <a:latin typeface="Arial"/>
+                <a:ea typeface="Arial"/>
+                <a:cs typeface="Arial"/>
+              </a:rPr>
+              <a:t>75k+</a:t>
+            </a:r>
+          </a:p>
+        </p:txBody>
+      </p:sp>
+      <p:sp>
+        <p:nvSpPr>
+          <p:cNvPr id="17" name="text">
+            <a:extLst xmlns:a="http://schemas.openxmlformats.org/drawingml/2006/main">
+              <a:ext uri="{FF2B5EF4-FFF2-40B4-BE49-F238E27FC236}">
+                <a16:creationId xmlns:a16="http://schemas.microsoft.com/office/drawing/2014/main" id="{5DB873A6-78EA-454D-8128-F14D278EAF65}"/>
+              </a:ext>
+            </a:extLst>
+          </p:cNvPr>
+          <p:cNvSpPr>
+            <a:spLocks xmlns:a="http://schemas.openxmlformats.org/drawingml/2006/main" noGrp="1"/>
+          </p:cNvSpPr>
+          <p:nvPr/>
+        </p:nvSpPr>
+        <p:spPr>
+          <a:xfrm xmlns:a="http://schemas.openxmlformats.org/drawingml/2006/main">
+            <a:off x="6362700" y="4467225"/>
+            <a:ext cx="1209675" cy="247650"/>
+          </a:xfrm>
+          <a:prstGeom xmlns:a="http://schemas.openxmlformats.org/drawingml/2006/main" prst="rect">
+            <a:avLst/>
+          </a:prstGeom>
+          <a:noFill xmlns:a="http://schemas.openxmlformats.org/drawingml/2006/main"/>
+          <a:ln xmlns:a="http://schemas.openxmlformats.org/drawingml/2006/main" w="0">
+            <a:noFill/>
+          </a:ln>
+        </p:spPr>
+        <p:txBody>
+          <a:bodyPr xmlns:a="http://schemas.openxmlformats.org/drawingml/2006/main">
+            <a:noAutofit/>
+          </a:bodyPr>
+          <a:lstStyle xmlns:a="http://schemas.openxmlformats.org/drawingml/2006/main">
+            <a:defPPr>
+              <a:defRPr sz="1500" b="0">
+                <a:solidFill>
+                  <a:srgbClr val="183044"/>
+                </a:solidFill>
+                <a:latin typeface="Arial"/>
+                <a:ea typeface="Arial"/>
+                <a:cs typeface="Arial"/>
+              </a:defRPr>
+            </a:defPPr>
+          </a:lstStyle>
+          <a:p xmlns:a="http://schemas.openxmlformats.org/drawingml/2006/main">
+            <a:pPr>
+              <a:defRPr sz="1500" b="0">
+                <a:solidFill>
+                  <a:srgbClr val="183044"/>
+                </a:solidFill>
+                <a:latin typeface="Arial"/>
+                <a:ea typeface="Arial"/>
+                <a:cs typeface="Arial"/>
+              </a:defRPr>
+            </a:pPr>
+            <a:r>
+              <a:rPr sz="1500" b="0">
+                <a:solidFill>
+                  <a:srgbClr val="183044"/>
+                </a:solidFill>
+                <a:latin typeface="Arial"/>
+                <a:ea typeface="Arial"/>
+                <a:cs typeface="Arial"/>
+              </a:rPr>
+              <a:t>18–39</a:t>
+            </a:r>
+          </a:p>
+        </p:txBody>
+      </p:sp>
+      <p:sp>
+        <p:nvSpPr>
+          <p:cNvPr id="18" name="text">
+            <a:extLst xmlns:a="http://schemas.openxmlformats.org/drawingml/2006/main">
+              <a:ext uri="{FF2B5EF4-FFF2-40B4-BE49-F238E27FC236}">
+                <a16:creationId xmlns:a16="http://schemas.microsoft.com/office/drawing/2014/main" id="{CC941876-B2F9-42F6-BAFE-BCFCF5FB76A0}"/>
+              </a:ext>
+            </a:extLst>
+          </p:cNvPr>
+          <p:cNvSpPr>
+            <a:spLocks xmlns:a="http://schemas.openxmlformats.org/drawingml/2006/main" noGrp="1"/>
+          </p:cNvSpPr>
+          <p:nvPr/>
+        </p:nvSpPr>
+        <p:spPr>
+          <a:xfrm xmlns:a="http://schemas.openxmlformats.org/drawingml/2006/main">
+            <a:off x="6362700" y="4829175"/>
+            <a:ext cx="1209675" cy="247650"/>
+          </a:xfrm>
+          <a:prstGeom xmlns:a="http://schemas.openxmlformats.org/drawingml/2006/main" prst="rect">
+            <a:avLst/>
+          </a:prstGeom>
+          <a:noFill xmlns:a="http://schemas.openxmlformats.org/drawingml/2006/main"/>
+          <a:ln xmlns:a="http://schemas.openxmlformats.org/drawingml/2006/main" w="0">
+            <a:noFill/>
+          </a:ln>
+        </p:spPr>
+        <p:txBody>
+          <a:bodyPr xmlns:a="http://schemas.openxmlformats.org/drawingml/2006/main">
+            <a:noAutofit/>
+          </a:bodyPr>
+          <a:lstStyle xmlns:a="http://schemas.openxmlformats.org/drawingml/2006/main">
+            <a:defPPr>
+              <a:defRPr sz="1500" b="0">
+                <a:solidFill>
+                  <a:srgbClr val="183044"/>
+                </a:solidFill>
+                <a:latin typeface="Arial"/>
+                <a:ea typeface="Arial"/>
+                <a:cs typeface="Arial"/>
+              </a:defRPr>
+            </a:defPPr>
+          </a:lstStyle>
+          <a:p xmlns:a="http://schemas.openxmlformats.org/drawingml/2006/main">
+            <a:pPr>
+              <a:defRPr sz="1500" b="0">
+                <a:solidFill>
+                  <a:srgbClr val="183044"/>
+                </a:solidFill>
+                <a:latin typeface="Arial"/>
+                <a:ea typeface="Arial"/>
+                <a:cs typeface="Arial"/>
+              </a:defRPr>
+            </a:pPr>
+            <a:r>
+              <a:rPr sz="1500" b="0">
+                <a:solidFill>
+                  <a:srgbClr val="183044"/>
+                </a:solidFill>
+                <a:latin typeface="Arial"/>
+                <a:ea typeface="Arial"/>
+                <a:cs typeface="Arial"/>
+              </a:rPr>
+              <a:t>40–54</a:t>
+            </a:r>
+          </a:p>
+        </p:txBody>
+      </p:sp>
+      <p:sp>
+        <p:nvSpPr>
+          <p:cNvPr id="19" name="text">
+            <a:extLst xmlns:a="http://schemas.openxmlformats.org/drawingml/2006/main">
+              <a:ext uri="{FF2B5EF4-FFF2-40B4-BE49-F238E27FC236}">
+                <a16:creationId xmlns:a16="http://schemas.microsoft.com/office/drawing/2014/main" id="{A49A9832-7220-45B6-B3B8-276E88242E45}"/>
+              </a:ext>
+            </a:extLst>
+          </p:cNvPr>
+          <p:cNvSpPr>
+            <a:spLocks xmlns:a="http://schemas.openxmlformats.org/drawingml/2006/main" noGrp="1"/>
+          </p:cNvSpPr>
+          <p:nvPr/>
+        </p:nvSpPr>
+        <p:spPr>
+          <a:xfrm xmlns:a="http://schemas.openxmlformats.org/drawingml/2006/main">
+            <a:off x="6362700" y="5191125"/>
+            <a:ext cx="1209675" cy="247650"/>
+          </a:xfrm>
+          <a:prstGeom xmlns:a="http://schemas.openxmlformats.org/drawingml/2006/main" prst="rect">
+            <a:avLst/>
+          </a:prstGeom>
+          <a:noFill xmlns:a="http://schemas.openxmlformats.org/drawingml/2006/main"/>
+          <a:ln xmlns:a="http://schemas.openxmlformats.org/drawingml/2006/main" w="0">
+            <a:noFill/>
+          </a:ln>
+        </p:spPr>
+        <p:txBody>
+          <a:bodyPr xmlns:a="http://schemas.openxmlformats.org/drawingml/2006/main">
+            <a:noAutofit/>
+          </a:bodyPr>
+          <a:lstStyle xmlns:a="http://schemas.openxmlformats.org/drawingml/2006/main">
+            <a:defPPr>
+              <a:defRPr sz="1500" b="0">
+                <a:solidFill>
+                  <a:srgbClr val="183044"/>
+                </a:solidFill>
+                <a:latin typeface="Arial"/>
+                <a:ea typeface="Arial"/>
+                <a:cs typeface="Arial"/>
+              </a:defRPr>
+            </a:defPPr>
+          </a:lstStyle>
+          <a:p xmlns:a="http://schemas.openxmlformats.org/drawingml/2006/main">
+            <a:pPr>
+              <a:defRPr sz="1500" b="0">
+                <a:solidFill>
+                  <a:srgbClr val="183044"/>
+                </a:solidFill>
+                <a:latin typeface="Arial"/>
+                <a:ea typeface="Arial"/>
+                <a:cs typeface="Arial"/>
+              </a:defRPr>
+            </a:pPr>
+            <a:r>
+              <a:rPr sz="1500" b="0">
+                <a:solidFill>
+                  <a:srgbClr val="183044"/>
+                </a:solidFill>
+                <a:latin typeface="Arial"/>
+                <a:ea typeface="Arial"/>
+                <a:cs typeface="Arial"/>
+              </a:rPr>
+              <a:t>55–69</a:t>
+            </a:r>
+          </a:p>
+        </p:txBody>
+      </p:sp>
+      <p:sp>
+        <p:nvSpPr>
+          <p:cNvPr id="20" name="text">
+            <a:extLst xmlns:a="http://schemas.openxmlformats.org/drawingml/2006/main">
+              <a:ext uri="{FF2B5EF4-FFF2-40B4-BE49-F238E27FC236}">
+                <a16:creationId xmlns:a16="http://schemas.microsoft.com/office/drawing/2014/main" id="{BF65BDDD-7238-45B7-900D-47C5353DAF79}"/>
+              </a:ext>
+            </a:extLst>
+          </p:cNvPr>
+          <p:cNvSpPr>
+            <a:spLocks xmlns:a="http://schemas.openxmlformats.org/drawingml/2006/main" noGrp="1"/>
+          </p:cNvSpPr>
+          <p:nvPr/>
+        </p:nvSpPr>
+        <p:spPr>
+          <a:xfrm xmlns:a="http://schemas.openxmlformats.org/drawingml/2006/main">
+            <a:off x="6362700" y="5553075"/>
+            <a:ext cx="1209675" cy="247650"/>
+          </a:xfrm>
+          <a:prstGeom xmlns:a="http://schemas.openxmlformats.org/drawingml/2006/main" prst="rect">
+            <a:avLst/>
+          </a:prstGeom>
+          <a:noFill xmlns:a="http://schemas.openxmlformats.org/drawingml/2006/main"/>
+          <a:ln xmlns:a="http://schemas.openxmlformats.org/drawingml/2006/main" w="0">
+            <a:noFill/>
+          </a:ln>
+        </p:spPr>
+        <p:txBody>
+          <a:bodyPr xmlns:a="http://schemas.openxmlformats.org/drawingml/2006/main">
+            <a:noAutofit/>
+          </a:bodyPr>
+          <a:lstStyle xmlns:a="http://schemas.openxmlformats.org/drawingml/2006/main">
+            <a:defPPr>
+              <a:defRPr sz="1500" b="0">
+                <a:solidFill>
+                  <a:srgbClr val="183044"/>
+                </a:solidFill>
+                <a:latin typeface="Arial"/>
+                <a:ea typeface="Arial"/>
+                <a:cs typeface="Arial"/>
+              </a:defRPr>
+            </a:defPPr>
+          </a:lstStyle>
+          <a:p xmlns:a="http://schemas.openxmlformats.org/drawingml/2006/main">
+            <a:pPr>
+              <a:defRPr sz="1500" b="0">
+                <a:solidFill>
+                  <a:srgbClr val="183044"/>
+                </a:solidFill>
+                <a:latin typeface="Arial"/>
+                <a:ea typeface="Arial"/>
+                <a:cs typeface="Arial"/>
+              </a:defRPr>
+            </a:pPr>
+            <a:r>
+              <a:rPr sz="1500" b="0">
+                <a:solidFill>
+                  <a:srgbClr val="183044"/>
+                </a:solidFill>
+                <a:latin typeface="Arial"/>
+                <a:ea typeface="Arial"/>
+                <a:cs typeface="Arial"/>
+              </a:rPr>
+              <a:t>70+</a:t>
+            </a:r>
+          </a:p>
+        </p:txBody>
+      </p:sp>
       <p:graphicFrame>
         <p:nvGraphicFramePr>
-          <p:cNvPr id="12" name="">
+          <p:cNvPr id="21" name="">
             <a:extLst xmlns:a="http://schemas.openxmlformats.org/drawingml/2006/main">
               <a:ext uri="{FF2B5EF4-FFF2-40B4-BE49-F238E27FC236}">
-                <a16:creationId xmlns:a16="http://schemas.microsoft.com/office/drawing/2014/main" id="{85C5E623-A319-42EE-8E5F-D1FF6F2ED5D0}"/>
+                <a16:creationId xmlns:a16="http://schemas.microsoft.com/office/drawing/2014/main" id="{F025724A-3473-4434-ABAF-D2C2D5113EBB}"/>
               </a:ext>
             </a:extLst>
           </p:cNvPr>
@@ -13028,19 +13862,20 @@
           <p:nvPr/>
         </p:nvGraphicFramePr>
         <p:xfrm>
-          <a:off xmlns:a="http://schemas.openxmlformats.org/drawingml/2006/main" x="3829050" y="4171950"/>
-          <a:ext xmlns:a="http://schemas.openxmlformats.org/drawingml/2006/main" cx="2028825" cy="1047750"/>
+          <a:off xmlns:a="http://schemas.openxmlformats.org/drawingml/2006/main" x="7620000" y="4429125"/>
+          <a:ext xmlns:a="http://schemas.openxmlformats.org/drawingml/2006/main" cx="3810000" cy="1447800"/>
         </p:xfrm>
         <a:graphic xmlns:a="http://schemas.openxmlformats.org/drawingml/2006/main">
           <a:graphicData uri="http://schemas.openxmlformats.org/drawingml/2006/table">
             <a:tbl>
               <a:tblPr/>
               <a:tblGrid>
-                <a:gridCol w="676275"/>
-                <a:gridCol w="581025"/>
-                <a:gridCol w="771525"/>
+                <a:gridCol w="952500"/>
+                <a:gridCol w="952500"/>
+                <a:gridCol w="952500"/>
+                <a:gridCol w="952500"/>
               </a:tblGrid>
-              <a:tr h="349250">
+              <a:tr h="361950">
                 <a:tc>
                   <a:txBody>
                     <a:bodyPr>
@@ -13048,9 +13883,9 @@
                     </a:bodyPr>
                     <a:lstStyle/>
                     <a:p>
-                      <a:pPr algn="l"/>
+                      <a:pPr algn="ctr"/>
                       <a:r>
-                        <a:rPr sz="1425" b="1">
+                        <a:rPr sz="1650" b="1">
                           <a:solidFill>
                             <a:srgbClr val="FFFFFF"/>
                           </a:solidFill>
@@ -13058,7 +13893,7 @@
                           <a:ea typeface="Arial"/>
                           <a:cs typeface="Arial"/>
                         </a:rPr>
-                        <a:t>Term</a:t>
+                        <a:t>A</a:t>
                       </a:r>
                     </a:p>
                   </a:txBody>
@@ -13101,7 +13936,267 @@
                     <a:p>
                       <a:pPr algn="ctr"/>
                       <a:r>
-                        <a:rPr sz="1425" b="1">
+                        <a:rPr sz="1650" b="1">
+                          <a:solidFill>
+                            <a:srgbClr val="183044"/>
+                          </a:solidFill>
+                          <a:latin typeface="Arial"/>
+                          <a:ea typeface="Arial"/>
+                          <a:cs typeface="Arial"/>
+                        </a:rPr>
+                        <a:t>B</a:t>
+                      </a:r>
+                    </a:p>
+                  </a:txBody>
+                  <a:tcPr marL="91440" marR="91440" marT="45720" marB="45720">
+                    <a:lnR w="9525">
+                      <a:solidFill>
+                        <a:srgbClr val="D6E0E5"/>
+                      </a:solidFill>
+                      <a:prstDash val="solid"/>
+                    </a:lnR>
+                    <a:lnT w="9525">
+                      <a:solidFill>
+                        <a:srgbClr val="D6E0E5"/>
+                      </a:solidFill>
+                      <a:prstDash val="solid"/>
+                    </a:lnT>
+                    <a:lnB w="9525">
+                      <a:solidFill>
+                        <a:srgbClr val="D6E0E5"/>
+                      </a:solidFill>
+                      <a:prstDash val="solid"/>
+                    </a:lnB>
+                    <a:solidFill>
+                      <a:srgbClr val="D0E4ED"/>
+                    </a:solidFill>
+                  </a:tcPr>
+                </a:tc>
+                <a:tc>
+                  <a:txBody>
+                    <a:bodyPr>
+                      <a:noAutofit/>
+                    </a:bodyPr>
+                    <a:lstStyle/>
+                    <a:p>
+                      <a:pPr algn="ctr"/>
+                      <a:r>
+                        <a:rPr sz="1650" b="1">
+                          <a:solidFill>
+                            <a:srgbClr val="183044"/>
+                          </a:solidFill>
+                          <a:latin typeface="Arial"/>
+                          <a:ea typeface="Arial"/>
+                          <a:cs typeface="Arial"/>
+                        </a:rPr>
+                        <a:t>C</a:t>
+                      </a:r>
+                    </a:p>
+                  </a:txBody>
+                  <a:tcPr marL="91440" marR="91440" marT="45720" marB="45720">
+                    <a:lnR w="9525">
+                      <a:solidFill>
+                        <a:srgbClr val="D6E0E5"/>
+                      </a:solidFill>
+                      <a:prstDash val="solid"/>
+                    </a:lnR>
+                    <a:lnT w="9525">
+                      <a:solidFill>
+                        <a:srgbClr val="D6E0E5"/>
+                      </a:solidFill>
+                      <a:prstDash val="solid"/>
+                    </a:lnT>
+                    <a:lnB w="9525">
+                      <a:solidFill>
+                        <a:srgbClr val="D6E0E5"/>
+                      </a:solidFill>
+                      <a:prstDash val="solid"/>
+                    </a:lnB>
+                    <a:solidFill>
+                      <a:srgbClr val="B9D6E2"/>
+                    </a:solidFill>
+                  </a:tcPr>
+                </a:tc>
+                <a:tc>
+                  <a:txBody>
+                    <a:bodyPr>
+                      <a:noAutofit/>
+                    </a:bodyPr>
+                    <a:lstStyle/>
+                    <a:p>
+                      <a:pPr algn="ctr"/>
+                      <a:r>
+                        <a:rPr sz="1650" b="1">
+                          <a:solidFill>
+                            <a:srgbClr val="183044"/>
+                          </a:solidFill>
+                          <a:latin typeface="Arial"/>
+                          <a:ea typeface="Arial"/>
+                          <a:cs typeface="Arial"/>
+                        </a:rPr>
+                        <a:t>D</a:t>
+                      </a:r>
+                    </a:p>
+                  </a:txBody>
+                  <a:tcPr marL="91440" marR="91440" marT="45720" marB="45720">
+                    <a:lnR w="9525">
+                      <a:solidFill>
+                        <a:srgbClr val="D6E0E5"/>
+                      </a:solidFill>
+                      <a:prstDash val="solid"/>
+                    </a:lnR>
+                    <a:lnT w="9525">
+                      <a:solidFill>
+                        <a:srgbClr val="D6E0E5"/>
+                      </a:solidFill>
+                      <a:prstDash val="solid"/>
+                    </a:lnT>
+                    <a:lnB w="9525">
+                      <a:solidFill>
+                        <a:srgbClr val="D6E0E5"/>
+                      </a:solidFill>
+                      <a:prstDash val="solid"/>
+                    </a:lnB>
+                    <a:solidFill>
+                      <a:srgbClr val="EAF2F5"/>
+                    </a:solidFill>
+                  </a:tcPr>
+                </a:tc>
+              </a:tr>
+              <a:tr h="361950">
+                <a:tc>
+                  <a:txBody>
+                    <a:bodyPr>
+                      <a:noAutofit/>
+                    </a:bodyPr>
+                    <a:lstStyle/>
+                    <a:p>
+                      <a:pPr algn="ctr"/>
+                      <a:r>
+                        <a:rPr sz="1650" b="1">
+                          <a:solidFill>
+                            <a:srgbClr val="183044"/>
+                          </a:solidFill>
+                          <a:latin typeface="Arial"/>
+                          <a:ea typeface="Arial"/>
+                          <a:cs typeface="Arial"/>
+                        </a:rPr>
+                        <a:t>B</a:t>
+                      </a:r>
+                    </a:p>
+                  </a:txBody>
+                  <a:tcPr marL="91440" marR="91440" marT="45720" marB="45720">
+                    <a:lnL w="9525">
+                      <a:solidFill>
+                        <a:srgbClr val="D6E0E5"/>
+                      </a:solidFill>
+                      <a:prstDash val="solid"/>
+                    </a:lnL>
+                    <a:lnR w="9525">
+                      <a:solidFill>
+                        <a:srgbClr val="D6E0E5"/>
+                      </a:solidFill>
+                      <a:prstDash val="solid"/>
+                    </a:lnR>
+                    <a:lnB w="9525">
+                      <a:solidFill>
+                        <a:srgbClr val="D6E0E5"/>
+                      </a:solidFill>
+                      <a:prstDash val="solid"/>
+                    </a:lnB>
+                    <a:solidFill>
+                      <a:srgbClr val="D0E4ED"/>
+                    </a:solidFill>
+                  </a:tcPr>
+                </a:tc>
+                <a:tc>
+                  <a:txBody>
+                    <a:bodyPr>
+                      <a:noAutofit/>
+                    </a:bodyPr>
+                    <a:lstStyle/>
+                    <a:p>
+                      <a:pPr algn="ctr"/>
+                      <a:r>
+                        <a:rPr sz="1650" b="1">
+                          <a:solidFill>
+                            <a:srgbClr val="183044"/>
+                          </a:solidFill>
+                          <a:latin typeface="Arial"/>
+                          <a:ea typeface="Arial"/>
+                          <a:cs typeface="Arial"/>
+                        </a:rPr>
+                        <a:t>C</a:t>
+                      </a:r>
+                    </a:p>
+                  </a:txBody>
+                  <a:tcPr marL="91440" marR="91440" marT="45720" marB="45720">
+                    <a:lnR w="9525">
+                      <a:solidFill>
+                        <a:srgbClr val="D6E0E5"/>
+                      </a:solidFill>
+                      <a:prstDash val="solid"/>
+                    </a:lnR>
+                    <a:lnB w="9525">
+                      <a:solidFill>
+                        <a:srgbClr val="D6E0E5"/>
+                      </a:solidFill>
+                      <a:prstDash val="solid"/>
+                    </a:lnB>
+                    <a:solidFill>
+                      <a:srgbClr val="B9D6E2"/>
+                    </a:solidFill>
+                  </a:tcPr>
+                </a:tc>
+                <a:tc>
+                  <a:txBody>
+                    <a:bodyPr>
+                      <a:noAutofit/>
+                    </a:bodyPr>
+                    <a:lstStyle/>
+                    <a:p>
+                      <a:pPr algn="ctr"/>
+                      <a:r>
+                        <a:rPr sz="1650" b="1">
+                          <a:solidFill>
+                            <a:srgbClr val="183044"/>
+                          </a:solidFill>
+                          <a:latin typeface="Arial"/>
+                          <a:ea typeface="Arial"/>
+                          <a:cs typeface="Arial"/>
+                        </a:rPr>
+                        <a:t>D</a:t>
+                      </a:r>
+                    </a:p>
+                  </a:txBody>
+                  <a:tcPr marL="91440" marR="91440" marT="45720" marB="45720">
+                    <a:lnR w="9525">
+                      <a:solidFill>
+                        <a:srgbClr val="D6E0E5"/>
+                      </a:solidFill>
+                      <a:prstDash val="solid"/>
+                    </a:lnR>
+                    <a:lnB w="9525">
+                      <a:solidFill>
+                        <a:srgbClr val="D6E0E5"/>
+                      </a:solidFill>
+                      <a:prstDash val="solid"/>
+                    </a:lnB>
+                    <a:solidFill>
+                      <a:srgbClr val="EAF2F5"/>
+                    </a:solidFill>
+                  </a:tcPr>
+                </a:tc>
+                <a:tc>
+                  <a:txBody>
+                    <a:bodyPr>
+                      <a:noAutofit/>
+                    </a:bodyPr>
+                    <a:lstStyle/>
+                    <a:p>
+                      <a:pPr algn="ctr"/>
+                      <a:r>
+                        <a:rPr sz="1650" b="1">
                           <a:solidFill>
                             <a:srgbClr val="FFFFFF"/>
                           </a:solidFill>
@@ -13109,7 +14204,7 @@
                           <a:ea typeface="Arial"/>
                           <a:cs typeface="Arial"/>
                         </a:rPr>
-                        <a:t>F</a:t>
+                        <a:t>A</a:t>
                       </a:r>
                     </a:p>
                   </a:txBody>
@@ -13120,12 +14215,131 @@
                       </a:solidFill>
                       <a:prstDash val="solid"/>
                     </a:lnR>
-                    <a:lnT w="9525">
-                      <a:solidFill>
-                        <a:srgbClr val="D6E0E5"/>
-                      </a:solidFill>
-                      <a:prstDash val="solid"/>
-                    </a:lnT>
+                    <a:lnB w="9525">
+                      <a:solidFill>
+                        <a:srgbClr val="D6E0E5"/>
+                      </a:solidFill>
+                      <a:prstDash val="solid"/>
+                    </a:lnB>
+                    <a:solidFill>
+                      <a:srgbClr val="176D8C"/>
+                    </a:solidFill>
+                  </a:tcPr>
+                </a:tc>
+              </a:tr>
+              <a:tr h="361950">
+                <a:tc>
+                  <a:txBody>
+                    <a:bodyPr>
+                      <a:noAutofit/>
+                    </a:bodyPr>
+                    <a:lstStyle/>
+                    <a:p>
+                      <a:pPr algn="ctr"/>
+                      <a:r>
+                        <a:rPr sz="1650" b="1">
+                          <a:solidFill>
+                            <a:srgbClr val="183044"/>
+                          </a:solidFill>
+                          <a:latin typeface="Arial"/>
+                          <a:ea typeface="Arial"/>
+                          <a:cs typeface="Arial"/>
+                        </a:rPr>
+                        <a:t>C</a:t>
+                      </a:r>
+                    </a:p>
+                  </a:txBody>
+                  <a:tcPr marL="91440" marR="91440" marT="45720" marB="45720">
+                    <a:lnL w="9525">
+                      <a:solidFill>
+                        <a:srgbClr val="D6E0E5"/>
+                      </a:solidFill>
+                      <a:prstDash val="solid"/>
+                    </a:lnL>
+                    <a:lnR w="9525">
+                      <a:solidFill>
+                        <a:srgbClr val="D6E0E5"/>
+                      </a:solidFill>
+                      <a:prstDash val="solid"/>
+                    </a:lnR>
+                    <a:lnB w="9525">
+                      <a:solidFill>
+                        <a:srgbClr val="D6E0E5"/>
+                      </a:solidFill>
+                      <a:prstDash val="solid"/>
+                    </a:lnB>
+                    <a:solidFill>
+                      <a:srgbClr val="B9D6E2"/>
+                    </a:solidFill>
+                  </a:tcPr>
+                </a:tc>
+                <a:tc>
+                  <a:txBody>
+                    <a:bodyPr>
+                      <a:noAutofit/>
+                    </a:bodyPr>
+                    <a:lstStyle/>
+                    <a:p>
+                      <a:pPr algn="ctr"/>
+                      <a:r>
+                        <a:rPr sz="1650" b="1">
+                          <a:solidFill>
+                            <a:srgbClr val="183044"/>
+                          </a:solidFill>
+                          <a:latin typeface="Arial"/>
+                          <a:ea typeface="Arial"/>
+                          <a:cs typeface="Arial"/>
+                        </a:rPr>
+                        <a:t>D</a:t>
+                      </a:r>
+                    </a:p>
+                  </a:txBody>
+                  <a:tcPr marL="91440" marR="91440" marT="45720" marB="45720">
+                    <a:lnR w="9525">
+                      <a:solidFill>
+                        <a:srgbClr val="D6E0E5"/>
+                      </a:solidFill>
+                      <a:prstDash val="solid"/>
+                    </a:lnR>
+                    <a:lnB w="9525">
+                      <a:solidFill>
+                        <a:srgbClr val="D6E0E5"/>
+                      </a:solidFill>
+                      <a:prstDash val="solid"/>
+                    </a:lnB>
+                    <a:solidFill>
+                      <a:srgbClr val="EAF2F5"/>
+                    </a:solidFill>
+                  </a:tcPr>
+                </a:tc>
+                <a:tc>
+                  <a:txBody>
+                    <a:bodyPr>
+                      <a:noAutofit/>
+                    </a:bodyPr>
+                    <a:lstStyle/>
+                    <a:p>
+                      <a:pPr algn="ctr"/>
+                      <a:r>
+                        <a:rPr sz="1650" b="1">
+                          <a:solidFill>
+                            <a:srgbClr val="FFFFFF"/>
+                          </a:solidFill>
+                          <a:latin typeface="Arial"/>
+                          <a:ea typeface="Arial"/>
+                          <a:cs typeface="Arial"/>
+                        </a:rPr>
+                        <a:t>A</a:t>
+                      </a:r>
+                    </a:p>
+                  </a:txBody>
+                  <a:tcPr marL="91440" marR="91440" marT="45720" marB="45720">
+                    <a:lnR w="9525">
+                      <a:solidFill>
+                        <a:srgbClr val="D6E0E5"/>
+                      </a:solidFill>
+                      <a:prstDash val="solid"/>
+                    </a:lnR>
                     <a:lnB w="9525">
                       <a:solidFill>
                         <a:srgbClr val="D6E0E5"/>
@@ -13146,54 +14360,7 @@
                     <a:p>
                       <a:pPr algn="ctr"/>
                       <a:r>
-                        <a:rPr sz="1425" b="1">
-                          <a:solidFill>
-                            <a:srgbClr val="FFFFFF"/>
-                          </a:solidFill>
-                          <a:latin typeface="Arial"/>
-                          <a:ea typeface="Arial"/>
-                          <a:cs typeface="Arial"/>
-                        </a:rPr>
-                        <a:t>p</a:t>
-                      </a:r>
-                    </a:p>
-                  </a:txBody>
-                  <a:tcPr marL="91440" marR="91440" marT="45720" marB="45720">
-                    <a:lnR w="9525">
-                      <a:solidFill>
-                        <a:srgbClr val="D6E0E5"/>
-                      </a:solidFill>
-                      <a:prstDash val="solid"/>
-                    </a:lnR>
-                    <a:lnT w="9525">
-                      <a:solidFill>
-                        <a:srgbClr val="D6E0E5"/>
-                      </a:solidFill>
-                      <a:prstDash val="solid"/>
-                    </a:lnT>
-                    <a:lnB w="9525">
-                      <a:solidFill>
-                        <a:srgbClr val="D6E0E5"/>
-                      </a:solidFill>
-                      <a:prstDash val="solid"/>
-                    </a:lnB>
-                    <a:solidFill>
-                      <a:srgbClr val="176D8C"/>
-                    </a:solidFill>
-                  </a:tcPr>
-                </a:tc>
-              </a:tr>
-              <a:tr h="349250">
-                <a:tc>
-                  <a:txBody>
-                    <a:bodyPr>
-                      <a:noAutofit/>
-                    </a:bodyPr>
-                    <a:lstStyle/>
-                    <a:p>
-                      <a:pPr algn="l"/>
-                      <a:r>
-                        <a:rPr sz="1425" b="0">
+                        <a:rPr sz="1650" b="1">
                           <a:solidFill>
                             <a:srgbClr val="183044"/>
                           </a:solidFill>
@@ -13201,17 +14368,11 @@
                           <a:ea typeface="Arial"/>
                           <a:cs typeface="Arial"/>
                         </a:rPr>
-                        <a:t>Block</a:t>
+                        <a:t>B</a:t>
                       </a:r>
                     </a:p>
                   </a:txBody>
                   <a:tcPr marL="91440" marR="91440" marT="45720" marB="45720">
-                    <a:lnL w="9525">
-                      <a:solidFill>
-                        <a:srgbClr val="D6E0E5"/>
-                      </a:solidFill>
-                      <a:prstDash val="solid"/>
-                    </a:lnL>
                     <a:lnR w="9525">
                       <a:solidFill>
                         <a:srgbClr val="D6E0E5"/>
@@ -13225,10 +14386,12 @@
                       <a:prstDash val="solid"/>
                     </a:lnB>
                     <a:solidFill>
-                      <a:srgbClr val="FFFFFF"/>
+                      <a:srgbClr val="D0E4ED"/>
                     </a:solidFill>
                   </a:tcPr>
                 </a:tc>
+              </a:tr>
+              <a:tr h="361950">
                 <a:tc>
                   <a:txBody>
                     <a:bodyPr>
@@ -13238,7 +14401,7 @@
                     <a:p>
                       <a:pPr algn="ctr"/>
                       <a:r>
-                        <a:rPr sz="1425" b="0">
+                        <a:rPr sz="1650" b="1">
                           <a:solidFill>
                             <a:srgbClr val="183044"/>
                           </a:solidFill>
@@ -13246,87 +14409,7 @@
                           <a:ea typeface="Arial"/>
                           <a:cs typeface="Arial"/>
                         </a:rPr>
-                        <a:t>5.86</a:t>
-                      </a:r>
-                    </a:p>
-                  </a:txBody>
-                  <a:tcPr marL="91440" marR="91440" marT="45720" marB="45720">
-                    <a:lnR w="9525">
-                      <a:solidFill>
-                        <a:srgbClr val="D6E0E5"/>
-                      </a:solidFill>
-                      <a:prstDash val="solid"/>
-                    </a:lnR>
-                    <a:lnB w="9525">
-                      <a:solidFill>
-                        <a:srgbClr val="D6E0E5"/>
-                      </a:solidFill>
-                      <a:prstDash val="solid"/>
-                    </a:lnB>
-                    <a:solidFill>
-                      <a:srgbClr val="FFFFFF"/>
-                    </a:solidFill>
-                  </a:tcPr>
-                </a:tc>
-                <a:tc>
-                  <a:txBody>
-                    <a:bodyPr>
-                      <a:noAutofit/>
-                    </a:bodyPr>
-                    <a:lstStyle/>
-                    <a:p>
-                      <a:pPr algn="ctr"/>
-                      <a:r>
-                        <a:rPr sz="1425" b="0">
-                          <a:solidFill>
-                            <a:srgbClr val="183044"/>
-                          </a:solidFill>
-                          <a:latin typeface="Arial"/>
-                          <a:ea typeface="Arial"/>
-                          <a:cs typeface="Arial"/>
-                        </a:rPr>
-                        <a:t>0.007</a:t>
-                      </a:r>
-                    </a:p>
-                  </a:txBody>
-                  <a:tcPr marL="91440" marR="91440" marT="45720" marB="45720">
-                    <a:lnR w="9525">
-                      <a:solidFill>
-                        <a:srgbClr val="D6E0E5"/>
-                      </a:solidFill>
-                      <a:prstDash val="solid"/>
-                    </a:lnR>
-                    <a:lnB w="9525">
-                      <a:solidFill>
-                        <a:srgbClr val="D6E0E5"/>
-                      </a:solidFill>
-                      <a:prstDash val="solid"/>
-                    </a:lnB>
-                    <a:solidFill>
-                      <a:srgbClr val="FFFFFF"/>
-                    </a:solidFill>
-                  </a:tcPr>
-                </a:tc>
-              </a:tr>
-              <a:tr h="349250">
-                <a:tc>
-                  <a:txBody>
-                    <a:bodyPr>
-                      <a:noAutofit/>
-                    </a:bodyPr>
-                    <a:lstStyle/>
-                    <a:p>
-                      <a:pPr algn="l"/>
-                      <a:r>
-                        <a:rPr sz="1425" b="0">
-                          <a:solidFill>
-                            <a:srgbClr val="183044"/>
-                          </a:solidFill>
-                          <a:latin typeface="Arial"/>
-                          <a:ea typeface="Arial"/>
-                          <a:cs typeface="Arial"/>
-                        </a:rPr>
-                        <a:t>Rate</a:t>
+                        <a:t>D</a:t>
                       </a:r>
                     </a:p>
                   </a:txBody>
@@ -13363,15 +14446,15 @@
                     <a:p>
                       <a:pPr algn="ctr"/>
                       <a:r>
-                        <a:rPr sz="1425" b="0">
+                        <a:rPr sz="1650" b="1">
                           <a:solidFill>
-                            <a:srgbClr val="183044"/>
+                            <a:srgbClr val="FFFFFF"/>
                           </a:solidFill>
                           <a:latin typeface="Arial"/>
                           <a:ea typeface="Arial"/>
                           <a:cs typeface="Arial"/>
                         </a:rPr>
-                        <a:t>2.17</a:t>
+                        <a:t>A</a:t>
                       </a:r>
                     </a:p>
                   </a:txBody>
@@ -13389,7 +14472,7 @@
                       <a:prstDash val="solid"/>
                     </a:lnB>
                     <a:solidFill>
-                      <a:srgbClr val="EAF2F5"/>
+                      <a:srgbClr val="176D8C"/>
                     </a:solidFill>
                   </a:tcPr>
                 </a:tc>
@@ -13402,7 +14485,7 @@
                     <a:p>
                       <a:pPr algn="ctr"/>
                       <a:r>
-                        <a:rPr sz="1425" b="0">
+                        <a:rPr sz="1650" b="1">
                           <a:solidFill>
                             <a:srgbClr val="183044"/>
                           </a:solidFill>
@@ -13410,7 +14493,7 @@
                           <a:ea typeface="Arial"/>
                           <a:cs typeface="Arial"/>
                         </a:rPr>
-                        <a:t>0.113</a:t>
+                        <a:t>B</a:t>
                       </a:r>
                     </a:p>
                   </a:txBody>
@@ -13428,7 +14511,46 @@
                       <a:prstDash val="solid"/>
                     </a:lnB>
                     <a:solidFill>
-                      <a:srgbClr val="EAF2F5"/>
+                      <a:srgbClr val="D0E4ED"/>
+                    </a:solidFill>
+                  </a:tcPr>
+                </a:tc>
+                <a:tc>
+                  <a:txBody>
+                    <a:bodyPr>
+                      <a:noAutofit/>
+                    </a:bodyPr>
+                    <a:lstStyle/>
+                    <a:p>
+                      <a:pPr algn="ctr"/>
+                      <a:r>
+                        <a:rPr sz="1650" b="1">
+                          <a:solidFill>
+                            <a:srgbClr val="183044"/>
+                          </a:solidFill>
+                          <a:latin typeface="Arial"/>
+                          <a:ea typeface="Arial"/>
+                          <a:cs typeface="Arial"/>
+                        </a:rPr>
+                        <a:t>C</a:t>
+                      </a:r>
+                    </a:p>
+                  </a:txBody>
+                  <a:tcPr marL="91440" marR="91440" marT="45720" marB="45720">
+                    <a:lnR w="9525">
+                      <a:solidFill>
+                        <a:srgbClr val="D6E0E5"/>
+                      </a:solidFill>
+                      <a:prstDash val="solid"/>
+                    </a:lnR>
+                    <a:lnB w="9525">
+                      <a:solidFill>
+                        <a:srgbClr val="D6E0E5"/>
+                      </a:solidFill>
+                      <a:prstDash val="solid"/>
+                    </a:lnB>
+                    <a:solidFill>
+                      <a:srgbClr val="B9D6E2"/>
                     </a:solidFill>
                   </a:tcPr>
                 </a:tc>
@@ -13439,10 +14561,10 @@
       </p:graphicFrame>
       <p:sp>
         <p:nvSpPr>
-          <p:cNvPr id="13" name="text">
+          <p:cNvPr id="22" name="text">
             <a:extLst xmlns:a="http://schemas.openxmlformats.org/drawingml/2006/main">
               <a:ext uri="{FF2B5EF4-FFF2-40B4-BE49-F238E27FC236}">
-                <a16:creationId xmlns:a16="http://schemas.microsoft.com/office/drawing/2014/main" id="{F8D55BB6-486B-4147-A382-5A3003678F38}"/>
+                <a16:creationId xmlns:a16="http://schemas.microsoft.com/office/drawing/2014/main" id="{7099BA5C-21A9-497E-ADDF-4CBDCD5B9E52}"/>
               </a:ext>
             </a:extLst>
           </p:cNvPr>
@@ -13453,99 +14575,8 @@
         </p:nvSpPr>
         <p:spPr>
           <a:xfrm xmlns:a="http://schemas.openxmlformats.org/drawingml/2006/main">
-            <a:off x="3829050" y="5467350"/>
-            <a:ext cx="2028825" cy="523875"/>
-          </a:xfrm>
-          <a:prstGeom xmlns:a="http://schemas.openxmlformats.org/drawingml/2006/main" prst="rect">
-            <a:avLst/>
-          </a:prstGeom>
-          <a:noFill xmlns:a="http://schemas.openxmlformats.org/drawingml/2006/main"/>
-          <a:ln xmlns:a="http://schemas.openxmlformats.org/drawingml/2006/main" w="0">
-            <a:noFill/>
-          </a:ln>
-        </p:spPr>
-        <p:txBody>
-          <a:bodyPr xmlns:a="http://schemas.openxmlformats.org/drawingml/2006/main">
-            <a:noAutofit/>
-          </a:bodyPr>
-          <a:lstStyle xmlns:a="http://schemas.openxmlformats.org/drawingml/2006/main">
-            <a:defPPr>
-              <a:defRPr sz="1425" b="1">
-                <a:solidFill>
-                  <a:srgbClr val="183044"/>
-                </a:solidFill>
-                <a:latin typeface="Arial"/>
-                <a:ea typeface="Arial"/>
-                <a:cs typeface="Arial"/>
-              </a:defRPr>
-            </a:defPPr>
-          </a:lstStyle>
-          <a:p xmlns:a="http://schemas.openxmlformats.org/drawingml/2006/main">
-            <a:pPr>
-              <a:defRPr sz="1425" b="1">
-                <a:solidFill>
-                  <a:srgbClr val="183044"/>
-                </a:solidFill>
-                <a:latin typeface="Arial"/>
-                <a:ea typeface="Arial"/>
-                <a:cs typeface="Arial"/>
-              </a:defRPr>
-            </a:pPr>
-            <a:r>
-              <a:rPr sz="1425" b="1">
-                <a:solidFill>
-                  <a:srgbClr val="183044"/>
-                </a:solidFill>
-                <a:latin typeface="Arial"/>
-                <a:ea typeface="Arial"/>
-                <a:cs typeface="Arial"/>
-              </a:rPr>
-              <a:t>6 rates in each block.</a:t>
-            </a:r>
-          </a:p>
-          <a:p xmlns:a="http://schemas.openxmlformats.org/drawingml/2006/main">
-            <a:pPr>
-              <a:defRPr sz="1425" b="1">
-                <a:solidFill>
-                  <a:srgbClr val="183044"/>
-                </a:solidFill>
-                <a:latin typeface="Arial"/>
-                <a:ea typeface="Arial"/>
-                <a:cs typeface="Arial"/>
-              </a:defRPr>
-            </a:pPr>
-            <a:r>
-              <a:rPr sz="1425" b="1">
-                <a:solidFill>
-                  <a:srgbClr val="183044"/>
-                </a:solidFill>
-                <a:latin typeface="Arial"/>
-                <a:ea typeface="Arial"/>
-                <a:cs typeface="Arial"/>
-              </a:rPr>
-              <a:t>44.8% lower error.</a:t>
-            </a:r>
-          </a:p>
-        </p:txBody>
-      </p:sp>
-      <p:sp>
-        <p:nvSpPr>
-          <p:cNvPr id="14" name="text">
-            <a:extLst xmlns:a="http://schemas.openxmlformats.org/drawingml/2006/main">
-              <a:ext uri="{FF2B5EF4-FFF2-40B4-BE49-F238E27FC236}">
-                <a16:creationId xmlns:a16="http://schemas.microsoft.com/office/drawing/2014/main" id="{90ABB4A8-285C-43A2-9095-FE72BC66925A}"/>
-              </a:ext>
-            </a:extLst>
-          </p:cNvPr>
-          <p:cNvSpPr>
-            <a:spLocks xmlns:a="http://schemas.openxmlformats.org/drawingml/2006/main" noGrp="1"/>
-          </p:cNvSpPr>
-          <p:nvPr/>
-        </p:nvSpPr>
-        <p:spPr>
-          <a:xfrm xmlns:a="http://schemas.openxmlformats.org/drawingml/2006/main">
-            <a:off x="400050" y="5857875"/>
-            <a:ext cx="5457825" cy="209550"/>
+            <a:off x="6362700" y="5924550"/>
+            <a:ext cx="5448300" cy="209550"/>
           </a:xfrm>
           <a:prstGeom xmlns:a="http://schemas.openxmlformats.org/drawingml/2006/main" prst="rect">
             <a:avLst/>
@@ -13563,7 +14594,7 @@
             <a:defPPr>
               <a:defRPr sz="1200" b="0">
                 <a:solidFill>
-                  <a:srgbClr val="415566"/>
+                  <a:srgbClr val="183044"/>
                 </a:solidFill>
                 <a:latin typeface="Arial"/>
                 <a:ea typeface="Arial"/>
@@ -13575,7 +14606,7 @@
             <a:pPr>
               <a:defRPr sz="1200" b="0">
                 <a:solidFill>
-                  <a:srgbClr val="415566"/>
+                  <a:srgbClr val="183044"/>
                 </a:solidFill>
                 <a:latin typeface="Arial"/>
                 <a:ea typeface="Arial"/>
@@ -13585,1326 +14616,23 @@
             <a:r>
               <a:rPr sz="1200" b="0">
                 <a:solidFill>
-                  <a:srgbClr val="415566"/>
+                  <a:srgbClr val="183044"/>
                 </a:solidFill>
                 <a:latin typeface="Arial"/>
                 <a:ea typeface="Arial"/>
                 <a:cs typeface="Arial"/>
               </a:rPr>
-              <a:t>X: seeding rate (kg/ha). Y: yield (kg/ha). Rate p = 0.113.</a:t>
-            </a:r>
-          </a:p>
-        </p:txBody>
-      </p:sp>
-      <p:graphicFrame>
-        <p:nvGraphicFramePr>
-          <p:cNvPr id="15" name="">
-            <a:extLst xmlns:a="http://schemas.openxmlformats.org/drawingml/2006/main">
-              <a:ext uri="{FF2B5EF4-FFF2-40B4-BE49-F238E27FC236}">
-                <a16:creationId xmlns:a16="http://schemas.microsoft.com/office/drawing/2014/main" id="{DB2B8861-70ED-46AE-85F0-A9E787B40B82}"/>
-              </a:ext>
-            </a:extLst>
-          </p:cNvPr>
-          <p:cNvGraphicFramePr/>
-          <p:nvPr/>
-        </p:nvGraphicFramePr>
-        <p:xfrm>
-          <a:off xmlns:a="http://schemas.openxmlformats.org/drawingml/2006/main" x="6372225" y="4152900"/>
-          <a:ext xmlns:a="http://schemas.openxmlformats.org/drawingml/2006/main" cx="2590800" cy="1695450"/>
-        </p:xfrm>
-        <a:graphic xmlns:a="http://schemas.openxmlformats.org/drawingml/2006/main">
-          <a:graphicData uri="http://schemas.openxmlformats.org/drawingml/2006/table">
-            <a:tbl>
-              <a:tblPr/>
-              <a:tblGrid>
-                <a:gridCol w="518160"/>
-                <a:gridCol w="518160"/>
-                <a:gridCol w="518160"/>
-                <a:gridCol w="518160"/>
-                <a:gridCol w="518160"/>
-              </a:tblGrid>
-              <a:tr h="339090">
-                <a:tc>
-                  <a:txBody>
-                    <a:bodyPr>
-                      <a:noAutofit/>
-                    </a:bodyPr>
-                    <a:lstStyle/>
-                    <a:p>
-                      <a:pPr algn="ctr"/>
-                      <a:r>
-                        <a:rPr sz="1575" b="1">
-                          <a:solidFill>
-                            <a:srgbClr val="183044"/>
-                          </a:solidFill>
-                          <a:latin typeface="Arial"/>
-                          <a:ea typeface="Arial"/>
-                          <a:cs typeface="Arial"/>
-                        </a:rPr>
-                        <a:t>B</a:t>
-                      </a:r>
-                    </a:p>
-                  </a:txBody>
-                  <a:tcPr marL="91440" marR="91440" marT="45720" marB="45720">
-                    <a:lnL w="9525">
-                      <a:solidFill>
-                        <a:srgbClr val="D6E0E5"/>
-                      </a:solidFill>
-                      <a:prstDash val="solid"/>
-                    </a:lnL>
-                    <a:lnR w="9525">
-                      <a:solidFill>
-                        <a:srgbClr val="D6E0E5"/>
-                      </a:solidFill>
-                      <a:prstDash val="solid"/>
-                    </a:lnR>
-                    <a:lnT w="9525">
-                      <a:solidFill>
-                        <a:srgbClr val="D6E0E5"/>
-                      </a:solidFill>
-                      <a:prstDash val="solid"/>
-                    </a:lnT>
-                    <a:lnB w="9525">
-                      <a:solidFill>
-                        <a:srgbClr val="D6E0E5"/>
-                      </a:solidFill>
-                      <a:prstDash val="solid"/>
-                    </a:lnB>
-                    <a:solidFill>
-                      <a:srgbClr val="D0E4ED"/>
-                    </a:solidFill>
-                  </a:tcPr>
-                </a:tc>
-                <a:tc>
-                  <a:txBody>
-                    <a:bodyPr>
-                      <a:noAutofit/>
-                    </a:bodyPr>
-                    <a:lstStyle/>
-                    <a:p>
-                      <a:pPr algn="ctr"/>
-                      <a:r>
-                        <a:rPr sz="1575" b="1">
-                          <a:solidFill>
-                            <a:srgbClr val="183044"/>
-                          </a:solidFill>
-                          <a:latin typeface="Arial"/>
-                          <a:ea typeface="Arial"/>
-                          <a:cs typeface="Arial"/>
-                        </a:rPr>
-                        <a:t>D</a:t>
-                      </a:r>
-                    </a:p>
-                  </a:txBody>
-                  <a:tcPr marL="91440" marR="91440" marT="45720" marB="45720">
-                    <a:lnR w="9525">
-                      <a:solidFill>
-                        <a:srgbClr val="D6E0E5"/>
-                      </a:solidFill>
-                      <a:prstDash val="solid"/>
-                    </a:lnR>
-                    <a:lnT w="9525">
-                      <a:solidFill>
-                        <a:srgbClr val="D6E0E5"/>
-                      </a:solidFill>
-                      <a:prstDash val="solid"/>
-                    </a:lnT>
-                    <a:lnB w="9525">
-                      <a:solidFill>
-                        <a:srgbClr val="D6E0E5"/>
-                      </a:solidFill>
-                      <a:prstDash val="solid"/>
-                    </a:lnB>
-                    <a:solidFill>
-                      <a:srgbClr val="B9D6E2"/>
-                    </a:solidFill>
-                  </a:tcPr>
-                </a:tc>
-                <a:tc>
-                  <a:txBody>
-                    <a:bodyPr>
-                      <a:noAutofit/>
-                    </a:bodyPr>
-                    <a:lstStyle/>
-                    <a:p>
-                      <a:pPr algn="ctr"/>
-                      <a:r>
-                        <a:rPr sz="1575" b="1">
-                          <a:solidFill>
-                            <a:srgbClr val="183044"/>
-                          </a:solidFill>
-                          <a:latin typeface="Arial"/>
-                          <a:ea typeface="Arial"/>
-                          <a:cs typeface="Arial"/>
-                        </a:rPr>
-                        <a:t>E</a:t>
-                      </a:r>
-                    </a:p>
-                  </a:txBody>
-                  <a:tcPr marL="91440" marR="91440" marT="45720" marB="45720">
-                    <a:lnR w="9525">
-                      <a:solidFill>
-                        <a:srgbClr val="D6E0E5"/>
-                      </a:solidFill>
-                      <a:prstDash val="solid"/>
-                    </a:lnR>
-                    <a:lnT w="9525">
-                      <a:solidFill>
-                        <a:srgbClr val="D6E0E5"/>
-                      </a:solidFill>
-                      <a:prstDash val="solid"/>
-                    </a:lnT>
-                    <a:lnB w="9525">
-                      <a:solidFill>
-                        <a:srgbClr val="D6E0E5"/>
-                      </a:solidFill>
-                      <a:prstDash val="solid"/>
-                    </a:lnB>
-                    <a:solidFill>
-                      <a:srgbClr val="EFF5F8"/>
-                    </a:solidFill>
-                  </a:tcPr>
-                </a:tc>
-                <a:tc>
-                  <a:txBody>
-                    <a:bodyPr>
-                      <a:noAutofit/>
-                    </a:bodyPr>
-                    <a:lstStyle/>
-                    <a:p>
-                      <a:pPr algn="ctr"/>
-                      <a:r>
-                        <a:rPr sz="1575" b="1">
-                          <a:solidFill>
-                            <a:srgbClr val="183044"/>
-                          </a:solidFill>
-                          <a:latin typeface="Arial"/>
-                          <a:ea typeface="Arial"/>
-                          <a:cs typeface="Arial"/>
-                        </a:rPr>
-                        <a:t>A</a:t>
-                      </a:r>
-                    </a:p>
-                  </a:txBody>
-                  <a:tcPr marL="91440" marR="91440" marT="45720" marB="45720">
-                    <a:lnR w="9525">
-                      <a:solidFill>
-                        <a:srgbClr val="D6E0E5"/>
-                      </a:solidFill>
-                      <a:prstDash val="solid"/>
-                    </a:lnR>
-                    <a:lnT w="9525">
-                      <a:solidFill>
-                        <a:srgbClr val="D6E0E5"/>
-                      </a:solidFill>
-                      <a:prstDash val="solid"/>
-                    </a:lnT>
-                    <a:lnB w="9525">
-                      <a:solidFill>
-                        <a:srgbClr val="D6E0E5"/>
-                      </a:solidFill>
-                      <a:prstDash val="solid"/>
-                    </a:lnB>
-                    <a:solidFill>
-                      <a:srgbClr val="E4F0F5"/>
-                    </a:solidFill>
-                  </a:tcPr>
-                </a:tc>
-                <a:tc>
-                  <a:txBody>
-                    <a:bodyPr>
-                      <a:noAutofit/>
-                    </a:bodyPr>
-                    <a:lstStyle/>
-                    <a:p>
-                      <a:pPr algn="ctr"/>
-                      <a:r>
-                        <a:rPr sz="1575" b="1">
-                          <a:solidFill>
-                            <a:srgbClr val="FFFFFF"/>
-                          </a:solidFill>
-                          <a:latin typeface="Arial"/>
-                          <a:ea typeface="Arial"/>
-                          <a:cs typeface="Arial"/>
-                        </a:rPr>
-                        <a:t>C</a:t>
-                      </a:r>
-                    </a:p>
-                  </a:txBody>
-                  <a:tcPr marL="91440" marR="91440" marT="45720" marB="45720">
-                    <a:lnR w="9525">
-                      <a:solidFill>
-                        <a:srgbClr val="D6E0E5"/>
-                      </a:solidFill>
-                      <a:prstDash val="solid"/>
-                    </a:lnR>
-                    <a:lnT w="9525">
-                      <a:solidFill>
-                        <a:srgbClr val="D6E0E5"/>
-                      </a:solidFill>
-                      <a:prstDash val="solid"/>
-                    </a:lnT>
-                    <a:lnB w="9525">
-                      <a:solidFill>
-                        <a:srgbClr val="D6E0E5"/>
-                      </a:solidFill>
-                      <a:prstDash val="solid"/>
-                    </a:lnB>
-                    <a:solidFill>
-                      <a:srgbClr val="176D8C"/>
-                    </a:solidFill>
-                  </a:tcPr>
-                </a:tc>
-              </a:tr>
-              <a:tr h="339090">
-                <a:tc>
-                  <a:txBody>
-                    <a:bodyPr>
-                      <a:noAutofit/>
-                    </a:bodyPr>
-                    <a:lstStyle/>
-                    <a:p>
-                      <a:pPr algn="ctr"/>
-                      <a:r>
-                        <a:rPr sz="1575" b="1">
-                          <a:solidFill>
-                            <a:srgbClr val="FFFFFF"/>
-                          </a:solidFill>
-                          <a:latin typeface="Arial"/>
-                          <a:ea typeface="Arial"/>
-                          <a:cs typeface="Arial"/>
-                        </a:rPr>
-                        <a:t>C</a:t>
-                      </a:r>
-                    </a:p>
-                  </a:txBody>
-                  <a:tcPr marL="91440" marR="91440" marT="45720" marB="45720">
-                    <a:lnL w="9525">
-                      <a:solidFill>
-                        <a:srgbClr val="D6E0E5"/>
-                      </a:solidFill>
-                      <a:prstDash val="solid"/>
-                    </a:lnL>
-                    <a:lnR w="9525">
-                      <a:solidFill>
-                        <a:srgbClr val="D6E0E5"/>
-                      </a:solidFill>
-                      <a:prstDash val="solid"/>
-                    </a:lnR>
-                    <a:lnB w="9525">
-                      <a:solidFill>
-                        <a:srgbClr val="D6E0E5"/>
-                      </a:solidFill>
-                      <a:prstDash val="solid"/>
-                    </a:lnB>
-                    <a:solidFill>
-                      <a:srgbClr val="176D8C"/>
-                    </a:solidFill>
-                  </a:tcPr>
-                </a:tc>
-                <a:tc>
-                  <a:txBody>
-                    <a:bodyPr>
-                      <a:noAutofit/>
-                    </a:bodyPr>
-                    <a:lstStyle/>
-                    <a:p>
-                      <a:pPr algn="ctr"/>
-                      <a:r>
-                        <a:rPr sz="1575" b="1">
-                          <a:solidFill>
-                            <a:srgbClr val="183044"/>
-                          </a:solidFill>
-                          <a:latin typeface="Arial"/>
-                          <a:ea typeface="Arial"/>
-                          <a:cs typeface="Arial"/>
-                        </a:rPr>
-                        <a:t>A</a:t>
-                      </a:r>
-                    </a:p>
-                  </a:txBody>
-                  <a:tcPr marL="91440" marR="91440" marT="45720" marB="45720">
-                    <a:lnR w="9525">
-                      <a:solidFill>
-                        <a:srgbClr val="D6E0E5"/>
-                      </a:solidFill>
-                      <a:prstDash val="solid"/>
-                    </a:lnR>
-                    <a:lnB w="9525">
-                      <a:solidFill>
-                        <a:srgbClr val="D6E0E5"/>
-                      </a:solidFill>
-                      <a:prstDash val="solid"/>
-                    </a:lnB>
-                    <a:solidFill>
-                      <a:srgbClr val="E4F0F5"/>
-                    </a:solidFill>
-                  </a:tcPr>
-                </a:tc>
-                <a:tc>
-                  <a:txBody>
-                    <a:bodyPr>
-                      <a:noAutofit/>
-                    </a:bodyPr>
-                    <a:lstStyle/>
-                    <a:p>
-                      <a:pPr algn="ctr"/>
-                      <a:r>
-                        <a:rPr sz="1575" b="1">
-                          <a:solidFill>
-                            <a:srgbClr val="183044"/>
-                          </a:solidFill>
-                          <a:latin typeface="Arial"/>
-                          <a:ea typeface="Arial"/>
-                          <a:cs typeface="Arial"/>
-                        </a:rPr>
-                        <a:t>B</a:t>
-                      </a:r>
-                    </a:p>
-                  </a:txBody>
-                  <a:tcPr marL="91440" marR="91440" marT="45720" marB="45720">
-                    <a:lnR w="9525">
-                      <a:solidFill>
-                        <a:srgbClr val="D6E0E5"/>
-                      </a:solidFill>
-                      <a:prstDash val="solid"/>
-                    </a:lnR>
-                    <a:lnB w="9525">
-                      <a:solidFill>
-                        <a:srgbClr val="D6E0E5"/>
-                      </a:solidFill>
-                      <a:prstDash val="solid"/>
-                    </a:lnB>
-                    <a:solidFill>
-                      <a:srgbClr val="D0E4ED"/>
-                    </a:solidFill>
-                  </a:tcPr>
-                </a:tc>
-                <a:tc>
-                  <a:txBody>
-                    <a:bodyPr>
-                      <a:noAutofit/>
-                    </a:bodyPr>
-                    <a:lstStyle/>
-                    <a:p>
-                      <a:pPr algn="ctr"/>
-                      <a:r>
-                        <a:rPr sz="1575" b="1">
-                          <a:solidFill>
-                            <a:srgbClr val="183044"/>
-                          </a:solidFill>
-                          <a:latin typeface="Arial"/>
-                          <a:ea typeface="Arial"/>
-                          <a:cs typeface="Arial"/>
-                        </a:rPr>
-                        <a:t>E</a:t>
-                      </a:r>
-                    </a:p>
-                  </a:txBody>
-                  <a:tcPr marL="91440" marR="91440" marT="45720" marB="45720">
-                    <a:lnR w="9525">
-                      <a:solidFill>
-                        <a:srgbClr val="D6E0E5"/>
-                      </a:solidFill>
-                      <a:prstDash val="solid"/>
-                    </a:lnR>
-                    <a:lnB w="9525">
-                      <a:solidFill>
-                        <a:srgbClr val="D6E0E5"/>
-                      </a:solidFill>
-                      <a:prstDash val="solid"/>
-                    </a:lnB>
-                    <a:solidFill>
-                      <a:srgbClr val="EFF5F8"/>
-                    </a:solidFill>
-                  </a:tcPr>
-                </a:tc>
-                <a:tc>
-                  <a:txBody>
-                    <a:bodyPr>
-                      <a:noAutofit/>
-                    </a:bodyPr>
-                    <a:lstStyle/>
-                    <a:p>
-                      <a:pPr algn="ctr"/>
-                      <a:r>
-                        <a:rPr sz="1575" b="1">
-                          <a:solidFill>
-                            <a:srgbClr val="183044"/>
-                          </a:solidFill>
-                          <a:latin typeface="Arial"/>
-                          <a:ea typeface="Arial"/>
-                          <a:cs typeface="Arial"/>
-                        </a:rPr>
-                        <a:t>D</a:t>
-                      </a:r>
-                    </a:p>
-                  </a:txBody>
-                  <a:tcPr marL="91440" marR="91440" marT="45720" marB="45720">
-                    <a:lnR w="9525">
-                      <a:solidFill>
-                        <a:srgbClr val="D6E0E5"/>
-                      </a:solidFill>
-                      <a:prstDash val="solid"/>
-                    </a:lnR>
-                    <a:lnB w="9525">
-                      <a:solidFill>
-                        <a:srgbClr val="D6E0E5"/>
-                      </a:solidFill>
-                      <a:prstDash val="solid"/>
-                    </a:lnB>
-                    <a:solidFill>
-                      <a:srgbClr val="B9D6E2"/>
-                    </a:solidFill>
-                  </a:tcPr>
-                </a:tc>
-              </a:tr>
-              <a:tr h="339090">
-                <a:tc>
-                  <a:txBody>
-                    <a:bodyPr>
-                      <a:noAutofit/>
-                    </a:bodyPr>
-                    <a:lstStyle/>
-                    <a:p>
-                      <a:pPr algn="ctr"/>
-                      <a:r>
-                        <a:rPr sz="1575" b="1">
-                          <a:solidFill>
-                            <a:srgbClr val="183044"/>
-                          </a:solidFill>
-                          <a:latin typeface="Arial"/>
-                          <a:ea typeface="Arial"/>
-                          <a:cs typeface="Arial"/>
-                        </a:rPr>
-                        <a:t>D</a:t>
-                      </a:r>
-                    </a:p>
-                  </a:txBody>
-                  <a:tcPr marL="91440" marR="91440" marT="45720" marB="45720">
-                    <a:lnL w="9525">
-                      <a:solidFill>
-                        <a:srgbClr val="D6E0E5"/>
-                      </a:solidFill>
-                      <a:prstDash val="solid"/>
-                    </a:lnL>
-                    <a:lnR w="9525">
-                      <a:solidFill>
-                        <a:srgbClr val="D6E0E5"/>
-                      </a:solidFill>
-                      <a:prstDash val="solid"/>
-                    </a:lnR>
-                    <a:lnB w="9525">
-                      <a:solidFill>
-                        <a:srgbClr val="D6E0E5"/>
-                      </a:solidFill>
-                      <a:prstDash val="solid"/>
-                    </a:lnB>
-                    <a:solidFill>
-                      <a:srgbClr val="B9D6E2"/>
-                    </a:solidFill>
-                  </a:tcPr>
-                </a:tc>
-                <a:tc>
-                  <a:txBody>
-                    <a:bodyPr>
-                      <a:noAutofit/>
-                    </a:bodyPr>
-                    <a:lstStyle/>
-                    <a:p>
-                      <a:pPr algn="ctr"/>
-                      <a:r>
-                        <a:rPr sz="1575" b="1">
-                          <a:solidFill>
-                            <a:srgbClr val="FFFFFF"/>
-                          </a:solidFill>
-                          <a:latin typeface="Arial"/>
-                          <a:ea typeface="Arial"/>
-                          <a:cs typeface="Arial"/>
-                        </a:rPr>
-                        <a:t>C</a:t>
-                      </a:r>
-                    </a:p>
-                  </a:txBody>
-                  <a:tcPr marL="91440" marR="91440" marT="45720" marB="45720">
-                    <a:lnR w="9525">
-                      <a:solidFill>
-                        <a:srgbClr val="D6E0E5"/>
-                      </a:solidFill>
-                      <a:prstDash val="solid"/>
-                    </a:lnR>
-                    <a:lnB w="9525">
-                      <a:solidFill>
-                        <a:srgbClr val="D6E0E5"/>
-                      </a:solidFill>
-                      <a:prstDash val="solid"/>
-                    </a:lnB>
-                    <a:solidFill>
-                      <a:srgbClr val="176D8C"/>
-                    </a:solidFill>
-                  </a:tcPr>
-                </a:tc>
-                <a:tc>
-                  <a:txBody>
-                    <a:bodyPr>
-                      <a:noAutofit/>
-                    </a:bodyPr>
-                    <a:lstStyle/>
-                    <a:p>
-                      <a:pPr algn="ctr"/>
-                      <a:r>
-                        <a:rPr sz="1575" b="1">
-                          <a:solidFill>
-                            <a:srgbClr val="183044"/>
-                          </a:solidFill>
-                          <a:latin typeface="Arial"/>
-                          <a:ea typeface="Arial"/>
-                          <a:cs typeface="Arial"/>
-                        </a:rPr>
-                        <a:t>A</a:t>
-                      </a:r>
-                    </a:p>
-                  </a:txBody>
-                  <a:tcPr marL="91440" marR="91440" marT="45720" marB="45720">
-                    <a:lnR w="9525">
-                      <a:solidFill>
-                        <a:srgbClr val="D6E0E5"/>
-                      </a:solidFill>
-                      <a:prstDash val="solid"/>
-                    </a:lnR>
-                    <a:lnB w="9525">
-                      <a:solidFill>
-                        <a:srgbClr val="D6E0E5"/>
-                      </a:solidFill>
-                      <a:prstDash val="solid"/>
-                    </a:lnB>
-                    <a:solidFill>
-                      <a:srgbClr val="E4F0F5"/>
-                    </a:solidFill>
-                  </a:tcPr>
-                </a:tc>
-                <a:tc>
-                  <a:txBody>
-                    <a:bodyPr>
-                      <a:noAutofit/>
-                    </a:bodyPr>
-                    <a:lstStyle/>
-                    <a:p>
-                      <a:pPr algn="ctr"/>
-                      <a:r>
-                        <a:rPr sz="1575" b="1">
-                          <a:solidFill>
-                            <a:srgbClr val="183044"/>
-                          </a:solidFill>
-                          <a:latin typeface="Arial"/>
-                          <a:ea typeface="Arial"/>
-                          <a:cs typeface="Arial"/>
-                        </a:rPr>
-                        <a:t>B</a:t>
-                      </a:r>
-                    </a:p>
-                  </a:txBody>
-                  <a:tcPr marL="91440" marR="91440" marT="45720" marB="45720">
-                    <a:lnR w="9525">
-                      <a:solidFill>
-                        <a:srgbClr val="D6E0E5"/>
-                      </a:solidFill>
-                      <a:prstDash val="solid"/>
-                    </a:lnR>
-                    <a:lnB w="9525">
-                      <a:solidFill>
-                        <a:srgbClr val="D6E0E5"/>
-                      </a:solidFill>
-                      <a:prstDash val="solid"/>
-                    </a:lnB>
-                    <a:solidFill>
-                      <a:srgbClr val="D0E4ED"/>
-                    </a:solidFill>
-                  </a:tcPr>
-                </a:tc>
-                <a:tc>
-                  <a:txBody>
-                    <a:bodyPr>
-                      <a:noAutofit/>
-                    </a:bodyPr>
-                    <a:lstStyle/>
-                    <a:p>
-                      <a:pPr algn="ctr"/>
-                      <a:r>
-                        <a:rPr sz="1575" b="1">
-                          <a:solidFill>
-                            <a:srgbClr val="183044"/>
-                          </a:solidFill>
-                          <a:latin typeface="Arial"/>
-                          <a:ea typeface="Arial"/>
-                          <a:cs typeface="Arial"/>
-                        </a:rPr>
-                        <a:t>E</a:t>
-                      </a:r>
-                    </a:p>
-                  </a:txBody>
-                  <a:tcPr marL="91440" marR="91440" marT="45720" marB="45720">
-                    <a:lnR w="9525">
-                      <a:solidFill>
-                        <a:srgbClr val="D6E0E5"/>
-                      </a:solidFill>
-                      <a:prstDash val="solid"/>
-                    </a:lnR>
-                    <a:lnB w="9525">
-                      <a:solidFill>
-                        <a:srgbClr val="D6E0E5"/>
-                      </a:solidFill>
-                      <a:prstDash val="solid"/>
-                    </a:lnB>
-                    <a:solidFill>
-                      <a:srgbClr val="EFF5F8"/>
-                    </a:solidFill>
-                  </a:tcPr>
-                </a:tc>
-              </a:tr>
-              <a:tr h="339090">
-                <a:tc>
-                  <a:txBody>
-                    <a:bodyPr>
-                      <a:noAutofit/>
-                    </a:bodyPr>
-                    <a:lstStyle/>
-                    <a:p>
-                      <a:pPr algn="ctr"/>
-                      <a:r>
-                        <a:rPr sz="1575" b="1">
-                          <a:solidFill>
-                            <a:srgbClr val="183044"/>
-                          </a:solidFill>
-                          <a:latin typeface="Arial"/>
-                          <a:ea typeface="Arial"/>
-                          <a:cs typeface="Arial"/>
-                        </a:rPr>
-                        <a:t>E</a:t>
-                      </a:r>
-                    </a:p>
-                  </a:txBody>
-                  <a:tcPr marL="91440" marR="91440" marT="45720" marB="45720">
-                    <a:lnL w="9525">
-                      <a:solidFill>
-                        <a:srgbClr val="D6E0E5"/>
-                      </a:solidFill>
-                      <a:prstDash val="solid"/>
-                    </a:lnL>
-                    <a:lnR w="9525">
-                      <a:solidFill>
-                        <a:srgbClr val="D6E0E5"/>
-                      </a:solidFill>
-                      <a:prstDash val="solid"/>
-                    </a:lnR>
-                    <a:lnB w="9525">
-                      <a:solidFill>
-                        <a:srgbClr val="D6E0E5"/>
-                      </a:solidFill>
-                      <a:prstDash val="solid"/>
-                    </a:lnB>
-                    <a:solidFill>
-                      <a:srgbClr val="EFF5F8"/>
-                    </a:solidFill>
-                  </a:tcPr>
-                </a:tc>
-                <a:tc>
-                  <a:txBody>
-                    <a:bodyPr>
-                      <a:noAutofit/>
-                    </a:bodyPr>
-                    <a:lstStyle/>
-                    <a:p>
-                      <a:pPr algn="ctr"/>
-                      <a:r>
-                        <a:rPr sz="1575" b="1">
-                          <a:solidFill>
-                            <a:srgbClr val="183044"/>
-                          </a:solidFill>
-                          <a:latin typeface="Arial"/>
-                          <a:ea typeface="Arial"/>
-                          <a:cs typeface="Arial"/>
-                        </a:rPr>
-                        <a:t>B</a:t>
-                      </a:r>
-                    </a:p>
-                  </a:txBody>
-                  <a:tcPr marL="91440" marR="91440" marT="45720" marB="45720">
-                    <a:lnR w="9525">
-                      <a:solidFill>
-                        <a:srgbClr val="D6E0E5"/>
-                      </a:solidFill>
-                      <a:prstDash val="solid"/>
-                    </a:lnR>
-                    <a:lnB w="9525">
-                      <a:solidFill>
-                        <a:srgbClr val="D6E0E5"/>
-                      </a:solidFill>
-                      <a:prstDash val="solid"/>
-                    </a:lnB>
-                    <a:solidFill>
-                      <a:srgbClr val="D0E4ED"/>
-                    </a:solidFill>
-                  </a:tcPr>
-                </a:tc>
-                <a:tc>
-                  <a:txBody>
-                    <a:bodyPr>
-                      <a:noAutofit/>
-                    </a:bodyPr>
-                    <a:lstStyle/>
-                    <a:p>
-                      <a:pPr algn="ctr"/>
-                      <a:r>
-                        <a:rPr sz="1575" b="1">
-                          <a:solidFill>
-                            <a:srgbClr val="FFFFFF"/>
-                          </a:solidFill>
-                          <a:latin typeface="Arial"/>
-                          <a:ea typeface="Arial"/>
-                          <a:cs typeface="Arial"/>
-                        </a:rPr>
-                        <a:t>C</a:t>
-                      </a:r>
-                    </a:p>
-                  </a:txBody>
-                  <a:tcPr marL="91440" marR="91440" marT="45720" marB="45720">
-                    <a:lnR w="9525">
-                      <a:solidFill>
-                        <a:srgbClr val="D6E0E5"/>
-                      </a:solidFill>
-                      <a:prstDash val="solid"/>
-                    </a:lnR>
-                    <a:lnB w="9525">
-                      <a:solidFill>
-                        <a:srgbClr val="D6E0E5"/>
-                      </a:solidFill>
-                      <a:prstDash val="solid"/>
-                    </a:lnB>
-                    <a:solidFill>
-                      <a:srgbClr val="176D8C"/>
-                    </a:solidFill>
-                  </a:tcPr>
-                </a:tc>
-                <a:tc>
-                  <a:txBody>
-                    <a:bodyPr>
-                      <a:noAutofit/>
-                    </a:bodyPr>
-                    <a:lstStyle/>
-                    <a:p>
-                      <a:pPr algn="ctr"/>
-                      <a:r>
-                        <a:rPr sz="1575" b="1">
-                          <a:solidFill>
-                            <a:srgbClr val="183044"/>
-                          </a:solidFill>
-                          <a:latin typeface="Arial"/>
-                          <a:ea typeface="Arial"/>
-                          <a:cs typeface="Arial"/>
-                        </a:rPr>
-                        <a:t>D</a:t>
-                      </a:r>
-                    </a:p>
-                  </a:txBody>
-                  <a:tcPr marL="91440" marR="91440" marT="45720" marB="45720">
-                    <a:lnR w="9525">
-                      <a:solidFill>
-                        <a:srgbClr val="D6E0E5"/>
-                      </a:solidFill>
-                      <a:prstDash val="solid"/>
-                    </a:lnR>
-                    <a:lnB w="9525">
-                      <a:solidFill>
-                        <a:srgbClr val="D6E0E5"/>
-                      </a:solidFill>
-                      <a:prstDash val="solid"/>
-                    </a:lnB>
-                    <a:solidFill>
-                      <a:srgbClr val="B9D6E2"/>
-                    </a:solidFill>
-                  </a:tcPr>
-                </a:tc>
-                <a:tc>
-                  <a:txBody>
-                    <a:bodyPr>
-                      <a:noAutofit/>
-                    </a:bodyPr>
-                    <a:lstStyle/>
-                    <a:p>
-                      <a:pPr algn="ctr"/>
-                      <a:r>
-                        <a:rPr sz="1575" b="1">
-                          <a:solidFill>
-                            <a:srgbClr val="183044"/>
-                          </a:solidFill>
-                          <a:latin typeface="Arial"/>
-                          <a:ea typeface="Arial"/>
-                          <a:cs typeface="Arial"/>
-                        </a:rPr>
-                        <a:t>A</a:t>
-                      </a:r>
-                    </a:p>
-                  </a:txBody>
-                  <a:tcPr marL="91440" marR="91440" marT="45720" marB="45720">
-                    <a:lnR w="9525">
-                      <a:solidFill>
-                        <a:srgbClr val="D6E0E5"/>
-                      </a:solidFill>
-                      <a:prstDash val="solid"/>
-                    </a:lnR>
-                    <a:lnB w="9525">
-                      <a:solidFill>
-                        <a:srgbClr val="D6E0E5"/>
-                      </a:solidFill>
-                      <a:prstDash val="solid"/>
-                    </a:lnB>
-                    <a:solidFill>
-                      <a:srgbClr val="E4F0F5"/>
-                    </a:solidFill>
-                  </a:tcPr>
-                </a:tc>
-              </a:tr>
-              <a:tr h="339090">
-                <a:tc>
-                  <a:txBody>
-                    <a:bodyPr>
-                      <a:noAutofit/>
-                    </a:bodyPr>
-                    <a:lstStyle/>
-                    <a:p>
-                      <a:pPr algn="ctr"/>
-                      <a:r>
-                        <a:rPr sz="1575" b="1">
-                          <a:solidFill>
-                            <a:srgbClr val="183044"/>
-                          </a:solidFill>
-                          <a:latin typeface="Arial"/>
-                          <a:ea typeface="Arial"/>
-                          <a:cs typeface="Arial"/>
-                        </a:rPr>
-                        <a:t>A</a:t>
-                      </a:r>
-                    </a:p>
-                  </a:txBody>
-                  <a:tcPr marL="91440" marR="91440" marT="45720" marB="45720">
-                    <a:lnL w="9525">
-                      <a:solidFill>
-                        <a:srgbClr val="D6E0E5"/>
-                      </a:solidFill>
-                      <a:prstDash val="solid"/>
-                    </a:lnL>
-                    <a:lnR w="9525">
-                      <a:solidFill>
-                        <a:srgbClr val="D6E0E5"/>
-                      </a:solidFill>
-                      <a:prstDash val="solid"/>
-                    </a:lnR>
-                    <a:lnB w="9525">
-                      <a:solidFill>
-                        <a:srgbClr val="D6E0E5"/>
-                      </a:solidFill>
-                      <a:prstDash val="solid"/>
-                    </a:lnB>
-                    <a:solidFill>
-                      <a:srgbClr val="E4F0F5"/>
-                    </a:solidFill>
-                  </a:tcPr>
-                </a:tc>
-                <a:tc>
-                  <a:txBody>
-                    <a:bodyPr>
-                      <a:noAutofit/>
-                    </a:bodyPr>
-                    <a:lstStyle/>
-                    <a:p>
-                      <a:pPr algn="ctr"/>
-                      <a:r>
-                        <a:rPr sz="1575" b="1">
-                          <a:solidFill>
-                            <a:srgbClr val="183044"/>
-                          </a:solidFill>
-                          <a:latin typeface="Arial"/>
-                          <a:ea typeface="Arial"/>
-                          <a:cs typeface="Arial"/>
-                        </a:rPr>
-                        <a:t>E</a:t>
-                      </a:r>
-                    </a:p>
-                  </a:txBody>
-                  <a:tcPr marL="91440" marR="91440" marT="45720" marB="45720">
-                    <a:lnR w="9525">
-                      <a:solidFill>
-                        <a:srgbClr val="D6E0E5"/>
-                      </a:solidFill>
-                      <a:prstDash val="solid"/>
-                    </a:lnR>
-                    <a:lnB w="9525">
-                      <a:solidFill>
-                        <a:srgbClr val="D6E0E5"/>
-                      </a:solidFill>
-                      <a:prstDash val="solid"/>
-                    </a:lnB>
-                    <a:solidFill>
-                      <a:srgbClr val="EFF5F8"/>
-                    </a:solidFill>
-                  </a:tcPr>
-                </a:tc>
-                <a:tc>
-                  <a:txBody>
-                    <a:bodyPr>
-                      <a:noAutofit/>
-                    </a:bodyPr>
-                    <a:lstStyle/>
-                    <a:p>
-                      <a:pPr algn="ctr"/>
-                      <a:r>
-                        <a:rPr sz="1575" b="1">
-                          <a:solidFill>
-                            <a:srgbClr val="183044"/>
-                          </a:solidFill>
-                          <a:latin typeface="Arial"/>
-                          <a:ea typeface="Arial"/>
-                          <a:cs typeface="Arial"/>
-                        </a:rPr>
-                        <a:t>D</a:t>
-                      </a:r>
-                    </a:p>
-                  </a:txBody>
-                  <a:tcPr marL="91440" marR="91440" marT="45720" marB="45720">
-                    <a:lnR w="9525">
-                      <a:solidFill>
-                        <a:srgbClr val="D6E0E5"/>
-                      </a:solidFill>
-                      <a:prstDash val="solid"/>
-                    </a:lnR>
-                    <a:lnB w="9525">
-                      <a:solidFill>
-                        <a:srgbClr val="D6E0E5"/>
-                      </a:solidFill>
-                      <a:prstDash val="solid"/>
-                    </a:lnB>
-                    <a:solidFill>
-                      <a:srgbClr val="B9D6E2"/>
-                    </a:solidFill>
-                  </a:tcPr>
-                </a:tc>
-                <a:tc>
-                  <a:txBody>
-                    <a:bodyPr>
-                      <a:noAutofit/>
-                    </a:bodyPr>
-                    <a:lstStyle/>
-                    <a:p>
-                      <a:pPr algn="ctr"/>
-                      <a:r>
-                        <a:rPr sz="1575" b="1">
-                          <a:solidFill>
-                            <a:srgbClr val="FFFFFF"/>
-                          </a:solidFill>
-                          <a:latin typeface="Arial"/>
-                          <a:ea typeface="Arial"/>
-                          <a:cs typeface="Arial"/>
-                        </a:rPr>
-                        <a:t>C</a:t>
-                      </a:r>
-                    </a:p>
-                  </a:txBody>
-                  <a:tcPr marL="91440" marR="91440" marT="45720" marB="45720">
-                    <a:lnR w="9525">
-                      <a:solidFill>
-                        <a:srgbClr val="D6E0E5"/>
-                      </a:solidFill>
-                      <a:prstDash val="solid"/>
-                    </a:lnR>
-                    <a:lnB w="9525">
-                      <a:solidFill>
-                        <a:srgbClr val="D6E0E5"/>
-                      </a:solidFill>
-                      <a:prstDash val="solid"/>
-                    </a:lnB>
-                    <a:solidFill>
-                      <a:srgbClr val="176D8C"/>
-                    </a:solidFill>
-                  </a:tcPr>
-                </a:tc>
-                <a:tc>
-                  <a:txBody>
-                    <a:bodyPr>
-                      <a:noAutofit/>
-                    </a:bodyPr>
-                    <a:lstStyle/>
-                    <a:p>
-                      <a:pPr algn="ctr"/>
-                      <a:r>
-                        <a:rPr sz="1575" b="1">
-                          <a:solidFill>
-                            <a:srgbClr val="183044"/>
-                          </a:solidFill>
-                          <a:latin typeface="Arial"/>
-                          <a:ea typeface="Arial"/>
-                          <a:cs typeface="Arial"/>
-                        </a:rPr>
-                        <a:t>B</a:t>
-                      </a:r>
-                    </a:p>
-                  </a:txBody>
-                  <a:tcPr marL="91440" marR="91440" marT="45720" marB="45720">
-                    <a:lnR w="9525">
-                      <a:solidFill>
-                        <a:srgbClr val="D6E0E5"/>
-                      </a:solidFill>
-                      <a:prstDash val="solid"/>
-                    </a:lnR>
-                    <a:lnB w="9525">
-                      <a:solidFill>
-                        <a:srgbClr val="D6E0E5"/>
-                      </a:solidFill>
-                      <a:prstDash val="solid"/>
-                    </a:lnB>
-                    <a:solidFill>
-                      <a:srgbClr val="D0E4ED"/>
-                    </a:solidFill>
-                  </a:tcPr>
-                </a:tc>
-              </a:tr>
-            </a:tbl>
-          </a:graphicData>
-        </a:graphic>
-      </p:graphicFrame>
-      <p:sp>
-        <p:nvSpPr>
-          <p:cNvPr id="16" name="text">
-            <a:extLst xmlns:a="http://schemas.openxmlformats.org/drawingml/2006/main">
-              <a:ext uri="{FF2B5EF4-FFF2-40B4-BE49-F238E27FC236}">
-                <a16:creationId xmlns:a16="http://schemas.microsoft.com/office/drawing/2014/main" id="{C72CFE92-7183-476B-8F3D-3812B5317110}"/>
-              </a:ext>
-            </a:extLst>
-          </p:cNvPr>
-          <p:cNvSpPr>
-            <a:spLocks xmlns:a="http://schemas.openxmlformats.org/drawingml/2006/main" noGrp="1"/>
-          </p:cNvSpPr>
-          <p:nvPr/>
-        </p:nvSpPr>
-        <p:spPr>
-          <a:xfrm xmlns:a="http://schemas.openxmlformats.org/drawingml/2006/main">
-            <a:off x="9220200" y="4152900"/>
-            <a:ext cx="2581275" cy="904875"/>
-          </a:xfrm>
-          <a:prstGeom xmlns:a="http://schemas.openxmlformats.org/drawingml/2006/main" prst="rect">
-            <a:avLst/>
-          </a:prstGeom>
-          <a:noFill xmlns:a="http://schemas.openxmlformats.org/drawingml/2006/main"/>
-          <a:ln xmlns:a="http://schemas.openxmlformats.org/drawingml/2006/main" w="0">
-            <a:noFill/>
-          </a:ln>
-        </p:spPr>
-        <p:txBody>
-          <a:bodyPr xmlns:a="http://schemas.openxmlformats.org/drawingml/2006/main">
-            <a:noAutofit/>
-          </a:bodyPr>
-          <a:lstStyle xmlns:a="http://schemas.openxmlformats.org/drawingml/2006/main">
-            <a:defPPr>
-              <a:defRPr sz="1575" b="0">
-                <a:solidFill>
-                  <a:srgbClr val="183044"/>
-                </a:solidFill>
-                <a:latin typeface="Arial"/>
-                <a:ea typeface="Arial"/>
-                <a:cs typeface="Arial"/>
-              </a:defRPr>
-            </a:defPPr>
-          </a:lstStyle>
-          <a:p xmlns:a="http://schemas.openxmlformats.org/drawingml/2006/main">
-            <a:pPr>
-              <a:defRPr sz="1575" b="0">
-                <a:solidFill>
-                  <a:srgbClr val="183044"/>
-                </a:solidFill>
-                <a:latin typeface="Arial"/>
-                <a:ea typeface="Arial"/>
-                <a:cs typeface="Arial"/>
-              </a:defRPr>
-            </a:pPr>
-            <a:r>
-              <a:rPr sz="1575" b="0">
-                <a:solidFill>
-                  <a:srgbClr val="183044"/>
-                </a:solidFill>
-                <a:latin typeface="Arial"/>
-                <a:ea typeface="Arial"/>
-                <a:cs typeface="Arial"/>
-              </a:rPr>
-              <a:t>Wheat: 5 treatments in a 5 × 5 grid. Each letter occurs once per row and column.</a:t>
+              <a:t>A Some HS, B High school, C Some college, D Graduate.</a:t>
             </a:r>
           </a:p>
         </p:txBody>
       </p:sp>
       <p:sp>
         <p:nvSpPr>
-          <p:cNvPr id="17" name="text">
+          <p:cNvPr id="23" name="">
             <a:extLst xmlns:a="http://schemas.openxmlformats.org/drawingml/2006/main">
               <a:ext uri="{FF2B5EF4-FFF2-40B4-BE49-F238E27FC236}">
-                <a16:creationId xmlns:a16="http://schemas.microsoft.com/office/drawing/2014/main" id="{63F30156-334B-450C-A433-665531398FEF}"/>
-              </a:ext>
-            </a:extLst>
-          </p:cNvPr>
-          <p:cNvSpPr>
-            <a:spLocks xmlns:a="http://schemas.openxmlformats.org/drawingml/2006/main" noGrp="1"/>
-          </p:cNvSpPr>
-          <p:nvPr/>
-        </p:nvSpPr>
-        <p:spPr>
-          <a:xfrm xmlns:a="http://schemas.openxmlformats.org/drawingml/2006/main">
-            <a:off x="9220200" y="5105400"/>
-            <a:ext cx="2581275" cy="295275"/>
-          </a:xfrm>
-          <a:prstGeom xmlns:a="http://schemas.openxmlformats.org/drawingml/2006/main" prst="rect">
-            <a:avLst/>
-          </a:prstGeom>
-          <a:noFill xmlns:a="http://schemas.openxmlformats.org/drawingml/2006/main"/>
-          <a:ln xmlns:a="http://schemas.openxmlformats.org/drawingml/2006/main" w="0">
-            <a:noFill/>
-          </a:ln>
-        </p:spPr>
-        <p:txBody>
-          <a:bodyPr xmlns:a="http://schemas.openxmlformats.org/drawingml/2006/main">
-            <a:noAutofit/>
-          </a:bodyPr>
-          <a:lstStyle xmlns:a="http://schemas.openxmlformats.org/drawingml/2006/main">
-            <a:defPPr>
-              <a:defRPr sz="1650" b="1">
-                <a:solidFill>
-                  <a:srgbClr val="176D8C"/>
-                </a:solidFill>
-                <a:latin typeface="Arial"/>
-                <a:ea typeface="Arial"/>
-                <a:cs typeface="Arial"/>
-              </a:defRPr>
-            </a:defPPr>
-          </a:lstStyle>
-          <a:p xmlns:a="http://schemas.openxmlformats.org/drawingml/2006/main">
-            <a:pPr>
-              <a:defRPr sz="1650" b="1">
-                <a:solidFill>
-                  <a:srgbClr val="176D8C"/>
-                </a:solidFill>
-                <a:latin typeface="Arial"/>
-                <a:ea typeface="Arial"/>
-                <a:cs typeface="Arial"/>
-              </a:defRPr>
-            </a:pPr>
-            <a:r>
-              <a:rPr sz="1650" b="1">
-                <a:solidFill>
-                  <a:srgbClr val="176D8C"/>
-                </a:solidFill>
-                <a:latin typeface="Arial"/>
-                <a:ea typeface="Arial"/>
-                <a:cs typeface="Arial"/>
-              </a:rPr>
-              <a:t>F = 21.03, p &lt; 0.001</a:t>
-            </a:r>
-          </a:p>
-        </p:txBody>
-      </p:sp>
-      <p:sp>
-        <p:nvSpPr>
-          <p:cNvPr id="18" name="text">
-            <a:extLst xmlns:a="http://schemas.openxmlformats.org/drawingml/2006/main">
-              <a:ext uri="{FF2B5EF4-FFF2-40B4-BE49-F238E27FC236}">
-                <a16:creationId xmlns:a16="http://schemas.microsoft.com/office/drawing/2014/main" id="{5425A212-07C7-4987-83BE-A8DE731D7A9A}"/>
-              </a:ext>
-            </a:extLst>
-          </p:cNvPr>
-          <p:cNvSpPr>
-            <a:spLocks xmlns:a="http://schemas.openxmlformats.org/drawingml/2006/main" noGrp="1"/>
-          </p:cNvSpPr>
-          <p:nvPr/>
-        </p:nvSpPr>
-        <p:spPr>
-          <a:xfrm xmlns:a="http://schemas.openxmlformats.org/drawingml/2006/main">
-            <a:off x="9220200" y="5505450"/>
-            <a:ext cx="2581275" cy="552450"/>
-          </a:xfrm>
-          <a:prstGeom xmlns:a="http://schemas.openxmlformats.org/drawingml/2006/main" prst="rect">
-            <a:avLst/>
-          </a:prstGeom>
-          <a:noFill xmlns:a="http://schemas.openxmlformats.org/drawingml/2006/main"/>
-          <a:ln xmlns:a="http://schemas.openxmlformats.org/drawingml/2006/main" w="0">
-            <a:noFill/>
-          </a:ln>
-        </p:spPr>
-        <p:txBody>
-          <a:bodyPr xmlns:a="http://schemas.openxmlformats.org/drawingml/2006/main">
-            <a:noAutofit/>
-          </a:bodyPr>
-          <a:lstStyle xmlns:a="http://schemas.openxmlformats.org/drawingml/2006/main">
-            <a:defPPr>
-              <a:defRPr sz="1575" b="1">
-                <a:solidFill>
-                  <a:srgbClr val="183044"/>
-                </a:solidFill>
-                <a:latin typeface="Arial"/>
-                <a:ea typeface="Arial"/>
-                <a:cs typeface="Arial"/>
-              </a:defRPr>
-            </a:defPPr>
-          </a:lstStyle>
-          <a:p xmlns:a="http://schemas.openxmlformats.org/drawingml/2006/main">
-            <a:pPr>
-              <a:defRPr sz="1575" b="1">
-                <a:solidFill>
-                  <a:srgbClr val="183044"/>
-                </a:solidFill>
-                <a:latin typeface="Arial"/>
-                <a:ea typeface="Arial"/>
-                <a:cs typeface="Arial"/>
-              </a:defRPr>
-            </a:pPr>
-            <a:r>
-              <a:rPr sz="1575" b="1">
-                <a:solidFill>
-                  <a:srgbClr val="183044"/>
-                </a:solidFill>
-                <a:latin typeface="Arial"/>
-                <a:ea typeface="Arial"/>
-                <a:cs typeface="Arial"/>
-              </a:rPr>
-              <a:t>C: highest mean, 13.12.</a:t>
-            </a:r>
-          </a:p>
-          <a:p xmlns:a="http://schemas.openxmlformats.org/drawingml/2006/main">
-            <a:pPr>
-              <a:defRPr sz="1575" b="1">
-                <a:solidFill>
-                  <a:srgbClr val="183044"/>
-                </a:solidFill>
-                <a:latin typeface="Arial"/>
-                <a:ea typeface="Arial"/>
-                <a:cs typeface="Arial"/>
-              </a:defRPr>
-            </a:pPr>
-            <a:r>
-              <a:rPr sz="1575" b="1">
-                <a:solidFill>
-                  <a:srgbClr val="183044"/>
-                </a:solidFill>
-                <a:latin typeface="Arial"/>
-                <a:ea typeface="Arial"/>
-                <a:cs typeface="Arial"/>
-              </a:rPr>
-              <a:t>Weekly dusting.</a:t>
-            </a:r>
-          </a:p>
-        </p:txBody>
-      </p:sp>
-      <p:sp>
-        <p:nvSpPr>
-          <p:cNvPr id="19" name="">
-            <a:extLst xmlns:a="http://schemas.openxmlformats.org/drawingml/2006/main">
-              <a:ext uri="{FF2B5EF4-FFF2-40B4-BE49-F238E27FC236}">
-                <a16:creationId xmlns:a16="http://schemas.microsoft.com/office/drawing/2014/main" id="{AFD2ED0E-D579-485E-846D-54105EB982D9}"/>
+                <a16:creationId xmlns:a16="http://schemas.microsoft.com/office/drawing/2014/main" id="{B971E844-6979-4FB3-8142-A032F7C73189}"/>
               </a:ext>
             </a:extLst>
           </p:cNvPr>
@@ -14931,10 +14659,10 @@
       </p:sp>
       <p:sp>
         <p:nvSpPr>
-          <p:cNvPr id="20" name="text">
+          <p:cNvPr id="24" name="text">
             <a:extLst xmlns:a="http://schemas.openxmlformats.org/drawingml/2006/main">
               <a:ext uri="{FF2B5EF4-FFF2-40B4-BE49-F238E27FC236}">
-                <a16:creationId xmlns:a16="http://schemas.microsoft.com/office/drawing/2014/main" id="{D985220E-B964-44D8-8FAB-37A2236D1A4F}"/>
+                <a16:creationId xmlns:a16="http://schemas.microsoft.com/office/drawing/2014/main" id="{884D8E43-D7FE-4F03-A5B1-3E3B785B2F6F}"/>
               </a:ext>
             </a:extLst>
           </p:cNvPr>
@@ -14992,17 +14720,17 @@
                 <a:ea typeface="Arial"/>
                 <a:cs typeface="Arial"/>
               </a:rPr>
-              <a:t>Blocks reduce unexplained error. Weekly dusting (C) has the highest wheat yield in its experiment.</a:t>
+              <a:t>All records come from BRFSS. Observational layouts: education was not randomly assigned.</a:t>
             </a:r>
           </a:p>
         </p:txBody>
       </p:sp>
       <p:sp>
         <p:nvSpPr>
-          <p:cNvPr id="21" name="text">
+          <p:cNvPr id="25" name="text">
             <a:extLst xmlns:a="http://schemas.openxmlformats.org/drawingml/2006/main">
               <a:ext uri="{FF2B5EF4-FFF2-40B4-BE49-F238E27FC236}">
-                <a16:creationId xmlns:a16="http://schemas.microsoft.com/office/drawing/2014/main" id="{3C8F1752-96A4-4E1B-ADCE-1CBFE23975EB}"/>
+                <a16:creationId xmlns:a16="http://schemas.microsoft.com/office/drawing/2014/main" id="{E073B5B5-34B8-46F5-95B5-699CCB505C44}"/>
               </a:ext>
             </a:extLst>
           </p:cNvPr>
@@ -15068,7 +14796,7 @@
     </p:spTree>
     <p:extLst>
       <p:ext uri="{BB962C8B-B14F-4D97-AF65-F5344CB8AC3E}">
-        <p14:creationId xmlns:p14="http://schemas.microsoft.com/office/powerpoint/2010/main" val="508784202"/>
+        <p14:creationId xmlns:p14="http://schemas.microsoft.com/office/powerpoint/2010/main" val="1473584409"/>
       </p:ext>
     </p:extLst>
   </p:cSld>
@@ -15099,7 +14827,7 @@
           <p:cNvPr id="25" name="text">
             <a:extLst xmlns:a="http://schemas.openxmlformats.org/drawingml/2006/main">
               <a:ext uri="{FF2B5EF4-FFF2-40B4-BE49-F238E27FC236}">
-                <a16:creationId xmlns:a16="http://schemas.microsoft.com/office/drawing/2014/main" id="{402CDFB7-0E69-4755-9E98-C85A7A02AEE0}"/>
+                <a16:creationId xmlns:a16="http://schemas.microsoft.com/office/drawing/2014/main" id="{5E8CC6F6-0D09-4438-8B08-D6572625CB33}"/>
               </a:ext>
             </a:extLst>
           </p:cNvPr>
@@ -15167,7 +14895,7 @@
           <p:cNvPr id="2" name="">
             <a:extLst xmlns:a="http://schemas.openxmlformats.org/drawingml/2006/main">
               <a:ext uri="{FF2B5EF4-FFF2-40B4-BE49-F238E27FC236}">
-                <a16:creationId xmlns:a16="http://schemas.microsoft.com/office/drawing/2014/main" id="{D7206F07-DAEA-40CE-847D-104F0F3C1ADC}"/>
+                <a16:creationId xmlns:a16="http://schemas.microsoft.com/office/drawing/2014/main" id="{4BD4190C-7911-4C74-A457-241F17F80A3E}"/>
               </a:ext>
             </a:extLst>
           </p:cNvPr>
@@ -15197,7 +14925,7 @@
           <p:cNvPr id="3" name="text">
             <a:extLst xmlns:a="http://schemas.openxmlformats.org/drawingml/2006/main">
               <a:ext uri="{FF2B5EF4-FFF2-40B4-BE49-F238E27FC236}">
-                <a16:creationId xmlns:a16="http://schemas.microsoft.com/office/drawing/2014/main" id="{D7DF432E-9258-4C82-8E90-0334593DA74F}"/>
+                <a16:creationId xmlns:a16="http://schemas.microsoft.com/office/drawing/2014/main" id="{800F8BDC-A85C-42C6-A0AB-26AA3BA797AD}"/>
               </a:ext>
             </a:extLst>
           </p:cNvPr>
@@ -15265,7 +14993,7 @@
           <p:cNvPr id="4" name="text">
             <a:extLst xmlns:a="http://schemas.openxmlformats.org/drawingml/2006/main">
               <a:ext uri="{FF2B5EF4-FFF2-40B4-BE49-F238E27FC236}">
-                <a16:creationId xmlns:a16="http://schemas.microsoft.com/office/drawing/2014/main" id="{9EB40B11-FD5D-4CB0-83A8-F0D946256E5F}"/>
+                <a16:creationId xmlns:a16="http://schemas.microsoft.com/office/drawing/2014/main" id="{6B0C9704-CEEC-44AC-8E6F-F693070ED89C}"/>
               </a:ext>
             </a:extLst>
           </p:cNvPr>
@@ -15333,7 +15061,7 @@
           <p:cNvPr id="5" name="text">
             <a:extLst xmlns:a="http://schemas.openxmlformats.org/drawingml/2006/main">
               <a:ext uri="{FF2B5EF4-FFF2-40B4-BE49-F238E27FC236}">
-                <a16:creationId xmlns:a16="http://schemas.microsoft.com/office/drawing/2014/main" id="{4DDCC23B-DC35-43B6-817C-99A7F2D34E9B}"/>
+                <a16:creationId xmlns:a16="http://schemas.microsoft.com/office/drawing/2014/main" id="{8EFFCC4D-7D2D-4736-9723-56BF14CA3E8A}"/>
               </a:ext>
             </a:extLst>
           </p:cNvPr>
@@ -15401,7 +15129,7 @@
           <p:cNvPr id="6" name="text">
             <a:extLst xmlns:a="http://schemas.openxmlformats.org/drawingml/2006/main">
               <a:ext uri="{FF2B5EF4-FFF2-40B4-BE49-F238E27FC236}">
-                <a16:creationId xmlns:a16="http://schemas.microsoft.com/office/drawing/2014/main" id="{2FE5CA5F-C385-4D8F-8967-F8A9A4621852}"/>
+                <a16:creationId xmlns:a16="http://schemas.microsoft.com/office/drawing/2014/main" id="{BF7FCE62-0177-48B6-9243-E0F26AA7C7DB}"/>
               </a:ext>
             </a:extLst>
           </p:cNvPr>
@@ -15469,7 +15197,7 @@
           <p:cNvPr id="7" name="text">
             <a:extLst xmlns:a="http://schemas.openxmlformats.org/drawingml/2006/main">
               <a:ext uri="{FF2B5EF4-FFF2-40B4-BE49-F238E27FC236}">
-                <a16:creationId xmlns:a16="http://schemas.microsoft.com/office/drawing/2014/main" id="{EF2AA9D6-EABB-46DA-AD23-122B15827940}"/>
+                <a16:creationId xmlns:a16="http://schemas.microsoft.com/office/drawing/2014/main" id="{3DD73EA6-4B44-4FB2-B60A-E1EB46686C04}"/>
               </a:ext>
             </a:extLst>
           </p:cNvPr>
@@ -15560,7 +15288,7 @@
           <p:cNvPr id="8" name="">
             <a:extLst xmlns:a="http://schemas.openxmlformats.org/drawingml/2006/main">
               <a:ext uri="{FF2B5EF4-FFF2-40B4-BE49-F238E27FC236}">
-                <a16:creationId xmlns:a16="http://schemas.microsoft.com/office/drawing/2014/main" id="{90E3E35A-B258-41D9-B03F-21816C04EE96}"/>
+                <a16:creationId xmlns:a16="http://schemas.microsoft.com/office/drawing/2014/main" id="{523D1E69-C4C1-4066-84A7-6106B63C797F}"/>
               </a:ext>
             </a:extLst>
           </p:cNvPr>
@@ -15590,7 +15318,7 @@
           <p:cNvPr id="9" name="text">
             <a:extLst xmlns:a="http://schemas.openxmlformats.org/drawingml/2006/main">
               <a:ext uri="{FF2B5EF4-FFF2-40B4-BE49-F238E27FC236}">
-                <a16:creationId xmlns:a16="http://schemas.microsoft.com/office/drawing/2014/main" id="{12494740-0211-4B5A-936F-A9C50551FA81}"/>
+                <a16:creationId xmlns:a16="http://schemas.microsoft.com/office/drawing/2014/main" id="{218578E5-839E-4AD4-8123-C19FEBC6B65A}"/>
               </a:ext>
             </a:extLst>
           </p:cNvPr>
@@ -15658,7 +15386,7 @@
           <p:cNvPr id="10" name="text">
             <a:extLst xmlns:a="http://schemas.openxmlformats.org/drawingml/2006/main">
               <a:ext uri="{FF2B5EF4-FFF2-40B4-BE49-F238E27FC236}">
-                <a16:creationId xmlns:a16="http://schemas.microsoft.com/office/drawing/2014/main" id="{5BAFC932-0268-40BF-AA8C-7A0F7EDBEF2D}"/>
+                <a16:creationId xmlns:a16="http://schemas.microsoft.com/office/drawing/2014/main" id="{0F114C27-16F1-4916-B826-A836DF331FD7}"/>
               </a:ext>
             </a:extLst>
           </p:cNvPr>
@@ -15749,7 +15477,7 @@
           <p:cNvPr id="11" name="">
             <a:extLst xmlns:a="http://schemas.openxmlformats.org/drawingml/2006/main">
               <a:ext uri="{FF2B5EF4-FFF2-40B4-BE49-F238E27FC236}">
-                <a16:creationId xmlns:a16="http://schemas.microsoft.com/office/drawing/2014/main" id="{14BC658F-45D6-4E07-8995-6371FD7986B1}"/>
+                <a16:creationId xmlns:a16="http://schemas.microsoft.com/office/drawing/2014/main" id="{F9649BDC-8C07-4697-BD62-96A5F61B3144}"/>
               </a:ext>
             </a:extLst>
           </p:cNvPr>
@@ -15779,7 +15507,7 @@
           <p:cNvPr id="12" name="text">
             <a:extLst xmlns:a="http://schemas.openxmlformats.org/drawingml/2006/main">
               <a:ext uri="{FF2B5EF4-FFF2-40B4-BE49-F238E27FC236}">
-                <a16:creationId xmlns:a16="http://schemas.microsoft.com/office/drawing/2014/main" id="{3D5DE960-A535-4452-8712-A347B5F98212}"/>
+                <a16:creationId xmlns:a16="http://schemas.microsoft.com/office/drawing/2014/main" id="{162856D2-46FC-49F2-924D-1CFC25C39C05}"/>
               </a:ext>
             </a:extLst>
           </p:cNvPr>
@@ -15847,7 +15575,7 @@
           <p:cNvPr id="13" name="text">
             <a:extLst xmlns:a="http://schemas.openxmlformats.org/drawingml/2006/main">
               <a:ext uri="{FF2B5EF4-FFF2-40B4-BE49-F238E27FC236}">
-                <a16:creationId xmlns:a16="http://schemas.microsoft.com/office/drawing/2014/main" id="{0262DCC1-D798-42A9-B0E6-84BFB8D4B8E7}"/>
+                <a16:creationId xmlns:a16="http://schemas.microsoft.com/office/drawing/2014/main" id="{47A195FD-DDF2-4391-955A-E2973605DF97}"/>
               </a:ext>
             </a:extLst>
           </p:cNvPr>
@@ -15938,7 +15666,7 @@
           <p:cNvPr id="14" name="">
             <a:extLst xmlns:a="http://schemas.openxmlformats.org/drawingml/2006/main">
               <a:ext uri="{FF2B5EF4-FFF2-40B4-BE49-F238E27FC236}">
-                <a16:creationId xmlns:a16="http://schemas.microsoft.com/office/drawing/2014/main" id="{2D40A5E3-2ECD-4D66-B323-A4C3883E5173}"/>
+                <a16:creationId xmlns:a16="http://schemas.microsoft.com/office/drawing/2014/main" id="{5CA2F648-11B7-4AF7-AF79-FC74731A85F6}"/>
               </a:ext>
             </a:extLst>
           </p:cNvPr>
@@ -15968,7 +15696,7 @@
           <p:cNvPr id="15" name="text">
             <a:extLst xmlns:a="http://schemas.openxmlformats.org/drawingml/2006/main">
               <a:ext uri="{FF2B5EF4-FFF2-40B4-BE49-F238E27FC236}">
-                <a16:creationId xmlns:a16="http://schemas.microsoft.com/office/drawing/2014/main" id="{B2BF0745-9D7A-4EBB-9A00-95B57A288099}"/>
+                <a16:creationId xmlns:a16="http://schemas.microsoft.com/office/drawing/2014/main" id="{A398971F-E573-4C6C-9DF9-177A5B9FC968}"/>
               </a:ext>
             </a:extLst>
           </p:cNvPr>
@@ -16036,7 +15764,7 @@
           <p:cNvPr id="16" name="text">
             <a:extLst xmlns:a="http://schemas.openxmlformats.org/drawingml/2006/main">
               <a:ext uri="{FF2B5EF4-FFF2-40B4-BE49-F238E27FC236}">
-                <a16:creationId xmlns:a16="http://schemas.microsoft.com/office/drawing/2014/main" id="{1AAF1245-4631-4FAE-B3E5-03DC013C6E2D}"/>
+                <a16:creationId xmlns:a16="http://schemas.microsoft.com/office/drawing/2014/main" id="{482316AA-1C40-4A02-A9FB-D115F9F4CB4C}"/>
               </a:ext>
             </a:extLst>
           </p:cNvPr>
@@ -16127,7 +15855,7 @@
           <p:cNvPr id="17" name="">
             <a:extLst xmlns:a="http://schemas.openxmlformats.org/drawingml/2006/main">
               <a:ext uri="{FF2B5EF4-FFF2-40B4-BE49-F238E27FC236}">
-                <a16:creationId xmlns:a16="http://schemas.microsoft.com/office/drawing/2014/main" id="{31BBFB55-6D56-4184-9CC9-D819199E3FBD}"/>
+                <a16:creationId xmlns:a16="http://schemas.microsoft.com/office/drawing/2014/main" id="{01F165A8-2DC5-43FA-98D1-CA4232F7A88B}"/>
               </a:ext>
             </a:extLst>
           </p:cNvPr>
@@ -16157,7 +15885,7 @@
           <p:cNvPr id="18" name="text">
             <a:extLst xmlns:a="http://schemas.openxmlformats.org/drawingml/2006/main">
               <a:ext uri="{FF2B5EF4-FFF2-40B4-BE49-F238E27FC236}">
-                <a16:creationId xmlns:a16="http://schemas.microsoft.com/office/drawing/2014/main" id="{EAAD3B16-0C51-45EE-B7B0-DF9FD86474B5}"/>
+                <a16:creationId xmlns:a16="http://schemas.microsoft.com/office/drawing/2014/main" id="{A597FC9A-85A1-42F1-A94E-583EB8854203}"/>
               </a:ext>
             </a:extLst>
           </p:cNvPr>
@@ -16225,7 +15953,7 @@
           <p:cNvPr id="19" name="text">
             <a:extLst xmlns:a="http://schemas.openxmlformats.org/drawingml/2006/main">
               <a:ext uri="{FF2B5EF4-FFF2-40B4-BE49-F238E27FC236}">
-                <a16:creationId xmlns:a16="http://schemas.microsoft.com/office/drawing/2014/main" id="{17630E17-A546-4635-9DDB-23F374704828}"/>
+                <a16:creationId xmlns:a16="http://schemas.microsoft.com/office/drawing/2014/main" id="{40D2E75D-792E-4630-9C2E-2AEC0936E32F}"/>
               </a:ext>
             </a:extLst>
           </p:cNvPr>
@@ -16362,7 +16090,7 @@
           <p:cNvPr id="20" name="text">
             <a:extLst xmlns:a="http://schemas.openxmlformats.org/drawingml/2006/main">
               <a:ext uri="{FF2B5EF4-FFF2-40B4-BE49-F238E27FC236}">
-                <a16:creationId xmlns:a16="http://schemas.microsoft.com/office/drawing/2014/main" id="{60388A41-CC67-41E0-8575-F85780645148}"/>
+                <a16:creationId xmlns:a16="http://schemas.microsoft.com/office/drawing/2014/main" id="{72D42E79-1FCB-4D7E-B0E6-CC4A58934996}"/>
               </a:ext>
             </a:extLst>
           </p:cNvPr>
@@ -16430,7 +16158,7 @@
           <p:cNvPr id="21" name="text">
             <a:extLst xmlns:a="http://schemas.openxmlformats.org/drawingml/2006/main">
               <a:ext uri="{FF2B5EF4-FFF2-40B4-BE49-F238E27FC236}">
-                <a16:creationId xmlns:a16="http://schemas.microsoft.com/office/drawing/2014/main" id="{28E5D311-4C8A-4B6E-B55D-00AC35991F36}"/>
+                <a16:creationId xmlns:a16="http://schemas.microsoft.com/office/drawing/2014/main" id="{AF2B78C0-5475-4AE5-98E9-B1D054FD2043}"/>
               </a:ext>
             </a:extLst>
           </p:cNvPr>
@@ -16567,7 +16295,7 @@
           <p:cNvPr id="22" name="">
             <a:extLst xmlns:a="http://schemas.openxmlformats.org/drawingml/2006/main">
               <a:ext uri="{FF2B5EF4-FFF2-40B4-BE49-F238E27FC236}">
-                <a16:creationId xmlns:a16="http://schemas.microsoft.com/office/drawing/2014/main" id="{7CF622FD-464E-4014-9353-3644485338D2}"/>
+                <a16:creationId xmlns:a16="http://schemas.microsoft.com/office/drawing/2014/main" id="{E4AE20F5-B6E2-412E-A935-B448C1659DBA}"/>
               </a:ext>
             </a:extLst>
           </p:cNvPr>
@@ -16597,7 +16325,7 @@
           <p:cNvPr id="23" name="text">
             <a:extLst xmlns:a="http://schemas.openxmlformats.org/drawingml/2006/main">
               <a:ext uri="{FF2B5EF4-FFF2-40B4-BE49-F238E27FC236}">
-                <a16:creationId xmlns:a16="http://schemas.microsoft.com/office/drawing/2014/main" id="{A47476D2-3839-46B6-8100-027A8EEB828A}"/>
+                <a16:creationId xmlns:a16="http://schemas.microsoft.com/office/drawing/2014/main" id="{35A98771-A85B-4392-B796-B6B4B82A0CBB}"/>
               </a:ext>
             </a:extLst>
           </p:cNvPr>
@@ -16665,7 +16393,7 @@
           <p:cNvPr id="24" name="text">
             <a:extLst xmlns:a="http://schemas.openxmlformats.org/drawingml/2006/main">
               <a:ext uri="{FF2B5EF4-FFF2-40B4-BE49-F238E27FC236}">
-                <a16:creationId xmlns:a16="http://schemas.microsoft.com/office/drawing/2014/main" id="{9842461C-E635-4DA8-A8E1-B7CB490E4087}"/>
+                <a16:creationId xmlns:a16="http://schemas.microsoft.com/office/drawing/2014/main" id="{24B50CEE-6ED2-4481-95B2-CFC599D453B8}"/>
               </a:ext>
             </a:extLst>
           </p:cNvPr>
@@ -16731,7 +16459,7 @@
     </p:spTree>
     <p:extLst>
       <p:ext uri="{BB962C8B-B14F-4D97-AF65-F5344CB8AC3E}">
-        <p14:creationId xmlns:p14="http://schemas.microsoft.com/office/powerpoint/2010/main" val="1368352135"/>
+        <p14:creationId xmlns:p14="http://schemas.microsoft.com/office/powerpoint/2010/main" val="2111688149"/>
       </p:ext>
     </p:extLst>
   </p:cSld>
@@ -16762,7 +16490,7 @@
           <p:cNvPr id="20" name="text">
             <a:extLst xmlns:a="http://schemas.openxmlformats.org/drawingml/2006/main">
               <a:ext uri="{FF2B5EF4-FFF2-40B4-BE49-F238E27FC236}">
-                <a16:creationId xmlns:a16="http://schemas.microsoft.com/office/drawing/2014/main" id="{B88AA237-9300-413A-8410-473B3C7C184A}"/>
+                <a16:creationId xmlns:a16="http://schemas.microsoft.com/office/drawing/2014/main" id="{D6283837-F506-46CE-BDC0-4E98A3008CCE}"/>
               </a:ext>
             </a:extLst>
           </p:cNvPr>
@@ -16830,7 +16558,7 @@
           <p:cNvPr id="2" name="">
             <a:extLst xmlns:a="http://schemas.openxmlformats.org/drawingml/2006/main">
               <a:ext uri="{FF2B5EF4-FFF2-40B4-BE49-F238E27FC236}">
-                <a16:creationId xmlns:a16="http://schemas.microsoft.com/office/drawing/2014/main" id="{33A55331-A90B-498E-AF32-119C93AF68E4}"/>
+                <a16:creationId xmlns:a16="http://schemas.microsoft.com/office/drawing/2014/main" id="{5E1DD9B2-801E-479C-9984-73194C9462EE}"/>
               </a:ext>
             </a:extLst>
           </p:cNvPr>
@@ -16860,7 +16588,7 @@
           <p:cNvPr id="3" name="text">
             <a:extLst xmlns:a="http://schemas.openxmlformats.org/drawingml/2006/main">
               <a:ext uri="{FF2B5EF4-FFF2-40B4-BE49-F238E27FC236}">
-                <a16:creationId xmlns:a16="http://schemas.microsoft.com/office/drawing/2014/main" id="{F01A3CFA-BAFB-473C-BD13-7D24222056B8}"/>
+                <a16:creationId xmlns:a16="http://schemas.microsoft.com/office/drawing/2014/main" id="{EAC9FFC1-935A-4775-8364-E8C8D36DCF0C}"/>
               </a:ext>
             </a:extLst>
           </p:cNvPr>
@@ -16928,7 +16656,7 @@
           <p:cNvPr id="4" name="text">
             <a:extLst xmlns:a="http://schemas.openxmlformats.org/drawingml/2006/main">
               <a:ext uri="{FF2B5EF4-FFF2-40B4-BE49-F238E27FC236}">
-                <a16:creationId xmlns:a16="http://schemas.microsoft.com/office/drawing/2014/main" id="{5656E8A2-34FA-4416-BDBB-9C4D06757EAD}"/>
+                <a16:creationId xmlns:a16="http://schemas.microsoft.com/office/drawing/2014/main" id="{9E642226-4BCC-4E71-8F31-A887BC5F3E41}"/>
               </a:ext>
             </a:extLst>
           </p:cNvPr>
@@ -16996,7 +16724,7 @@
           <p:cNvPr id="5" name="text">
             <a:extLst xmlns:a="http://schemas.openxmlformats.org/drawingml/2006/main">
               <a:ext uri="{FF2B5EF4-FFF2-40B4-BE49-F238E27FC236}">
-                <a16:creationId xmlns:a16="http://schemas.microsoft.com/office/drawing/2014/main" id="{12D266DF-1141-4979-8417-A913EF5A4114}"/>
+                <a16:creationId xmlns:a16="http://schemas.microsoft.com/office/drawing/2014/main" id="{679E1AF5-3A95-4228-8226-C65C0278C9FF}"/>
               </a:ext>
             </a:extLst>
           </p:cNvPr>
@@ -17064,7 +16792,7 @@
           <p:cNvPr id="6" name="text">
             <a:extLst xmlns:a="http://schemas.openxmlformats.org/drawingml/2006/main">
               <a:ext uri="{FF2B5EF4-FFF2-40B4-BE49-F238E27FC236}">
-                <a16:creationId xmlns:a16="http://schemas.microsoft.com/office/drawing/2014/main" id="{3E5EFC91-A56A-4F8B-8579-96E7CCBC1BEC}"/>
+                <a16:creationId xmlns:a16="http://schemas.microsoft.com/office/drawing/2014/main" id="{0E16D926-E3D8-490F-858A-B2F1B277A320}"/>
               </a:ext>
             </a:extLst>
           </p:cNvPr>
@@ -17132,7 +16860,7 @@
           <p:cNvPr id="7" name="text">
             <a:extLst xmlns:a="http://schemas.openxmlformats.org/drawingml/2006/main">
               <a:ext uri="{FF2B5EF4-FFF2-40B4-BE49-F238E27FC236}">
-                <a16:creationId xmlns:a16="http://schemas.microsoft.com/office/drawing/2014/main" id="{1F9FC16C-9892-4A44-99B4-9C677A45887E}"/>
+                <a16:creationId xmlns:a16="http://schemas.microsoft.com/office/drawing/2014/main" id="{5AB97D57-AA1A-490F-97C8-A1CA879A4E32}"/>
               </a:ext>
             </a:extLst>
           </p:cNvPr>
@@ -17200,7 +16928,7 @@
           <p:cNvPr id="8" name="text">
             <a:extLst xmlns:a="http://schemas.openxmlformats.org/drawingml/2006/main">
               <a:ext uri="{FF2B5EF4-FFF2-40B4-BE49-F238E27FC236}">
-                <a16:creationId xmlns:a16="http://schemas.microsoft.com/office/drawing/2014/main" id="{ACAE7129-8961-4CB6-B4A6-7F3A0A1EA835}"/>
+                <a16:creationId xmlns:a16="http://schemas.microsoft.com/office/drawing/2014/main" id="{1AA4DB6D-79B6-411A-909F-E9767BF838AF}"/>
               </a:ext>
             </a:extLst>
           </p:cNvPr>
@@ -17268,7 +16996,7 @@
           <p:cNvPr id="9" name="text">
             <a:extLst xmlns:a="http://schemas.openxmlformats.org/drawingml/2006/main">
               <a:ext uri="{FF2B5EF4-FFF2-40B4-BE49-F238E27FC236}">
-                <a16:creationId xmlns:a16="http://schemas.microsoft.com/office/drawing/2014/main" id="{801BB551-F5A7-4BDE-9D16-12112E6461B1}"/>
+                <a16:creationId xmlns:a16="http://schemas.microsoft.com/office/drawing/2014/main" id="{D6CBE087-1B46-475D-8355-4BC4CBC208C7}"/>
               </a:ext>
             </a:extLst>
           </p:cNvPr>
@@ -17336,7 +17064,7 @@
           <p:cNvPr id="10" name="text">
             <a:extLst xmlns:a="http://schemas.openxmlformats.org/drawingml/2006/main">
               <a:ext uri="{FF2B5EF4-FFF2-40B4-BE49-F238E27FC236}">
-                <a16:creationId xmlns:a16="http://schemas.microsoft.com/office/drawing/2014/main" id="{CB56F897-B6B0-476C-A83C-1E0B7E550569}"/>
+                <a16:creationId xmlns:a16="http://schemas.microsoft.com/office/drawing/2014/main" id="{44EB03C3-6C17-436A-90C1-8879F6DCD31A}"/>
               </a:ext>
             </a:extLst>
           </p:cNvPr>
@@ -17404,7 +17132,7 @@
           <p:cNvPr id="11" name="">
             <a:extLst xmlns:a="http://schemas.openxmlformats.org/drawingml/2006/main">
               <a:ext uri="{FF2B5EF4-FFF2-40B4-BE49-F238E27FC236}">
-                <a16:creationId xmlns:a16="http://schemas.microsoft.com/office/drawing/2014/main" id="{E1970EB0-1E52-4EF0-8821-1772F8D91160}"/>
+                <a16:creationId xmlns:a16="http://schemas.microsoft.com/office/drawing/2014/main" id="{68536196-7DD9-4CF2-BACE-94D4141B7F27}"/>
               </a:ext>
             </a:extLst>
           </p:cNvPr>
@@ -17434,7 +17162,7 @@
           <p:cNvPr id="12" name="text">
             <a:extLst xmlns:a="http://schemas.openxmlformats.org/drawingml/2006/main">
               <a:ext uri="{FF2B5EF4-FFF2-40B4-BE49-F238E27FC236}">
-                <a16:creationId xmlns:a16="http://schemas.microsoft.com/office/drawing/2014/main" id="{83F93A84-0928-4977-BD82-82BD5DD11238}"/>
+                <a16:creationId xmlns:a16="http://schemas.microsoft.com/office/drawing/2014/main" id="{BA3B2712-1321-4F0B-BF02-68CCB36EA084}"/>
               </a:ext>
             </a:extLst>
           </p:cNvPr>
@@ -17502,7 +17230,7 @@
           <p:cNvPr id="13" name="Chart">
             <a:extLst xmlns:a="http://schemas.openxmlformats.org/drawingml/2006/main">
               <a:ext uri="{FF2B5EF4-FFF2-40B4-BE49-F238E27FC236}">
-                <a16:creationId xmlns:a16="http://schemas.microsoft.com/office/drawing/2014/main" id="{FBE2E38D-6FDB-4EA1-B5E3-6BB30A0568B6}"/>
+                <a16:creationId xmlns:a16="http://schemas.microsoft.com/office/drawing/2014/main" id="{1978AC0F-835E-4012-BA35-5012490F656A}"/>
               </a:ext>
             </a:extLst>
           </p:cNvPr>
@@ -17515,7 +17243,7 @@
         </p:xfrm>
         <a:graphic xmlns:a="http://schemas.openxmlformats.org/drawingml/2006/main">
           <a:graphicData uri="http://schemas.openxmlformats.org/drawingml/2006/chart">
-            <c:chart xmlns:r="http://schemas.openxmlformats.org/officeDocument/2006/relationships" xmlns:c="http://schemas.openxmlformats.org/drawingml/2006/chart" r:id="Rc282e3fab9db43d1"/>
+            <c:chart xmlns:r="http://schemas.openxmlformats.org/officeDocument/2006/relationships" xmlns:c="http://schemas.openxmlformats.org/drawingml/2006/chart" r:id="Rddb8523eb6434e22"/>
           </a:graphicData>
         </a:graphic>
       </p:graphicFrame>
@@ -17524,7 +17252,7 @@
           <p:cNvPr id="14" name="text">
             <a:extLst xmlns:a="http://schemas.openxmlformats.org/drawingml/2006/main">
               <a:ext uri="{FF2B5EF4-FFF2-40B4-BE49-F238E27FC236}">
-                <a16:creationId xmlns:a16="http://schemas.microsoft.com/office/drawing/2014/main" id="{F0FA5E43-857E-477A-92F7-A11C31112330}"/>
+                <a16:creationId xmlns:a16="http://schemas.microsoft.com/office/drawing/2014/main" id="{176C3B45-D8D0-44F9-984B-8542F23B6013}"/>
               </a:ext>
             </a:extLst>
           </p:cNvPr>
@@ -17592,7 +17320,7 @@
           <p:cNvPr id="15" name="">
             <a:extLst xmlns:a="http://schemas.openxmlformats.org/drawingml/2006/main">
               <a:ext uri="{FF2B5EF4-FFF2-40B4-BE49-F238E27FC236}">
-                <a16:creationId xmlns:a16="http://schemas.microsoft.com/office/drawing/2014/main" id="{6C9390DC-901C-4CFD-A33A-58A8377E1818}"/>
+                <a16:creationId xmlns:a16="http://schemas.microsoft.com/office/drawing/2014/main" id="{CA943FAF-BAA6-4E0A-9386-4E1455DB538F}"/>
               </a:ext>
             </a:extLst>
           </p:cNvPr>
@@ -18062,7 +17790,7 @@
           <p:cNvPr id="16" name="text">
             <a:extLst xmlns:a="http://schemas.openxmlformats.org/drawingml/2006/main">
               <a:ext uri="{FF2B5EF4-FFF2-40B4-BE49-F238E27FC236}">
-                <a16:creationId xmlns:a16="http://schemas.microsoft.com/office/drawing/2014/main" id="{F0F98DDB-289B-4E9A-9230-A318B9670054}"/>
+                <a16:creationId xmlns:a16="http://schemas.microsoft.com/office/drawing/2014/main" id="{EDD43907-4FC0-4178-8D2A-870DD5118389}"/>
               </a:ext>
             </a:extLst>
           </p:cNvPr>
@@ -18130,7 +17858,7 @@
           <p:cNvPr id="17" name="">
             <a:extLst xmlns:a="http://schemas.openxmlformats.org/drawingml/2006/main">
               <a:ext uri="{FF2B5EF4-FFF2-40B4-BE49-F238E27FC236}">
-                <a16:creationId xmlns:a16="http://schemas.microsoft.com/office/drawing/2014/main" id="{36EB406E-0AFA-4AB2-83D2-9A71001599EA}"/>
+                <a16:creationId xmlns:a16="http://schemas.microsoft.com/office/drawing/2014/main" id="{6D9C5C27-DD84-40F8-82D0-4DF310CE1A2A}"/>
               </a:ext>
             </a:extLst>
           </p:cNvPr>
@@ -18160,7 +17888,7 @@
           <p:cNvPr id="18" name="text">
             <a:extLst xmlns:a="http://schemas.openxmlformats.org/drawingml/2006/main">
               <a:ext uri="{FF2B5EF4-FFF2-40B4-BE49-F238E27FC236}">
-                <a16:creationId xmlns:a16="http://schemas.microsoft.com/office/drawing/2014/main" id="{BA732739-5099-45FB-8D91-56DC5D8EF5E7}"/>
+                <a16:creationId xmlns:a16="http://schemas.microsoft.com/office/drawing/2014/main" id="{FBBB9080-E9D5-4471-956F-D51B2CCCB9B2}"/>
               </a:ext>
             </a:extLst>
           </p:cNvPr>
@@ -18228,7 +17956,7 @@
           <p:cNvPr id="19" name="text">
             <a:extLst xmlns:a="http://schemas.openxmlformats.org/drawingml/2006/main">
               <a:ext uri="{FF2B5EF4-FFF2-40B4-BE49-F238E27FC236}">
-                <a16:creationId xmlns:a16="http://schemas.microsoft.com/office/drawing/2014/main" id="{DE51494A-3055-4356-97B9-47B2756B87E2}"/>
+                <a16:creationId xmlns:a16="http://schemas.microsoft.com/office/drawing/2014/main" id="{B9CC7759-B79B-4858-B24A-B3517271410C}"/>
               </a:ext>
             </a:extLst>
           </p:cNvPr>
@@ -18294,7 +18022,7 @@
     </p:spTree>
     <p:extLst>
       <p:ext uri="{BB962C8B-B14F-4D97-AF65-F5344CB8AC3E}">
-        <p14:creationId xmlns:p14="http://schemas.microsoft.com/office/powerpoint/2010/main" val="1870032062"/>
+        <p14:creationId xmlns:p14="http://schemas.microsoft.com/office/powerpoint/2010/main" val="1206976812"/>
       </p:ext>
     </p:extLst>
   </p:cSld>
@@ -18325,7 +18053,7 @@
           <p:cNvPr id="29" name="text">
             <a:extLst xmlns:a="http://schemas.openxmlformats.org/drawingml/2006/main">
               <a:ext uri="{FF2B5EF4-FFF2-40B4-BE49-F238E27FC236}">
-                <a16:creationId xmlns:a16="http://schemas.microsoft.com/office/drawing/2014/main" id="{69D93CC7-E457-4A1D-9BA4-79811710D80E}"/>
+                <a16:creationId xmlns:a16="http://schemas.microsoft.com/office/drawing/2014/main" id="{5AF5B9B9-C26E-45AE-8355-39A8F6698873}"/>
               </a:ext>
             </a:extLst>
           </p:cNvPr>
@@ -18393,7 +18121,7 @@
           <p:cNvPr id="2" name="">
             <a:extLst xmlns:a="http://schemas.openxmlformats.org/drawingml/2006/main">
               <a:ext uri="{FF2B5EF4-FFF2-40B4-BE49-F238E27FC236}">
-                <a16:creationId xmlns:a16="http://schemas.microsoft.com/office/drawing/2014/main" id="{3E27F08C-E1DC-411C-B7B5-EF15DCA35A03}"/>
+                <a16:creationId xmlns:a16="http://schemas.microsoft.com/office/drawing/2014/main" id="{376B1FA1-FC65-4AED-AA7D-74093CFBA0C9}"/>
               </a:ext>
             </a:extLst>
           </p:cNvPr>
@@ -18423,7 +18151,7 @@
           <p:cNvPr id="3" name="text">
             <a:extLst xmlns:a="http://schemas.openxmlformats.org/drawingml/2006/main">
               <a:ext uri="{FF2B5EF4-FFF2-40B4-BE49-F238E27FC236}">
-                <a16:creationId xmlns:a16="http://schemas.microsoft.com/office/drawing/2014/main" id="{B91F5532-76F6-40C3-AAAE-08172716A529}"/>
+                <a16:creationId xmlns:a16="http://schemas.microsoft.com/office/drawing/2014/main" id="{CF2094BD-C79F-4330-BCE7-8DEDFA87489E}"/>
               </a:ext>
             </a:extLst>
           </p:cNvPr>
@@ -18491,7 +18219,7 @@
           <p:cNvPr id="4" name="text">
             <a:extLst xmlns:a="http://schemas.openxmlformats.org/drawingml/2006/main">
               <a:ext uri="{FF2B5EF4-FFF2-40B4-BE49-F238E27FC236}">
-                <a16:creationId xmlns:a16="http://schemas.microsoft.com/office/drawing/2014/main" id="{FD69EAD5-5F0A-431E-8034-A810C5232063}"/>
+                <a16:creationId xmlns:a16="http://schemas.microsoft.com/office/drawing/2014/main" id="{EDD1AD39-C5E3-4B21-8E95-B6677BAB4BDC}"/>
               </a:ext>
             </a:extLst>
           </p:cNvPr>
@@ -18559,7 +18287,7 @@
           <p:cNvPr id="5" name="">
             <a:extLst xmlns:a="http://schemas.openxmlformats.org/drawingml/2006/main">
               <a:ext uri="{FF2B5EF4-FFF2-40B4-BE49-F238E27FC236}">
-                <a16:creationId xmlns:a16="http://schemas.microsoft.com/office/drawing/2014/main" id="{CAFF7992-ABC5-4F45-AE75-4BCE8075D5C6}"/>
+                <a16:creationId xmlns:a16="http://schemas.microsoft.com/office/drawing/2014/main" id="{BD891AD6-0353-46A7-9D0B-E3689796D4ED}"/>
               </a:ext>
             </a:extLst>
           </p:cNvPr>
@@ -18591,7 +18319,7 @@
           <p:cNvPr id="6" name="text">
             <a:extLst xmlns:a="http://schemas.openxmlformats.org/drawingml/2006/main">
               <a:ext uri="{FF2B5EF4-FFF2-40B4-BE49-F238E27FC236}">
-                <a16:creationId xmlns:a16="http://schemas.microsoft.com/office/drawing/2014/main" id="{C2CDD8CB-5D73-4D65-8C5E-081F8073540E}"/>
+                <a16:creationId xmlns:a16="http://schemas.microsoft.com/office/drawing/2014/main" id="{0E0AAF17-B550-4409-99E6-69344046A361}"/>
               </a:ext>
             </a:extLst>
           </p:cNvPr>
@@ -18659,7 +18387,7 @@
           <p:cNvPr id="7" name="text">
             <a:extLst xmlns:a="http://schemas.openxmlformats.org/drawingml/2006/main">
               <a:ext uri="{FF2B5EF4-FFF2-40B4-BE49-F238E27FC236}">
-                <a16:creationId xmlns:a16="http://schemas.microsoft.com/office/drawing/2014/main" id="{06B265FD-AE74-4A96-9B53-5994CAC602EA}"/>
+                <a16:creationId xmlns:a16="http://schemas.microsoft.com/office/drawing/2014/main" id="{407B58C1-DE0C-4F0A-AC05-76DC13E126EA}"/>
               </a:ext>
             </a:extLst>
           </p:cNvPr>
@@ -18727,7 +18455,7 @@
           <p:cNvPr id="8" name="">
             <a:extLst xmlns:a="http://schemas.openxmlformats.org/drawingml/2006/main">
               <a:ext uri="{FF2B5EF4-FFF2-40B4-BE49-F238E27FC236}">
-                <a16:creationId xmlns:a16="http://schemas.microsoft.com/office/drawing/2014/main" id="{11B8D6C3-3E70-4E99-A6A8-52D4784D565F}"/>
+                <a16:creationId xmlns:a16="http://schemas.microsoft.com/office/drawing/2014/main" id="{C77704E1-7D5B-4F3E-8F08-F9D1BFAA9950}"/>
               </a:ext>
             </a:extLst>
           </p:cNvPr>
@@ -18757,7 +18485,7 @@
           <p:cNvPr id="9" name="">
             <a:extLst xmlns:a="http://schemas.openxmlformats.org/drawingml/2006/main">
               <a:ext uri="{FF2B5EF4-FFF2-40B4-BE49-F238E27FC236}">
-                <a16:creationId xmlns:a16="http://schemas.microsoft.com/office/drawing/2014/main" id="{1A036549-EDEC-4EB6-A0D4-80058A5FAFB1}"/>
+                <a16:creationId xmlns:a16="http://schemas.microsoft.com/office/drawing/2014/main" id="{EF84B3F4-5FF2-4862-8F72-88295EA79BF7}"/>
               </a:ext>
             </a:extLst>
           </p:cNvPr>
@@ -18789,7 +18517,7 @@
           <p:cNvPr id="10" name="text">
             <a:extLst xmlns:a="http://schemas.openxmlformats.org/drawingml/2006/main">
               <a:ext uri="{FF2B5EF4-FFF2-40B4-BE49-F238E27FC236}">
-                <a16:creationId xmlns:a16="http://schemas.microsoft.com/office/drawing/2014/main" id="{F32A4E98-D0E3-4747-A856-6F20B9D9D0B8}"/>
+                <a16:creationId xmlns:a16="http://schemas.microsoft.com/office/drawing/2014/main" id="{9119FAA4-71B3-4CCB-9D42-8909232EFD4B}"/>
               </a:ext>
             </a:extLst>
           </p:cNvPr>
@@ -18857,7 +18585,7 @@
           <p:cNvPr id="11" name="text">
             <a:extLst xmlns:a="http://schemas.openxmlformats.org/drawingml/2006/main">
               <a:ext uri="{FF2B5EF4-FFF2-40B4-BE49-F238E27FC236}">
-                <a16:creationId xmlns:a16="http://schemas.microsoft.com/office/drawing/2014/main" id="{FF93EF6F-F8A9-4330-89C4-77C1298A739E}"/>
+                <a16:creationId xmlns:a16="http://schemas.microsoft.com/office/drawing/2014/main" id="{0D49E024-5510-4D8C-8D25-06EF1DF3ECF9}"/>
               </a:ext>
             </a:extLst>
           </p:cNvPr>
@@ -18925,7 +18653,7 @@
           <p:cNvPr id="12" name="">
             <a:extLst xmlns:a="http://schemas.openxmlformats.org/drawingml/2006/main">
               <a:ext uri="{FF2B5EF4-FFF2-40B4-BE49-F238E27FC236}">
-                <a16:creationId xmlns:a16="http://schemas.microsoft.com/office/drawing/2014/main" id="{072CE9D1-027F-443F-B5F4-E42FC757CAEE}"/>
+                <a16:creationId xmlns:a16="http://schemas.microsoft.com/office/drawing/2014/main" id="{5892E0DB-B426-41D2-902D-4DE335165B86}"/>
               </a:ext>
             </a:extLst>
           </p:cNvPr>
@@ -18955,7 +18683,7 @@
           <p:cNvPr id="13" name="">
             <a:extLst xmlns:a="http://schemas.openxmlformats.org/drawingml/2006/main">
               <a:ext uri="{FF2B5EF4-FFF2-40B4-BE49-F238E27FC236}">
-                <a16:creationId xmlns:a16="http://schemas.microsoft.com/office/drawing/2014/main" id="{A037429B-5672-417D-96B6-B8223C78F769}"/>
+                <a16:creationId xmlns:a16="http://schemas.microsoft.com/office/drawing/2014/main" id="{A3FAD753-B918-40E4-B5C1-BC7935CE63A8}"/>
               </a:ext>
             </a:extLst>
           </p:cNvPr>
@@ -18987,7 +18715,7 @@
           <p:cNvPr id="14" name="text">
             <a:extLst xmlns:a="http://schemas.openxmlformats.org/drawingml/2006/main">
               <a:ext uri="{FF2B5EF4-FFF2-40B4-BE49-F238E27FC236}">
-                <a16:creationId xmlns:a16="http://schemas.microsoft.com/office/drawing/2014/main" id="{B099407E-6FAA-4B9C-9164-7C911D31A2D4}"/>
+                <a16:creationId xmlns:a16="http://schemas.microsoft.com/office/drawing/2014/main" id="{E2B585FE-D13C-4B14-A4EA-6AB56D94E824}"/>
               </a:ext>
             </a:extLst>
           </p:cNvPr>
@@ -19055,7 +18783,7 @@
           <p:cNvPr id="15" name="text">
             <a:extLst xmlns:a="http://schemas.openxmlformats.org/drawingml/2006/main">
               <a:ext uri="{FF2B5EF4-FFF2-40B4-BE49-F238E27FC236}">
-                <a16:creationId xmlns:a16="http://schemas.microsoft.com/office/drawing/2014/main" id="{C4173FA1-40FC-4DD2-A139-7693DD31C5E9}"/>
+                <a16:creationId xmlns:a16="http://schemas.microsoft.com/office/drawing/2014/main" id="{41E95651-B9E4-4C86-B0D6-C33927238E6D}"/>
               </a:ext>
             </a:extLst>
           </p:cNvPr>
@@ -19123,7 +18851,7 @@
           <p:cNvPr id="16" name="">
             <a:extLst xmlns:a="http://schemas.openxmlformats.org/drawingml/2006/main">
               <a:ext uri="{FF2B5EF4-FFF2-40B4-BE49-F238E27FC236}">
-                <a16:creationId xmlns:a16="http://schemas.microsoft.com/office/drawing/2014/main" id="{5874DA55-318A-41DE-8036-51B77256AD55}"/>
+                <a16:creationId xmlns:a16="http://schemas.microsoft.com/office/drawing/2014/main" id="{008F5346-EF03-472F-97BD-7E2020CE4715}"/>
               </a:ext>
             </a:extLst>
           </p:cNvPr>
@@ -19153,7 +18881,7 @@
           <p:cNvPr id="17" name="">
             <a:extLst xmlns:a="http://schemas.openxmlformats.org/drawingml/2006/main">
               <a:ext uri="{FF2B5EF4-FFF2-40B4-BE49-F238E27FC236}">
-                <a16:creationId xmlns:a16="http://schemas.microsoft.com/office/drawing/2014/main" id="{2AE0BAA7-6E2D-4D29-92C8-ACF6FCACDE42}"/>
+                <a16:creationId xmlns:a16="http://schemas.microsoft.com/office/drawing/2014/main" id="{158E77A8-AE22-4F8B-8BDB-8DBD1F564E6D}"/>
               </a:ext>
             </a:extLst>
           </p:cNvPr>
@@ -19185,7 +18913,7 @@
           <p:cNvPr id="18" name="text">
             <a:extLst xmlns:a="http://schemas.openxmlformats.org/drawingml/2006/main">
               <a:ext uri="{FF2B5EF4-FFF2-40B4-BE49-F238E27FC236}">
-                <a16:creationId xmlns:a16="http://schemas.microsoft.com/office/drawing/2014/main" id="{70D3E509-77D2-478E-A839-A7EEB2F073B7}"/>
+                <a16:creationId xmlns:a16="http://schemas.microsoft.com/office/drawing/2014/main" id="{04C05437-CA5E-4933-98C2-596749F2BEB0}"/>
               </a:ext>
             </a:extLst>
           </p:cNvPr>
@@ -19253,7 +18981,7 @@
           <p:cNvPr id="19" name="text">
             <a:extLst xmlns:a="http://schemas.openxmlformats.org/drawingml/2006/main">
               <a:ext uri="{FF2B5EF4-FFF2-40B4-BE49-F238E27FC236}">
-                <a16:creationId xmlns:a16="http://schemas.microsoft.com/office/drawing/2014/main" id="{7B47B917-6D82-4525-AFCE-E4F4208570E6}"/>
+                <a16:creationId xmlns:a16="http://schemas.microsoft.com/office/drawing/2014/main" id="{B3D9EC42-014C-47EA-82DE-CCD68B45FF95}"/>
               </a:ext>
             </a:extLst>
           </p:cNvPr>
@@ -19321,7 +19049,7 @@
           <p:cNvPr id="20" name="text">
             <a:extLst xmlns:a="http://schemas.openxmlformats.org/drawingml/2006/main">
               <a:ext uri="{FF2B5EF4-FFF2-40B4-BE49-F238E27FC236}">
-                <a16:creationId xmlns:a16="http://schemas.microsoft.com/office/drawing/2014/main" id="{D1E0C7D4-0E86-431F-8120-D1F517FA3283}"/>
+                <a16:creationId xmlns:a16="http://schemas.microsoft.com/office/drawing/2014/main" id="{62497EA2-859E-48A3-9F90-48A771D4F1E3}"/>
               </a:ext>
             </a:extLst>
           </p:cNvPr>
@@ -19389,7 +19117,7 @@
           <p:cNvPr id="21" name="text">
             <a:extLst xmlns:a="http://schemas.openxmlformats.org/drawingml/2006/main">
               <a:ext uri="{FF2B5EF4-FFF2-40B4-BE49-F238E27FC236}">
-                <a16:creationId xmlns:a16="http://schemas.microsoft.com/office/drawing/2014/main" id="{82BB44CB-DA5F-4B61-80B6-604CDBB76EE5}"/>
+                <a16:creationId xmlns:a16="http://schemas.microsoft.com/office/drawing/2014/main" id="{FA199593-E0DA-43DB-B405-DC0DFB2D897F}"/>
               </a:ext>
             </a:extLst>
           </p:cNvPr>
@@ -19457,7 +19185,7 @@
           <p:cNvPr id="22" name="">
             <a:extLst xmlns:a="http://schemas.openxmlformats.org/drawingml/2006/main">
               <a:ext uri="{FF2B5EF4-FFF2-40B4-BE49-F238E27FC236}">
-                <a16:creationId xmlns:a16="http://schemas.microsoft.com/office/drawing/2014/main" id="{F5DC3C15-44E4-478C-9B2E-54890BBE5799}"/>
+                <a16:creationId xmlns:a16="http://schemas.microsoft.com/office/drawing/2014/main" id="{6B3566E4-DC1C-4310-87FA-3588639470B0}"/>
               </a:ext>
             </a:extLst>
           </p:cNvPr>
@@ -19841,7 +19569,7 @@
           <p:cNvPr id="23" name="">
             <a:extLst xmlns:a="http://schemas.openxmlformats.org/drawingml/2006/main">
               <a:ext uri="{FF2B5EF4-FFF2-40B4-BE49-F238E27FC236}">
-                <a16:creationId xmlns:a16="http://schemas.microsoft.com/office/drawing/2014/main" id="{4368C5CC-8B3E-48DD-8E1B-6827EEF10442}"/>
+                <a16:creationId xmlns:a16="http://schemas.microsoft.com/office/drawing/2014/main" id="{E0821D3D-BB92-4397-BE57-414EF033187F}"/>
               </a:ext>
             </a:extLst>
           </p:cNvPr>
@@ -20311,7 +20039,7 @@
           <p:cNvPr id="24" name="">
             <a:extLst xmlns:a="http://schemas.openxmlformats.org/drawingml/2006/main">
               <a:ext uri="{FF2B5EF4-FFF2-40B4-BE49-F238E27FC236}">
-                <a16:creationId xmlns:a16="http://schemas.microsoft.com/office/drawing/2014/main" id="{288C675D-5A41-4EF5-80EA-827C99A10201}"/>
+                <a16:creationId xmlns:a16="http://schemas.microsoft.com/office/drawing/2014/main" id="{34BE28B7-F731-4C02-A086-20DA9A3154C5}"/>
               </a:ext>
             </a:extLst>
           </p:cNvPr>
@@ -20341,7 +20069,7 @@
           <p:cNvPr id="25" name="text">
             <a:extLst xmlns:a="http://schemas.openxmlformats.org/drawingml/2006/main">
               <a:ext uri="{FF2B5EF4-FFF2-40B4-BE49-F238E27FC236}">
-                <a16:creationId xmlns:a16="http://schemas.microsoft.com/office/drawing/2014/main" id="{91E3D806-1562-4B0D-B596-BE639B78DF69}"/>
+                <a16:creationId xmlns:a16="http://schemas.microsoft.com/office/drawing/2014/main" id="{7B7775B6-2088-4384-8696-4A56AE7C068F}"/>
               </a:ext>
             </a:extLst>
           </p:cNvPr>
@@ -20409,7 +20137,7 @@
           <p:cNvPr id="26" name="">
             <a:extLst xmlns:a="http://schemas.openxmlformats.org/drawingml/2006/main">
               <a:ext uri="{FF2B5EF4-FFF2-40B4-BE49-F238E27FC236}">
-                <a16:creationId xmlns:a16="http://schemas.microsoft.com/office/drawing/2014/main" id="{731F2CCD-AADE-4069-BB56-D23006D419D4}"/>
+                <a16:creationId xmlns:a16="http://schemas.microsoft.com/office/drawing/2014/main" id="{6E869A28-6F49-44EA-902B-360D4CD179BF}"/>
               </a:ext>
             </a:extLst>
           </p:cNvPr>
@@ -20439,7 +20167,7 @@
           <p:cNvPr id="27" name="text">
             <a:extLst xmlns:a="http://schemas.openxmlformats.org/drawingml/2006/main">
               <a:ext uri="{FF2B5EF4-FFF2-40B4-BE49-F238E27FC236}">
-                <a16:creationId xmlns:a16="http://schemas.microsoft.com/office/drawing/2014/main" id="{D177E518-C4F8-4F4E-9814-E066A1D2A726}"/>
+                <a16:creationId xmlns:a16="http://schemas.microsoft.com/office/drawing/2014/main" id="{F46E855A-1064-4616-B658-DF3F8AF89668}"/>
               </a:ext>
             </a:extLst>
           </p:cNvPr>
@@ -20507,7 +20235,7 @@
           <p:cNvPr id="28" name="text">
             <a:extLst xmlns:a="http://schemas.openxmlformats.org/drawingml/2006/main">
               <a:ext uri="{FF2B5EF4-FFF2-40B4-BE49-F238E27FC236}">
-                <a16:creationId xmlns:a16="http://schemas.microsoft.com/office/drawing/2014/main" id="{74440455-E825-448D-98A6-292914489C22}"/>
+                <a16:creationId xmlns:a16="http://schemas.microsoft.com/office/drawing/2014/main" id="{1855A92B-9B7C-4EB8-A946-204ABCC30DF1}"/>
               </a:ext>
             </a:extLst>
           </p:cNvPr>
@@ -20573,7 +20301,7 @@
     </p:spTree>
     <p:extLst>
       <p:ext uri="{BB962C8B-B14F-4D97-AF65-F5344CB8AC3E}">
-        <p14:creationId xmlns:p14="http://schemas.microsoft.com/office/powerpoint/2010/main" val="1343544049"/>
+        <p14:creationId xmlns:p14="http://schemas.microsoft.com/office/powerpoint/2010/main" val="1918436776"/>
       </p:ext>
     </p:extLst>
   </p:cSld>
@@ -20604,7 +20332,7 @@
           <p:cNvPr id="13" name="text">
             <a:extLst xmlns:a="http://schemas.openxmlformats.org/drawingml/2006/main">
               <a:ext uri="{FF2B5EF4-FFF2-40B4-BE49-F238E27FC236}">
-                <a16:creationId xmlns:a16="http://schemas.microsoft.com/office/drawing/2014/main" id="{FA7235B8-9CD9-46E1-B0D6-71CFF0476044}"/>
+                <a16:creationId xmlns:a16="http://schemas.microsoft.com/office/drawing/2014/main" id="{1AC58C73-1221-42E3-BECF-BB60BD02DD16}"/>
               </a:ext>
             </a:extLst>
           </p:cNvPr>
@@ -20672,7 +20400,7 @@
           <p:cNvPr id="2" name="">
             <a:extLst xmlns:a="http://schemas.openxmlformats.org/drawingml/2006/main">
               <a:ext uri="{FF2B5EF4-FFF2-40B4-BE49-F238E27FC236}">
-                <a16:creationId xmlns:a16="http://schemas.microsoft.com/office/drawing/2014/main" id="{1FD95958-0F28-42B1-B164-888F03348314}"/>
+                <a16:creationId xmlns:a16="http://schemas.microsoft.com/office/drawing/2014/main" id="{E164F81F-4557-4F1A-95B9-DD9993FCB0EA}"/>
               </a:ext>
             </a:extLst>
           </p:cNvPr>
@@ -20702,7 +20430,7 @@
           <p:cNvPr id="3" name="text">
             <a:extLst xmlns:a="http://schemas.openxmlformats.org/drawingml/2006/main">
               <a:ext uri="{FF2B5EF4-FFF2-40B4-BE49-F238E27FC236}">
-                <a16:creationId xmlns:a16="http://schemas.microsoft.com/office/drawing/2014/main" id="{2DAE9344-ED8B-49CB-B1D6-BFCB1D609D5A}"/>
+                <a16:creationId xmlns:a16="http://schemas.microsoft.com/office/drawing/2014/main" id="{282218FF-A7D2-4908-BC1F-BCB2A8E37A5D}"/>
               </a:ext>
             </a:extLst>
           </p:cNvPr>
@@ -20770,7 +20498,7 @@
           <p:cNvPr id="4" name="text">
             <a:extLst xmlns:a="http://schemas.openxmlformats.org/drawingml/2006/main">
               <a:ext uri="{FF2B5EF4-FFF2-40B4-BE49-F238E27FC236}">
-                <a16:creationId xmlns:a16="http://schemas.microsoft.com/office/drawing/2014/main" id="{BAF99A6F-8CD8-4A3F-B724-C763CD1A1114}"/>
+                <a16:creationId xmlns:a16="http://schemas.microsoft.com/office/drawing/2014/main" id="{70B28B42-6C55-4203-A515-F68B947F8A53}"/>
               </a:ext>
             </a:extLst>
           </p:cNvPr>
@@ -20838,7 +20566,7 @@
           <p:cNvPr id="5" name="text">
             <a:extLst xmlns:a="http://schemas.openxmlformats.org/drawingml/2006/main">
               <a:ext uri="{FF2B5EF4-FFF2-40B4-BE49-F238E27FC236}">
-                <a16:creationId xmlns:a16="http://schemas.microsoft.com/office/drawing/2014/main" id="{9DAE8CAB-4B84-4B23-9C31-AC7FCE9558A3}"/>
+                <a16:creationId xmlns:a16="http://schemas.microsoft.com/office/drawing/2014/main" id="{856126A2-7F11-452F-82E0-31B4B49F3109}"/>
               </a:ext>
             </a:extLst>
           </p:cNvPr>
@@ -20906,7 +20634,7 @@
           <p:cNvPr id="6" name="text">
             <a:extLst xmlns:a="http://schemas.openxmlformats.org/drawingml/2006/main">
               <a:ext uri="{FF2B5EF4-FFF2-40B4-BE49-F238E27FC236}">
-                <a16:creationId xmlns:a16="http://schemas.microsoft.com/office/drawing/2014/main" id="{F78E1E99-4635-4497-87F5-DD1FE9990362}"/>
+                <a16:creationId xmlns:a16="http://schemas.microsoft.com/office/drawing/2014/main" id="{95CBE9C2-6B38-449E-AA2D-D1F93C2FD456}"/>
               </a:ext>
             </a:extLst>
           </p:cNvPr>
@@ -20974,7 +20702,7 @@
           <p:cNvPr id="7" name="">
             <a:extLst xmlns:a="http://schemas.openxmlformats.org/drawingml/2006/main">
               <a:ext uri="{FF2B5EF4-FFF2-40B4-BE49-F238E27FC236}">
-                <a16:creationId xmlns:a16="http://schemas.microsoft.com/office/drawing/2014/main" id="{0438A0E3-2B85-4A18-8242-42B8D97CBAD6}"/>
+                <a16:creationId xmlns:a16="http://schemas.microsoft.com/office/drawing/2014/main" id="{E245A8B6-5952-472E-B3BB-D7E50E027A68}"/>
               </a:ext>
             </a:extLst>
           </p:cNvPr>
@@ -20984,7 +20712,7 @@
           <p:nvPr/>
         </p:nvPicPr>
         <p:blipFill>
-          <a:blip xmlns:r="http://schemas.openxmlformats.org/officeDocument/2006/relationships" xmlns:a="http://schemas.openxmlformats.org/drawingml/2006/main" r:embed="R3f4db761466745aa"/>
+          <a:blip xmlns:r="http://schemas.openxmlformats.org/officeDocument/2006/relationships" xmlns:a="http://schemas.openxmlformats.org/drawingml/2006/main" r:embed="Rcb84373465d6464a"/>
           <a:stretch xmlns:a="http://schemas.openxmlformats.org/drawingml/2006/main"/>
         </p:blipFill>
         <p:spPr>
@@ -21002,7 +20730,7 @@
           <p:cNvPr id="8" name="">
             <a:extLst xmlns:a="http://schemas.openxmlformats.org/drawingml/2006/main">
               <a:ext uri="{FF2B5EF4-FFF2-40B4-BE49-F238E27FC236}">
-                <a16:creationId xmlns:a16="http://schemas.microsoft.com/office/drawing/2014/main" id="{4FD8C091-B762-4319-A37B-ACD2F8F17121}"/>
+                <a16:creationId xmlns:a16="http://schemas.microsoft.com/office/drawing/2014/main" id="{53E66785-63C2-45D1-B172-9AA26942455F}"/>
               </a:ext>
             </a:extLst>
           </p:cNvPr>
@@ -21012,7 +20740,7 @@
           <p:nvPr/>
         </p:nvPicPr>
         <p:blipFill>
-          <a:blip xmlns:r="http://schemas.openxmlformats.org/officeDocument/2006/relationships" xmlns:a="http://schemas.openxmlformats.org/drawingml/2006/main" r:embed="R43f19b2b0d3e4bf3"/>
+          <a:blip xmlns:r="http://schemas.openxmlformats.org/officeDocument/2006/relationships" xmlns:a="http://schemas.openxmlformats.org/drawingml/2006/main" r:embed="R0eda1d2c936a462e"/>
           <a:stretch xmlns:a="http://schemas.openxmlformats.org/drawingml/2006/main"/>
         </p:blipFill>
         <p:spPr>
@@ -21030,7 +20758,7 @@
           <p:cNvPr id="9" name="">
             <a:extLst xmlns:a="http://schemas.openxmlformats.org/drawingml/2006/main">
               <a:ext uri="{FF2B5EF4-FFF2-40B4-BE49-F238E27FC236}">
-                <a16:creationId xmlns:a16="http://schemas.microsoft.com/office/drawing/2014/main" id="{6A3D4B11-C779-40A8-81CA-A52BDBA900CB}"/>
+                <a16:creationId xmlns:a16="http://schemas.microsoft.com/office/drawing/2014/main" id="{2A63B648-3AB9-44D6-9098-393DDC30FA4E}"/>
               </a:ext>
             </a:extLst>
           </p:cNvPr>
@@ -21702,7 +21430,7 @@
           <p:cNvPr id="10" name="">
             <a:extLst xmlns:a="http://schemas.openxmlformats.org/drawingml/2006/main">
               <a:ext uri="{FF2B5EF4-FFF2-40B4-BE49-F238E27FC236}">
-                <a16:creationId xmlns:a16="http://schemas.microsoft.com/office/drawing/2014/main" id="{3D50D125-A0FA-4325-98D9-E5A7B930E17F}"/>
+                <a16:creationId xmlns:a16="http://schemas.microsoft.com/office/drawing/2014/main" id="{C7212B7C-3503-4374-9820-F3DA9E08A1E9}"/>
               </a:ext>
             </a:extLst>
           </p:cNvPr>
@@ -21732,7 +21460,7 @@
           <p:cNvPr id="11" name="text">
             <a:extLst xmlns:a="http://schemas.openxmlformats.org/drawingml/2006/main">
               <a:ext uri="{FF2B5EF4-FFF2-40B4-BE49-F238E27FC236}">
-                <a16:creationId xmlns:a16="http://schemas.microsoft.com/office/drawing/2014/main" id="{95F69925-0513-4448-9F9C-52DAC1BBBDE7}"/>
+                <a16:creationId xmlns:a16="http://schemas.microsoft.com/office/drawing/2014/main" id="{31D02C3A-670A-4401-A809-CF844F2535C9}"/>
               </a:ext>
             </a:extLst>
           </p:cNvPr>
@@ -21800,7 +21528,7 @@
           <p:cNvPr id="12" name="text">
             <a:extLst xmlns:a="http://schemas.openxmlformats.org/drawingml/2006/main">
               <a:ext uri="{FF2B5EF4-FFF2-40B4-BE49-F238E27FC236}">
-                <a16:creationId xmlns:a16="http://schemas.microsoft.com/office/drawing/2014/main" id="{F23BE498-CC07-4A52-B57E-BB2139C02AAB}"/>
+                <a16:creationId xmlns:a16="http://schemas.microsoft.com/office/drawing/2014/main" id="{DDCC7AB7-6F8E-46C1-9FA0-73D004B19332}"/>
               </a:ext>
             </a:extLst>
           </p:cNvPr>
@@ -21866,7 +21594,7 @@
     </p:spTree>
     <p:extLst>
       <p:ext uri="{BB962C8B-B14F-4D97-AF65-F5344CB8AC3E}">
-        <p14:creationId xmlns:p14="http://schemas.microsoft.com/office/powerpoint/2010/main" val="1728026802"/>
+        <p14:creationId xmlns:p14="http://schemas.microsoft.com/office/powerpoint/2010/main" val="2136613268"/>
       </p:ext>
     </p:extLst>
   </p:cSld>
@@ -21897,7 +21625,7 @@
           <p:cNvPr id="15" name="text">
             <a:extLst xmlns:a="http://schemas.openxmlformats.org/drawingml/2006/main">
               <a:ext uri="{FF2B5EF4-FFF2-40B4-BE49-F238E27FC236}">
-                <a16:creationId xmlns:a16="http://schemas.microsoft.com/office/drawing/2014/main" id="{6015DC63-A509-401D-8C95-B0B937BDF898}"/>
+                <a16:creationId xmlns:a16="http://schemas.microsoft.com/office/drawing/2014/main" id="{4DEB0708-46EB-46EF-9761-3FAC425C5479}"/>
               </a:ext>
             </a:extLst>
           </p:cNvPr>
@@ -21965,7 +21693,7 @@
           <p:cNvPr id="2" name="">
             <a:extLst xmlns:a="http://schemas.openxmlformats.org/drawingml/2006/main">
               <a:ext uri="{FF2B5EF4-FFF2-40B4-BE49-F238E27FC236}">
-                <a16:creationId xmlns:a16="http://schemas.microsoft.com/office/drawing/2014/main" id="{BB7951EC-6FAD-45AE-AFCD-8EECF97890D9}"/>
+                <a16:creationId xmlns:a16="http://schemas.microsoft.com/office/drawing/2014/main" id="{C91DF299-D18A-4563-B0C3-C37E1981DB23}"/>
               </a:ext>
             </a:extLst>
           </p:cNvPr>
@@ -21995,7 +21723,7 @@
           <p:cNvPr id="3" name="text">
             <a:extLst xmlns:a="http://schemas.openxmlformats.org/drawingml/2006/main">
               <a:ext uri="{FF2B5EF4-FFF2-40B4-BE49-F238E27FC236}">
-                <a16:creationId xmlns:a16="http://schemas.microsoft.com/office/drawing/2014/main" id="{B0357CBB-3FBE-445C-9D91-6C1269402433}"/>
+                <a16:creationId xmlns:a16="http://schemas.microsoft.com/office/drawing/2014/main" id="{DB1D5AF5-35F2-4630-91B1-9A115A64EB7A}"/>
               </a:ext>
             </a:extLst>
           </p:cNvPr>
@@ -22063,7 +21791,7 @@
           <p:cNvPr id="4" name="text">
             <a:extLst xmlns:a="http://schemas.openxmlformats.org/drawingml/2006/main">
               <a:ext uri="{FF2B5EF4-FFF2-40B4-BE49-F238E27FC236}">
-                <a16:creationId xmlns:a16="http://schemas.microsoft.com/office/drawing/2014/main" id="{F9BCAE12-1379-4A61-937D-CA3653116BB3}"/>
+                <a16:creationId xmlns:a16="http://schemas.microsoft.com/office/drawing/2014/main" id="{B4765E9B-0B10-411A-AA31-AFFBB9A36CD3}"/>
               </a:ext>
             </a:extLst>
           </p:cNvPr>
@@ -22131,7 +21859,7 @@
           <p:cNvPr id="5" name="">
             <a:extLst xmlns:a="http://schemas.openxmlformats.org/drawingml/2006/main">
               <a:ext uri="{FF2B5EF4-FFF2-40B4-BE49-F238E27FC236}">
-                <a16:creationId xmlns:a16="http://schemas.microsoft.com/office/drawing/2014/main" id="{0D0C3559-03AA-44C2-B2EA-40C75A8E29E0}"/>
+                <a16:creationId xmlns:a16="http://schemas.microsoft.com/office/drawing/2014/main" id="{18FA9AF1-30D0-45D5-B0A7-AD75435224F6}"/>
               </a:ext>
             </a:extLst>
           </p:cNvPr>
@@ -23004,7 +22732,7 @@
           <p:cNvPr id="6" name="text">
             <a:extLst xmlns:a="http://schemas.openxmlformats.org/drawingml/2006/main">
               <a:ext uri="{FF2B5EF4-FFF2-40B4-BE49-F238E27FC236}">
-                <a16:creationId xmlns:a16="http://schemas.microsoft.com/office/drawing/2014/main" id="{F6E1D1AE-5AEE-4F79-8B74-B310352E8348}"/>
+                <a16:creationId xmlns:a16="http://schemas.microsoft.com/office/drawing/2014/main" id="{8EBAFA12-4D74-4AD5-A9A1-38565E9E3E36}"/>
               </a:ext>
             </a:extLst>
           </p:cNvPr>
@@ -23072,7 +22800,7 @@
           <p:cNvPr id="7" name="text">
             <a:extLst xmlns:a="http://schemas.openxmlformats.org/drawingml/2006/main">
               <a:ext uri="{FF2B5EF4-FFF2-40B4-BE49-F238E27FC236}">
-                <a16:creationId xmlns:a16="http://schemas.microsoft.com/office/drawing/2014/main" id="{A73E61DC-18A5-4F2D-9B08-487AC4A68076}"/>
+                <a16:creationId xmlns:a16="http://schemas.microsoft.com/office/drawing/2014/main" id="{41B296CA-F399-42F7-945F-CB6799B08C2D}"/>
               </a:ext>
             </a:extLst>
           </p:cNvPr>
@@ -23140,7 +22868,7 @@
           <p:cNvPr id="8" name="text">
             <a:extLst xmlns:a="http://schemas.openxmlformats.org/drawingml/2006/main">
               <a:ext uri="{FF2B5EF4-FFF2-40B4-BE49-F238E27FC236}">
-                <a16:creationId xmlns:a16="http://schemas.microsoft.com/office/drawing/2014/main" id="{5F34F2B7-9773-45F8-B2C3-C79C678E44EE}"/>
+                <a16:creationId xmlns:a16="http://schemas.microsoft.com/office/drawing/2014/main" id="{1C5773F6-9FE5-4464-AC6E-38E82BC19DE7}"/>
               </a:ext>
             </a:extLst>
           </p:cNvPr>
@@ -23208,7 +22936,7 @@
           <p:cNvPr id="9" name="Chart">
             <a:extLst xmlns:a="http://schemas.openxmlformats.org/drawingml/2006/main">
               <a:ext uri="{FF2B5EF4-FFF2-40B4-BE49-F238E27FC236}">
-                <a16:creationId xmlns:a16="http://schemas.microsoft.com/office/drawing/2014/main" id="{CDB21306-B5A5-4B1D-8E09-8E5F056A2CFB}"/>
+                <a16:creationId xmlns:a16="http://schemas.microsoft.com/office/drawing/2014/main" id="{56F7CFCE-9ED2-44AC-A86A-11CC04CA3309}"/>
               </a:ext>
             </a:extLst>
           </p:cNvPr>
@@ -23221,7 +22949,7 @@
         </p:xfrm>
         <a:graphic xmlns:a="http://schemas.openxmlformats.org/drawingml/2006/main">
           <a:graphicData uri="http://schemas.openxmlformats.org/drawingml/2006/chart">
-            <c:chart xmlns:r="http://schemas.openxmlformats.org/officeDocument/2006/relationships" xmlns:c="http://schemas.openxmlformats.org/drawingml/2006/chart" r:id="R69c30da51e244dd2"/>
+            <c:chart xmlns:r="http://schemas.openxmlformats.org/officeDocument/2006/relationships" xmlns:c="http://schemas.openxmlformats.org/drawingml/2006/chart" r:id="R40b341382b9e4e37"/>
           </a:graphicData>
         </a:graphic>
       </p:graphicFrame>
@@ -23230,7 +22958,7 @@
           <p:cNvPr id="10" name="Chart">
             <a:extLst xmlns:a="http://schemas.openxmlformats.org/drawingml/2006/main">
               <a:ext uri="{FF2B5EF4-FFF2-40B4-BE49-F238E27FC236}">
-                <a16:creationId xmlns:a16="http://schemas.microsoft.com/office/drawing/2014/main" id="{2A39FC19-D07B-464A-BE38-29A1220BD5F5}"/>
+                <a16:creationId xmlns:a16="http://schemas.microsoft.com/office/drawing/2014/main" id="{AE5C915E-47AE-461C-880E-1A4911F85FE4}"/>
               </a:ext>
             </a:extLst>
           </p:cNvPr>
@@ -23243,7 +22971,7 @@
         </p:xfrm>
         <a:graphic xmlns:a="http://schemas.openxmlformats.org/drawingml/2006/main">
           <a:graphicData uri="http://schemas.openxmlformats.org/drawingml/2006/chart">
-            <c:chart xmlns:r="http://schemas.openxmlformats.org/officeDocument/2006/relationships" xmlns:c="http://schemas.openxmlformats.org/drawingml/2006/chart" r:id="R4055ce8fdd8640ae"/>
+            <c:chart xmlns:r="http://schemas.openxmlformats.org/officeDocument/2006/relationships" xmlns:c="http://schemas.openxmlformats.org/drawingml/2006/chart" r:id="R7054122269e84168"/>
           </a:graphicData>
         </a:graphic>
       </p:graphicFrame>
@@ -23252,7 +22980,7 @@
           <p:cNvPr id="11" name="">
             <a:extLst xmlns:a="http://schemas.openxmlformats.org/drawingml/2006/main">
               <a:ext uri="{FF2B5EF4-FFF2-40B4-BE49-F238E27FC236}">
-                <a16:creationId xmlns:a16="http://schemas.microsoft.com/office/drawing/2014/main" id="{19147D6E-461D-4F84-8B22-E300A01F2692}"/>
+                <a16:creationId xmlns:a16="http://schemas.microsoft.com/office/drawing/2014/main" id="{AB6415B8-CE5E-4151-B69B-A870E0D62EAB}"/>
               </a:ext>
             </a:extLst>
           </p:cNvPr>
@@ -23262,7 +22990,7 @@
           <p:nvPr/>
         </p:nvPicPr>
         <p:blipFill>
-          <a:blip xmlns:r="http://schemas.openxmlformats.org/officeDocument/2006/relationships" xmlns:a="http://schemas.openxmlformats.org/drawingml/2006/main" r:embed="R32f04393c25d479b"/>
+          <a:blip xmlns:r="http://schemas.openxmlformats.org/officeDocument/2006/relationships" xmlns:a="http://schemas.openxmlformats.org/drawingml/2006/main" r:embed="R8e22f836ca0e45f4"/>
           <a:stretch xmlns:a="http://schemas.openxmlformats.org/drawingml/2006/main"/>
         </p:blipFill>
         <p:spPr>
@@ -23280,7 +23008,7 @@
           <p:cNvPr id="12" name="">
             <a:extLst xmlns:a="http://schemas.openxmlformats.org/drawingml/2006/main">
               <a:ext uri="{FF2B5EF4-FFF2-40B4-BE49-F238E27FC236}">
-                <a16:creationId xmlns:a16="http://schemas.microsoft.com/office/drawing/2014/main" id="{82390ADB-A970-4ECE-B253-97EA5CE67218}"/>
+                <a16:creationId xmlns:a16="http://schemas.microsoft.com/office/drawing/2014/main" id="{4CC0731B-0360-4EAD-BD39-95B1A5AFA41E}"/>
               </a:ext>
             </a:extLst>
           </p:cNvPr>
@@ -23310,7 +23038,7 @@
           <p:cNvPr id="13" name="text">
             <a:extLst xmlns:a="http://schemas.openxmlformats.org/drawingml/2006/main">
               <a:ext uri="{FF2B5EF4-FFF2-40B4-BE49-F238E27FC236}">
-                <a16:creationId xmlns:a16="http://schemas.microsoft.com/office/drawing/2014/main" id="{C9508634-D460-4711-9C0C-9A9391C3B34D}"/>
+                <a16:creationId xmlns:a16="http://schemas.microsoft.com/office/drawing/2014/main" id="{92AE30CE-D234-454E-97A4-4995F256D009}"/>
               </a:ext>
             </a:extLst>
           </p:cNvPr>
@@ -23378,7 +23106,7 @@
           <p:cNvPr id="14" name="text">
             <a:extLst xmlns:a="http://schemas.openxmlformats.org/drawingml/2006/main">
               <a:ext uri="{FF2B5EF4-FFF2-40B4-BE49-F238E27FC236}">
-                <a16:creationId xmlns:a16="http://schemas.microsoft.com/office/drawing/2014/main" id="{200001F3-3C66-40B7-AF74-1644C0401C78}"/>
+                <a16:creationId xmlns:a16="http://schemas.microsoft.com/office/drawing/2014/main" id="{C448B52C-409C-43BE-9277-EBF20D3DCDA5}"/>
               </a:ext>
             </a:extLst>
           </p:cNvPr>
@@ -23444,7 +23172,7 @@
     </p:spTree>
     <p:extLst>
       <p:ext uri="{BB962C8B-B14F-4D97-AF65-F5344CB8AC3E}">
-        <p14:creationId xmlns:p14="http://schemas.microsoft.com/office/powerpoint/2010/main" val="477712724"/>
+        <p14:creationId xmlns:p14="http://schemas.microsoft.com/office/powerpoint/2010/main" val="1420270258"/>
       </p:ext>
     </p:extLst>
   </p:cSld>
@@ -23475,7 +23203,7 @@
           <p:cNvPr id="15" name="text">
             <a:extLst xmlns:a="http://schemas.openxmlformats.org/drawingml/2006/main">
               <a:ext uri="{FF2B5EF4-FFF2-40B4-BE49-F238E27FC236}">
-                <a16:creationId xmlns:a16="http://schemas.microsoft.com/office/drawing/2014/main" id="{2A298C7D-82C3-44A8-9F65-11EA2C675716}"/>
+                <a16:creationId xmlns:a16="http://schemas.microsoft.com/office/drawing/2014/main" id="{04B84B74-A52F-44E1-9672-0859E6A73C42}"/>
               </a:ext>
             </a:extLst>
           </p:cNvPr>
@@ -23543,7 +23271,7 @@
           <p:cNvPr id="2" name="">
             <a:extLst xmlns:a="http://schemas.openxmlformats.org/drawingml/2006/main">
               <a:ext uri="{FF2B5EF4-FFF2-40B4-BE49-F238E27FC236}">
-                <a16:creationId xmlns:a16="http://schemas.microsoft.com/office/drawing/2014/main" id="{F27B610A-6213-44F7-990E-9459E4AFDD02}"/>
+                <a16:creationId xmlns:a16="http://schemas.microsoft.com/office/drawing/2014/main" id="{EE1039DA-E45A-43D5-9F2C-AB20EC91D40A}"/>
               </a:ext>
             </a:extLst>
           </p:cNvPr>
@@ -23573,7 +23301,7 @@
           <p:cNvPr id="3" name="text">
             <a:extLst xmlns:a="http://schemas.openxmlformats.org/drawingml/2006/main">
               <a:ext uri="{FF2B5EF4-FFF2-40B4-BE49-F238E27FC236}">
-                <a16:creationId xmlns:a16="http://schemas.microsoft.com/office/drawing/2014/main" id="{EA091E90-32CB-412D-883D-E559B68D0459}"/>
+                <a16:creationId xmlns:a16="http://schemas.microsoft.com/office/drawing/2014/main" id="{7BA6EAB2-6A13-4EE4-BAE5-EBC446E221AF}"/>
               </a:ext>
             </a:extLst>
           </p:cNvPr>
@@ -23641,7 +23369,7 @@
           <p:cNvPr id="4" name="text">
             <a:extLst xmlns:a="http://schemas.openxmlformats.org/drawingml/2006/main">
               <a:ext uri="{FF2B5EF4-FFF2-40B4-BE49-F238E27FC236}">
-                <a16:creationId xmlns:a16="http://schemas.microsoft.com/office/drawing/2014/main" id="{9DCFE636-6DA0-4A7E-8FA0-D16991910D43}"/>
+                <a16:creationId xmlns:a16="http://schemas.microsoft.com/office/drawing/2014/main" id="{045FC83A-D4D3-44FC-A9C3-3E527B9BE18B}"/>
               </a:ext>
             </a:extLst>
           </p:cNvPr>
@@ -23709,7 +23437,7 @@
           <p:cNvPr id="5" name="text">
             <a:extLst xmlns:a="http://schemas.openxmlformats.org/drawingml/2006/main">
               <a:ext uri="{FF2B5EF4-FFF2-40B4-BE49-F238E27FC236}">
-                <a16:creationId xmlns:a16="http://schemas.microsoft.com/office/drawing/2014/main" id="{F70309A1-107F-463C-85CA-0C66E7844A52}"/>
+                <a16:creationId xmlns:a16="http://schemas.microsoft.com/office/drawing/2014/main" id="{F7780328-C1DF-4695-B13E-145BBA867559}"/>
               </a:ext>
             </a:extLst>
           </p:cNvPr>
@@ -23777,7 +23505,7 @@
           <p:cNvPr id="6" name="text">
             <a:extLst xmlns:a="http://schemas.openxmlformats.org/drawingml/2006/main">
               <a:ext uri="{FF2B5EF4-FFF2-40B4-BE49-F238E27FC236}">
-                <a16:creationId xmlns:a16="http://schemas.microsoft.com/office/drawing/2014/main" id="{4E996D81-E12C-4532-923A-1DCFD3987F0F}"/>
+                <a16:creationId xmlns:a16="http://schemas.microsoft.com/office/drawing/2014/main" id="{E1522672-76E3-4028-A3BD-8DA5DE3F18EC}"/>
               </a:ext>
             </a:extLst>
           </p:cNvPr>
@@ -23845,7 +23573,7 @@
           <p:cNvPr id="7" name="">
             <a:extLst xmlns:a="http://schemas.openxmlformats.org/drawingml/2006/main">
               <a:ext uri="{FF2B5EF4-FFF2-40B4-BE49-F238E27FC236}">
-                <a16:creationId xmlns:a16="http://schemas.microsoft.com/office/drawing/2014/main" id="{F11F004E-6D0E-4393-AB9B-CA7D886F2E92}"/>
+                <a16:creationId xmlns:a16="http://schemas.microsoft.com/office/drawing/2014/main" id="{F67B27AD-6BA7-4C22-A0BC-B3D93BDAC612}"/>
               </a:ext>
             </a:extLst>
           </p:cNvPr>
@@ -23855,7 +23583,7 @@
           <p:nvPr/>
         </p:nvPicPr>
         <p:blipFill>
-          <a:blip xmlns:r="http://schemas.openxmlformats.org/officeDocument/2006/relationships" xmlns:a="http://schemas.openxmlformats.org/drawingml/2006/main" r:embed="Raa203d5c4db341f1"/>
+          <a:blip xmlns:r="http://schemas.openxmlformats.org/officeDocument/2006/relationships" xmlns:a="http://schemas.openxmlformats.org/drawingml/2006/main" r:embed="R804816767db54f2f"/>
           <a:stretch xmlns:a="http://schemas.openxmlformats.org/drawingml/2006/main"/>
         </p:blipFill>
         <p:spPr>
@@ -23873,7 +23601,7 @@
           <p:cNvPr id="8" name="">
             <a:extLst xmlns:a="http://schemas.openxmlformats.org/drawingml/2006/main">
               <a:ext uri="{FF2B5EF4-FFF2-40B4-BE49-F238E27FC236}">
-                <a16:creationId xmlns:a16="http://schemas.microsoft.com/office/drawing/2014/main" id="{5FEF68E0-53E8-4B05-B873-32A3E3E654AA}"/>
+                <a16:creationId xmlns:a16="http://schemas.microsoft.com/office/drawing/2014/main" id="{E2A0F4AF-F2F6-41B0-9D69-3A02F1005413}"/>
               </a:ext>
             </a:extLst>
           </p:cNvPr>
@@ -23883,7 +23611,7 @@
           <p:nvPr/>
         </p:nvPicPr>
         <p:blipFill>
-          <a:blip xmlns:r="http://schemas.openxmlformats.org/officeDocument/2006/relationships" xmlns:a="http://schemas.openxmlformats.org/drawingml/2006/main" r:embed="Red83c470d01344a9"/>
+          <a:blip xmlns:r="http://schemas.openxmlformats.org/officeDocument/2006/relationships" xmlns:a="http://schemas.openxmlformats.org/drawingml/2006/main" r:embed="R88987c0d4ae84dad"/>
           <a:stretch xmlns:a="http://schemas.openxmlformats.org/drawingml/2006/main"/>
         </p:blipFill>
         <p:spPr>
@@ -23901,7 +23629,7 @@
           <p:cNvPr id="9" name="">
             <a:extLst xmlns:a="http://schemas.openxmlformats.org/drawingml/2006/main">
               <a:ext uri="{FF2B5EF4-FFF2-40B4-BE49-F238E27FC236}">
-                <a16:creationId xmlns:a16="http://schemas.microsoft.com/office/drawing/2014/main" id="{DF1721CE-9768-4980-929A-5531753B9605}"/>
+                <a16:creationId xmlns:a16="http://schemas.microsoft.com/office/drawing/2014/main" id="{E051EFA3-A528-4010-8835-1EC1677EAC63}"/>
               </a:ext>
             </a:extLst>
           </p:cNvPr>
@@ -24283,7 +24011,7 @@
           <p:cNvPr id="10" name="text">
             <a:extLst xmlns:a="http://schemas.openxmlformats.org/drawingml/2006/main">
               <a:ext uri="{FF2B5EF4-FFF2-40B4-BE49-F238E27FC236}">
-                <a16:creationId xmlns:a16="http://schemas.microsoft.com/office/drawing/2014/main" id="{ADEDDF50-206B-4641-8D9D-3DB1F5E7B374}"/>
+                <a16:creationId xmlns:a16="http://schemas.microsoft.com/office/drawing/2014/main" id="{28555BE5-DCC0-46CE-BDB7-1C102498E6BB}"/>
               </a:ext>
             </a:extLst>
           </p:cNvPr>
@@ -24351,7 +24079,7 @@
           <p:cNvPr id="11" name="">
             <a:extLst xmlns:a="http://schemas.openxmlformats.org/drawingml/2006/main">
               <a:ext uri="{FF2B5EF4-FFF2-40B4-BE49-F238E27FC236}">
-                <a16:creationId xmlns:a16="http://schemas.microsoft.com/office/drawing/2014/main" id="{4AE3C1E7-1E37-48C2-B893-014D07C8DF32}"/>
+                <a16:creationId xmlns:a16="http://schemas.microsoft.com/office/drawing/2014/main" id="{92D6D6F8-D872-4CCF-BCDE-36782777EE74}"/>
               </a:ext>
             </a:extLst>
           </p:cNvPr>
@@ -24648,7 +24376,7 @@
           <p:cNvPr id="12" name="">
             <a:extLst xmlns:a="http://schemas.openxmlformats.org/drawingml/2006/main">
               <a:ext uri="{FF2B5EF4-FFF2-40B4-BE49-F238E27FC236}">
-                <a16:creationId xmlns:a16="http://schemas.microsoft.com/office/drawing/2014/main" id="{CE0D0DF1-D093-44FA-886E-A619AE0CC694}"/>
+                <a16:creationId xmlns:a16="http://schemas.microsoft.com/office/drawing/2014/main" id="{7AA708C1-36D7-4373-85B6-CB812EF068E9}"/>
               </a:ext>
             </a:extLst>
           </p:cNvPr>
@@ -24678,7 +24406,7 @@
           <p:cNvPr id="13" name="text">
             <a:extLst xmlns:a="http://schemas.openxmlformats.org/drawingml/2006/main">
               <a:ext uri="{FF2B5EF4-FFF2-40B4-BE49-F238E27FC236}">
-                <a16:creationId xmlns:a16="http://schemas.microsoft.com/office/drawing/2014/main" id="{52D18026-F745-4AD5-BB23-3014C1FD16DE}"/>
+                <a16:creationId xmlns:a16="http://schemas.microsoft.com/office/drawing/2014/main" id="{02FB9ED9-1B65-4026-8E54-63D1A6D7147D}"/>
               </a:ext>
             </a:extLst>
           </p:cNvPr>
@@ -24746,7 +24474,7 @@
           <p:cNvPr id="14" name="text">
             <a:extLst xmlns:a="http://schemas.openxmlformats.org/drawingml/2006/main">
               <a:ext uri="{FF2B5EF4-FFF2-40B4-BE49-F238E27FC236}">
-                <a16:creationId xmlns:a16="http://schemas.microsoft.com/office/drawing/2014/main" id="{AA4E72B4-4525-4A14-948B-721209E92D5C}"/>
+                <a16:creationId xmlns:a16="http://schemas.microsoft.com/office/drawing/2014/main" id="{1C0C2C6E-3295-4CEF-9796-93D69F27CBF0}"/>
               </a:ext>
             </a:extLst>
           </p:cNvPr>
@@ -24812,7 +24540,7 @@
     </p:spTree>
     <p:extLst>
       <p:ext uri="{BB962C8B-B14F-4D97-AF65-F5344CB8AC3E}">
-        <p14:creationId xmlns:p14="http://schemas.microsoft.com/office/powerpoint/2010/main" val="1615900468"/>
+        <p14:creationId xmlns:p14="http://schemas.microsoft.com/office/powerpoint/2010/main" val="679758086"/>
       </p:ext>
     </p:extLst>
   </p:cSld>
@@ -24843,7 +24571,7 @@
           <p:cNvPr id="17" name="text">
             <a:extLst xmlns:a="http://schemas.openxmlformats.org/drawingml/2006/main">
               <a:ext uri="{FF2B5EF4-FFF2-40B4-BE49-F238E27FC236}">
-                <a16:creationId xmlns:a16="http://schemas.microsoft.com/office/drawing/2014/main" id="{1650DEC2-5C12-4889-9179-803A866570F1}"/>
+                <a16:creationId xmlns:a16="http://schemas.microsoft.com/office/drawing/2014/main" id="{6C0113B7-053A-455A-B415-CB3D648703B8}"/>
               </a:ext>
             </a:extLst>
           </p:cNvPr>
@@ -24911,7 +24639,7 @@
           <p:cNvPr id="2" name="">
             <a:extLst xmlns:a="http://schemas.openxmlformats.org/drawingml/2006/main">
               <a:ext uri="{FF2B5EF4-FFF2-40B4-BE49-F238E27FC236}">
-                <a16:creationId xmlns:a16="http://schemas.microsoft.com/office/drawing/2014/main" id="{93B9F54F-5033-43E6-B7AE-FBE8C32A00FB}"/>
+                <a16:creationId xmlns:a16="http://schemas.microsoft.com/office/drawing/2014/main" id="{B6912699-A0A0-4EC0-96A3-293CCA85A7CF}"/>
               </a:ext>
             </a:extLst>
           </p:cNvPr>
@@ -24941,7 +24669,7 @@
           <p:cNvPr id="3" name="text">
             <a:extLst xmlns:a="http://schemas.openxmlformats.org/drawingml/2006/main">
               <a:ext uri="{FF2B5EF4-FFF2-40B4-BE49-F238E27FC236}">
-                <a16:creationId xmlns:a16="http://schemas.microsoft.com/office/drawing/2014/main" id="{42C59FBE-CC85-4E7F-B92F-E2311A1CFA53}"/>
+                <a16:creationId xmlns:a16="http://schemas.microsoft.com/office/drawing/2014/main" id="{4AFD8C8C-0D48-44D2-9A04-2E58AC9E9A00}"/>
               </a:ext>
             </a:extLst>
           </p:cNvPr>
@@ -25009,7 +24737,7 @@
           <p:cNvPr id="4" name="text">
             <a:extLst xmlns:a="http://schemas.openxmlformats.org/drawingml/2006/main">
               <a:ext uri="{FF2B5EF4-FFF2-40B4-BE49-F238E27FC236}">
-                <a16:creationId xmlns:a16="http://schemas.microsoft.com/office/drawing/2014/main" id="{B61243EF-9749-469F-90BB-9BA5C33126B4}"/>
+                <a16:creationId xmlns:a16="http://schemas.microsoft.com/office/drawing/2014/main" id="{0B08E941-1B5C-48A5-9E5B-F78643D77390}"/>
               </a:ext>
             </a:extLst>
           </p:cNvPr>
@@ -25077,7 +24805,7 @@
           <p:cNvPr id="5" name="text">
             <a:extLst xmlns:a="http://schemas.openxmlformats.org/drawingml/2006/main">
               <a:ext uri="{FF2B5EF4-FFF2-40B4-BE49-F238E27FC236}">
-                <a16:creationId xmlns:a16="http://schemas.microsoft.com/office/drawing/2014/main" id="{2DAF2E03-C286-4A8D-89C9-98F2EF7CE8CE}"/>
+                <a16:creationId xmlns:a16="http://schemas.microsoft.com/office/drawing/2014/main" id="{9C51CCEE-59DB-412E-AD7E-039BD2E22E29}"/>
               </a:ext>
             </a:extLst>
           </p:cNvPr>
@@ -25145,7 +24873,7 @@
           <p:cNvPr id="6" name="text">
             <a:extLst xmlns:a="http://schemas.openxmlformats.org/drawingml/2006/main">
               <a:ext uri="{FF2B5EF4-FFF2-40B4-BE49-F238E27FC236}">
-                <a16:creationId xmlns:a16="http://schemas.microsoft.com/office/drawing/2014/main" id="{80F2E65D-6E2E-45CB-B93D-054359A840EC}"/>
+                <a16:creationId xmlns:a16="http://schemas.microsoft.com/office/drawing/2014/main" id="{EEF3CD68-0E0B-44B0-8CDA-335D81D4105B}"/>
               </a:ext>
             </a:extLst>
           </p:cNvPr>
@@ -25213,7 +24941,7 @@
           <p:cNvPr id="7" name="text">
             <a:extLst xmlns:a="http://schemas.openxmlformats.org/drawingml/2006/main">
               <a:ext uri="{FF2B5EF4-FFF2-40B4-BE49-F238E27FC236}">
-                <a16:creationId xmlns:a16="http://schemas.microsoft.com/office/drawing/2014/main" id="{CA44863D-D803-4A7E-8028-9CF3D4858899}"/>
+                <a16:creationId xmlns:a16="http://schemas.microsoft.com/office/drawing/2014/main" id="{2D945311-9DC6-4BA3-BDE0-E92589A7E992}"/>
               </a:ext>
             </a:extLst>
           </p:cNvPr>
@@ -25281,7 +25009,7 @@
           <p:cNvPr id="8" name="text">
             <a:extLst xmlns:a="http://schemas.openxmlformats.org/drawingml/2006/main">
               <a:ext uri="{FF2B5EF4-FFF2-40B4-BE49-F238E27FC236}">
-                <a16:creationId xmlns:a16="http://schemas.microsoft.com/office/drawing/2014/main" id="{870E785A-DB08-4C7E-B869-9D65778ADD55}"/>
+                <a16:creationId xmlns:a16="http://schemas.microsoft.com/office/drawing/2014/main" id="{4E09CE9B-C90C-4558-9FCD-77EB474A8C54}"/>
               </a:ext>
             </a:extLst>
           </p:cNvPr>
@@ -25349,7 +25077,7 @@
           <p:cNvPr id="9" name="text">
             <a:extLst xmlns:a="http://schemas.openxmlformats.org/drawingml/2006/main">
               <a:ext uri="{FF2B5EF4-FFF2-40B4-BE49-F238E27FC236}">
-                <a16:creationId xmlns:a16="http://schemas.microsoft.com/office/drawing/2014/main" id="{18CC942D-450D-4ED2-AC61-FD646D8C3009}"/>
+                <a16:creationId xmlns:a16="http://schemas.microsoft.com/office/drawing/2014/main" id="{0BC9EDA5-D27E-4B52-ABF9-6AD267A68A82}"/>
               </a:ext>
             </a:extLst>
           </p:cNvPr>
@@ -25417,7 +25145,7 @@
           <p:cNvPr id="10" name="">
             <a:extLst xmlns:a="http://schemas.openxmlformats.org/drawingml/2006/main">
               <a:ext uri="{FF2B5EF4-FFF2-40B4-BE49-F238E27FC236}">
-                <a16:creationId xmlns:a16="http://schemas.microsoft.com/office/drawing/2014/main" id="{22C52390-405A-464A-954C-804662F16D3E}"/>
+                <a16:creationId xmlns:a16="http://schemas.microsoft.com/office/drawing/2014/main" id="{64B529C9-44D9-4752-87AE-EE0B3DBEB838}"/>
               </a:ext>
             </a:extLst>
           </p:cNvPr>
@@ -26214,7 +25942,7 @@
           <p:cNvPr id="11" name="text">
             <a:extLst xmlns:a="http://schemas.openxmlformats.org/drawingml/2006/main">
               <a:ext uri="{FF2B5EF4-FFF2-40B4-BE49-F238E27FC236}">
-                <a16:creationId xmlns:a16="http://schemas.microsoft.com/office/drawing/2014/main" id="{41EA7CC1-A08F-420B-82FF-0022E7EDB3C0}"/>
+                <a16:creationId xmlns:a16="http://schemas.microsoft.com/office/drawing/2014/main" id="{B6EE2959-175E-411A-B781-49F2175918F6}"/>
               </a:ext>
             </a:extLst>
           </p:cNvPr>
@@ -26282,7 +26010,7 @@
           <p:cNvPr id="12" name="">
             <a:extLst xmlns:a="http://schemas.openxmlformats.org/drawingml/2006/main">
               <a:ext uri="{FF2B5EF4-FFF2-40B4-BE49-F238E27FC236}">
-                <a16:creationId xmlns:a16="http://schemas.microsoft.com/office/drawing/2014/main" id="{2EED6018-8BEF-414D-8A7E-253529F87E3E}"/>
+                <a16:creationId xmlns:a16="http://schemas.microsoft.com/office/drawing/2014/main" id="{145FF610-CADA-46FC-A7B8-303B248FE622}"/>
               </a:ext>
             </a:extLst>
           </p:cNvPr>
@@ -26292,7 +26020,7 @@
           <p:nvPr/>
         </p:nvPicPr>
         <p:blipFill>
-          <a:blip xmlns:r="http://schemas.openxmlformats.org/officeDocument/2006/relationships" xmlns:a="http://schemas.openxmlformats.org/drawingml/2006/main" r:embed="R225f8cec11b74a47"/>
+          <a:blip xmlns:r="http://schemas.openxmlformats.org/officeDocument/2006/relationships" xmlns:a="http://schemas.openxmlformats.org/drawingml/2006/main" r:embed="R80fee833d737424d"/>
           <a:stretch xmlns:a="http://schemas.openxmlformats.org/drawingml/2006/main"/>
         </p:blipFill>
         <p:spPr>
@@ -26310,7 +26038,7 @@
           <p:cNvPr id="13" name="text">
             <a:extLst xmlns:a="http://schemas.openxmlformats.org/drawingml/2006/main">
               <a:ext uri="{FF2B5EF4-FFF2-40B4-BE49-F238E27FC236}">
-                <a16:creationId xmlns:a16="http://schemas.microsoft.com/office/drawing/2014/main" id="{429609F3-60EB-4C86-B3D7-10ED1BB12046}"/>
+                <a16:creationId xmlns:a16="http://schemas.microsoft.com/office/drawing/2014/main" id="{C391ED33-5949-4F1B-ABC6-D6B883905542}"/>
               </a:ext>
             </a:extLst>
           </p:cNvPr>
@@ -26378,7 +26106,7 @@
           <p:cNvPr id="14" name="">
             <a:extLst xmlns:a="http://schemas.openxmlformats.org/drawingml/2006/main">
               <a:ext uri="{FF2B5EF4-FFF2-40B4-BE49-F238E27FC236}">
-                <a16:creationId xmlns:a16="http://schemas.microsoft.com/office/drawing/2014/main" id="{381A3443-E337-4718-B742-7B1199CAA198}"/>
+                <a16:creationId xmlns:a16="http://schemas.microsoft.com/office/drawing/2014/main" id="{8DE7F133-F0C7-47B0-B8CA-0947525ED840}"/>
               </a:ext>
             </a:extLst>
           </p:cNvPr>
@@ -26408,7 +26136,7 @@
           <p:cNvPr id="15" name="text">
             <a:extLst xmlns:a="http://schemas.openxmlformats.org/drawingml/2006/main">
               <a:ext uri="{FF2B5EF4-FFF2-40B4-BE49-F238E27FC236}">
-                <a16:creationId xmlns:a16="http://schemas.microsoft.com/office/drawing/2014/main" id="{CECC568D-1911-4B14-A095-FF20B3AECB61}"/>
+                <a16:creationId xmlns:a16="http://schemas.microsoft.com/office/drawing/2014/main" id="{6757CE31-9C01-427B-869D-5354A070B1F5}"/>
               </a:ext>
             </a:extLst>
           </p:cNvPr>
@@ -26476,7 +26204,7 @@
           <p:cNvPr id="16" name="text">
             <a:extLst xmlns:a="http://schemas.openxmlformats.org/drawingml/2006/main">
               <a:ext uri="{FF2B5EF4-FFF2-40B4-BE49-F238E27FC236}">
-                <a16:creationId xmlns:a16="http://schemas.microsoft.com/office/drawing/2014/main" id="{53A109DD-7DD4-4DC1-9E0B-E45E677EBC06}"/>
+                <a16:creationId xmlns:a16="http://schemas.microsoft.com/office/drawing/2014/main" id="{1781C7A2-4CD7-4264-91AF-5EEFA45CFFEC}"/>
               </a:ext>
             </a:extLst>
           </p:cNvPr>
@@ -26542,7 +26270,7 @@
     </p:spTree>
     <p:extLst>
       <p:ext uri="{BB962C8B-B14F-4D97-AF65-F5344CB8AC3E}">
-        <p14:creationId xmlns:p14="http://schemas.microsoft.com/office/powerpoint/2010/main" val="1093279097"/>
+        <p14:creationId xmlns:p14="http://schemas.microsoft.com/office/powerpoint/2010/main" val="454013134"/>
       </p:ext>
     </p:extLst>
   </p:cSld>
@@ -26573,7 +26301,7 @@
           <p:cNvPr id="23" name="text">
             <a:extLst xmlns:a="http://schemas.openxmlformats.org/drawingml/2006/main">
               <a:ext uri="{FF2B5EF4-FFF2-40B4-BE49-F238E27FC236}">
-                <a16:creationId xmlns:a16="http://schemas.microsoft.com/office/drawing/2014/main" id="{B0821982-F68C-4597-9A50-2D62E4FDB1FC}"/>
+                <a16:creationId xmlns:a16="http://schemas.microsoft.com/office/drawing/2014/main" id="{FA6E1E58-4908-4876-A5CF-D1784E89E3C4}"/>
               </a:ext>
             </a:extLst>
           </p:cNvPr>
@@ -26641,7 +26369,7 @@
           <p:cNvPr id="2" name="">
             <a:extLst xmlns:a="http://schemas.openxmlformats.org/drawingml/2006/main">
               <a:ext uri="{FF2B5EF4-FFF2-40B4-BE49-F238E27FC236}">
-                <a16:creationId xmlns:a16="http://schemas.microsoft.com/office/drawing/2014/main" id="{01355D31-8CFC-4416-87D9-AAAF9D3515A0}"/>
+                <a16:creationId xmlns:a16="http://schemas.microsoft.com/office/drawing/2014/main" id="{AFA73463-6041-4BCB-9704-B6B9FB5420EC}"/>
               </a:ext>
             </a:extLst>
           </p:cNvPr>
@@ -26671,7 +26399,7 @@
           <p:cNvPr id="3" name="text">
             <a:extLst xmlns:a="http://schemas.openxmlformats.org/drawingml/2006/main">
               <a:ext uri="{FF2B5EF4-FFF2-40B4-BE49-F238E27FC236}">
-                <a16:creationId xmlns:a16="http://schemas.microsoft.com/office/drawing/2014/main" id="{51562088-BB71-4245-8A41-31B139C54B58}"/>
+                <a16:creationId xmlns:a16="http://schemas.microsoft.com/office/drawing/2014/main" id="{C9F2BC33-42FC-496F-AD6D-417E994613AC}"/>
               </a:ext>
             </a:extLst>
           </p:cNvPr>
@@ -26739,7 +26467,7 @@
           <p:cNvPr id="4" name="text">
             <a:extLst xmlns:a="http://schemas.openxmlformats.org/drawingml/2006/main">
               <a:ext uri="{FF2B5EF4-FFF2-40B4-BE49-F238E27FC236}">
-                <a16:creationId xmlns:a16="http://schemas.microsoft.com/office/drawing/2014/main" id="{3164EF7D-6D52-4BF8-A871-1EAB7B64AC38}"/>
+                <a16:creationId xmlns:a16="http://schemas.microsoft.com/office/drawing/2014/main" id="{D2CF7B26-0920-421B-B52A-9DA72687F2D5}"/>
               </a:ext>
             </a:extLst>
           </p:cNvPr>
@@ -26807,7 +26535,7 @@
           <p:cNvPr id="5" name="text">
             <a:extLst xmlns:a="http://schemas.openxmlformats.org/drawingml/2006/main">
               <a:ext uri="{FF2B5EF4-FFF2-40B4-BE49-F238E27FC236}">
-                <a16:creationId xmlns:a16="http://schemas.microsoft.com/office/drawing/2014/main" id="{D720C90F-6D18-4B34-8240-46290D68E395}"/>
+                <a16:creationId xmlns:a16="http://schemas.microsoft.com/office/drawing/2014/main" id="{3D57C5F7-570F-49A9-BF62-6D583EEDB2E4}"/>
               </a:ext>
             </a:extLst>
           </p:cNvPr>
@@ -26875,7 +26603,7 @@
           <p:cNvPr id="6" name="text">
             <a:extLst xmlns:a="http://schemas.openxmlformats.org/drawingml/2006/main">
               <a:ext uri="{FF2B5EF4-FFF2-40B4-BE49-F238E27FC236}">
-                <a16:creationId xmlns:a16="http://schemas.microsoft.com/office/drawing/2014/main" id="{9AE30701-1C8E-4C6C-AACE-067257CAEED9}"/>
+                <a16:creationId xmlns:a16="http://schemas.microsoft.com/office/drawing/2014/main" id="{31DED968-E515-46D5-B8F5-E113C6633203}"/>
               </a:ext>
             </a:extLst>
           </p:cNvPr>
@@ -26966,7 +26694,7 @@
           <p:cNvPr id="7" name="text">
             <a:extLst xmlns:a="http://schemas.openxmlformats.org/drawingml/2006/main">
               <a:ext uri="{FF2B5EF4-FFF2-40B4-BE49-F238E27FC236}">
-                <a16:creationId xmlns:a16="http://schemas.microsoft.com/office/drawing/2014/main" id="{AACE7B4F-E4BD-401D-BAE0-B625EDADF117}"/>
+                <a16:creationId xmlns:a16="http://schemas.microsoft.com/office/drawing/2014/main" id="{CAE545F7-D6D9-40E5-89C1-71E1DC74A790}"/>
               </a:ext>
             </a:extLst>
           </p:cNvPr>
@@ -27034,7 +26762,7 @@
           <p:cNvPr id="8" name="text">
             <a:extLst xmlns:a="http://schemas.openxmlformats.org/drawingml/2006/main">
               <a:ext uri="{FF2B5EF4-FFF2-40B4-BE49-F238E27FC236}">
-                <a16:creationId xmlns:a16="http://schemas.microsoft.com/office/drawing/2014/main" id="{C6F6CC38-3D06-43DA-BFC0-8E53DAFD571D}"/>
+                <a16:creationId xmlns:a16="http://schemas.microsoft.com/office/drawing/2014/main" id="{1E202832-4552-40A1-9FAB-B425F80378A4}"/>
               </a:ext>
             </a:extLst>
           </p:cNvPr>
@@ -27102,7 +26830,7 @@
           <p:cNvPr id="9" name="text">
             <a:extLst xmlns:a="http://schemas.openxmlformats.org/drawingml/2006/main">
               <a:ext uri="{FF2B5EF4-FFF2-40B4-BE49-F238E27FC236}">
-                <a16:creationId xmlns:a16="http://schemas.microsoft.com/office/drawing/2014/main" id="{2E0DD874-19C2-4832-A732-C630EE59E988}"/>
+                <a16:creationId xmlns:a16="http://schemas.microsoft.com/office/drawing/2014/main" id="{F8C12143-6368-4C63-B6E0-04DDB5B03321}"/>
               </a:ext>
             </a:extLst>
           </p:cNvPr>
@@ -27170,7 +26898,7 @@
           <p:cNvPr id="10" name="text">
             <a:extLst xmlns:a="http://schemas.openxmlformats.org/drawingml/2006/main">
               <a:ext uri="{FF2B5EF4-FFF2-40B4-BE49-F238E27FC236}">
-                <a16:creationId xmlns:a16="http://schemas.microsoft.com/office/drawing/2014/main" id="{12C26ED9-0632-432B-BBD8-2002DBBB9139}"/>
+                <a16:creationId xmlns:a16="http://schemas.microsoft.com/office/drawing/2014/main" id="{87FDD356-9998-43CF-87A2-E781427FA3A6}"/>
               </a:ext>
             </a:extLst>
           </p:cNvPr>
@@ -27261,7 +26989,7 @@
           <p:cNvPr id="11" name="text">
             <a:extLst xmlns:a="http://schemas.openxmlformats.org/drawingml/2006/main">
               <a:ext uri="{FF2B5EF4-FFF2-40B4-BE49-F238E27FC236}">
-                <a16:creationId xmlns:a16="http://schemas.microsoft.com/office/drawing/2014/main" id="{AB7CD8DC-5193-437F-A6F9-EB5BDD965EC7}"/>
+                <a16:creationId xmlns:a16="http://schemas.microsoft.com/office/drawing/2014/main" id="{6BF8089E-2CFE-4A07-8463-47121DD1595A}"/>
               </a:ext>
             </a:extLst>
           </p:cNvPr>
@@ -27329,7 +27057,7 @@
           <p:cNvPr id="12" name="text">
             <a:extLst xmlns:a="http://schemas.openxmlformats.org/drawingml/2006/main">
               <a:ext uri="{FF2B5EF4-FFF2-40B4-BE49-F238E27FC236}">
-                <a16:creationId xmlns:a16="http://schemas.microsoft.com/office/drawing/2014/main" id="{0A0EC5B6-46EA-4E0E-8973-81E728FB27D5}"/>
+                <a16:creationId xmlns:a16="http://schemas.microsoft.com/office/drawing/2014/main" id="{6AEFBA8C-5F84-4106-80FA-6E1BCF58CA8E}"/>
               </a:ext>
             </a:extLst>
           </p:cNvPr>
@@ -27397,7 +27125,7 @@
           <p:cNvPr id="13" name="text">
             <a:extLst xmlns:a="http://schemas.openxmlformats.org/drawingml/2006/main">
               <a:ext uri="{FF2B5EF4-FFF2-40B4-BE49-F238E27FC236}">
-                <a16:creationId xmlns:a16="http://schemas.microsoft.com/office/drawing/2014/main" id="{03815971-EBC0-447F-841D-74E1532524CC}"/>
+                <a16:creationId xmlns:a16="http://schemas.microsoft.com/office/drawing/2014/main" id="{F13DA261-4908-4220-A5A9-A2CA72375EA7}"/>
               </a:ext>
             </a:extLst>
           </p:cNvPr>
@@ -27465,7 +27193,7 @@
           <p:cNvPr id="14" name="text">
             <a:extLst xmlns:a="http://schemas.openxmlformats.org/drawingml/2006/main">
               <a:ext uri="{FF2B5EF4-FFF2-40B4-BE49-F238E27FC236}">
-                <a16:creationId xmlns:a16="http://schemas.microsoft.com/office/drawing/2014/main" id="{0AD79AE1-FF52-402A-A343-61F6A66DBA7B}"/>
+                <a16:creationId xmlns:a16="http://schemas.microsoft.com/office/drawing/2014/main" id="{A285340B-DF59-47D9-8948-E5B9F34B2E04}"/>
               </a:ext>
             </a:extLst>
           </p:cNvPr>
@@ -27556,7 +27284,7 @@
           <p:cNvPr id="15" name="text">
             <a:extLst xmlns:a="http://schemas.openxmlformats.org/drawingml/2006/main">
               <a:ext uri="{FF2B5EF4-FFF2-40B4-BE49-F238E27FC236}">
-                <a16:creationId xmlns:a16="http://schemas.microsoft.com/office/drawing/2014/main" id="{144946CD-F7CE-4012-B3BF-0F6906513665}"/>
+                <a16:creationId xmlns:a16="http://schemas.microsoft.com/office/drawing/2014/main" id="{323039B2-DC94-4C03-928C-95F1A0A12BB2}"/>
               </a:ext>
             </a:extLst>
           </p:cNvPr>
@@ -27624,7 +27352,7 @@
           <p:cNvPr id="16" name="text">
             <a:extLst xmlns:a="http://schemas.openxmlformats.org/drawingml/2006/main">
               <a:ext uri="{FF2B5EF4-FFF2-40B4-BE49-F238E27FC236}">
-                <a16:creationId xmlns:a16="http://schemas.microsoft.com/office/drawing/2014/main" id="{A82B58FE-8DEB-449D-A0D2-073EBDC89C9B}"/>
+                <a16:creationId xmlns:a16="http://schemas.microsoft.com/office/drawing/2014/main" id="{800B17F5-1CD7-4BD6-BA9B-4436FA415FA5}"/>
               </a:ext>
             </a:extLst>
           </p:cNvPr>
@@ -27692,7 +27420,7 @@
           <p:cNvPr id="17" name="Chart">
             <a:extLst xmlns:a="http://schemas.openxmlformats.org/drawingml/2006/main">
               <a:ext uri="{FF2B5EF4-FFF2-40B4-BE49-F238E27FC236}">
-                <a16:creationId xmlns:a16="http://schemas.microsoft.com/office/drawing/2014/main" id="{3204407A-65C9-4295-9670-230AC87A77ED}"/>
+                <a16:creationId xmlns:a16="http://schemas.microsoft.com/office/drawing/2014/main" id="{86330080-0894-4EC0-B904-DC1E50112A28}"/>
               </a:ext>
             </a:extLst>
           </p:cNvPr>
@@ -27705,7 +27433,7 @@
         </p:xfrm>
         <a:graphic xmlns:a="http://schemas.openxmlformats.org/drawingml/2006/main">
           <a:graphicData uri="http://schemas.openxmlformats.org/drawingml/2006/chart">
-            <c:chart xmlns:r="http://schemas.openxmlformats.org/officeDocument/2006/relationships" xmlns:c="http://schemas.openxmlformats.org/drawingml/2006/chart" r:id="R0ab05b52c5df4144"/>
+            <c:chart xmlns:r="http://schemas.openxmlformats.org/officeDocument/2006/relationships" xmlns:c="http://schemas.openxmlformats.org/drawingml/2006/chart" r:id="R277e23564b364742"/>
           </a:graphicData>
         </a:graphic>
       </p:graphicFrame>
@@ -27714,7 +27442,7 @@
           <p:cNvPr id="18" name="">
             <a:extLst xmlns:a="http://schemas.openxmlformats.org/drawingml/2006/main">
               <a:ext uri="{FF2B5EF4-FFF2-40B4-BE49-F238E27FC236}">
-                <a16:creationId xmlns:a16="http://schemas.microsoft.com/office/drawing/2014/main" id="{86C5F6E2-4572-4FFC-BB5F-7DD1E17A5720}"/>
+                <a16:creationId xmlns:a16="http://schemas.microsoft.com/office/drawing/2014/main" id="{5B8C530F-0B93-4925-B4BC-269E240F7989}"/>
               </a:ext>
             </a:extLst>
           </p:cNvPr>
@@ -27724,7 +27452,7 @@
           <p:nvPr/>
         </p:nvPicPr>
         <p:blipFill>
-          <a:blip xmlns:r="http://schemas.openxmlformats.org/officeDocument/2006/relationships" xmlns:a="http://schemas.openxmlformats.org/drawingml/2006/main" r:embed="Rff05c8fa60434d15"/>
+          <a:blip xmlns:r="http://schemas.openxmlformats.org/officeDocument/2006/relationships" xmlns:a="http://schemas.openxmlformats.org/drawingml/2006/main" r:embed="Rcc4cf6ce57b648ee"/>
           <a:stretch xmlns:a="http://schemas.openxmlformats.org/drawingml/2006/main"/>
         </p:blipFill>
         <p:spPr>
@@ -27742,7 +27470,7 @@
           <p:cNvPr id="19" name="Chart">
             <a:extLst xmlns:a="http://schemas.openxmlformats.org/drawingml/2006/main">
               <a:ext uri="{FF2B5EF4-FFF2-40B4-BE49-F238E27FC236}">
-                <a16:creationId xmlns:a16="http://schemas.microsoft.com/office/drawing/2014/main" id="{4B9EBA86-E5A6-4344-B29C-FE061296877F}"/>
+                <a16:creationId xmlns:a16="http://schemas.microsoft.com/office/drawing/2014/main" id="{2C4A34B0-6E47-4F7E-8029-0ACA4AF43A5B}"/>
               </a:ext>
             </a:extLst>
           </p:cNvPr>
@@ -27755,7 +27483,7 @@
         </p:xfrm>
         <a:graphic xmlns:a="http://schemas.openxmlformats.org/drawingml/2006/main">
           <a:graphicData uri="http://schemas.openxmlformats.org/drawingml/2006/chart">
-            <c:chart xmlns:r="http://schemas.openxmlformats.org/officeDocument/2006/relationships" xmlns:c="http://schemas.openxmlformats.org/drawingml/2006/chart" r:id="Rd95f25cffa184133"/>
+            <c:chart xmlns:r="http://schemas.openxmlformats.org/officeDocument/2006/relationships" xmlns:c="http://schemas.openxmlformats.org/drawingml/2006/chart" r:id="Rdaeb00e8f19d4beb"/>
           </a:graphicData>
         </a:graphic>
       </p:graphicFrame>
@@ -27764,7 +27492,7 @@
           <p:cNvPr id="20" name="">
             <a:extLst xmlns:a="http://schemas.openxmlformats.org/drawingml/2006/main">
               <a:ext uri="{FF2B5EF4-FFF2-40B4-BE49-F238E27FC236}">
-                <a16:creationId xmlns:a16="http://schemas.microsoft.com/office/drawing/2014/main" id="{79B9E904-6F28-4075-9855-1050F6CD7006}"/>
+                <a16:creationId xmlns:a16="http://schemas.microsoft.com/office/drawing/2014/main" id="{C3FBB22D-98BE-4DE9-BADB-FDBE490D9EB2}"/>
               </a:ext>
             </a:extLst>
           </p:cNvPr>
@@ -27794,7 +27522,7 @@
           <p:cNvPr id="21" name="text">
             <a:extLst xmlns:a="http://schemas.openxmlformats.org/drawingml/2006/main">
               <a:ext uri="{FF2B5EF4-FFF2-40B4-BE49-F238E27FC236}">
-                <a16:creationId xmlns:a16="http://schemas.microsoft.com/office/drawing/2014/main" id="{FD77F09C-CEF4-4A51-9DBC-EE4C4181BCDE}"/>
+                <a16:creationId xmlns:a16="http://schemas.microsoft.com/office/drawing/2014/main" id="{D764A1E6-3BD9-49FF-AADE-AA0B62EA7C2F}"/>
               </a:ext>
             </a:extLst>
           </p:cNvPr>
@@ -27862,7 +27590,7 @@
           <p:cNvPr id="22" name="text">
             <a:extLst xmlns:a="http://schemas.openxmlformats.org/drawingml/2006/main">
               <a:ext uri="{FF2B5EF4-FFF2-40B4-BE49-F238E27FC236}">
-                <a16:creationId xmlns:a16="http://schemas.microsoft.com/office/drawing/2014/main" id="{78D2C1F9-4211-4CE5-AB28-99814961A794}"/>
+                <a16:creationId xmlns:a16="http://schemas.microsoft.com/office/drawing/2014/main" id="{E506CDF2-8668-4497-8FEA-2CD7A746D951}"/>
               </a:ext>
             </a:extLst>
           </p:cNvPr>
@@ -27928,7 +27656,7 @@
     </p:spTree>
     <p:extLst>
       <p:ext uri="{BB962C8B-B14F-4D97-AF65-F5344CB8AC3E}">
-        <p14:creationId xmlns:p14="http://schemas.microsoft.com/office/powerpoint/2010/main" val="290144096"/>
+        <p14:creationId xmlns:p14="http://schemas.microsoft.com/office/powerpoint/2010/main" val="477851231"/>
       </p:ext>
     </p:extLst>
   </p:cSld>
@@ -27959,7 +27687,7 @@
           <p:cNvPr id="15" name="text">
             <a:extLst xmlns:a="http://schemas.openxmlformats.org/drawingml/2006/main">
               <a:ext uri="{FF2B5EF4-FFF2-40B4-BE49-F238E27FC236}">
-                <a16:creationId xmlns:a16="http://schemas.microsoft.com/office/drawing/2014/main" id="{16D4F2AE-413B-4191-90E5-8841304F2BD1}"/>
+                <a16:creationId xmlns:a16="http://schemas.microsoft.com/office/drawing/2014/main" id="{90852A46-D532-415D-B2AB-AD28046189CF}"/>
               </a:ext>
             </a:extLst>
           </p:cNvPr>
@@ -28027,7 +27755,7 @@
           <p:cNvPr id="2" name="">
             <a:extLst xmlns:a="http://schemas.openxmlformats.org/drawingml/2006/main">
               <a:ext uri="{FF2B5EF4-FFF2-40B4-BE49-F238E27FC236}">
-                <a16:creationId xmlns:a16="http://schemas.microsoft.com/office/drawing/2014/main" id="{7CF3277A-09D2-404A-B1ED-8EA5AE9AE076}"/>
+                <a16:creationId xmlns:a16="http://schemas.microsoft.com/office/drawing/2014/main" id="{7A25C072-7123-4BA6-86C1-DEB9361A79C6}"/>
               </a:ext>
             </a:extLst>
           </p:cNvPr>
@@ -28057,7 +27785,7 @@
           <p:cNvPr id="3" name="text">
             <a:extLst xmlns:a="http://schemas.openxmlformats.org/drawingml/2006/main">
               <a:ext uri="{FF2B5EF4-FFF2-40B4-BE49-F238E27FC236}">
-                <a16:creationId xmlns:a16="http://schemas.microsoft.com/office/drawing/2014/main" id="{8964B676-3653-4B75-9001-ED29047DECF2}"/>
+                <a16:creationId xmlns:a16="http://schemas.microsoft.com/office/drawing/2014/main" id="{5A5E8E20-2E0B-4F14-944C-CA514E292AAB}"/>
               </a:ext>
             </a:extLst>
           </p:cNvPr>
@@ -28125,7 +27853,7 @@
           <p:cNvPr id="4" name="text">
             <a:extLst xmlns:a="http://schemas.openxmlformats.org/drawingml/2006/main">
               <a:ext uri="{FF2B5EF4-FFF2-40B4-BE49-F238E27FC236}">
-                <a16:creationId xmlns:a16="http://schemas.microsoft.com/office/drawing/2014/main" id="{361888EE-C68C-4DB8-A3AF-AAFFE387855D}"/>
+                <a16:creationId xmlns:a16="http://schemas.microsoft.com/office/drawing/2014/main" id="{833099E6-B866-46AC-AB44-795A9A0DA9F9}"/>
               </a:ext>
             </a:extLst>
           </p:cNvPr>
@@ -28193,7 +27921,7 @@
           <p:cNvPr id="5" name="">
             <a:extLst xmlns:a="http://schemas.openxmlformats.org/drawingml/2006/main">
               <a:ext uri="{FF2B5EF4-FFF2-40B4-BE49-F238E27FC236}">
-                <a16:creationId xmlns:a16="http://schemas.microsoft.com/office/drawing/2014/main" id="{CB3189B3-AA2D-4A8C-8B63-27E4C998F75D}"/>
+                <a16:creationId xmlns:a16="http://schemas.microsoft.com/office/drawing/2014/main" id="{8B1F0AE6-9EEE-4692-BC5E-C88AAB561096}"/>
               </a:ext>
             </a:extLst>
           </p:cNvPr>
@@ -29067,7 +28795,7 @@
           <p:cNvPr id="6" name="text">
             <a:extLst xmlns:a="http://schemas.openxmlformats.org/drawingml/2006/main">
               <a:ext uri="{FF2B5EF4-FFF2-40B4-BE49-F238E27FC236}">
-                <a16:creationId xmlns:a16="http://schemas.microsoft.com/office/drawing/2014/main" id="{C9730753-980E-4AD9-8626-857C141A9D85}"/>
+                <a16:creationId xmlns:a16="http://schemas.microsoft.com/office/drawing/2014/main" id="{94273A72-0B19-4897-A9EC-44D637AFECD7}"/>
               </a:ext>
             </a:extLst>
           </p:cNvPr>
@@ -29135,7 +28863,7 @@
           <p:cNvPr id="7" name="text">
             <a:extLst xmlns:a="http://schemas.openxmlformats.org/drawingml/2006/main">
               <a:ext uri="{FF2B5EF4-FFF2-40B4-BE49-F238E27FC236}">
-                <a16:creationId xmlns:a16="http://schemas.microsoft.com/office/drawing/2014/main" id="{10E8E932-1655-480A-8F66-7AB26A27FE3B}"/>
+                <a16:creationId xmlns:a16="http://schemas.microsoft.com/office/drawing/2014/main" id="{678B919E-C6EA-4D6E-9DAD-06C5ADC5A3FD}"/>
               </a:ext>
             </a:extLst>
           </p:cNvPr>
@@ -29203,7 +28931,7 @@
           <p:cNvPr id="8" name="Chart">
             <a:extLst xmlns:a="http://schemas.openxmlformats.org/drawingml/2006/main">
               <a:ext uri="{FF2B5EF4-FFF2-40B4-BE49-F238E27FC236}">
-                <a16:creationId xmlns:a16="http://schemas.microsoft.com/office/drawing/2014/main" id="{21EC13C8-921D-4715-9107-AF708D9EDBA7}"/>
+                <a16:creationId xmlns:a16="http://schemas.microsoft.com/office/drawing/2014/main" id="{BA68659A-0CE8-4F86-BF0E-31050D8FD53F}"/>
               </a:ext>
             </a:extLst>
           </p:cNvPr>
@@ -29216,7 +28944,7 @@
         </p:xfrm>
         <a:graphic xmlns:a="http://schemas.openxmlformats.org/drawingml/2006/main">
           <a:graphicData uri="http://schemas.openxmlformats.org/drawingml/2006/chart">
-            <c:chart xmlns:r="http://schemas.openxmlformats.org/officeDocument/2006/relationships" xmlns:c="http://schemas.openxmlformats.org/drawingml/2006/chart" r:id="Rb018e4c5a85448e4"/>
+            <c:chart xmlns:r="http://schemas.openxmlformats.org/officeDocument/2006/relationships" xmlns:c="http://schemas.openxmlformats.org/drawingml/2006/chart" r:id="R1b041a56ed3c4c78"/>
           </a:graphicData>
         </a:graphic>
       </p:graphicFrame>
@@ -29225,7 +28953,7 @@
           <p:cNvPr id="9" name="Chart">
             <a:extLst xmlns:a="http://schemas.openxmlformats.org/drawingml/2006/main">
               <a:ext uri="{FF2B5EF4-FFF2-40B4-BE49-F238E27FC236}">
-                <a16:creationId xmlns:a16="http://schemas.microsoft.com/office/drawing/2014/main" id="{81ED09CE-42C1-41B4-B135-B9106861F560}"/>
+                <a16:creationId xmlns:a16="http://schemas.microsoft.com/office/drawing/2014/main" id="{3318E1B7-8F14-4810-BD3E-B6AC66BECBD1}"/>
               </a:ext>
             </a:extLst>
           </p:cNvPr>
@@ -29238,7 +28966,7 @@
         </p:xfrm>
         <a:graphic xmlns:a="http://schemas.openxmlformats.org/drawingml/2006/main">
           <a:graphicData uri="http://schemas.openxmlformats.org/drawingml/2006/chart">
-            <c:chart xmlns:r="http://schemas.openxmlformats.org/officeDocument/2006/relationships" xmlns:c="http://schemas.openxmlformats.org/drawingml/2006/chart" r:id="R9c3a92a8c6cc4bf6"/>
+            <c:chart xmlns:r="http://schemas.openxmlformats.org/officeDocument/2006/relationships" xmlns:c="http://schemas.openxmlformats.org/drawingml/2006/chart" r:id="R5fb1f737396e4f2b"/>
           </a:graphicData>
         </a:graphic>
       </p:graphicFrame>
@@ -29247,7 +28975,7 @@
           <p:cNvPr id="10" name="text">
             <a:extLst xmlns:a="http://schemas.openxmlformats.org/drawingml/2006/main">
               <a:ext uri="{FF2B5EF4-FFF2-40B4-BE49-F238E27FC236}">
-                <a16:creationId xmlns:a16="http://schemas.microsoft.com/office/drawing/2014/main" id="{8F8BCD11-B3E1-43CA-BE33-A20806014D46}"/>
+                <a16:creationId xmlns:a16="http://schemas.microsoft.com/office/drawing/2014/main" id="{78BBDFEE-BAA2-4AD4-BE53-365DE40E8429}"/>
               </a:ext>
             </a:extLst>
           </p:cNvPr>
@@ -29338,7 +29066,7 @@
           <p:cNvPr id="11" name="text">
             <a:extLst xmlns:a="http://schemas.openxmlformats.org/drawingml/2006/main">
               <a:ext uri="{FF2B5EF4-FFF2-40B4-BE49-F238E27FC236}">
-                <a16:creationId xmlns:a16="http://schemas.microsoft.com/office/drawing/2014/main" id="{CEFDBDC1-5578-4F64-A83A-7C8C7CE44102}"/>
+                <a16:creationId xmlns:a16="http://schemas.microsoft.com/office/drawing/2014/main" id="{1AE16857-2365-49DB-9EB0-7E676521FDA1}"/>
               </a:ext>
             </a:extLst>
           </p:cNvPr>
@@ -29429,7 +29157,7 @@
           <p:cNvPr id="12" name="">
             <a:extLst xmlns:a="http://schemas.openxmlformats.org/drawingml/2006/main">
               <a:ext uri="{FF2B5EF4-FFF2-40B4-BE49-F238E27FC236}">
-                <a16:creationId xmlns:a16="http://schemas.microsoft.com/office/drawing/2014/main" id="{1A46B5CD-D818-44AF-B422-70D6D844043D}"/>
+                <a16:creationId xmlns:a16="http://schemas.microsoft.com/office/drawing/2014/main" id="{0509DFF3-7A80-4B97-8540-A51E7248920E}"/>
               </a:ext>
             </a:extLst>
           </p:cNvPr>
@@ -29459,7 +29187,7 @@
           <p:cNvPr id="13" name="text">
             <a:extLst xmlns:a="http://schemas.openxmlformats.org/drawingml/2006/main">
               <a:ext uri="{FF2B5EF4-FFF2-40B4-BE49-F238E27FC236}">
-                <a16:creationId xmlns:a16="http://schemas.microsoft.com/office/drawing/2014/main" id="{1B379733-C18B-4C0B-8156-FE8919FF5E2C}"/>
+                <a16:creationId xmlns:a16="http://schemas.microsoft.com/office/drawing/2014/main" id="{4A6C3F03-B3C7-4E91-954F-E9BDB8094764}"/>
               </a:ext>
             </a:extLst>
           </p:cNvPr>
@@ -29527,7 +29255,7 @@
           <p:cNvPr id="14" name="text">
             <a:extLst xmlns:a="http://schemas.openxmlformats.org/drawingml/2006/main">
               <a:ext uri="{FF2B5EF4-FFF2-40B4-BE49-F238E27FC236}">
-                <a16:creationId xmlns:a16="http://schemas.microsoft.com/office/drawing/2014/main" id="{4566213D-B919-4D39-8A45-C48F2019D5CF}"/>
+                <a16:creationId xmlns:a16="http://schemas.microsoft.com/office/drawing/2014/main" id="{1B53797B-697E-48E0-9BF6-E590AAB909CF}"/>
               </a:ext>
             </a:extLst>
           </p:cNvPr>
@@ -29593,7 +29321,7 @@
     </p:spTree>
     <p:extLst>
       <p:ext uri="{BB962C8B-B14F-4D97-AF65-F5344CB8AC3E}">
-        <p14:creationId xmlns:p14="http://schemas.microsoft.com/office/powerpoint/2010/main" val="755091194"/>
+        <p14:creationId xmlns:p14="http://schemas.microsoft.com/office/powerpoint/2010/main" val="2012571872"/>
       </p:ext>
     </p:extLst>
   </p:cSld>
